--- a/claude_code_workshop_v2.pptx
+++ b/claude_code_workshop_v2.pptx
@@ -4,6 +4,9 @@
   <p:sldMasterIdLst>
     <p:sldMasterId id="2147483648" r:id="rId1"/>
   </p:sldMasterIdLst>
+  <p:notesMasterIdLst>
+    <p:notesMasterId r:id="rId36"/>
+  </p:notesMasterIdLst>
   <p:sldIdLst>
     <p:sldId id="256" r:id="rId2"/>
     <p:sldId id="257" r:id="rId3"/>
@@ -40,9 +43,6 @@
     <p:sldId id="288" r:id="rId34"/>
     <p:sldId id="289" r:id="rId35"/>
   </p:sldIdLst>
-  <p:notesMasterIdLst>
-    <p:notesMasterId r:id="rId36"/>
-  </p:notesMasterIdLst>
   <p:sldSz cx="12192000" cy="6858000"/>
   <p:notesSz cx="6858000" cy="12192000"/>
   <p:defaultTextStyle>
@@ -137,6 +137,11 @@
       </a:defRPr>
     </a:lvl9pPr>
   </p:defaultTextStyle>
+  <p:extLst>
+    <p:ext uri="{EFAFB233-063F-42B5-8137-9DF3F51BA10A}">
+      <p15:sldGuideLst xmlns:p15="http://schemas.microsoft.com/office/powerpoint/2012/main"/>
+    </p:ext>
+  </p:extLst>
 </p:presentation>
 </file>
 
@@ -162,234 +167,10 @@
           <a:chExt cx="0" cy="0"/>
         </a:xfrm>
       </p:grpSpPr>
-      <p:sp>
-        <p:nvSpPr>
-          <p:cNvPr id="2" name="Header Placeholder 1"/>
-          <p:cNvSpPr>
-            <a:spLocks noGrp="1"/>
-          </p:cNvSpPr>
-          <p:nvPr>
-            <p:ph type="hdr" sz="quarter"/>
-          </p:nvPr>
-        </p:nvSpPr>
-        <p:spPr>
-          <a:xfrm>
-            <a:off x="0" y="0"/>
-            <a:ext cx="2971800" cy="458788"/>
-          </a:xfrm>
-          <a:prstGeom prst="rect">
-            <a:avLst/>
-          </a:prstGeom>
-        </p:spPr>
-        <p:txBody>
-          <a:bodyPr vert="horz" lIns="91440" tIns="45720" rIns="91440" bIns="45720" rtlCol="0"/>
-          <a:lstStyle>
-            <a:lvl1pPr algn="l">
-              <a:defRPr sz="1200"/>
-            </a:lvl1pPr>
-          </a:lstStyle>
-          <a:p>
-            <a:endParaRPr lang="en-US"/>
-          </a:p>
-        </p:txBody>
-      </p:sp>
-      <p:sp>
-        <p:nvSpPr>
-          <p:cNvPr id="3" name="Date Placeholder 2"/>
-          <p:cNvSpPr>
-            <a:spLocks noGrp="1"/>
-          </p:cNvSpPr>
-          <p:nvPr>
-            <p:ph type="dt" idx="1"/>
-          </p:nvPr>
-        </p:nvSpPr>
-        <p:spPr>
-          <a:xfrm>
-            <a:off x="3884613" y="0"/>
-            <a:ext cx="2971800" cy="458788"/>
-          </a:xfrm>
-          <a:prstGeom prst="rect">
-            <a:avLst/>
-          </a:prstGeom>
-        </p:spPr>
-        <p:txBody>
-          <a:bodyPr vert="horz" lIns="91440" tIns="45720" rIns="91440" bIns="45720" rtlCol="0"/>
-          <a:lstStyle>
-            <a:lvl1pPr algn="r">
-              <a:defRPr sz="1200"/>
-            </a:lvl1pPr>
-          </a:lstStyle>
-          <a:p>
-            <a:fld id="{5282F153-3F37-0F45-9E97-73ACFA13230C}" type="datetimeFigureOut">
-              <a:rPr lang="en-US"/>
-              <a:t>7/23/19</a:t>
-            </a:fld>
-            <a:endParaRPr lang="en-US"/>
-          </a:p>
-        </p:txBody>
-      </p:sp>
-      <p:sp>
-        <p:nvSpPr>
-          <p:cNvPr id="4" name="Slide Image Placeholder 3"/>
-          <p:cNvSpPr>
-            <a:spLocks noGrp="1" noRot="1" noChangeAspect="1"/>
-          </p:cNvSpPr>
-          <p:nvPr>
-            <p:ph type="sldImg" idx="2"/>
-          </p:nvPr>
-        </p:nvSpPr>
-        <p:spPr>
-          <a:xfrm>
-            <a:off x="685800" y="1143000"/>
-            <a:ext cx="5486400" cy="3086100"/>
-          </a:xfrm>
-          <a:prstGeom prst="rect">
-            <a:avLst/>
-          </a:prstGeom>
-          <a:noFill/>
-          <a:ln w="12700">
-            <a:solidFill>
-              <a:prstClr val="black"/>
-            </a:solidFill>
-          </a:ln>
-        </p:spPr>
-        <p:txBody>
-          <a:bodyPr vert="horz" lIns="91440" tIns="45720" rIns="91440" bIns="45720" rtlCol="0" anchor="ctr"/>
-          <a:lstStyle/>
-          <a:p>
-            <a:endParaRPr lang="en-US"/>
-          </a:p>
-        </p:txBody>
-      </p:sp>
-      <p:sp>
-        <p:nvSpPr>
-          <p:cNvPr id="5" name="Notes Placeholder 4"/>
-          <p:cNvSpPr>
-            <a:spLocks noGrp="1"/>
-          </p:cNvSpPr>
-          <p:nvPr>
-            <p:ph type="body" sz="quarter" idx="3"/>
-          </p:nvPr>
-        </p:nvSpPr>
-        <p:spPr>
-          <a:xfrm>
-            <a:off x="685800" y="4400550"/>
-            <a:ext cx="5486400" cy="3600450"/>
-          </a:xfrm>
-          <a:prstGeom prst="rect">
-            <a:avLst/>
-          </a:prstGeom>
-        </p:spPr>
-        <p:txBody>
-          <a:bodyPr vert="horz" lIns="91440" tIns="45720" rIns="91440" bIns="45720" rtlCol="0"/>
-          <a:lstStyle/>
-          <a:p>
-            <a:pPr lvl="0"/>
-            <a:r>
-              <a:rPr lang="en-US"/>
-              <a:t>Click to edit Master text styles</a:t>
-            </a:r>
-          </a:p>
-          <a:p>
-            <a:pPr lvl="1"/>
-            <a:r>
-              <a:rPr lang="en-US"/>
-              <a:t>Second level</a:t>
-            </a:r>
-          </a:p>
-          <a:p>
-            <a:pPr lvl="2"/>
-            <a:r>
-              <a:rPr lang="en-US"/>
-              <a:t>Third level</a:t>
-            </a:r>
-          </a:p>
-          <a:p>
-            <a:pPr lvl="3"/>
-            <a:r>
-              <a:rPr lang="en-US"/>
-              <a:t>Fourth level</a:t>
-            </a:r>
-          </a:p>
-          <a:p>
-            <a:pPr lvl="4"/>
-            <a:r>
-              <a:rPr lang="en-US"/>
-              <a:t>Fifth level</a:t>
-            </a:r>
-          </a:p>
-        </p:txBody>
-      </p:sp>
-      <p:sp>
-        <p:nvSpPr>
-          <p:cNvPr id="6" name="Footer Placeholder 5"/>
-          <p:cNvSpPr>
-            <a:spLocks noGrp="1"/>
-          </p:cNvSpPr>
-          <p:nvPr>
-            <p:ph type="ftr" sz="quarter" idx="4"/>
-          </p:nvPr>
-        </p:nvSpPr>
-        <p:spPr>
-          <a:xfrm>
-            <a:off x="0" y="8685213"/>
-            <a:ext cx="2971800" cy="458787"/>
-          </a:xfrm>
-          <a:prstGeom prst="rect">
-            <a:avLst/>
-          </a:prstGeom>
-        </p:spPr>
-        <p:txBody>
-          <a:bodyPr vert="horz" lIns="91440" tIns="45720" rIns="91440" bIns="45720" rtlCol="0" anchor="b"/>
-          <a:lstStyle>
-            <a:lvl1pPr algn="l">
-              <a:defRPr sz="1200"/>
-            </a:lvl1pPr>
-          </a:lstStyle>
-          <a:p>
-            <a:endParaRPr lang="en-US"/>
-          </a:p>
-        </p:txBody>
-      </p:sp>
-      <p:sp>
-        <p:nvSpPr>
-          <p:cNvPr id="7" name="Slide Number Placeholder 6"/>
-          <p:cNvSpPr>
-            <a:spLocks noGrp="1"/>
-          </p:cNvSpPr>
-          <p:nvPr>
-            <p:ph type="sldNum" sz="quarter" idx="5"/>
-          </p:nvPr>
-        </p:nvSpPr>
-        <p:spPr>
-          <a:xfrm>
-            <a:off x="3884613" y="8685213"/>
-            <a:ext cx="2971800" cy="458787"/>
-          </a:xfrm>
-          <a:prstGeom prst="rect">
-            <a:avLst/>
-          </a:prstGeom>
-        </p:spPr>
-        <p:txBody>
-          <a:bodyPr vert="horz" lIns="91440" tIns="45720" rIns="91440" bIns="45720" rtlCol="0" anchor="b"/>
-          <a:lstStyle>
-            <a:lvl1pPr algn="r">
-              <a:defRPr sz="1200"/>
-            </a:lvl1pPr>
-          </a:lstStyle>
-          <a:p>
-            <a:fld id="{CE5E9CC1-C706-0F49-92D6-E571CC5EEA8F}" type="slidenum">
-              <a:rPr lang="en-US"/>
-              <a:t>‹#›</a:t>
-            </a:fld>
-            <a:endParaRPr lang="en-US"/>
-          </a:p>
-        </p:txBody>
-      </p:sp>
     </p:spTree>
     <p:extLst>
       <p:ext uri="{BB962C8B-B14F-4D97-AF65-F5344CB8AC3E}">
-        <p14:creationId xmlns:p14="http://schemas.microsoft.com/office/powerpoint/2010/main" val="1024086991"/>
+        <p14:creationId xmlns:p14="http://schemas.microsoft.com/office/powerpoint/2010/main" val="1522205177"/>
       </p:ext>
     </p:extLst>
   </p:cSld>
@@ -533,10 +314,6 @@
           <a:bodyPr/>
           <a:lstStyle/>
           <a:p>
-            <a:r>
-              <a:rPr lang="en-US" dirty="0"/>
-              <a:t/>
-            </a:r>
             <a:endParaRPr lang="en-US" dirty="0"/>
           </a:p>
         </p:txBody>
@@ -621,10 +398,6 @@
           <a:bodyPr/>
           <a:lstStyle/>
           <a:p>
-            <a:r>
-              <a:rPr lang="en-US" dirty="0"/>
-              <a:t/>
-            </a:r>
             <a:endParaRPr lang="en-US" dirty="0"/>
           </a:p>
         </p:txBody>
@@ -715,7 +488,6 @@
 All env vars can also be set in settings.json under the env key.
 effortLevel accepts: low, medium, high. Note: max effort is session-scoped only and cannot be set in settings.json.</a:t>
             </a:r>
-            <a:endParaRPr lang="en-US" dirty="0"/>
           </a:p>
         </p:txBody>
       </p:sp>
@@ -806,7 +578,6 @@
 - SkillsBench: arxiv.org/abs/2602.12670
 On tool-generated CLAUDE.md: Beads writes .beads/CLAUDE.md (or project-level), haft writes to .haft/. Claude loads all discovered CLAUDE.md files in the project. You don't need to manually maintain those — just don't let them bloat your own file.</a:t>
             </a:r>
-            <a:endParaRPr lang="en-US" dirty="0"/>
           </a:p>
         </p:txBody>
       </p:sp>
@@ -894,7 +665,6 @@
               <a:rPr lang="en-US" dirty="0"/>
               <a:t>Walk around and ask people what rule they added. Good examples to share: language/framework preferences, testing conventions, forbidden patterns, naming conventions. Bad examples: generic advice Claude already knows.</a:t>
             </a:r>
-            <a:endParaRPr lang="en-US" dirty="0"/>
           </a:p>
         </p:txBody>
       </p:sp>
@@ -978,10 +748,6 @@
           <a:bodyPr/>
           <a:lstStyle/>
           <a:p>
-            <a:r>
-              <a:rPr lang="en-US" dirty="0"/>
-              <a:t/>
-            </a:r>
             <a:endParaRPr lang="en-US" dirty="0"/>
           </a:p>
         </p:txBody>
@@ -1071,7 +837,6 @@
               <a:t>Full details: code.claude.com/docs/en/data-usage
 For journal peer review: most journals now acknowledge AI-assisted review. If the paper is publicly available (arxiv, preprint server), there is no confidentiality concern. For embargoed submissions, check the specific journal's AI policy before using Claude.</a:t>
             </a:r>
-            <a:endParaRPr lang="en-US" dirty="0"/>
           </a:p>
         </p:txBody>
       </p:sp>
@@ -1155,10 +920,6 @@
           <a:bodyPr/>
           <a:lstStyle/>
           <a:p>
-            <a:r>
-              <a:rPr lang="en-US" dirty="0"/>
-              <a:t/>
-            </a:r>
             <a:endParaRPr lang="en-US" dirty="0"/>
           </a:p>
         </p:txBody>
@@ -1243,10 +1004,6 @@
           <a:bodyPr/>
           <a:lstStyle/>
           <a:p>
-            <a:r>
-              <a:rPr lang="en-US" dirty="0"/>
-              <a:t/>
-            </a:r>
             <a:endParaRPr lang="en-US" dirty="0"/>
           </a:p>
         </p:txBody>
@@ -1337,7 +1094,6 @@
 Model resolution order: env var &gt; per-invocation parameter &gt; frontmatter &gt; inherit from parent.
 Subagents cannot spawn other subagents. For parallel work, use agent teams (separate sessions that communicate).</a:t>
             </a:r>
-            <a:endParaRPr lang="en-US" dirty="0"/>
           </a:p>
         </p:txBody>
       </p:sp>
@@ -1421,10 +1177,6 @@
           <a:bodyPr/>
           <a:lstStyle/>
           <a:p>
-            <a:r>
-              <a:rPr lang="en-US" dirty="0"/>
-              <a:t/>
-            </a:r>
             <a:endParaRPr lang="en-US" dirty="0"/>
           </a:p>
         </p:txBody>
@@ -1509,10 +1261,6 @@
           <a:bodyPr/>
           <a:lstStyle/>
           <a:p>
-            <a:r>
-              <a:rPr lang="en-US" dirty="0"/>
-              <a:t/>
-            </a:r>
             <a:endParaRPr lang="en-US" dirty="0"/>
           </a:p>
         </p:txBody>
@@ -1597,10 +1345,6 @@
           <a:bodyPr/>
           <a:lstStyle/>
           <a:p>
-            <a:r>
-              <a:rPr lang="en-US" dirty="0"/>
-              <a:t/>
-            </a:r>
             <a:endParaRPr lang="en-US" dirty="0"/>
           </a:p>
         </p:txBody>
@@ -1685,10 +1429,6 @@
           <a:bodyPr/>
           <a:lstStyle/>
           <a:p>
-            <a:r>
-              <a:rPr lang="en-US" dirty="0"/>
-              <a:t/>
-            </a:r>
             <a:endParaRPr lang="en-US" dirty="0"/>
           </a:p>
         </p:txBody>
@@ -1779,7 +1519,6 @@
 /h-onboard scans an existing project for architecture knowledge. /h-search is full-text search across all artifacts.
 Note: renamed from Quint Codes in v6.0 — all /q-* commands are now /h-*. The .quint/ directory migrates automatically to .haft/ on first haft init.</a:t>
             </a:r>
-            <a:endParaRPr lang="en-US" dirty="0"/>
           </a:p>
         </p:txBody>
       </p:sp>
@@ -1863,10 +1602,6 @@
           <a:bodyPr/>
           <a:lstStyle/>
           <a:p>
-            <a:r>
-              <a:rPr lang="en-US" dirty="0"/>
-              <a:t/>
-            </a:r>
             <a:endParaRPr lang="en-US" dirty="0"/>
           </a:p>
         </p:txBody>
@@ -1951,10 +1686,6 @@
           <a:bodyPr/>
           <a:lstStyle/>
           <a:p>
-            <a:r>
-              <a:rPr lang="en-US" dirty="0"/>
-              <a:t/>
-            </a:r>
             <a:endParaRPr lang="en-US" dirty="0"/>
           </a:p>
         </p:txBody>
@@ -2039,10 +1770,6 @@
           <a:bodyPr/>
           <a:lstStyle/>
           <a:p>
-            <a:r>
-              <a:rPr lang="en-US" dirty="0"/>
-              <a:t/>
-            </a:r>
             <a:endParaRPr lang="en-US" dirty="0"/>
           </a:p>
         </p:txBody>
@@ -2127,10 +1854,6 @@
           <a:bodyPr/>
           <a:lstStyle/>
           <a:p>
-            <a:r>
-              <a:rPr lang="en-US" dirty="0"/>
-              <a:t/>
-            </a:r>
             <a:endParaRPr lang="en-US" dirty="0"/>
           </a:p>
         </p:txBody>
@@ -2219,7 +1942,6 @@
               <a:rPr lang="en-US" dirty="0"/>
               <a:t>This is a good moment for a short break if you haven't had one — people can grab coffee while tools install. Common issue: Beads plugin needs uv installed first (the install.sh handles this, but if someone skipped it: curl -LsSf https://astral.sh/uv/install.sh | sh).</a:t>
             </a:r>
-            <a:endParaRPr lang="en-US" dirty="0"/>
           </a:p>
         </p:txBody>
       </p:sp>
@@ -2303,10 +2025,6 @@
           <a:bodyPr/>
           <a:lstStyle/>
           <a:p>
-            <a:r>
-              <a:rPr lang="en-US" dirty="0"/>
-              <a:t/>
-            </a:r>
             <a:endParaRPr lang="en-US" dirty="0"/>
           </a:p>
         </p:txBody>
@@ -2399,7 +2117,6 @@
 - MDPI (2025): 'Cognitive Atrophy Paradox of AI–Human Interaction'
 Discussion prompt for audience: When did you last solve a problem without reaching for an AI tool first?</a:t>
             </a:r>
-            <a:endParaRPr lang="en-US" dirty="0"/>
           </a:p>
         </p:txBody>
       </p:sp>
@@ -2483,10 +2200,6 @@
           <a:bodyPr/>
           <a:lstStyle/>
           <a:p>
-            <a:r>
-              <a:rPr lang="en-US" dirty="0"/>
-              <a:t/>
-            </a:r>
             <a:endParaRPr lang="en-US" dirty="0"/>
           </a:p>
         </p:txBody>
@@ -2579,7 +2292,6 @@
 - David Deutsch pencil quote via Ivan Zakutnii (haft developer)
 Discussion prompt: Do you agree with the 50% prediction? What does it mean for your field specifically?</a:t>
             </a:r>
-            <a:endParaRPr lang="en-US" dirty="0"/>
           </a:p>
         </p:txBody>
       </p:sp>
@@ -2663,10 +2375,6 @@
           <a:bodyPr/>
           <a:lstStyle/>
           <a:p>
-            <a:r>
-              <a:rPr lang="en-US" dirty="0"/>
-              <a:t/>
-            </a:r>
             <a:endParaRPr lang="en-US" dirty="0"/>
           </a:p>
         </p:txBody>
@@ -2764,7 +2472,6 @@
 hotl: [CMake config, test scaffolding, code review]
 hootl: [formatting, boilerplate, doc scaffolding]</a:t>
             </a:r>
-            <a:endParaRPr lang="en-US" dirty="0"/>
           </a:p>
         </p:txBody>
       </p:sp>
@@ -2854,7 +2561,6 @@
 Repo: github.com/anthropics/skills
 Paper: arxiv.org/abs/2602.12670 (SkillsBench)</a:t>
             </a:r>
-            <a:endParaRPr lang="en-US" dirty="0"/>
           </a:p>
         </p:txBody>
       </p:sp>
@@ -2953,7 +2659,6 @@
 - Gloaguen et al. (2025): arxiv.org/abs/2602.11988
 - SkillsBench: arxiv.org/abs/2602.12670</a:t>
             </a:r>
-            <a:endParaRPr lang="en-US" dirty="0"/>
           </a:p>
         </p:txBody>
       </p:sp>
@@ -3037,10 +2742,6 @@
           <a:bodyPr/>
           <a:lstStyle/>
           <a:p>
-            <a:r>
-              <a:rPr lang="en-US" dirty="0"/>
-              <a:t/>
-            </a:r>
             <a:endParaRPr lang="en-US" dirty="0"/>
           </a:p>
         </p:txBody>
@@ -3125,10 +2826,6 @@
           <a:bodyPr/>
           <a:lstStyle/>
           <a:p>
-            <a:r>
-              <a:rPr lang="en-US" dirty="0"/>
-              <a:t/>
-            </a:r>
             <a:endParaRPr lang="en-US" dirty="0"/>
           </a:p>
         </p:txBody>
@@ -3217,7 +2914,6 @@
               <a:rPr lang="en-US" dirty="0"/>
               <a:t>Give people ~10 minutes here. Walk the room. Common issues: Node.js version conflicts (Claude Code uses its own runtime, ignore these), auth failures (check they're using the right account), PATH not updated after install (restart terminal).</a:t>
             </a:r>
-            <a:endParaRPr lang="en-US" dirty="0"/>
           </a:p>
         </p:txBody>
       </p:sp>
@@ -3301,10 +2997,6 @@
           <a:bodyPr/>
           <a:lstStyle/>
           <a:p>
-            <a:r>
-              <a:rPr lang="en-US" dirty="0"/>
-              <a:t/>
-            </a:r>
             <a:endParaRPr lang="en-US" dirty="0"/>
           </a:p>
         </p:txBody>
@@ -3395,7 +3087,6 @@
 Effort level (low/medium/high) is also configurable: in settings.json as 'effortLevel', mid-session with /effort, or --effort flag at launch. 'max' effort is Opus 4.6 only and session-scoped — doesn't persist to settings.
 The /model picker also has a left/right arrow slider for effort level when you select a model.</a:t>
             </a:r>
-            <a:endParaRPr lang="en-US" dirty="0"/>
           </a:p>
         </p:txBody>
       </p:sp>
@@ -3479,10 +3170,6 @@
           <a:bodyPr/>
           <a:lstStyle/>
           <a:p>
-            <a:r>
-              <a:rPr lang="en-US" dirty="0"/>
-              <a:t/>
-            </a:r>
             <a:endParaRPr lang="en-US" dirty="0"/>
           </a:p>
         </p:txBody>
@@ -3556,6 +3243,11 @@
 <file path=ppt/slideMasters/slideMaster1.xml><?xml version="1.0" encoding="utf-8"?>
 <p:sldMaster xmlns:a="http://schemas.openxmlformats.org/drawingml/2006/main" xmlns:r="http://schemas.openxmlformats.org/officeDocument/2006/relationships" xmlns:p="http://schemas.openxmlformats.org/presentationml/2006/main">
   <p:cSld>
+    <p:bg>
+      <p:bgRef idx="1001">
+        <a:schemeClr val="bg1"/>
+      </p:bgRef>
+    </p:bg>
     <p:spTree>
       <p:nvGrpSpPr>
         <p:cNvPr id="1" name=""/>
@@ -3838,6 +3530,7 @@
         <a:solidFill>
           <a:srgbClr val="FFFFFF"/>
         </a:solidFill>
+        <a:effectLst/>
       </p:bgPr>
     </p:bg>
     <p:spTree>
@@ -3875,7 +3568,7 @@
           <a:bodyPr wrap="square" lIns="0" tIns="0" rIns="0" bIns="0" rtlCol="0" anchor="ctr"/>
           <a:lstStyle/>
           <a:p>
-            <a:pPr algn="l" indent="0" marL="0">
+            <a:pPr marL="0" indent="0" algn="l">
               <a:buNone/>
             </a:pPr>
             <a:r>
@@ -3914,7 +3607,7 @@
           <a:bodyPr wrap="square" lIns="0" tIns="0" rIns="0" bIns="0" rtlCol="0" anchor="ctr"/>
           <a:lstStyle/>
           <a:p>
-            <a:pPr algn="l" indent="0" marL="0">
+            <a:pPr marL="0" indent="0" algn="l">
               <a:buNone/>
             </a:pPr>
             <a:r>
@@ -3934,14 +3627,14 @@
       </p:sp>
       <p:pic>
         <p:nvPicPr>
-          <p:cNvPr id="4" name="Image 0" descr="/sessions/gracious-blissful-pasteur/mnt/claude_code_presentation/numericor.png">    </p:cNvPr>
+          <p:cNvPr id="4" name="Image 0" descr="/sessions/gracious-blissful-pasteur/mnt/claude_code_presentation/numericor.png"/>
           <p:cNvPicPr>
             <a:picLocks noChangeAspect="1"/>
           </p:cNvPicPr>
           <p:nvPr/>
         </p:nvPicPr>
         <p:blipFill>
-          <a:blip r:embed="rId1"/>
+          <a:blip r:embed="rId3"/>
           <a:stretch>
             <a:fillRect/>
           </a:stretch>
@@ -3977,7 +3670,7 @@
           <a:bodyPr wrap="square" rtlCol="0" anchor="ctr"/>
           <a:lstStyle/>
           <a:p>
-            <a:pPr indent="0" marL="0">
+            <a:pPr marL="0" indent="0">
               <a:buNone/>
             </a:pPr>
             <a:r>
@@ -4011,6 +3704,7 @@
         <a:solidFill>
           <a:srgbClr val="FFFFFF"/>
         </a:solidFill>
+        <a:effectLst/>
       </p:bgPr>
     </p:bg>
     <p:spTree>
@@ -4048,7 +3742,7 @@
           <a:bodyPr wrap="square" lIns="0" tIns="0" rIns="0" bIns="0" rtlCol="0" anchor="ctr"/>
           <a:lstStyle/>
           <a:p>
-            <a:pPr indent="0" marL="0">
+            <a:pPr marL="0" indent="0">
               <a:buNone/>
             </a:pPr>
             <a:r>
@@ -4087,7 +3781,7 @@
           <a:bodyPr wrap="square" lIns="0" tIns="0" rIns="0" bIns="0" rtlCol="0" anchor="ctr"/>
           <a:lstStyle/>
           <a:p>
-            <a:pPr indent="0" marL="0">
+            <a:pPr marL="0" indent="0">
               <a:buNone/>
             </a:pPr>
             <a:r>
@@ -4126,7 +3820,7 @@
           <a:bodyPr wrap="square" lIns="0" tIns="0" rIns="0" bIns="0" rtlCol="0" anchor="t"/>
           <a:lstStyle/>
           <a:p>
-            <a:pPr indent="0" marL="0">
+            <a:pPr marL="0" indent="0">
               <a:spcAft>
                 <a:spcPts val="400"/>
               </a:spcAft>
@@ -4230,7 +3924,7 @@
             <a:endParaRPr lang="en-US" sz="1600" dirty="0"/>
           </a:p>
           <a:p>
-            <a:pPr indent="0" marL="0">
+            <a:pPr marL="0" indent="0">
               <a:spcAft>
                 <a:spcPts val="400"/>
               </a:spcAft>
@@ -4250,7 +3944,7 @@
             <a:endParaRPr lang="en-US" sz="1600" dirty="0"/>
           </a:p>
           <a:p>
-            <a:pPr indent="0" marL="0">
+            <a:pPr marL="0" indent="0">
               <a:spcAft>
                 <a:spcPts val="400"/>
               </a:spcAft>
@@ -4333,7 +4027,7 @@
             <a:endParaRPr lang="en-US" sz="1600" dirty="0"/>
           </a:p>
           <a:p>
-            <a:pPr indent="0" marL="0">
+            <a:pPr marL="0" indent="0">
               <a:spcAft>
                 <a:spcPts val="400"/>
               </a:spcAft>
@@ -4353,7 +4047,7 @@
             <a:endParaRPr lang="en-US" sz="1600" dirty="0"/>
           </a:p>
           <a:p>
-            <a:pPr indent="0" marL="0">
+            <a:pPr marL="0" indent="0">
               <a:spcAft>
                 <a:spcPts val="400"/>
               </a:spcAft>
@@ -4373,7 +4067,7 @@
             <a:endParaRPr lang="en-US" sz="1600" dirty="0"/>
           </a:p>
           <a:p>
-            <a:pPr indent="0" marL="0">
+            <a:pPr marL="0" indent="0">
               <a:spcAft>
                 <a:spcPts val="400"/>
               </a:spcAft>
@@ -4393,7 +4087,7 @@
             <a:endParaRPr lang="en-US" sz="1600" dirty="0"/>
           </a:p>
           <a:p>
-            <a:pPr indent="0" marL="0">
+            <a:pPr marL="0" indent="0">
               <a:spcAft>
                 <a:spcPts val="400"/>
               </a:spcAft>
@@ -4416,14 +4110,14 @@
       </p:sp>
       <p:pic>
         <p:nvPicPr>
-          <p:cNvPr id="5" name="Image 0" descr="/sessions/gracious-blissful-pasteur/mnt/claude_code_presentation/numericor.png">    </p:cNvPr>
+          <p:cNvPr id="5" name="Image 0" descr="/sessions/gracious-blissful-pasteur/mnt/claude_code_presentation/numericor.png"/>
           <p:cNvPicPr>
             <a:picLocks noChangeAspect="1"/>
           </p:cNvPicPr>
           <p:nvPr/>
         </p:nvPicPr>
         <p:blipFill>
-          <a:blip r:embed="rId1"/>
+          <a:blip r:embed="rId3"/>
           <a:stretch>
             <a:fillRect/>
           </a:stretch>
@@ -4459,7 +4153,7 @@
           <a:bodyPr wrap="square" rtlCol="0" anchor="ctr"/>
           <a:lstStyle/>
           <a:p>
-            <a:pPr algn="r" indent="0" marL="0">
+            <a:pPr marL="0" indent="0" algn="r">
               <a:buNone/>
             </a:pPr>
             <a:r>
@@ -4493,6 +4187,7 @@
         <a:solidFill>
           <a:srgbClr val="FFFFFF"/>
         </a:solidFill>
+        <a:effectLst/>
       </p:bgPr>
     </p:bg>
     <p:spTree>
@@ -4530,7 +4225,7 @@
           <a:bodyPr wrap="square" lIns="0" tIns="0" rIns="0" bIns="0" rtlCol="0" anchor="ctr"/>
           <a:lstStyle/>
           <a:p>
-            <a:pPr indent="0" marL="0">
+            <a:pPr marL="0" indent="0">
               <a:buNone/>
             </a:pPr>
             <a:r>
@@ -4569,7 +4264,7 @@
           <a:bodyPr wrap="square" lIns="0" tIns="0" rIns="0" bIns="0" rtlCol="0" anchor="ctr"/>
           <a:lstStyle/>
           <a:p>
-            <a:pPr indent="0" marL="0">
+            <a:pPr marL="0" indent="0">
               <a:buNone/>
             </a:pPr>
             <a:r>
@@ -4608,7 +4303,7 @@
           <a:bodyPr wrap="square" lIns="0" tIns="0" rIns="0" bIns="0" rtlCol="0" anchor="t"/>
           <a:lstStyle/>
           <a:p>
-            <a:pPr indent="0" marL="0">
+            <a:pPr marL="0" indent="0">
               <a:spcAft>
                 <a:spcPts val="400"/>
               </a:spcAft>
@@ -4628,7 +4323,7 @@
             <a:endParaRPr lang="en-US" sz="1600" dirty="0"/>
           </a:p>
           <a:p>
-            <a:pPr indent="0" marL="0">
+            <a:pPr marL="0" indent="0">
               <a:spcAft>
                 <a:spcPts val="400"/>
               </a:spcAft>
@@ -4648,7 +4343,7 @@
             <a:endParaRPr lang="en-US" sz="1600" dirty="0"/>
           </a:p>
           <a:p>
-            <a:pPr indent="0" marL="0">
+            <a:pPr marL="0" indent="0">
               <a:spcAft>
                 <a:spcPts val="400"/>
               </a:spcAft>
@@ -4668,7 +4363,7 @@
             <a:endParaRPr lang="en-US" sz="1600" dirty="0"/>
           </a:p>
           <a:p>
-            <a:pPr indent="0" marL="0">
+            <a:pPr marL="0" indent="0">
               <a:spcAft>
                 <a:spcPts val="400"/>
               </a:spcAft>
@@ -4688,7 +4383,7 @@
             <a:endParaRPr lang="en-US" sz="1600" dirty="0"/>
           </a:p>
           <a:p>
-            <a:pPr indent="0" marL="0">
+            <a:pPr marL="0" indent="0">
               <a:spcAft>
                 <a:spcPts val="400"/>
               </a:spcAft>
@@ -4708,7 +4403,7 @@
             <a:endParaRPr lang="en-US" sz="1600" dirty="0"/>
           </a:p>
           <a:p>
-            <a:pPr indent="0" marL="0">
+            <a:pPr marL="0" indent="0">
               <a:spcAft>
                 <a:spcPts val="400"/>
               </a:spcAft>
@@ -4728,7 +4423,7 @@
             <a:endParaRPr lang="en-US" sz="1600" dirty="0"/>
           </a:p>
           <a:p>
-            <a:pPr indent="0" marL="0">
+            <a:pPr marL="0" indent="0">
               <a:spcAft>
                 <a:spcPts val="400"/>
               </a:spcAft>
@@ -4748,7 +4443,7 @@
             <a:endParaRPr lang="en-US" sz="1600" dirty="0"/>
           </a:p>
           <a:p>
-            <a:pPr indent="0" marL="0">
+            <a:pPr marL="0" indent="0">
               <a:spcAft>
                 <a:spcPts val="400"/>
               </a:spcAft>
@@ -4768,7 +4463,7 @@
             <a:endParaRPr lang="en-US" sz="1600" dirty="0"/>
           </a:p>
           <a:p>
-            <a:pPr indent="0" marL="0">
+            <a:pPr marL="0" indent="0">
               <a:spcAft>
                 <a:spcPts val="400"/>
               </a:spcAft>
@@ -4788,7 +4483,7 @@
             <a:endParaRPr lang="en-US" sz="1600" dirty="0"/>
           </a:p>
           <a:p>
-            <a:pPr indent="0" marL="0">
+            <a:pPr marL="0" indent="0">
               <a:spcAft>
                 <a:spcPts val="400"/>
               </a:spcAft>
@@ -4808,7 +4503,7 @@
             <a:endParaRPr lang="en-US" sz="1600" dirty="0"/>
           </a:p>
           <a:p>
-            <a:pPr indent="0" marL="0">
+            <a:pPr marL="0" indent="0">
               <a:spcAft>
                 <a:spcPts val="400"/>
               </a:spcAft>
@@ -4828,7 +4523,7 @@
             <a:endParaRPr lang="en-US" sz="1600" dirty="0"/>
           </a:p>
           <a:p>
-            <a:pPr indent="0" marL="0">
+            <a:pPr marL="0" indent="0">
               <a:spcAft>
                 <a:spcPts val="400"/>
               </a:spcAft>
@@ -4848,7 +4543,7 @@
             <a:endParaRPr lang="en-US" sz="1600" dirty="0"/>
           </a:p>
           <a:p>
-            <a:pPr indent="0" marL="0">
+            <a:pPr marL="0" indent="0">
               <a:spcAft>
                 <a:spcPts val="400"/>
               </a:spcAft>
@@ -4868,7 +4563,7 @@
             <a:endParaRPr lang="en-US" sz="1600" dirty="0"/>
           </a:p>
           <a:p>
-            <a:pPr indent="0" marL="0">
+            <a:pPr marL="0" indent="0">
               <a:spcAft>
                 <a:spcPts val="400"/>
               </a:spcAft>
@@ -4888,7 +4583,7 @@
             <a:endParaRPr lang="en-US" sz="1600" dirty="0"/>
           </a:p>
           <a:p>
-            <a:pPr indent="0" marL="0">
+            <a:pPr marL="0" indent="0">
               <a:spcAft>
                 <a:spcPts val="400"/>
               </a:spcAft>
@@ -4908,7 +4603,7 @@
             <a:endParaRPr lang="en-US" sz="1600" dirty="0"/>
           </a:p>
           <a:p>
-            <a:pPr indent="0" marL="0">
+            <a:pPr marL="0" indent="0">
               <a:spcAft>
                 <a:spcPts val="400"/>
               </a:spcAft>
@@ -4928,7 +4623,7 @@
             <a:endParaRPr lang="en-US" sz="1600" dirty="0"/>
           </a:p>
           <a:p>
-            <a:pPr indent="0" marL="0">
+            <a:pPr marL="0" indent="0">
               <a:spcAft>
                 <a:spcPts val="400"/>
               </a:spcAft>
@@ -4951,14 +4646,14 @@
       </p:sp>
       <p:pic>
         <p:nvPicPr>
-          <p:cNvPr id="5" name="Image 0" descr="/sessions/gracious-blissful-pasteur/mnt/claude_code_presentation/numericor.png">    </p:cNvPr>
+          <p:cNvPr id="5" name="Image 0" descr="/sessions/gracious-blissful-pasteur/mnt/claude_code_presentation/numericor.png"/>
           <p:cNvPicPr>
             <a:picLocks noChangeAspect="1"/>
           </p:cNvPicPr>
           <p:nvPr/>
         </p:nvPicPr>
         <p:blipFill>
-          <a:blip r:embed="rId1"/>
+          <a:blip r:embed="rId3"/>
           <a:stretch>
             <a:fillRect/>
           </a:stretch>
@@ -4994,7 +4689,7 @@
           <a:bodyPr wrap="square" rtlCol="0" anchor="ctr"/>
           <a:lstStyle/>
           <a:p>
-            <a:pPr algn="r" indent="0" marL="0">
+            <a:pPr marL="0" indent="0" algn="r">
               <a:buNone/>
             </a:pPr>
             <a:r>
@@ -5028,6 +4723,7 @@
         <a:solidFill>
           <a:srgbClr val="FFFFFF"/>
         </a:solidFill>
+        <a:effectLst/>
       </p:bgPr>
     </p:bg>
     <p:spTree>
@@ -5065,7 +4761,7 @@
           <a:bodyPr wrap="square" lIns="0" tIns="0" rIns="0" bIns="0" rtlCol="0" anchor="ctr"/>
           <a:lstStyle/>
           <a:p>
-            <a:pPr indent="0" marL="0">
+            <a:pPr marL="0" indent="0">
               <a:buNone/>
             </a:pPr>
             <a:r>
@@ -5104,7 +4800,7 @@
           <a:bodyPr wrap="square" lIns="0" tIns="0" rIns="0" bIns="0" rtlCol="0" anchor="ctr"/>
           <a:lstStyle/>
           <a:p>
-            <a:pPr indent="0" marL="0">
+            <a:pPr marL="0" indent="0">
               <a:buNone/>
             </a:pPr>
             <a:r>
@@ -5143,7 +4839,7 @@
           <a:bodyPr wrap="square" lIns="0" tIns="0" rIns="0" bIns="0" rtlCol="0" anchor="t"/>
           <a:lstStyle/>
           <a:p>
-            <a:pPr indent="0" marL="0">
+            <a:pPr marL="0" indent="0">
               <a:spcAft>
                 <a:spcPts val="400"/>
               </a:spcAft>
@@ -5163,7 +4859,7 @@
             <a:endParaRPr lang="en-US" sz="1600" dirty="0"/>
           </a:p>
           <a:p>
-            <a:pPr indent="0" marL="0">
+            <a:pPr marL="0" indent="0">
               <a:spcAft>
                 <a:spcPts val="400"/>
               </a:spcAft>
@@ -5183,7 +4879,7 @@
             <a:endParaRPr lang="en-US" sz="1600" dirty="0"/>
           </a:p>
           <a:p>
-            <a:pPr indent="0" marL="0">
+            <a:pPr marL="0" indent="0">
               <a:spcAft>
                 <a:spcPts val="400"/>
               </a:spcAft>
@@ -5203,7 +4899,7 @@
             <a:endParaRPr lang="en-US" sz="1600" dirty="0"/>
           </a:p>
           <a:p>
-            <a:pPr indent="0" marL="0">
+            <a:pPr marL="0" indent="0">
               <a:spcAft>
                 <a:spcPts val="400"/>
               </a:spcAft>
@@ -5223,7 +4919,7 @@
             <a:endParaRPr lang="en-US" sz="1600" dirty="0"/>
           </a:p>
           <a:p>
-            <a:pPr indent="0" marL="0">
+            <a:pPr marL="0" indent="0">
               <a:spcAft>
                 <a:spcPts val="400"/>
               </a:spcAft>
@@ -5243,7 +4939,7 @@
             <a:endParaRPr lang="en-US" sz="1600" dirty="0"/>
           </a:p>
           <a:p>
-            <a:pPr indent="0" marL="0">
+            <a:pPr marL="0" indent="0">
               <a:spcAft>
                 <a:spcPts val="400"/>
               </a:spcAft>
@@ -5263,7 +4959,7 @@
             <a:endParaRPr lang="en-US" sz="1600" dirty="0"/>
           </a:p>
           <a:p>
-            <a:pPr indent="0" marL="0">
+            <a:pPr marL="0" indent="0">
               <a:spcAft>
                 <a:spcPts val="400"/>
               </a:spcAft>
@@ -5346,7 +5042,7 @@
             <a:endParaRPr lang="en-US" sz="1600" dirty="0"/>
           </a:p>
           <a:p>
-            <a:pPr indent="0" marL="0">
+            <a:pPr marL="0" indent="0">
               <a:spcAft>
                 <a:spcPts val="400"/>
               </a:spcAft>
@@ -5366,7 +5062,7 @@
             <a:endParaRPr lang="en-US" sz="1600" dirty="0"/>
           </a:p>
           <a:p>
-            <a:pPr indent="0" marL="0">
+            <a:pPr marL="0" indent="0">
               <a:spcAft>
                 <a:spcPts val="400"/>
               </a:spcAft>
@@ -5389,14 +5085,14 @@
       </p:sp>
       <p:pic>
         <p:nvPicPr>
-          <p:cNvPr id="5" name="Image 0" descr="/sessions/gracious-blissful-pasteur/mnt/claude_code_presentation/numericor.png">    </p:cNvPr>
+          <p:cNvPr id="5" name="Image 0" descr="/sessions/gracious-blissful-pasteur/mnt/claude_code_presentation/numericor.png"/>
           <p:cNvPicPr>
             <a:picLocks noChangeAspect="1"/>
           </p:cNvPicPr>
           <p:nvPr/>
         </p:nvPicPr>
         <p:blipFill>
-          <a:blip r:embed="rId1"/>
+          <a:blip r:embed="rId3"/>
           <a:stretch>
             <a:fillRect/>
           </a:stretch>
@@ -5432,7 +5128,7 @@
           <a:bodyPr wrap="square" rtlCol="0" anchor="ctr"/>
           <a:lstStyle/>
           <a:p>
-            <a:pPr algn="r" indent="0" marL="0">
+            <a:pPr marL="0" indent="0" algn="r">
               <a:buNone/>
             </a:pPr>
             <a:r>
@@ -5466,6 +5162,7 @@
         <a:solidFill>
           <a:srgbClr val="FFFFFF"/>
         </a:solidFill>
+        <a:effectLst/>
       </p:bgPr>
     </p:bg>
     <p:spTree>
@@ -5503,7 +5200,7 @@
           <a:bodyPr wrap="square" lIns="0" tIns="0" rIns="0" bIns="0" rtlCol="0" anchor="ctr"/>
           <a:lstStyle/>
           <a:p>
-            <a:pPr indent="0" marL="0">
+            <a:pPr marL="0" indent="0">
               <a:buNone/>
             </a:pPr>
             <a:r>
@@ -5542,7 +5239,7 @@
           <a:bodyPr wrap="square" lIns="0" tIns="0" rIns="0" bIns="0" rtlCol="0" anchor="ctr"/>
           <a:lstStyle/>
           <a:p>
-            <a:pPr indent="0" marL="0">
+            <a:pPr marL="0" indent="0">
               <a:buNone/>
             </a:pPr>
             <a:r>
@@ -5581,7 +5278,7 @@
           <a:bodyPr wrap="square" lIns="0" tIns="0" rIns="0" bIns="0" rtlCol="0" anchor="t"/>
           <a:lstStyle/>
           <a:p>
-            <a:pPr indent="0" marL="0">
+            <a:pPr marL="0" indent="0">
               <a:spcAft>
                 <a:spcPts val="400"/>
               </a:spcAft>
@@ -5601,7 +5298,7 @@
             <a:endParaRPr lang="en-US" sz="1600" dirty="0"/>
           </a:p>
           <a:p>
-            <a:pPr indent="0" marL="0">
+            <a:pPr marL="0" indent="0">
               <a:spcAft>
                 <a:spcPts val="400"/>
               </a:spcAft>
@@ -5621,7 +5318,7 @@
             <a:endParaRPr lang="en-US" sz="1600" dirty="0"/>
           </a:p>
           <a:p>
-            <a:pPr indent="0" marL="0">
+            <a:pPr marL="0" indent="0">
               <a:spcAft>
                 <a:spcPts val="400"/>
               </a:spcAft>
@@ -5641,7 +5338,7 @@
             <a:endParaRPr lang="en-US" sz="1600" dirty="0"/>
           </a:p>
           <a:p>
-            <a:pPr indent="0" marL="0">
+            <a:pPr marL="0" indent="0">
               <a:spcAft>
                 <a:spcPts val="400"/>
               </a:spcAft>
@@ -5661,7 +5358,7 @@
             <a:endParaRPr lang="en-US" sz="1600" dirty="0"/>
           </a:p>
           <a:p>
-            <a:pPr indent="0" marL="0">
+            <a:pPr marL="0" indent="0">
               <a:spcAft>
                 <a:spcPts val="400"/>
               </a:spcAft>
@@ -5681,7 +5378,7 @@
             <a:endParaRPr lang="en-US" sz="1600" dirty="0"/>
           </a:p>
           <a:p>
-            <a:pPr indent="0" marL="0">
+            <a:pPr marL="0" indent="0">
               <a:spcAft>
                 <a:spcPts val="400"/>
               </a:spcAft>
@@ -5701,7 +5398,7 @@
             <a:endParaRPr lang="en-US" sz="1600" dirty="0"/>
           </a:p>
           <a:p>
-            <a:pPr indent="0" marL="0">
+            <a:pPr marL="0" indent="0">
               <a:spcAft>
                 <a:spcPts val="400"/>
               </a:spcAft>
@@ -5721,7 +5418,7 @@
             <a:endParaRPr lang="en-US" sz="1600" dirty="0"/>
           </a:p>
           <a:p>
-            <a:pPr indent="0" marL="0">
+            <a:pPr marL="0" indent="0">
               <a:spcAft>
                 <a:spcPts val="400"/>
               </a:spcAft>
@@ -5741,7 +5438,7 @@
             <a:endParaRPr lang="en-US" sz="1600" dirty="0"/>
           </a:p>
           <a:p>
-            <a:pPr indent="0" marL="0">
+            <a:pPr marL="0" indent="0">
               <a:spcAft>
                 <a:spcPts val="400"/>
               </a:spcAft>
@@ -5761,7 +5458,7 @@
             <a:endParaRPr lang="en-US" sz="1600" dirty="0"/>
           </a:p>
           <a:p>
-            <a:pPr indent="0" marL="0">
+            <a:pPr marL="0" indent="0">
               <a:spcAft>
                 <a:spcPts val="400"/>
               </a:spcAft>
@@ -5781,7 +5478,7 @@
             <a:endParaRPr lang="en-US" sz="1600" dirty="0"/>
           </a:p>
           <a:p>
-            <a:pPr indent="0" marL="0">
+            <a:pPr marL="0" indent="0">
               <a:spcAft>
                 <a:spcPts val="400"/>
               </a:spcAft>
@@ -5804,14 +5501,14 @@
       </p:sp>
       <p:pic>
         <p:nvPicPr>
-          <p:cNvPr id="5" name="Image 0" descr="/sessions/gracious-blissful-pasteur/mnt/claude_code_presentation/numericor.png">    </p:cNvPr>
+          <p:cNvPr id="5" name="Image 0" descr="/sessions/gracious-blissful-pasteur/mnt/claude_code_presentation/numericor.png"/>
           <p:cNvPicPr>
             <a:picLocks noChangeAspect="1"/>
           </p:cNvPicPr>
           <p:nvPr/>
         </p:nvPicPr>
         <p:blipFill>
-          <a:blip r:embed="rId1"/>
+          <a:blip r:embed="rId3"/>
           <a:stretch>
             <a:fillRect/>
           </a:stretch>
@@ -5847,7 +5544,7 @@
           <a:bodyPr wrap="square" rtlCol="0" anchor="ctr"/>
           <a:lstStyle/>
           <a:p>
-            <a:pPr algn="r" indent="0" marL="0">
+            <a:pPr marL="0" indent="0" algn="r">
               <a:buNone/>
             </a:pPr>
             <a:r>
@@ -5881,6 +5578,7 @@
         <a:solidFill>
           <a:srgbClr val="FFFFFF"/>
         </a:solidFill>
+        <a:effectLst/>
       </p:bgPr>
     </p:bg>
     <p:spTree>
@@ -5918,7 +5616,7 @@
           <a:bodyPr wrap="square" lIns="0" tIns="0" rIns="0" bIns="0" rtlCol="0" anchor="ctr"/>
           <a:lstStyle/>
           <a:p>
-            <a:pPr indent="0" marL="0">
+            <a:pPr marL="0" indent="0">
               <a:buNone/>
             </a:pPr>
             <a:r>
@@ -5957,7 +5655,7 @@
           <a:bodyPr wrap="square" lIns="0" tIns="0" rIns="0" bIns="0" rtlCol="0" anchor="ctr"/>
           <a:lstStyle/>
           <a:p>
-            <a:pPr indent="0" marL="0">
+            <a:pPr marL="0" indent="0">
               <a:buNone/>
             </a:pPr>
             <a:r>
@@ -5996,7 +5694,7 @@
           <a:bodyPr wrap="square" lIns="0" tIns="0" rIns="0" bIns="0" rtlCol="0" anchor="t"/>
           <a:lstStyle/>
           <a:p>
-            <a:pPr indent="0" marL="0">
+            <a:pPr marL="0" indent="0">
               <a:spcAft>
                 <a:spcPts val="400"/>
               </a:spcAft>
@@ -6016,7 +5714,7 @@
             <a:endParaRPr lang="en-US" sz="1600" dirty="0"/>
           </a:p>
           <a:p>
-            <a:pPr indent="0" marL="0">
+            <a:pPr marL="0" indent="0">
               <a:spcAft>
                 <a:spcPts val="400"/>
               </a:spcAft>
@@ -6036,7 +5734,7 @@
             <a:endParaRPr lang="en-US" sz="1600" dirty="0"/>
           </a:p>
           <a:p>
-            <a:pPr indent="0" marL="0">
+            <a:pPr marL="0" indent="0">
               <a:spcAft>
                 <a:spcPts val="400"/>
               </a:spcAft>
@@ -6119,7 +5817,7 @@
             <a:endParaRPr lang="en-US" sz="1600" dirty="0"/>
           </a:p>
           <a:p>
-            <a:pPr indent="0" marL="0">
+            <a:pPr marL="0" indent="0">
               <a:spcAft>
                 <a:spcPts val="400"/>
               </a:spcAft>
@@ -6139,7 +5837,7 @@
             <a:endParaRPr lang="en-US" sz="1600" dirty="0"/>
           </a:p>
           <a:p>
-            <a:pPr indent="0" marL="0">
+            <a:pPr marL="0" indent="0">
               <a:spcAft>
                 <a:spcPts val="400"/>
               </a:spcAft>
@@ -6159,7 +5857,7 @@
             <a:endParaRPr lang="en-US" sz="1600" dirty="0"/>
           </a:p>
           <a:p>
-            <a:pPr indent="0" marL="0">
+            <a:pPr marL="0" indent="0">
               <a:spcAft>
                 <a:spcPts val="400"/>
               </a:spcAft>
@@ -6182,14 +5880,14 @@
       </p:sp>
       <p:pic>
         <p:nvPicPr>
-          <p:cNvPr id="5" name="Image 0" descr="/sessions/gracious-blissful-pasteur/mnt/claude_code_presentation/numericor.png">    </p:cNvPr>
+          <p:cNvPr id="5" name="Image 0" descr="/sessions/gracious-blissful-pasteur/mnt/claude_code_presentation/numericor.png"/>
           <p:cNvPicPr>
             <a:picLocks noChangeAspect="1"/>
           </p:cNvPicPr>
           <p:nvPr/>
         </p:nvPicPr>
         <p:blipFill>
-          <a:blip r:embed="rId1"/>
+          <a:blip r:embed="rId3"/>
           <a:stretch>
             <a:fillRect/>
           </a:stretch>
@@ -6225,7 +5923,7 @@
           <a:bodyPr wrap="square" rtlCol="0" anchor="ctr"/>
           <a:lstStyle/>
           <a:p>
-            <a:pPr algn="r" indent="0" marL="0">
+            <a:pPr marL="0" indent="0" algn="r">
               <a:buNone/>
             </a:pPr>
             <a:r>
@@ -6259,6 +5957,7 @@
         <a:solidFill>
           <a:srgbClr val="FFFFFF"/>
         </a:solidFill>
+        <a:effectLst/>
       </p:bgPr>
     </p:bg>
     <p:spTree>
@@ -6296,7 +5995,7 @@
           <a:bodyPr wrap="square" lIns="0" tIns="0" rIns="0" bIns="0" rtlCol="0" anchor="ctr"/>
           <a:lstStyle/>
           <a:p>
-            <a:pPr indent="0" marL="0">
+            <a:pPr marL="0" indent="0">
               <a:buNone/>
             </a:pPr>
             <a:r>
@@ -6335,7 +6034,7 @@
           <a:bodyPr wrap="square" lIns="0" tIns="0" rIns="0" bIns="0" rtlCol="0" anchor="ctr"/>
           <a:lstStyle/>
           <a:p>
-            <a:pPr indent="0" marL="0">
+            <a:pPr marL="0" indent="0">
               <a:buNone/>
             </a:pPr>
             <a:r>
@@ -6374,7 +6073,7 @@
           <a:bodyPr wrap="square" lIns="0" tIns="0" rIns="0" bIns="0" rtlCol="0" anchor="t"/>
           <a:lstStyle/>
           <a:p>
-            <a:pPr indent="0" marL="0">
+            <a:pPr marL="0" indent="0">
               <a:spcAft>
                 <a:spcPts val="400"/>
               </a:spcAft>
@@ -6436,7 +6135,7 @@
             <a:endParaRPr lang="en-US" sz="1600" dirty="0"/>
           </a:p>
           <a:p>
-            <a:pPr indent="0" marL="0">
+            <a:pPr marL="0" indent="0">
               <a:spcAft>
                 <a:spcPts val="400"/>
               </a:spcAft>
@@ -6456,7 +6155,7 @@
             <a:endParaRPr lang="en-US" sz="1600" dirty="0"/>
           </a:p>
           <a:p>
-            <a:pPr indent="0" marL="0">
+            <a:pPr marL="0" indent="0">
               <a:spcAft>
                 <a:spcPts val="400"/>
               </a:spcAft>
@@ -6539,7 +6238,7 @@
             <a:endParaRPr lang="en-US" sz="1600" dirty="0"/>
           </a:p>
           <a:p>
-            <a:pPr indent="0" marL="0">
+            <a:pPr marL="0" indent="0">
               <a:spcAft>
                 <a:spcPts val="400"/>
               </a:spcAft>
@@ -6559,7 +6258,7 @@
             <a:endParaRPr lang="en-US" sz="1600" dirty="0"/>
           </a:p>
           <a:p>
-            <a:pPr indent="0" marL="0">
+            <a:pPr marL="0" indent="0">
               <a:spcAft>
                 <a:spcPts val="400"/>
               </a:spcAft>
@@ -6579,7 +6278,7 @@
             <a:endParaRPr lang="en-US" sz="1600" dirty="0"/>
           </a:p>
           <a:p>
-            <a:pPr indent="0" marL="0">
+            <a:pPr marL="0" indent="0">
               <a:spcAft>
                 <a:spcPts val="400"/>
               </a:spcAft>
@@ -6599,7 +6298,7 @@
             <a:endParaRPr lang="en-US" sz="1600" dirty="0"/>
           </a:p>
           <a:p>
-            <a:pPr indent="0" marL="0">
+            <a:pPr marL="0" indent="0">
               <a:spcAft>
                 <a:spcPts val="400"/>
               </a:spcAft>
@@ -6619,7 +6318,7 @@
             <a:endParaRPr lang="en-US" sz="1600" dirty="0"/>
           </a:p>
           <a:p>
-            <a:pPr indent="0" marL="0">
+            <a:pPr marL="0" indent="0">
               <a:spcAft>
                 <a:spcPts val="400"/>
               </a:spcAft>
@@ -6639,7 +6338,7 @@
             <a:endParaRPr lang="en-US" sz="1600" dirty="0"/>
           </a:p>
           <a:p>
-            <a:pPr indent="0" marL="0">
+            <a:pPr marL="0" indent="0">
               <a:spcAft>
                 <a:spcPts val="400"/>
               </a:spcAft>
@@ -6659,7 +6358,7 @@
             <a:endParaRPr lang="en-US" sz="1600" dirty="0"/>
           </a:p>
           <a:p>
-            <a:pPr indent="0" marL="0">
+            <a:pPr marL="0" indent="0">
               <a:spcAft>
                 <a:spcPts val="400"/>
               </a:spcAft>
@@ -6682,14 +6381,14 @@
       </p:sp>
       <p:pic>
         <p:nvPicPr>
-          <p:cNvPr id="5" name="Image 0" descr="/sessions/gracious-blissful-pasteur/mnt/claude_code_presentation/numericor.png">    </p:cNvPr>
+          <p:cNvPr id="5" name="Image 0" descr="/sessions/gracious-blissful-pasteur/mnt/claude_code_presentation/numericor.png"/>
           <p:cNvPicPr>
             <a:picLocks noChangeAspect="1"/>
           </p:cNvPicPr>
           <p:nvPr/>
         </p:nvPicPr>
         <p:blipFill>
-          <a:blip r:embed="rId1"/>
+          <a:blip r:embed="rId3"/>
           <a:stretch>
             <a:fillRect/>
           </a:stretch>
@@ -6725,7 +6424,7 @@
           <a:bodyPr wrap="square" rtlCol="0" anchor="ctr"/>
           <a:lstStyle/>
           <a:p>
-            <a:pPr algn="r" indent="0" marL="0">
+            <a:pPr marL="0" indent="0" algn="r">
               <a:buNone/>
             </a:pPr>
             <a:r>
@@ -6759,6 +6458,7 @@
         <a:solidFill>
           <a:srgbClr val="FFFFFF"/>
         </a:solidFill>
+        <a:effectLst/>
       </p:bgPr>
     </p:bg>
     <p:spTree>
@@ -6796,7 +6496,7 @@
           <a:bodyPr wrap="square" lIns="0" tIns="0" rIns="0" bIns="0" rtlCol="0" anchor="ctr"/>
           <a:lstStyle/>
           <a:p>
-            <a:pPr indent="0" marL="0">
+            <a:pPr marL="0" indent="0">
               <a:buNone/>
             </a:pPr>
             <a:r>
@@ -6835,7 +6535,7 @@
           <a:bodyPr wrap="square" lIns="0" tIns="0" rIns="0" bIns="0" rtlCol="0" anchor="ctr"/>
           <a:lstStyle/>
           <a:p>
-            <a:pPr indent="0" marL="0">
+            <a:pPr marL="0" indent="0">
               <a:buNone/>
             </a:pPr>
             <a:r>
@@ -6874,7 +6574,7 @@
           <a:bodyPr wrap="square" lIns="0" tIns="0" rIns="0" bIns="0" rtlCol="0" anchor="t"/>
           <a:lstStyle/>
           <a:p>
-            <a:pPr indent="0" marL="0">
+            <a:pPr marL="0" indent="0">
               <a:spcAft>
                 <a:spcPts val="400"/>
               </a:spcAft>
@@ -6894,7 +6594,7 @@
             <a:endParaRPr lang="en-US" sz="1600" dirty="0"/>
           </a:p>
           <a:p>
-            <a:pPr indent="0" marL="0">
+            <a:pPr marL="0" indent="0">
               <a:spcAft>
                 <a:spcPts val="400"/>
               </a:spcAft>
@@ -6914,7 +6614,7 @@
             <a:endParaRPr lang="en-US" sz="1600" dirty="0"/>
           </a:p>
           <a:p>
-            <a:pPr indent="0" marL="0">
+            <a:pPr marL="0" indent="0">
               <a:spcAft>
                 <a:spcPts val="400"/>
               </a:spcAft>
@@ -6934,7 +6634,7 @@
             <a:endParaRPr lang="en-US" sz="1600" dirty="0"/>
           </a:p>
           <a:p>
-            <a:pPr indent="0" marL="0">
+            <a:pPr marL="0" indent="0">
               <a:spcAft>
                 <a:spcPts val="400"/>
               </a:spcAft>
@@ -7017,7 +6717,7 @@
             <a:endParaRPr lang="en-US" sz="1600" dirty="0"/>
           </a:p>
           <a:p>
-            <a:pPr indent="0" marL="0">
+            <a:pPr marL="0" indent="0">
               <a:spcAft>
                 <a:spcPts val="400"/>
               </a:spcAft>
@@ -7037,7 +6737,7 @@
             <a:endParaRPr lang="en-US" sz="1600" dirty="0"/>
           </a:p>
           <a:p>
-            <a:pPr indent="0" marL="0">
+            <a:pPr marL="0" indent="0">
               <a:spcAft>
                 <a:spcPts val="400"/>
               </a:spcAft>
@@ -7057,7 +6757,7 @@
             <a:endParaRPr lang="en-US" sz="1600" dirty="0"/>
           </a:p>
           <a:p>
-            <a:pPr indent="0" marL="0">
+            <a:pPr marL="0" indent="0">
               <a:spcAft>
                 <a:spcPts val="400"/>
               </a:spcAft>
@@ -7077,7 +6777,7 @@
             <a:endParaRPr lang="en-US" sz="1600" dirty="0"/>
           </a:p>
           <a:p>
-            <a:pPr indent="0" marL="0">
+            <a:pPr marL="0" indent="0">
               <a:spcAft>
                 <a:spcPts val="400"/>
               </a:spcAft>
@@ -7097,7 +6797,7 @@
             <a:endParaRPr lang="en-US" sz="1600" dirty="0"/>
           </a:p>
           <a:p>
-            <a:pPr indent="0" marL="0">
+            <a:pPr marL="0" indent="0">
               <a:spcAft>
                 <a:spcPts val="400"/>
               </a:spcAft>
@@ -7117,7 +6817,7 @@
             <a:endParaRPr lang="en-US" sz="1600" dirty="0"/>
           </a:p>
           <a:p>
-            <a:pPr indent="0" marL="0">
+            <a:pPr marL="0" indent="0">
               <a:spcAft>
                 <a:spcPts val="400"/>
               </a:spcAft>
@@ -7137,7 +6837,7 @@
             <a:endParaRPr lang="en-US" sz="1600" dirty="0"/>
           </a:p>
           <a:p>
-            <a:pPr indent="0" marL="0">
+            <a:pPr marL="0" indent="0">
               <a:spcAft>
                 <a:spcPts val="400"/>
               </a:spcAft>
@@ -7157,7 +6857,7 @@
             <a:endParaRPr lang="en-US" sz="1600" dirty="0"/>
           </a:p>
           <a:p>
-            <a:pPr indent="0" marL="0">
+            <a:pPr marL="0" indent="0">
               <a:spcAft>
                 <a:spcPts val="400"/>
               </a:spcAft>
@@ -7177,7 +6877,7 @@
             <a:endParaRPr lang="en-US" sz="1600" dirty="0"/>
           </a:p>
           <a:p>
-            <a:pPr indent="0" marL="0">
+            <a:pPr marL="0" indent="0">
               <a:spcAft>
                 <a:spcPts val="400"/>
               </a:spcAft>
@@ -7200,14 +6900,14 @@
       </p:sp>
       <p:pic>
         <p:nvPicPr>
-          <p:cNvPr id="5" name="Image 0" descr="/sessions/gracious-blissful-pasteur/mnt/claude_code_presentation/numericor.png">    </p:cNvPr>
+          <p:cNvPr id="5" name="Image 0" descr="/sessions/gracious-blissful-pasteur/mnt/claude_code_presentation/numericor.png"/>
           <p:cNvPicPr>
             <a:picLocks noChangeAspect="1"/>
           </p:cNvPicPr>
           <p:nvPr/>
         </p:nvPicPr>
         <p:blipFill>
-          <a:blip r:embed="rId1"/>
+          <a:blip r:embed="rId3"/>
           <a:stretch>
             <a:fillRect/>
           </a:stretch>
@@ -7243,7 +6943,7 @@
           <a:bodyPr wrap="square" rtlCol="0" anchor="ctr"/>
           <a:lstStyle/>
           <a:p>
-            <a:pPr algn="r" indent="0" marL="0">
+            <a:pPr marL="0" indent="0" algn="r">
               <a:buNone/>
             </a:pPr>
             <a:r>
@@ -7277,6 +6977,7 @@
         <a:solidFill>
           <a:srgbClr val="FFFFFF"/>
         </a:solidFill>
+        <a:effectLst/>
       </p:bgPr>
     </p:bg>
     <p:spTree>
@@ -7314,7 +7015,7 @@
           <a:bodyPr wrap="square" lIns="0" tIns="0" rIns="0" bIns="0" rtlCol="0" anchor="ctr"/>
           <a:lstStyle/>
           <a:p>
-            <a:pPr indent="0" marL="0">
+            <a:pPr marL="0" indent="0">
               <a:buNone/>
             </a:pPr>
             <a:r>
@@ -7353,7 +7054,7 @@
           <a:bodyPr wrap="square" lIns="0" tIns="0" rIns="0" bIns="0" rtlCol="0" anchor="ctr"/>
           <a:lstStyle/>
           <a:p>
-            <a:pPr indent="0" marL="0">
+            <a:pPr marL="0" indent="0">
               <a:buNone/>
             </a:pPr>
             <a:r>
@@ -7392,7 +7093,7 @@
           <a:bodyPr wrap="square" lIns="0" tIns="0" rIns="0" bIns="0" rtlCol="0" anchor="t"/>
           <a:lstStyle/>
           <a:p>
-            <a:pPr indent="0" marL="0">
+            <a:pPr marL="0" indent="0">
               <a:spcAft>
                 <a:spcPts val="400"/>
               </a:spcAft>
@@ -7412,7 +7113,7 @@
             <a:endParaRPr lang="en-US" sz="1600" dirty="0"/>
           </a:p>
           <a:p>
-            <a:pPr indent="0" marL="0">
+            <a:pPr marL="0" indent="0">
               <a:spcAft>
                 <a:spcPts val="400"/>
               </a:spcAft>
@@ -7432,7 +7133,7 @@
             <a:endParaRPr lang="en-US" sz="1600" dirty="0"/>
           </a:p>
           <a:p>
-            <a:pPr indent="0" marL="0">
+            <a:pPr marL="0" indent="0">
               <a:spcAft>
                 <a:spcPts val="400"/>
               </a:spcAft>
@@ -7452,7 +7153,7 @@
             <a:endParaRPr lang="en-US" sz="1600" dirty="0"/>
           </a:p>
           <a:p>
-            <a:pPr indent="0" marL="0">
+            <a:pPr marL="0" indent="0">
               <a:spcAft>
                 <a:spcPts val="400"/>
               </a:spcAft>
@@ -7472,7 +7173,7 @@
             <a:endParaRPr lang="en-US" sz="1600" dirty="0"/>
           </a:p>
           <a:p>
-            <a:pPr indent="0" marL="0">
+            <a:pPr marL="0" indent="0">
               <a:spcAft>
                 <a:spcPts val="400"/>
               </a:spcAft>
@@ -7492,7 +7193,7 @@
             <a:endParaRPr lang="en-US" sz="1600" dirty="0"/>
           </a:p>
           <a:p>
-            <a:pPr indent="0" marL="0">
+            <a:pPr marL="0" indent="0">
               <a:spcAft>
                 <a:spcPts val="400"/>
               </a:spcAft>
@@ -7512,7 +7213,7 @@
             <a:endParaRPr lang="en-US" sz="1600" dirty="0"/>
           </a:p>
           <a:p>
-            <a:pPr indent="0" marL="0">
+            <a:pPr marL="0" indent="0">
               <a:spcAft>
                 <a:spcPts val="400"/>
               </a:spcAft>
@@ -7595,7 +7296,7 @@
             <a:endParaRPr lang="en-US" sz="1600" dirty="0"/>
           </a:p>
           <a:p>
-            <a:pPr indent="0" marL="0">
+            <a:pPr marL="0" indent="0">
               <a:spcAft>
                 <a:spcPts val="400"/>
               </a:spcAft>
@@ -7615,7 +7316,7 @@
             <a:endParaRPr lang="en-US" sz="1600" dirty="0"/>
           </a:p>
           <a:p>
-            <a:pPr indent="0" marL="0">
+            <a:pPr marL="0" indent="0">
               <a:spcAft>
                 <a:spcPts val="400"/>
               </a:spcAft>
@@ -7638,14 +7339,14 @@
       </p:sp>
       <p:pic>
         <p:nvPicPr>
-          <p:cNvPr id="5" name="Image 0" descr="/sessions/gracious-blissful-pasteur/mnt/claude_code_presentation/numericor.png">    </p:cNvPr>
+          <p:cNvPr id="5" name="Image 0" descr="/sessions/gracious-blissful-pasteur/mnt/claude_code_presentation/numericor.png"/>
           <p:cNvPicPr>
             <a:picLocks noChangeAspect="1"/>
           </p:cNvPicPr>
           <p:nvPr/>
         </p:nvPicPr>
         <p:blipFill>
-          <a:blip r:embed="rId1"/>
+          <a:blip r:embed="rId3"/>
           <a:stretch>
             <a:fillRect/>
           </a:stretch>
@@ -7681,7 +7382,7 @@
           <a:bodyPr wrap="square" rtlCol="0" anchor="ctr"/>
           <a:lstStyle/>
           <a:p>
-            <a:pPr algn="r" indent="0" marL="0">
+            <a:pPr marL="0" indent="0" algn="r">
               <a:buNone/>
             </a:pPr>
             <a:r>
@@ -7715,6 +7416,7 @@
         <a:solidFill>
           <a:srgbClr val="FFFFFF"/>
         </a:solidFill>
+        <a:effectLst/>
       </p:bgPr>
     </p:bg>
     <p:spTree>
@@ -7752,7 +7454,7 @@
           <a:bodyPr wrap="square" lIns="0" tIns="0" rIns="0" bIns="0" rtlCol="0" anchor="ctr"/>
           <a:lstStyle/>
           <a:p>
-            <a:pPr indent="0" marL="0">
+            <a:pPr marL="0" indent="0">
               <a:buNone/>
             </a:pPr>
             <a:r>
@@ -7791,7 +7493,7 @@
           <a:bodyPr wrap="square" lIns="0" tIns="0" rIns="0" bIns="0" rtlCol="0" anchor="ctr"/>
           <a:lstStyle/>
           <a:p>
-            <a:pPr indent="0" marL="0">
+            <a:pPr marL="0" indent="0">
               <a:buNone/>
             </a:pPr>
             <a:r>
@@ -7830,7 +7532,7 @@
           <a:bodyPr wrap="square" lIns="0" tIns="0" rIns="0" bIns="0" rtlCol="0" anchor="t"/>
           <a:lstStyle/>
           <a:p>
-            <a:pPr indent="0" marL="0">
+            <a:pPr marL="0" indent="0">
               <a:spcAft>
                 <a:spcPts val="400"/>
               </a:spcAft>
@@ -7913,7 +7615,7 @@
             <a:endParaRPr lang="en-US" sz="1600" dirty="0"/>
           </a:p>
           <a:p>
-            <a:pPr indent="0" marL="0">
+            <a:pPr marL="0" indent="0">
               <a:spcAft>
                 <a:spcPts val="400"/>
               </a:spcAft>
@@ -7933,7 +7635,7 @@
             <a:endParaRPr lang="en-US" sz="1600" dirty="0"/>
           </a:p>
           <a:p>
-            <a:pPr indent="0" marL="0">
+            <a:pPr marL="0" indent="0">
               <a:spcAft>
                 <a:spcPts val="400"/>
               </a:spcAft>
@@ -7953,7 +7655,7 @@
             <a:endParaRPr lang="en-US" sz="1600" dirty="0"/>
           </a:p>
           <a:p>
-            <a:pPr indent="0" marL="0">
+            <a:pPr marL="0" indent="0">
               <a:spcAft>
                 <a:spcPts val="400"/>
               </a:spcAft>
@@ -7973,7 +7675,7 @@
             <a:endParaRPr lang="en-US" sz="1600" dirty="0"/>
           </a:p>
           <a:p>
-            <a:pPr indent="0" marL="0">
+            <a:pPr marL="0" indent="0">
               <a:spcAft>
                 <a:spcPts val="400"/>
               </a:spcAft>
@@ -7993,7 +7695,7 @@
             <a:endParaRPr lang="en-US" sz="1600" dirty="0"/>
           </a:p>
           <a:p>
-            <a:pPr indent="0" marL="0">
+            <a:pPr marL="0" indent="0">
               <a:spcAft>
                 <a:spcPts val="400"/>
               </a:spcAft>
@@ -8013,7 +7715,7 @@
             <a:endParaRPr lang="en-US" sz="1600" dirty="0"/>
           </a:p>
           <a:p>
-            <a:pPr indent="0" marL="0">
+            <a:pPr marL="0" indent="0">
               <a:spcAft>
                 <a:spcPts val="400"/>
               </a:spcAft>
@@ -8033,7 +7735,7 @@
             <a:endParaRPr lang="en-US" sz="1600" dirty="0"/>
           </a:p>
           <a:p>
-            <a:pPr indent="0" marL="0">
+            <a:pPr marL="0" indent="0">
               <a:spcAft>
                 <a:spcPts val="400"/>
               </a:spcAft>
@@ -8053,7 +7755,7 @@
             <a:endParaRPr lang="en-US" sz="1600" dirty="0"/>
           </a:p>
           <a:p>
-            <a:pPr indent="0" marL="0">
+            <a:pPr marL="0" indent="0">
               <a:spcAft>
                 <a:spcPts val="400"/>
               </a:spcAft>
@@ -8073,7 +7775,7 @@
             <a:endParaRPr lang="en-US" sz="1600" dirty="0"/>
           </a:p>
           <a:p>
-            <a:pPr indent="0" marL="0">
+            <a:pPr marL="0" indent="0">
               <a:spcAft>
                 <a:spcPts val="400"/>
               </a:spcAft>
@@ -8093,7 +7795,7 @@
             <a:endParaRPr lang="en-US" sz="1600" dirty="0"/>
           </a:p>
           <a:p>
-            <a:pPr indent="0" marL="0">
+            <a:pPr marL="0" indent="0">
               <a:spcAft>
                 <a:spcPts val="400"/>
               </a:spcAft>
@@ -8113,7 +7815,7 @@
             <a:endParaRPr lang="en-US" sz="1600" dirty="0"/>
           </a:p>
           <a:p>
-            <a:pPr indent="0" marL="0">
+            <a:pPr marL="0" indent="0">
               <a:spcAft>
                 <a:spcPts val="400"/>
               </a:spcAft>
@@ -8133,7 +7835,7 @@
             <a:endParaRPr lang="en-US" sz="1600" dirty="0"/>
           </a:p>
           <a:p>
-            <a:pPr indent="0" marL="0">
+            <a:pPr marL="0" indent="0">
               <a:spcAft>
                 <a:spcPts val="400"/>
               </a:spcAft>
@@ -8153,7 +7855,7 @@
             <a:endParaRPr lang="en-US" sz="1600" dirty="0"/>
           </a:p>
           <a:p>
-            <a:pPr indent="0" marL="0">
+            <a:pPr marL="0" indent="0">
               <a:spcAft>
                 <a:spcPts val="400"/>
               </a:spcAft>
@@ -8176,14 +7878,14 @@
       </p:sp>
       <p:pic>
         <p:nvPicPr>
-          <p:cNvPr id="5" name="Image 0" descr="/sessions/gracious-blissful-pasteur/mnt/claude_code_presentation/numericor.png">    </p:cNvPr>
+          <p:cNvPr id="5" name="Image 0" descr="/sessions/gracious-blissful-pasteur/mnt/claude_code_presentation/numericor.png"/>
           <p:cNvPicPr>
             <a:picLocks noChangeAspect="1"/>
           </p:cNvPicPr>
           <p:nvPr/>
         </p:nvPicPr>
         <p:blipFill>
-          <a:blip r:embed="rId1"/>
+          <a:blip r:embed="rId3"/>
           <a:stretch>
             <a:fillRect/>
           </a:stretch>
@@ -8219,7 +7921,7 @@
           <a:bodyPr wrap="square" rtlCol="0" anchor="ctr"/>
           <a:lstStyle/>
           <a:p>
-            <a:pPr algn="r" indent="0" marL="0">
+            <a:pPr marL="0" indent="0" algn="r">
               <a:buNone/>
             </a:pPr>
             <a:r>
@@ -8253,6 +7955,7 @@
         <a:solidFill>
           <a:srgbClr val="000000"/>
         </a:solidFill>
+        <a:effectLst/>
       </p:bgPr>
     </p:bg>
     <p:spTree>
@@ -8290,7 +7993,7 @@
           <a:bodyPr wrap="square" lIns="0" tIns="0" rIns="0" bIns="0" rtlCol="0" anchor="ctr"/>
           <a:lstStyle/>
           <a:p>
-            <a:pPr algn="l" indent="0" marL="0">
+            <a:pPr marL="0" indent="0" algn="l">
               <a:buNone/>
             </a:pPr>
             <a:r>
@@ -8329,7 +8032,7 @@
           <a:bodyPr wrap="square" lIns="0" tIns="0" rIns="0" bIns="0" rtlCol="0" anchor="ctr"/>
           <a:lstStyle/>
           <a:p>
-            <a:pPr algn="l" indent="0" marL="0">
+            <a:pPr marL="0" indent="0" algn="l">
               <a:buNone/>
             </a:pPr>
             <a:r>
@@ -8368,7 +8071,7 @@
           <a:bodyPr wrap="square" rtlCol="0" anchor="ctr"/>
           <a:lstStyle/>
           <a:p>
-            <a:pPr algn="l" indent="0" marL="0">
+            <a:pPr marL="0" indent="0" algn="l">
               <a:buNone/>
             </a:pPr>
             <a:r>
@@ -8407,7 +8110,7 @@
           <a:bodyPr wrap="square" rtlCol="0" anchor="ctr"/>
           <a:lstStyle/>
           <a:p>
-            <a:pPr algn="r" indent="0" marL="0">
+            <a:pPr marL="0" indent="0" algn="r">
               <a:buNone/>
             </a:pPr>
             <a:r>
@@ -8441,6 +8144,7 @@
         <a:solidFill>
           <a:srgbClr val="FFFFFF"/>
         </a:solidFill>
+        <a:effectLst/>
       </p:bgPr>
     </p:bg>
     <p:spTree>
@@ -8478,7 +8182,7 @@
           <a:bodyPr wrap="square" lIns="0" tIns="0" rIns="0" bIns="0" rtlCol="0" anchor="ctr"/>
           <a:lstStyle/>
           <a:p>
-            <a:pPr indent="0" marL="0">
+            <a:pPr marL="0" indent="0">
               <a:buNone/>
             </a:pPr>
             <a:r>
@@ -8517,7 +8221,7 @@
           <a:bodyPr wrap="square" lIns="0" tIns="0" rIns="0" bIns="0" rtlCol="0" anchor="t"/>
           <a:lstStyle/>
           <a:p>
-            <a:pPr indent="0" marL="0">
+            <a:pPr marL="0" indent="0">
               <a:spcAft>
                 <a:spcPts val="400"/>
               </a:spcAft>
@@ -8537,7 +8241,7 @@
             <a:endParaRPr lang="en-US" sz="1600" dirty="0"/>
           </a:p>
           <a:p>
-            <a:pPr indent="0" marL="0">
+            <a:pPr marL="0" indent="0">
               <a:spcAft>
                 <a:spcPts val="400"/>
               </a:spcAft>
@@ -8557,7 +8261,7 @@
             <a:endParaRPr lang="en-US" sz="1600" dirty="0"/>
           </a:p>
           <a:p>
-            <a:pPr indent="0" marL="0">
+            <a:pPr marL="0" indent="0">
               <a:spcAft>
                 <a:spcPts val="400"/>
               </a:spcAft>
@@ -8577,7 +8281,7 @@
             <a:endParaRPr lang="en-US" sz="1600" dirty="0"/>
           </a:p>
           <a:p>
-            <a:pPr indent="0" marL="0">
+            <a:pPr marL="0" indent="0">
               <a:spcAft>
                 <a:spcPts val="400"/>
               </a:spcAft>
@@ -8597,7 +8301,7 @@
             <a:endParaRPr lang="en-US" sz="1600" dirty="0"/>
           </a:p>
           <a:p>
-            <a:pPr indent="0" marL="0">
+            <a:pPr marL="0" indent="0">
               <a:spcAft>
                 <a:spcPts val="400"/>
               </a:spcAft>
@@ -8617,7 +8321,7 @@
             <a:endParaRPr lang="en-US" sz="1600" dirty="0"/>
           </a:p>
           <a:p>
-            <a:pPr indent="0" marL="0">
+            <a:pPr marL="0" indent="0">
               <a:spcAft>
                 <a:spcPts val="400"/>
               </a:spcAft>
@@ -8637,7 +8341,7 @@
             <a:endParaRPr lang="en-US" sz="1600" dirty="0"/>
           </a:p>
           <a:p>
-            <a:pPr indent="0" marL="0">
+            <a:pPr marL="0" indent="0">
               <a:spcAft>
                 <a:spcPts val="400"/>
               </a:spcAft>
@@ -8652,12 +8356,12 @@
                 <a:ea typeface="Inter" pitchFamily="34" charset="-122"/>
                 <a:cs typeface="Inter" pitchFamily="34" charset="-120"/>
               </a:rPr>
-              <a:t>Third-party tools referenced — Claude Code, haft, Beads — are subject to their own terms, pricing, and availability, and may change at any time without notice. Always verify current documentation before relying on any workflow described here.</a:t>
-            </a:r>
-            <a:endParaRPr lang="en-US" sz="1600" dirty="0"/>
-          </a:p>
-          <a:p>
-            <a:pPr indent="0" marL="0">
+              <a:t>Third-party tools referenced — Claude Code, haft, beads — are subject to their own terms, pricing, and availability, and may change at any time without notice. Always verify current documentation before relying on any workflow described here.</a:t>
+            </a:r>
+            <a:endParaRPr lang="en-US" sz="1600" dirty="0"/>
+          </a:p>
+          <a:p>
+            <a:pPr marL="0" indent="0">
               <a:spcAft>
                 <a:spcPts val="400"/>
               </a:spcAft>
@@ -8677,7 +8381,7 @@
             <a:endParaRPr lang="en-US" sz="1600" dirty="0"/>
           </a:p>
           <a:p>
-            <a:pPr indent="0" marL="0">
+            <a:pPr marL="0" indent="0">
               <a:spcAft>
                 <a:spcPts val="400"/>
               </a:spcAft>
@@ -8692,7 +8396,26 @@
                 <a:ea typeface="Inter" pitchFamily="34" charset="-122"/>
                 <a:cs typeface="Inter" pitchFamily="34" charset="-120"/>
               </a:rPr>
-              <a:t>No part of this presentation may be reproduced or distributed without prior written permission. Questions: elias.karabelas@numericor.at</a:t>
+              <a:t>No part of this presentation may be reproduced or distributed without prior written permission. </a:t>
+            </a:r>
+          </a:p>
+          <a:p>
+            <a:pPr marL="0" indent="0">
+              <a:spcAft>
+                <a:spcPts val="400"/>
+              </a:spcAft>
+              <a:buNone/>
+            </a:pPr>
+            <a:r>
+              <a:rPr lang="en-US" sz="1600" dirty="0">
+                <a:solidFill>
+                  <a:srgbClr val="000000"/>
+                </a:solidFill>
+                <a:latin typeface="Inter" pitchFamily="34" charset="0"/>
+                <a:ea typeface="Inter" pitchFamily="34" charset="-122"/>
+                <a:cs typeface="Inter" pitchFamily="34" charset="-120"/>
+              </a:rPr>
+              <a:t>Questions: elias.karabelas@numericor.at</a:t>
             </a:r>
             <a:endParaRPr lang="en-US" sz="1600" dirty="0"/>
           </a:p>
@@ -8700,14 +8423,14 @@
       </p:sp>
       <p:pic>
         <p:nvPicPr>
-          <p:cNvPr id="4" name="Image 0" descr="/sessions/gracious-blissful-pasteur/mnt/claude_code_presentation/numericor.png">    </p:cNvPr>
+          <p:cNvPr id="4" name="Image 0" descr="/sessions/gracious-blissful-pasteur/mnt/claude_code_presentation/numericor.png"/>
           <p:cNvPicPr>
             <a:picLocks noChangeAspect="1"/>
           </p:cNvPicPr>
           <p:nvPr/>
         </p:nvPicPr>
         <p:blipFill>
-          <a:blip r:embed="rId1"/>
+          <a:blip r:embed="rId3"/>
           <a:stretch>
             <a:fillRect/>
           </a:stretch>
@@ -8743,7 +8466,7 @@
           <a:bodyPr wrap="square" rtlCol="0" anchor="ctr"/>
           <a:lstStyle/>
           <a:p>
-            <a:pPr algn="r" indent="0" marL="0">
+            <a:pPr marL="0" indent="0" algn="r">
               <a:buNone/>
             </a:pPr>
             <a:r>
@@ -8777,6 +8500,7 @@
         <a:solidFill>
           <a:srgbClr val="FFFFFF"/>
         </a:solidFill>
+        <a:effectLst/>
       </p:bgPr>
     </p:bg>
     <p:spTree>
@@ -8814,7 +8538,7 @@
           <a:bodyPr wrap="square" lIns="0" tIns="0" rIns="0" bIns="0" rtlCol="0" anchor="ctr"/>
           <a:lstStyle/>
           <a:p>
-            <a:pPr indent="0" marL="0">
+            <a:pPr marL="0" indent="0">
               <a:buNone/>
             </a:pPr>
             <a:r>
@@ -8853,7 +8577,7 @@
           <a:bodyPr wrap="square" lIns="0" tIns="0" rIns="0" bIns="0" rtlCol="0" anchor="ctr"/>
           <a:lstStyle/>
           <a:p>
-            <a:pPr indent="0" marL="0">
+            <a:pPr marL="0" indent="0">
               <a:buNone/>
             </a:pPr>
             <a:r>
@@ -8892,7 +8616,7 @@
           <a:bodyPr wrap="square" lIns="0" tIns="0" rIns="0" bIns="0" rtlCol="0" anchor="t"/>
           <a:lstStyle/>
           <a:p>
-            <a:pPr indent="0" marL="0">
+            <a:pPr marL="0" indent="0">
               <a:spcAft>
                 <a:spcPts val="400"/>
               </a:spcAft>
@@ -8912,7 +8636,7 @@
             <a:endParaRPr lang="en-US" sz="1600" dirty="0"/>
           </a:p>
           <a:p>
-            <a:pPr indent="0" marL="0">
+            <a:pPr marL="0" indent="0">
               <a:spcAft>
                 <a:spcPts val="400"/>
               </a:spcAft>
@@ -8932,7 +8656,7 @@
             <a:endParaRPr lang="en-US" sz="1600" dirty="0"/>
           </a:p>
           <a:p>
-            <a:pPr indent="0" marL="0">
+            <a:pPr marL="0" indent="0">
               <a:spcAft>
                 <a:spcPts val="400"/>
               </a:spcAft>
@@ -9057,7 +8781,7 @@
             <a:endParaRPr lang="en-US" sz="1600" dirty="0"/>
           </a:p>
           <a:p>
-            <a:pPr indent="0" marL="0">
+            <a:pPr marL="0" indent="0">
               <a:spcAft>
                 <a:spcPts val="400"/>
               </a:spcAft>
@@ -9077,7 +8801,7 @@
             <a:endParaRPr lang="en-US" sz="1600" dirty="0"/>
           </a:p>
           <a:p>
-            <a:pPr indent="0" marL="0">
+            <a:pPr marL="0" indent="0">
               <a:spcAft>
                 <a:spcPts val="400"/>
               </a:spcAft>
@@ -9097,7 +8821,7 @@
             <a:endParaRPr lang="en-US" sz="1600" dirty="0"/>
           </a:p>
           <a:p>
-            <a:pPr indent="0" marL="0">
+            <a:pPr marL="0" indent="0">
               <a:spcAft>
                 <a:spcPts val="400"/>
               </a:spcAft>
@@ -9120,14 +8844,14 @@
       </p:sp>
       <p:pic>
         <p:nvPicPr>
-          <p:cNvPr id="5" name="Image 0" descr="/sessions/gracious-blissful-pasteur/mnt/claude_code_presentation/numericor.png">    </p:cNvPr>
+          <p:cNvPr id="5" name="Image 0" descr="/sessions/gracious-blissful-pasteur/mnt/claude_code_presentation/numericor.png"/>
           <p:cNvPicPr>
             <a:picLocks noChangeAspect="1"/>
           </p:cNvPicPr>
           <p:nvPr/>
         </p:nvPicPr>
         <p:blipFill>
-          <a:blip r:embed="rId1"/>
+          <a:blip r:embed="rId3"/>
           <a:stretch>
             <a:fillRect/>
           </a:stretch>
@@ -9163,7 +8887,7 @@
           <a:bodyPr wrap="square" rtlCol="0" anchor="ctr"/>
           <a:lstStyle/>
           <a:p>
-            <a:pPr algn="r" indent="0" marL="0">
+            <a:pPr marL="0" indent="0" algn="r">
               <a:buNone/>
             </a:pPr>
             <a:r>
@@ -9197,6 +8921,7 @@
         <a:solidFill>
           <a:srgbClr val="FFFFFF"/>
         </a:solidFill>
+        <a:effectLst/>
       </p:bgPr>
     </p:bg>
     <p:spTree>
@@ -9234,7 +8959,7 @@
           <a:bodyPr wrap="square" lIns="0" tIns="0" rIns="0" bIns="0" rtlCol="0" anchor="ctr"/>
           <a:lstStyle/>
           <a:p>
-            <a:pPr indent="0" marL="0">
+            <a:pPr marL="0" indent="0">
               <a:buNone/>
             </a:pPr>
             <a:r>
@@ -9273,7 +8998,7 @@
           <a:bodyPr wrap="square" lIns="0" tIns="0" rIns="0" bIns="0" rtlCol="0" anchor="ctr"/>
           <a:lstStyle/>
           <a:p>
-            <a:pPr indent="0" marL="0">
+            <a:pPr marL="0" indent="0">
               <a:buNone/>
             </a:pPr>
             <a:r>
@@ -9312,7 +9037,7 @@
           <a:bodyPr wrap="square" lIns="0" tIns="0" rIns="0" bIns="0" rtlCol="0" anchor="t"/>
           <a:lstStyle/>
           <a:p>
-            <a:pPr indent="0" marL="0">
+            <a:pPr marL="0" indent="0">
               <a:spcAft>
                 <a:spcPts val="400"/>
               </a:spcAft>
@@ -9332,7 +9057,7 @@
             <a:endParaRPr lang="en-US" sz="1600" dirty="0"/>
           </a:p>
           <a:p>
-            <a:pPr indent="0" marL="0">
+            <a:pPr marL="0" indent="0">
               <a:spcAft>
                 <a:spcPts val="400"/>
               </a:spcAft>
@@ -9352,7 +9077,7 @@
             <a:endParaRPr lang="en-US" sz="1600" dirty="0"/>
           </a:p>
           <a:p>
-            <a:pPr indent="0" marL="0">
+            <a:pPr marL="0" indent="0">
               <a:spcAft>
                 <a:spcPts val="400"/>
               </a:spcAft>
@@ -9372,7 +9097,7 @@
             <a:endParaRPr lang="en-US" sz="1600" dirty="0"/>
           </a:p>
           <a:p>
-            <a:pPr indent="0" marL="0">
+            <a:pPr marL="0" indent="0">
               <a:spcAft>
                 <a:spcPts val="400"/>
               </a:spcAft>
@@ -9392,7 +9117,7 @@
             <a:endParaRPr lang="en-US" sz="1600" dirty="0"/>
           </a:p>
           <a:p>
-            <a:pPr indent="0" marL="0">
+            <a:pPr marL="0" indent="0">
               <a:spcAft>
                 <a:spcPts val="400"/>
               </a:spcAft>
@@ -9412,7 +9137,7 @@
             <a:endParaRPr lang="en-US" sz="1600" dirty="0"/>
           </a:p>
           <a:p>
-            <a:pPr indent="0" marL="0">
+            <a:pPr marL="0" indent="0">
               <a:spcAft>
                 <a:spcPts val="400"/>
               </a:spcAft>
@@ -9432,7 +9157,7 @@
             <a:endParaRPr lang="en-US" sz="1600" dirty="0"/>
           </a:p>
           <a:p>
-            <a:pPr indent="0" marL="0">
+            <a:pPr marL="0" indent="0">
               <a:spcAft>
                 <a:spcPts val="400"/>
               </a:spcAft>
@@ -9452,7 +9177,7 @@
             <a:endParaRPr lang="en-US" sz="1600" dirty="0"/>
           </a:p>
           <a:p>
-            <a:pPr indent="0" marL="0">
+            <a:pPr marL="0" indent="0">
               <a:spcAft>
                 <a:spcPts val="400"/>
               </a:spcAft>
@@ -9472,7 +9197,7 @@
             <a:endParaRPr lang="en-US" sz="1600" dirty="0"/>
           </a:p>
           <a:p>
-            <a:pPr indent="0" marL="0">
+            <a:pPr marL="0" indent="0">
               <a:spcAft>
                 <a:spcPts val="400"/>
               </a:spcAft>
@@ -9492,7 +9217,7 @@
             <a:endParaRPr lang="en-US" sz="1600" dirty="0"/>
           </a:p>
           <a:p>
-            <a:pPr indent="0" marL="0">
+            <a:pPr marL="0" indent="0">
               <a:spcAft>
                 <a:spcPts val="400"/>
               </a:spcAft>
@@ -9512,7 +9237,7 @@
             <a:endParaRPr lang="en-US" sz="1600" dirty="0"/>
           </a:p>
           <a:p>
-            <a:pPr indent="0" marL="0">
+            <a:pPr marL="0" indent="0">
               <a:spcAft>
                 <a:spcPts val="400"/>
               </a:spcAft>
@@ -9577,14 +9302,14 @@
       </p:sp>
       <p:pic>
         <p:nvPicPr>
-          <p:cNvPr id="5" name="Image 0" descr="/sessions/gracious-blissful-pasteur/mnt/claude_code_presentation/numericor.png">    </p:cNvPr>
+          <p:cNvPr id="5" name="Image 0" descr="/sessions/gracious-blissful-pasteur/mnt/claude_code_presentation/numericor.png"/>
           <p:cNvPicPr>
             <a:picLocks noChangeAspect="1"/>
           </p:cNvPicPr>
           <p:nvPr/>
         </p:nvPicPr>
         <p:blipFill>
-          <a:blip r:embed="rId1"/>
+          <a:blip r:embed="rId3"/>
           <a:stretch>
             <a:fillRect/>
           </a:stretch>
@@ -9620,7 +9345,7 @@
           <a:bodyPr wrap="square" rtlCol="0" anchor="ctr"/>
           <a:lstStyle/>
           <a:p>
-            <a:pPr algn="r" indent="0" marL="0">
+            <a:pPr marL="0" indent="0" algn="r">
               <a:buNone/>
             </a:pPr>
             <a:r>
@@ -9654,6 +9379,7 @@
         <a:solidFill>
           <a:srgbClr val="FFFFFF"/>
         </a:solidFill>
+        <a:effectLst/>
       </p:bgPr>
     </p:bg>
     <p:spTree>
@@ -9691,7 +9417,7 @@
           <a:bodyPr wrap="square" lIns="0" tIns="0" rIns="0" bIns="0" rtlCol="0" anchor="ctr"/>
           <a:lstStyle/>
           <a:p>
-            <a:pPr indent="0" marL="0">
+            <a:pPr marL="0" indent="0">
               <a:buNone/>
             </a:pPr>
             <a:r>
@@ -9730,7 +9456,7 @@
           <a:bodyPr wrap="square" lIns="0" tIns="0" rIns="0" bIns="0" rtlCol="0" anchor="ctr"/>
           <a:lstStyle/>
           <a:p>
-            <a:pPr indent="0" marL="0">
+            <a:pPr marL="0" indent="0">
               <a:buNone/>
             </a:pPr>
             <a:r>
@@ -9769,7 +9495,7 @@
           <a:bodyPr wrap="square" lIns="0" tIns="0" rIns="0" bIns="0" rtlCol="0" anchor="t"/>
           <a:lstStyle/>
           <a:p>
-            <a:pPr indent="0" marL="0">
+            <a:pPr marL="0" indent="0">
               <a:spcAft>
                 <a:spcPts val="400"/>
               </a:spcAft>
@@ -9915,7 +9641,7 @@
             <a:endParaRPr lang="en-US" sz="1600" dirty="0"/>
           </a:p>
           <a:p>
-            <a:pPr indent="0" marL="0">
+            <a:pPr marL="0" indent="0">
               <a:spcAft>
                 <a:spcPts val="400"/>
               </a:spcAft>
@@ -9935,7 +9661,7 @@
             <a:endParaRPr lang="en-US" sz="1600" dirty="0"/>
           </a:p>
           <a:p>
-            <a:pPr indent="0" marL="0">
+            <a:pPr marL="0" indent="0">
               <a:spcAft>
                 <a:spcPts val="400"/>
               </a:spcAft>
@@ -9976,7 +9702,7 @@
             <a:endParaRPr lang="en-US" sz="1600" dirty="0"/>
           </a:p>
           <a:p>
-            <a:pPr indent="0" marL="0">
+            <a:pPr marL="0" indent="0">
               <a:spcAft>
                 <a:spcPts val="400"/>
               </a:spcAft>
@@ -9996,7 +9722,7 @@
             <a:endParaRPr lang="en-US" sz="1600" dirty="0"/>
           </a:p>
           <a:p>
-            <a:pPr indent="0" marL="0">
+            <a:pPr marL="0" indent="0">
               <a:spcAft>
                 <a:spcPts val="400"/>
               </a:spcAft>
@@ -10103,14 +9829,14 @@
       </p:sp>
       <p:pic>
         <p:nvPicPr>
-          <p:cNvPr id="5" name="Image 0" descr="/sessions/gracious-blissful-pasteur/mnt/claude_code_presentation/numericor.png">    </p:cNvPr>
+          <p:cNvPr id="5" name="Image 0" descr="/sessions/gracious-blissful-pasteur/mnt/claude_code_presentation/numericor.png"/>
           <p:cNvPicPr>
             <a:picLocks noChangeAspect="1"/>
           </p:cNvPicPr>
           <p:nvPr/>
         </p:nvPicPr>
         <p:blipFill>
-          <a:blip r:embed="rId1"/>
+          <a:blip r:embed="rId3"/>
           <a:stretch>
             <a:fillRect/>
           </a:stretch>
@@ -10146,7 +9872,7 @@
           <a:bodyPr wrap="square" rtlCol="0" anchor="ctr"/>
           <a:lstStyle/>
           <a:p>
-            <a:pPr algn="r" indent="0" marL="0">
+            <a:pPr marL="0" indent="0" algn="r">
               <a:buNone/>
             </a:pPr>
             <a:r>
@@ -10180,6 +9906,7 @@
         <a:solidFill>
           <a:srgbClr val="000000"/>
         </a:solidFill>
+        <a:effectLst/>
       </p:bgPr>
     </p:bg>
     <p:spTree>
@@ -10217,7 +9944,7 @@
           <a:bodyPr wrap="square" lIns="0" tIns="0" rIns="0" bIns="0" rtlCol="0" anchor="ctr"/>
           <a:lstStyle/>
           <a:p>
-            <a:pPr algn="l" indent="0" marL="0">
+            <a:pPr marL="0" indent="0" algn="l">
               <a:buNone/>
             </a:pPr>
             <a:r>
@@ -10256,7 +9983,7 @@
           <a:bodyPr wrap="square" lIns="0" tIns="0" rIns="0" bIns="0" rtlCol="0" anchor="ctr"/>
           <a:lstStyle/>
           <a:p>
-            <a:pPr algn="l" indent="0" marL="0">
+            <a:pPr marL="0" indent="0" algn="l">
               <a:buNone/>
             </a:pPr>
             <a:r>
@@ -10295,7 +10022,7 @@
           <a:bodyPr wrap="square" rtlCol="0" anchor="ctr"/>
           <a:lstStyle/>
           <a:p>
-            <a:pPr algn="l" indent="0" marL="0">
+            <a:pPr marL="0" indent="0" algn="l">
               <a:buNone/>
             </a:pPr>
             <a:r>
@@ -10334,7 +10061,7 @@
           <a:bodyPr wrap="square" rtlCol="0" anchor="ctr"/>
           <a:lstStyle/>
           <a:p>
-            <a:pPr algn="r" indent="0" marL="0">
+            <a:pPr marL="0" indent="0" algn="r">
               <a:buNone/>
             </a:pPr>
             <a:r>
@@ -10368,6 +10095,7 @@
         <a:solidFill>
           <a:srgbClr val="FFFFFF"/>
         </a:solidFill>
+        <a:effectLst/>
       </p:bgPr>
     </p:bg>
     <p:spTree>
@@ -10405,7 +10133,7 @@
           <a:bodyPr wrap="square" lIns="0" tIns="0" rIns="0" bIns="0" rtlCol="0" anchor="ctr"/>
           <a:lstStyle/>
           <a:p>
-            <a:pPr indent="0" marL="0">
+            <a:pPr marL="0" indent="0">
               <a:buNone/>
             </a:pPr>
             <a:r>
@@ -10444,7 +10172,7 @@
           <a:bodyPr wrap="square" lIns="0" tIns="0" rIns="0" bIns="0" rtlCol="0" anchor="ctr"/>
           <a:lstStyle/>
           <a:p>
-            <a:pPr indent="0" marL="0">
+            <a:pPr marL="0" indent="0">
               <a:buNone/>
             </a:pPr>
             <a:r>
@@ -10483,7 +10211,7 @@
           <a:bodyPr wrap="square" lIns="0" tIns="0" rIns="0" bIns="0" rtlCol="0" anchor="t"/>
           <a:lstStyle/>
           <a:p>
-            <a:pPr indent="0" marL="0">
+            <a:pPr marL="0" indent="0">
               <a:spcAft>
                 <a:spcPts val="400"/>
               </a:spcAft>
@@ -10503,7 +10231,7 @@
             <a:endParaRPr lang="en-US" sz="1600" dirty="0"/>
           </a:p>
           <a:p>
-            <a:pPr indent="0" marL="0">
+            <a:pPr marL="0" indent="0">
               <a:spcAft>
                 <a:spcPts val="400"/>
               </a:spcAft>
@@ -10523,7 +10251,7 @@
             <a:endParaRPr lang="en-US" sz="1600" dirty="0"/>
           </a:p>
           <a:p>
-            <a:pPr indent="0" marL="0">
+            <a:pPr marL="0" indent="0">
               <a:spcAft>
                 <a:spcPts val="400"/>
               </a:spcAft>
@@ -10627,7 +10355,7 @@
             <a:endParaRPr lang="en-US" sz="1600" dirty="0"/>
           </a:p>
           <a:p>
-            <a:pPr indent="0" marL="0">
+            <a:pPr marL="0" indent="0">
               <a:spcAft>
                 <a:spcPts val="400"/>
               </a:spcAft>
@@ -10647,7 +10375,7 @@
             <a:endParaRPr lang="en-US" sz="1600" dirty="0"/>
           </a:p>
           <a:p>
-            <a:pPr indent="0" marL="0">
+            <a:pPr marL="0" indent="0">
               <a:spcAft>
                 <a:spcPts val="400"/>
               </a:spcAft>
@@ -10667,7 +10395,7 @@
             <a:endParaRPr lang="en-US" sz="1600" dirty="0"/>
           </a:p>
           <a:p>
-            <a:pPr indent="0" marL="0">
+            <a:pPr marL="0" indent="0">
               <a:spcAft>
                 <a:spcPts val="400"/>
               </a:spcAft>
@@ -10687,7 +10415,7 @@
             <a:endParaRPr lang="en-US" sz="1600" dirty="0"/>
           </a:p>
           <a:p>
-            <a:pPr indent="0" marL="0">
+            <a:pPr marL="0" indent="0">
               <a:spcAft>
                 <a:spcPts val="400"/>
               </a:spcAft>
@@ -10707,7 +10435,7 @@
             <a:endParaRPr lang="en-US" sz="1600" dirty="0"/>
           </a:p>
           <a:p>
-            <a:pPr indent="0" marL="0">
+            <a:pPr marL="0" indent="0">
               <a:spcAft>
                 <a:spcPts val="400"/>
               </a:spcAft>
@@ -10727,7 +10455,7 @@
             <a:endParaRPr lang="en-US" sz="1600" dirty="0"/>
           </a:p>
           <a:p>
-            <a:pPr indent="0" marL="0">
+            <a:pPr marL="0" indent="0">
               <a:spcAft>
                 <a:spcPts val="400"/>
               </a:spcAft>
@@ -10750,14 +10478,14 @@
       </p:sp>
       <p:pic>
         <p:nvPicPr>
-          <p:cNvPr id="5" name="Image 0" descr="/sessions/gracious-blissful-pasteur/mnt/claude_code_presentation/numericor.png">    </p:cNvPr>
+          <p:cNvPr id="5" name="Image 0" descr="/sessions/gracious-blissful-pasteur/mnt/claude_code_presentation/numericor.png"/>
           <p:cNvPicPr>
             <a:picLocks noChangeAspect="1"/>
           </p:cNvPicPr>
           <p:nvPr/>
         </p:nvPicPr>
         <p:blipFill>
-          <a:blip r:embed="rId1"/>
+          <a:blip r:embed="rId3"/>
           <a:stretch>
             <a:fillRect/>
           </a:stretch>
@@ -10793,7 +10521,7 @@
           <a:bodyPr wrap="square" rtlCol="0" anchor="ctr"/>
           <a:lstStyle/>
           <a:p>
-            <a:pPr algn="r" indent="0" marL="0">
+            <a:pPr marL="0" indent="0" algn="r">
               <a:buNone/>
             </a:pPr>
             <a:r>
@@ -10827,6 +10555,7 @@
         <a:solidFill>
           <a:srgbClr val="FFFFFF"/>
         </a:solidFill>
+        <a:effectLst/>
       </p:bgPr>
     </p:bg>
     <p:spTree>
@@ -10864,7 +10593,7 @@
           <a:bodyPr wrap="square" lIns="0" tIns="0" rIns="0" bIns="0" rtlCol="0" anchor="ctr"/>
           <a:lstStyle/>
           <a:p>
-            <a:pPr indent="0" marL="0">
+            <a:pPr marL="0" indent="0">
               <a:buNone/>
             </a:pPr>
             <a:r>
@@ -10903,7 +10632,7 @@
           <a:bodyPr wrap="square" lIns="0" tIns="0" rIns="0" bIns="0" rtlCol="0" anchor="ctr"/>
           <a:lstStyle/>
           <a:p>
-            <a:pPr indent="0" marL="0">
+            <a:pPr marL="0" indent="0">
               <a:buNone/>
             </a:pPr>
             <a:r>
@@ -10942,7 +10671,7 @@
           <a:bodyPr wrap="square" lIns="0" tIns="0" rIns="0" bIns="0" rtlCol="0" anchor="t"/>
           <a:lstStyle/>
           <a:p>
-            <a:pPr indent="0" marL="0">
+            <a:pPr marL="0" indent="0">
               <a:spcAft>
                 <a:spcPts val="400"/>
               </a:spcAft>
@@ -10962,7 +10691,7 @@
             <a:endParaRPr lang="en-US" sz="1600" dirty="0"/>
           </a:p>
           <a:p>
-            <a:pPr indent="0" marL="0">
+            <a:pPr marL="0" indent="0">
               <a:spcAft>
                 <a:spcPts val="400"/>
               </a:spcAft>
@@ -10982,7 +10711,7 @@
             <a:endParaRPr lang="en-US" sz="1600" dirty="0"/>
           </a:p>
           <a:p>
-            <a:pPr indent="0" marL="0">
+            <a:pPr marL="0" indent="0">
               <a:spcAft>
                 <a:spcPts val="400"/>
               </a:spcAft>
@@ -11002,7 +10731,7 @@
             <a:endParaRPr lang="en-US" sz="1600" dirty="0"/>
           </a:p>
           <a:p>
-            <a:pPr indent="0" marL="0">
+            <a:pPr marL="0" indent="0">
               <a:spcAft>
                 <a:spcPts val="400"/>
               </a:spcAft>
@@ -11022,7 +10751,7 @@
             <a:endParaRPr lang="en-US" sz="1600" dirty="0"/>
           </a:p>
           <a:p>
-            <a:pPr indent="0" marL="0">
+            <a:pPr marL="0" indent="0">
               <a:spcAft>
                 <a:spcPts val="400"/>
               </a:spcAft>
@@ -11042,7 +10771,7 @@
             <a:endParaRPr lang="en-US" sz="1600" dirty="0"/>
           </a:p>
           <a:p>
-            <a:pPr indent="0" marL="0">
+            <a:pPr marL="0" indent="0">
               <a:spcAft>
                 <a:spcPts val="400"/>
               </a:spcAft>
@@ -11062,7 +10791,7 @@
             <a:endParaRPr lang="en-US" sz="1600" dirty="0"/>
           </a:p>
           <a:p>
-            <a:pPr indent="0" marL="0">
+            <a:pPr marL="0" indent="0">
               <a:spcAft>
                 <a:spcPts val="400"/>
               </a:spcAft>
@@ -11082,7 +10811,7 @@
             <a:endParaRPr lang="en-US" sz="1600" dirty="0"/>
           </a:p>
           <a:p>
-            <a:pPr indent="0" marL="0">
+            <a:pPr marL="0" indent="0">
               <a:spcAft>
                 <a:spcPts val="400"/>
               </a:spcAft>
@@ -11144,7 +10873,7 @@
             <a:endParaRPr lang="en-US" sz="1600" dirty="0"/>
           </a:p>
           <a:p>
-            <a:pPr indent="0" marL="0">
+            <a:pPr marL="0" indent="0">
               <a:spcAft>
                 <a:spcPts val="400"/>
               </a:spcAft>
@@ -11164,7 +10893,7 @@
             <a:endParaRPr lang="en-US" sz="1600" dirty="0"/>
           </a:p>
           <a:p>
-            <a:pPr indent="0" marL="0">
+            <a:pPr marL="0" indent="0">
               <a:spcAft>
                 <a:spcPts val="400"/>
               </a:spcAft>
@@ -11184,7 +10913,7 @@
             <a:endParaRPr lang="en-US" sz="1600" dirty="0"/>
           </a:p>
           <a:p>
-            <a:pPr indent="0" marL="0">
+            <a:pPr marL="0" indent="0">
               <a:spcAft>
                 <a:spcPts val="400"/>
               </a:spcAft>
@@ -11207,14 +10936,14 @@
       </p:sp>
       <p:pic>
         <p:nvPicPr>
-          <p:cNvPr id="5" name="Image 0" descr="/sessions/gracious-blissful-pasteur/mnt/claude_code_presentation/numericor.png">    </p:cNvPr>
+          <p:cNvPr id="5" name="Image 0" descr="/sessions/gracious-blissful-pasteur/mnt/claude_code_presentation/numericor.png"/>
           <p:cNvPicPr>
             <a:picLocks noChangeAspect="1"/>
           </p:cNvPicPr>
           <p:nvPr/>
         </p:nvPicPr>
         <p:blipFill>
-          <a:blip r:embed="rId1"/>
+          <a:blip r:embed="rId3"/>
           <a:stretch>
             <a:fillRect/>
           </a:stretch>
@@ -11250,7 +10979,7 @@
           <a:bodyPr wrap="square" rtlCol="0" anchor="ctr"/>
           <a:lstStyle/>
           <a:p>
-            <a:pPr algn="r" indent="0" marL="0">
+            <a:pPr marL="0" indent="0" algn="r">
               <a:buNone/>
             </a:pPr>
             <a:r>
@@ -11284,6 +11013,7 @@
         <a:solidFill>
           <a:srgbClr val="FFFFFF"/>
         </a:solidFill>
+        <a:effectLst/>
       </p:bgPr>
     </p:bg>
     <p:spTree>
@@ -11321,7 +11051,7 @@
           <a:bodyPr wrap="square" lIns="0" tIns="0" rIns="0" bIns="0" rtlCol="0" anchor="ctr"/>
           <a:lstStyle/>
           <a:p>
-            <a:pPr indent="0" marL="0">
+            <a:pPr marL="0" indent="0">
               <a:buNone/>
             </a:pPr>
             <a:r>
@@ -11360,7 +11090,7 @@
           <a:bodyPr wrap="square" lIns="0" tIns="0" rIns="0" bIns="0" rtlCol="0" anchor="ctr"/>
           <a:lstStyle/>
           <a:p>
-            <a:pPr indent="0" marL="0">
+            <a:pPr marL="0" indent="0">
               <a:buNone/>
             </a:pPr>
             <a:r>
@@ -11399,7 +11129,7 @@
           <a:bodyPr wrap="square" lIns="0" tIns="0" rIns="0" bIns="0" rtlCol="0" anchor="t"/>
           <a:lstStyle/>
           <a:p>
-            <a:pPr indent="0" marL="0">
+            <a:pPr marL="0" indent="0">
               <a:spcAft>
                 <a:spcPts val="400"/>
               </a:spcAft>
@@ -11419,7 +11149,7 @@
             <a:endParaRPr lang="en-US" sz="1600" dirty="0"/>
           </a:p>
           <a:p>
-            <a:pPr indent="0" marL="0">
+            <a:pPr marL="0" indent="0">
               <a:spcAft>
                 <a:spcPts val="400"/>
               </a:spcAft>
@@ -11439,7 +11169,7 @@
             <a:endParaRPr lang="en-US" sz="1600" dirty="0"/>
           </a:p>
           <a:p>
-            <a:pPr indent="0" marL="0">
+            <a:pPr marL="0" indent="0">
               <a:spcAft>
                 <a:spcPts val="400"/>
               </a:spcAft>
@@ -11459,7 +11189,7 @@
             <a:endParaRPr lang="en-US" sz="1600" dirty="0"/>
           </a:p>
           <a:p>
-            <a:pPr indent="0" marL="0">
+            <a:pPr marL="0" indent="0">
               <a:spcAft>
                 <a:spcPts val="400"/>
               </a:spcAft>
@@ -11479,7 +11209,7 @@
             <a:endParaRPr lang="en-US" sz="1600" dirty="0"/>
           </a:p>
           <a:p>
-            <a:pPr indent="0" marL="0">
+            <a:pPr marL="0" indent="0">
               <a:spcAft>
                 <a:spcPts val="400"/>
               </a:spcAft>
@@ -11499,7 +11229,7 @@
             <a:endParaRPr lang="en-US" sz="1600" dirty="0"/>
           </a:p>
           <a:p>
-            <a:pPr indent="0" marL="0">
+            <a:pPr marL="0" indent="0">
               <a:spcAft>
                 <a:spcPts val="400"/>
               </a:spcAft>
@@ -11519,7 +11249,7 @@
             <a:endParaRPr lang="en-US" sz="1600" dirty="0"/>
           </a:p>
           <a:p>
-            <a:pPr indent="0" marL="0">
+            <a:pPr marL="0" indent="0">
               <a:spcAft>
                 <a:spcPts val="400"/>
               </a:spcAft>
@@ -11539,7 +11269,7 @@
             <a:endParaRPr lang="en-US" sz="1600" dirty="0"/>
           </a:p>
           <a:p>
-            <a:pPr indent="0" marL="0">
+            <a:pPr marL="0" indent="0">
               <a:spcAft>
                 <a:spcPts val="400"/>
               </a:spcAft>
@@ -11559,7 +11289,7 @@
             <a:endParaRPr lang="en-US" sz="1600" dirty="0"/>
           </a:p>
           <a:p>
-            <a:pPr indent="0" marL="0">
+            <a:pPr marL="0" indent="0">
               <a:spcAft>
                 <a:spcPts val="400"/>
               </a:spcAft>
@@ -11579,7 +11309,7 @@
             <a:endParaRPr lang="en-US" sz="1600" dirty="0"/>
           </a:p>
           <a:p>
-            <a:pPr indent="0" marL="0">
+            <a:pPr marL="0" indent="0">
               <a:spcAft>
                 <a:spcPts val="400"/>
               </a:spcAft>
@@ -11662,7 +11392,7 @@
             <a:endParaRPr lang="en-US" sz="1600" dirty="0"/>
           </a:p>
           <a:p>
-            <a:pPr indent="0" marL="0">
+            <a:pPr marL="0" indent="0">
               <a:spcAft>
                 <a:spcPts val="400"/>
               </a:spcAft>
@@ -11682,7 +11412,7 @@
             <a:endParaRPr lang="en-US" sz="1600" dirty="0"/>
           </a:p>
           <a:p>
-            <a:pPr indent="0" marL="0">
+            <a:pPr marL="0" indent="0">
               <a:spcAft>
                 <a:spcPts val="400"/>
               </a:spcAft>
@@ -11705,14 +11435,14 @@
       </p:sp>
       <p:pic>
         <p:nvPicPr>
-          <p:cNvPr id="5" name="Image 0" descr="/sessions/gracious-blissful-pasteur/mnt/claude_code_presentation/numericor.png">    </p:cNvPr>
+          <p:cNvPr id="5" name="Image 0" descr="/sessions/gracious-blissful-pasteur/mnt/claude_code_presentation/numericor.png"/>
           <p:cNvPicPr>
             <a:picLocks noChangeAspect="1"/>
           </p:cNvPicPr>
           <p:nvPr/>
         </p:nvPicPr>
         <p:blipFill>
-          <a:blip r:embed="rId1"/>
+          <a:blip r:embed="rId3"/>
           <a:stretch>
             <a:fillRect/>
           </a:stretch>
@@ -11748,7 +11478,7 @@
           <a:bodyPr wrap="square" rtlCol="0" anchor="ctr"/>
           <a:lstStyle/>
           <a:p>
-            <a:pPr algn="r" indent="0" marL="0">
+            <a:pPr marL="0" indent="0" algn="r">
               <a:buNone/>
             </a:pPr>
             <a:r>
@@ -11782,6 +11512,7 @@
         <a:solidFill>
           <a:srgbClr val="FFFFFF"/>
         </a:solidFill>
+        <a:effectLst/>
       </p:bgPr>
     </p:bg>
     <p:spTree>
@@ -11819,7 +11550,7 @@
           <a:bodyPr wrap="square" lIns="0" tIns="0" rIns="0" bIns="0" rtlCol="0" anchor="ctr"/>
           <a:lstStyle/>
           <a:p>
-            <a:pPr indent="0" marL="0">
+            <a:pPr marL="0" indent="0">
               <a:buNone/>
             </a:pPr>
             <a:r>
@@ -11858,7 +11589,7 @@
           <a:bodyPr wrap="square" lIns="0" tIns="0" rIns="0" bIns="0" rtlCol="0" anchor="ctr"/>
           <a:lstStyle/>
           <a:p>
-            <a:pPr indent="0" marL="0">
+            <a:pPr marL="0" indent="0">
               <a:buNone/>
             </a:pPr>
             <a:r>
@@ -11897,7 +11628,7 @@
           <a:bodyPr wrap="square" lIns="0" tIns="0" rIns="0" bIns="0" rtlCol="0" anchor="t"/>
           <a:lstStyle/>
           <a:p>
-            <a:pPr indent="0" marL="0">
+            <a:pPr marL="0" indent="0">
               <a:spcAft>
                 <a:spcPts val="400"/>
               </a:spcAft>
@@ -11917,7 +11648,7 @@
             <a:endParaRPr lang="en-US" sz="1600" dirty="0"/>
           </a:p>
           <a:p>
-            <a:pPr indent="0" marL="0">
+            <a:pPr marL="0" indent="0">
               <a:spcAft>
                 <a:spcPts val="400"/>
               </a:spcAft>
@@ -11937,7 +11668,7 @@
             <a:endParaRPr lang="en-US" sz="1600" dirty="0"/>
           </a:p>
           <a:p>
-            <a:pPr indent="0" marL="0">
+            <a:pPr marL="0" indent="0">
               <a:spcAft>
                 <a:spcPts val="400"/>
               </a:spcAft>
@@ -11957,7 +11688,7 @@
             <a:endParaRPr lang="en-US" sz="1600" dirty="0"/>
           </a:p>
           <a:p>
-            <a:pPr indent="0" marL="0">
+            <a:pPr marL="0" indent="0">
               <a:spcAft>
                 <a:spcPts val="400"/>
               </a:spcAft>
@@ -11977,7 +11708,7 @@
             <a:endParaRPr lang="en-US" sz="1600" dirty="0"/>
           </a:p>
           <a:p>
-            <a:pPr indent="0" marL="0">
+            <a:pPr marL="0" indent="0">
               <a:spcAft>
                 <a:spcPts val="400"/>
               </a:spcAft>
@@ -11997,7 +11728,7 @@
             <a:endParaRPr lang="en-US" sz="1600" dirty="0"/>
           </a:p>
           <a:p>
-            <a:pPr indent="0" marL="0">
+            <a:pPr marL="0" indent="0">
               <a:spcAft>
                 <a:spcPts val="400"/>
               </a:spcAft>
@@ -12017,7 +11748,7 @@
             <a:endParaRPr lang="en-US" sz="1600" dirty="0"/>
           </a:p>
           <a:p>
-            <a:pPr indent="0" marL="0">
+            <a:pPr marL="0" indent="0">
               <a:spcAft>
                 <a:spcPts val="400"/>
               </a:spcAft>
@@ -12037,7 +11768,7 @@
             <a:endParaRPr lang="en-US" sz="1600" dirty="0"/>
           </a:p>
           <a:p>
-            <a:pPr indent="0" marL="0">
+            <a:pPr marL="0" indent="0">
               <a:spcAft>
                 <a:spcPts val="400"/>
               </a:spcAft>
@@ -12057,7 +11788,7 @@
             <a:endParaRPr lang="en-US" sz="1600" dirty="0"/>
           </a:p>
           <a:p>
-            <a:pPr indent="0" marL="0">
+            <a:pPr marL="0" indent="0">
               <a:spcAft>
                 <a:spcPts val="400"/>
               </a:spcAft>
@@ -12077,7 +11808,7 @@
             <a:endParaRPr lang="en-US" sz="1600" dirty="0"/>
           </a:p>
           <a:p>
-            <a:pPr indent="0" marL="0">
+            <a:pPr marL="0" indent="0">
               <a:spcAft>
                 <a:spcPts val="400"/>
               </a:spcAft>
@@ -12097,7 +11828,7 @@
             <a:endParaRPr lang="en-US" sz="1600" dirty="0"/>
           </a:p>
           <a:p>
-            <a:pPr indent="0" marL="0">
+            <a:pPr marL="0" indent="0">
               <a:spcAft>
                 <a:spcPts val="400"/>
               </a:spcAft>
@@ -12117,7 +11848,7 @@
             <a:endParaRPr lang="en-US" sz="1600" dirty="0"/>
           </a:p>
           <a:p>
-            <a:pPr indent="0" marL="0">
+            <a:pPr marL="0" indent="0">
               <a:spcAft>
                 <a:spcPts val="400"/>
               </a:spcAft>
@@ -12137,7 +11868,7 @@
             <a:endParaRPr lang="en-US" sz="1600" dirty="0"/>
           </a:p>
           <a:p>
-            <a:pPr indent="0" marL="0">
+            <a:pPr marL="0" indent="0">
               <a:spcAft>
                 <a:spcPts val="400"/>
               </a:spcAft>
@@ -12157,7 +11888,7 @@
             <a:endParaRPr lang="en-US" sz="1600" dirty="0"/>
           </a:p>
           <a:p>
-            <a:pPr indent="0" marL="0">
+            <a:pPr marL="0" indent="0">
               <a:spcAft>
                 <a:spcPts val="400"/>
               </a:spcAft>
@@ -12177,7 +11908,7 @@
             <a:endParaRPr lang="en-US" sz="1600" dirty="0"/>
           </a:p>
           <a:p>
-            <a:pPr indent="0" marL="0">
+            <a:pPr marL="0" indent="0">
               <a:spcAft>
                 <a:spcPts val="400"/>
               </a:spcAft>
@@ -12197,7 +11928,7 @@
             <a:endParaRPr lang="en-US" sz="1600" dirty="0"/>
           </a:p>
           <a:p>
-            <a:pPr indent="0" marL="0">
+            <a:pPr marL="0" indent="0">
               <a:spcAft>
                 <a:spcPts val="400"/>
               </a:spcAft>
@@ -12220,14 +11951,14 @@
       </p:sp>
       <p:pic>
         <p:nvPicPr>
-          <p:cNvPr id="5" name="Image 0" descr="/sessions/gracious-blissful-pasteur/mnt/claude_code_presentation/numericor.png">    </p:cNvPr>
+          <p:cNvPr id="5" name="Image 0" descr="/sessions/gracious-blissful-pasteur/mnt/claude_code_presentation/numericor.png"/>
           <p:cNvPicPr>
             <a:picLocks noChangeAspect="1"/>
           </p:cNvPicPr>
           <p:nvPr/>
         </p:nvPicPr>
         <p:blipFill>
-          <a:blip r:embed="rId1"/>
+          <a:blip r:embed="rId3"/>
           <a:stretch>
             <a:fillRect/>
           </a:stretch>
@@ -12263,7 +11994,7 @@
           <a:bodyPr wrap="square" rtlCol="0" anchor="ctr"/>
           <a:lstStyle/>
           <a:p>
-            <a:pPr algn="r" indent="0" marL="0">
+            <a:pPr marL="0" indent="0" algn="r">
               <a:buNone/>
             </a:pPr>
             <a:r>
@@ -12297,6 +12028,7 @@
         <a:solidFill>
           <a:srgbClr val="000000"/>
         </a:solidFill>
+        <a:effectLst/>
       </p:bgPr>
     </p:bg>
     <p:spTree>
@@ -12334,7 +12066,7 @@
           <a:bodyPr wrap="square" lIns="0" tIns="0" rIns="0" bIns="0" rtlCol="0" anchor="ctr"/>
           <a:lstStyle/>
           <a:p>
-            <a:pPr algn="l" indent="0" marL="0">
+            <a:pPr marL="0" indent="0" algn="l">
               <a:buNone/>
             </a:pPr>
             <a:r>
@@ -12373,7 +12105,7 @@
           <a:bodyPr wrap="square" lIns="0" tIns="0" rIns="0" bIns="0" rtlCol="0" anchor="ctr"/>
           <a:lstStyle/>
           <a:p>
-            <a:pPr algn="l" indent="0" marL="0">
+            <a:pPr marL="0" indent="0" algn="l">
               <a:buNone/>
             </a:pPr>
             <a:r>
@@ -12412,7 +12144,7 @@
           <a:bodyPr wrap="square" rtlCol="0" anchor="ctr"/>
           <a:lstStyle/>
           <a:p>
-            <a:pPr algn="l" indent="0" marL="0">
+            <a:pPr marL="0" indent="0" algn="l">
               <a:buNone/>
             </a:pPr>
             <a:r>
@@ -12451,7 +12183,7 @@
           <a:bodyPr wrap="square" rtlCol="0" anchor="ctr"/>
           <a:lstStyle/>
           <a:p>
-            <a:pPr algn="r" indent="0" marL="0">
+            <a:pPr marL="0" indent="0" algn="r">
               <a:buNone/>
             </a:pPr>
             <a:r>
@@ -12485,6 +12217,7 @@
         <a:solidFill>
           <a:srgbClr val="FFFFFF"/>
         </a:solidFill>
+        <a:effectLst/>
       </p:bgPr>
     </p:bg>
     <p:spTree>
@@ -12522,7 +12255,7 @@
           <a:bodyPr wrap="square" lIns="0" tIns="0" rIns="0" bIns="0" rtlCol="0" anchor="ctr"/>
           <a:lstStyle/>
           <a:p>
-            <a:pPr indent="0" marL="0">
+            <a:pPr marL="0" indent="0">
               <a:buNone/>
             </a:pPr>
             <a:r>
@@ -12561,7 +12294,7 @@
           <a:bodyPr wrap="square" lIns="0" tIns="0" rIns="0" bIns="0" rtlCol="0" anchor="ctr"/>
           <a:lstStyle/>
           <a:p>
-            <a:pPr indent="0" marL="0">
+            <a:pPr marL="0" indent="0">
               <a:buNone/>
             </a:pPr>
             <a:r>
@@ -12600,7 +12333,7 @@
           <a:bodyPr wrap="square" lIns="0" tIns="0" rIns="0" bIns="0" rtlCol="0" anchor="t"/>
           <a:lstStyle/>
           <a:p>
-            <a:pPr indent="0" marL="0">
+            <a:pPr marL="0" indent="0">
               <a:spcAft>
                 <a:spcPts val="400"/>
               </a:spcAft>
@@ -12620,7 +12353,7 @@
             <a:endParaRPr lang="en-US" sz="1600" dirty="0"/>
           </a:p>
           <a:p>
-            <a:pPr indent="0" marL="0">
+            <a:pPr marL="0" indent="0">
               <a:spcAft>
                 <a:spcPts val="400"/>
               </a:spcAft>
@@ -12640,7 +12373,7 @@
             <a:endParaRPr lang="en-US" sz="1600" dirty="0"/>
           </a:p>
           <a:p>
-            <a:pPr indent="0" marL="0">
+            <a:pPr marL="0" indent="0">
               <a:spcAft>
                 <a:spcPts val="400"/>
               </a:spcAft>
@@ -12660,7 +12393,7 @@
             <a:endParaRPr lang="en-US" sz="1600" dirty="0"/>
           </a:p>
           <a:p>
-            <a:pPr indent="0" marL="0">
+            <a:pPr marL="0" indent="0">
               <a:spcAft>
                 <a:spcPts val="400"/>
               </a:spcAft>
@@ -12680,7 +12413,7 @@
             <a:endParaRPr lang="en-US" sz="1600" dirty="0"/>
           </a:p>
           <a:p>
-            <a:pPr indent="0" marL="0">
+            <a:pPr marL="0" indent="0">
               <a:spcAft>
                 <a:spcPts val="400"/>
               </a:spcAft>
@@ -12700,7 +12433,7 @@
             <a:endParaRPr lang="en-US" sz="1600" dirty="0"/>
           </a:p>
           <a:p>
-            <a:pPr indent="0" marL="0">
+            <a:pPr marL="0" indent="0">
               <a:spcAft>
                 <a:spcPts val="400"/>
               </a:spcAft>
@@ -12720,7 +12453,7 @@
             <a:endParaRPr lang="en-US" sz="1600" dirty="0"/>
           </a:p>
           <a:p>
-            <a:pPr indent="0" marL="0">
+            <a:pPr marL="0" indent="0">
               <a:spcAft>
                 <a:spcPts val="400"/>
               </a:spcAft>
@@ -12740,7 +12473,7 @@
             <a:endParaRPr lang="en-US" sz="1600" dirty="0"/>
           </a:p>
           <a:p>
-            <a:pPr indent="0" marL="0">
+            <a:pPr marL="0" indent="0">
               <a:spcAft>
                 <a:spcPts val="400"/>
               </a:spcAft>
@@ -12760,7 +12493,7 @@
             <a:endParaRPr lang="en-US" sz="1600" dirty="0"/>
           </a:p>
           <a:p>
-            <a:pPr indent="0" marL="0">
+            <a:pPr marL="0" indent="0">
               <a:spcAft>
                 <a:spcPts val="400"/>
               </a:spcAft>
@@ -12783,14 +12516,14 @@
       </p:sp>
       <p:pic>
         <p:nvPicPr>
-          <p:cNvPr id="5" name="Image 0" descr="/sessions/gracious-blissful-pasteur/mnt/claude_code_presentation/numericor.png">    </p:cNvPr>
+          <p:cNvPr id="5" name="Image 0" descr="/sessions/gracious-blissful-pasteur/mnt/claude_code_presentation/numericor.png"/>
           <p:cNvPicPr>
             <a:picLocks noChangeAspect="1"/>
           </p:cNvPicPr>
           <p:nvPr/>
         </p:nvPicPr>
         <p:blipFill>
-          <a:blip r:embed="rId1"/>
+          <a:blip r:embed="rId3"/>
           <a:stretch>
             <a:fillRect/>
           </a:stretch>
@@ -12826,7 +12559,7 @@
           <a:bodyPr wrap="square" rtlCol="0" anchor="ctr"/>
           <a:lstStyle/>
           <a:p>
-            <a:pPr algn="r" indent="0" marL="0">
+            <a:pPr marL="0" indent="0" algn="r">
               <a:buNone/>
             </a:pPr>
             <a:r>
@@ -12860,6 +12593,7 @@
         <a:solidFill>
           <a:srgbClr val="FFFFFF"/>
         </a:solidFill>
+        <a:effectLst/>
       </p:bgPr>
     </p:bg>
     <p:spTree>
@@ -12897,7 +12631,7 @@
           <a:bodyPr wrap="square" lIns="0" tIns="0" rIns="0" bIns="0" rtlCol="0" anchor="ctr"/>
           <a:lstStyle/>
           <a:p>
-            <a:pPr indent="0" marL="0">
+            <a:pPr marL="0" indent="0">
               <a:buNone/>
             </a:pPr>
             <a:r>
@@ -12936,7 +12670,7 @@
           <a:bodyPr wrap="square" lIns="0" tIns="0" rIns="0" bIns="0" rtlCol="0" anchor="ctr"/>
           <a:lstStyle/>
           <a:p>
-            <a:pPr indent="0" marL="0">
+            <a:pPr marL="0" indent="0">
               <a:buNone/>
             </a:pPr>
             <a:r>
@@ -13101,7 +12835,7 @@
             <a:endParaRPr lang="en-US" sz="1600" dirty="0"/>
           </a:p>
           <a:p>
-            <a:pPr indent="0" marL="0">
+            <a:pPr marL="0" indent="0">
               <a:spcAft>
                 <a:spcPts val="400"/>
               </a:spcAft>
@@ -13121,7 +12855,7 @@
             <a:endParaRPr lang="en-US" sz="1600" dirty="0"/>
           </a:p>
           <a:p>
-            <a:pPr indent="0" marL="0">
+            <a:pPr marL="0" indent="0">
               <a:spcAft>
                 <a:spcPts val="400"/>
               </a:spcAft>
@@ -13141,7 +12875,7 @@
             <a:endParaRPr lang="en-US" sz="1600" dirty="0"/>
           </a:p>
           <a:p>
-            <a:pPr indent="0" marL="0">
+            <a:pPr marL="0" indent="0">
               <a:spcAft>
                 <a:spcPts val="400"/>
               </a:spcAft>
@@ -13164,14 +12898,14 @@
       </p:sp>
       <p:pic>
         <p:nvPicPr>
-          <p:cNvPr id="5" name="Image 0" descr="/sessions/gracious-blissful-pasteur/mnt/claude_code_presentation/numericor.png">    </p:cNvPr>
+          <p:cNvPr id="5" name="Image 0" descr="/sessions/gracious-blissful-pasteur/mnt/claude_code_presentation/numericor.png"/>
           <p:cNvPicPr>
             <a:picLocks noChangeAspect="1"/>
           </p:cNvPicPr>
           <p:nvPr/>
         </p:nvPicPr>
         <p:blipFill>
-          <a:blip r:embed="rId1"/>
+          <a:blip r:embed="rId3"/>
           <a:stretch>
             <a:fillRect/>
           </a:stretch>
@@ -13207,7 +12941,7 @@
           <a:bodyPr wrap="square" rtlCol="0" anchor="ctr"/>
           <a:lstStyle/>
           <a:p>
-            <a:pPr algn="r" indent="0" marL="0">
+            <a:pPr marL="0" indent="0" algn="r">
               <a:buNone/>
             </a:pPr>
             <a:r>
@@ -13241,6 +12975,7 @@
         <a:solidFill>
           <a:srgbClr val="FFFFFF"/>
         </a:solidFill>
+        <a:effectLst/>
       </p:bgPr>
     </p:bg>
     <p:spTree>
@@ -13278,7 +13013,7 @@
           <a:bodyPr wrap="square" lIns="0" tIns="0" rIns="0" bIns="0" rtlCol="0" anchor="ctr"/>
           <a:lstStyle/>
           <a:p>
-            <a:pPr indent="0" marL="0">
+            <a:pPr marL="0" indent="0">
               <a:buNone/>
             </a:pPr>
             <a:r>
@@ -13317,7 +13052,7 @@
           <a:bodyPr wrap="square" lIns="0" tIns="0" rIns="0" bIns="0" rtlCol="0" anchor="ctr"/>
           <a:lstStyle/>
           <a:p>
-            <a:pPr indent="0" marL="0">
+            <a:pPr marL="0" indent="0">
               <a:buNone/>
             </a:pPr>
             <a:r>
@@ -13356,7 +13091,7 @@
           <a:bodyPr wrap="square" lIns="0" tIns="0" rIns="0" bIns="0" rtlCol="0" anchor="t"/>
           <a:lstStyle/>
           <a:p>
-            <a:pPr indent="0" marL="0">
+            <a:pPr marL="0" indent="0">
               <a:spcAft>
                 <a:spcPts val="400"/>
               </a:spcAft>
@@ -13376,7 +13111,7 @@
             <a:endParaRPr lang="en-US" sz="1600" dirty="0"/>
           </a:p>
           <a:p>
-            <a:pPr indent="0" marL="0">
+            <a:pPr marL="0" indent="0">
               <a:spcAft>
                 <a:spcPts val="400"/>
               </a:spcAft>
@@ -13396,7 +13131,7 @@
             <a:endParaRPr lang="en-US" sz="1600" dirty="0"/>
           </a:p>
           <a:p>
-            <a:pPr indent="0" marL="0">
+            <a:pPr marL="0" indent="0">
               <a:spcAft>
                 <a:spcPts val="400"/>
               </a:spcAft>
@@ -13416,7 +13151,7 @@
             <a:endParaRPr lang="en-US" sz="1600" dirty="0"/>
           </a:p>
           <a:p>
-            <a:pPr indent="0" marL="0">
+            <a:pPr marL="0" indent="0">
               <a:spcAft>
                 <a:spcPts val="400"/>
               </a:spcAft>
@@ -13436,7 +13171,7 @@
             <a:endParaRPr lang="en-US" sz="1600" dirty="0"/>
           </a:p>
           <a:p>
-            <a:pPr indent="0" marL="0">
+            <a:pPr marL="0" indent="0">
               <a:spcAft>
                 <a:spcPts val="400"/>
               </a:spcAft>
@@ -13456,7 +13191,7 @@
             <a:endParaRPr lang="en-US" sz="1600" dirty="0"/>
           </a:p>
           <a:p>
-            <a:pPr indent="0" marL="0">
+            <a:pPr marL="0" indent="0">
               <a:spcAft>
                 <a:spcPts val="400"/>
               </a:spcAft>
@@ -13476,7 +13211,7 @@
             <a:endParaRPr lang="en-US" sz="1600" dirty="0"/>
           </a:p>
           <a:p>
-            <a:pPr indent="0" marL="0">
+            <a:pPr marL="0" indent="0">
               <a:spcAft>
                 <a:spcPts val="400"/>
               </a:spcAft>
@@ -13496,7 +13231,7 @@
             <a:endParaRPr lang="en-US" sz="1600" dirty="0"/>
           </a:p>
           <a:p>
-            <a:pPr indent="0" marL="0">
+            <a:pPr marL="0" indent="0">
               <a:spcAft>
                 <a:spcPts val="400"/>
               </a:spcAft>
@@ -13516,7 +13251,7 @@
             <a:endParaRPr lang="en-US" sz="1600" dirty="0"/>
           </a:p>
           <a:p>
-            <a:pPr indent="0" marL="0">
+            <a:pPr marL="0" indent="0">
               <a:spcAft>
                 <a:spcPts val="400"/>
               </a:spcAft>
@@ -13536,7 +13271,7 @@
             <a:endParaRPr lang="en-US" sz="1600" dirty="0"/>
           </a:p>
           <a:p>
-            <a:pPr indent="0" marL="0">
+            <a:pPr marL="0" indent="0">
               <a:spcAft>
                 <a:spcPts val="400"/>
               </a:spcAft>
@@ -13559,14 +13294,14 @@
       </p:sp>
       <p:pic>
         <p:nvPicPr>
-          <p:cNvPr id="5" name="Image 0" descr="/sessions/gracious-blissful-pasteur/mnt/claude_code_presentation/numericor.png">    </p:cNvPr>
+          <p:cNvPr id="5" name="Image 0" descr="/sessions/gracious-blissful-pasteur/mnt/claude_code_presentation/numericor.png"/>
           <p:cNvPicPr>
             <a:picLocks noChangeAspect="1"/>
           </p:cNvPicPr>
           <p:nvPr/>
         </p:nvPicPr>
         <p:blipFill>
-          <a:blip r:embed="rId1"/>
+          <a:blip r:embed="rId3"/>
           <a:stretch>
             <a:fillRect/>
           </a:stretch>
@@ -13602,7 +13337,7 @@
           <a:bodyPr wrap="square" rtlCol="0" anchor="ctr"/>
           <a:lstStyle/>
           <a:p>
-            <a:pPr algn="r" indent="0" marL="0">
+            <a:pPr marL="0" indent="0" algn="r">
               <a:buNone/>
             </a:pPr>
             <a:r>
@@ -13636,6 +13371,7 @@
         <a:solidFill>
           <a:srgbClr val="FFFFFF"/>
         </a:solidFill>
+        <a:effectLst/>
       </p:bgPr>
     </p:bg>
     <p:spTree>
@@ -13673,7 +13409,7 @@
           <a:bodyPr wrap="square" lIns="0" tIns="0" rIns="0" bIns="0" rtlCol="0" anchor="ctr"/>
           <a:lstStyle/>
           <a:p>
-            <a:pPr indent="0" marL="0">
+            <a:pPr marL="0" indent="0">
               <a:buNone/>
             </a:pPr>
             <a:r>
@@ -13712,7 +13448,7 @@
           <a:bodyPr wrap="square" lIns="0" tIns="0" rIns="0" bIns="0" rtlCol="0" anchor="ctr"/>
           <a:lstStyle/>
           <a:p>
-            <a:pPr indent="0" marL="0">
+            <a:pPr marL="0" indent="0">
               <a:buNone/>
             </a:pPr>
             <a:r>
@@ -13751,7 +13487,7 @@
           <a:bodyPr wrap="square" lIns="0" tIns="0" rIns="0" bIns="0" rtlCol="0" anchor="t"/>
           <a:lstStyle/>
           <a:p>
-            <a:pPr indent="0" marL="0">
+            <a:pPr marL="0" indent="0">
               <a:spcAft>
                 <a:spcPts val="400"/>
               </a:spcAft>
@@ -13771,7 +13507,7 @@
             <a:endParaRPr lang="en-US" sz="1600" dirty="0"/>
           </a:p>
           <a:p>
-            <a:pPr indent="0" marL="0">
+            <a:pPr marL="0" indent="0">
               <a:spcAft>
                 <a:spcPts val="400"/>
               </a:spcAft>
@@ -13791,7 +13527,7 @@
             <a:endParaRPr lang="en-US" sz="1600" dirty="0"/>
           </a:p>
           <a:p>
-            <a:pPr indent="0" marL="0">
+            <a:pPr marL="0" indent="0">
               <a:spcAft>
                 <a:spcPts val="400"/>
               </a:spcAft>
@@ -13811,7 +13547,7 @@
             <a:endParaRPr lang="en-US" sz="1600" dirty="0"/>
           </a:p>
           <a:p>
-            <a:pPr indent="0" marL="0">
+            <a:pPr marL="0" indent="0">
               <a:spcAft>
                 <a:spcPts val="400"/>
               </a:spcAft>
@@ -13831,7 +13567,7 @@
             <a:endParaRPr lang="en-US" sz="1600" dirty="0"/>
           </a:p>
           <a:p>
-            <a:pPr indent="0" marL="0">
+            <a:pPr marL="0" indent="0">
               <a:spcAft>
                 <a:spcPts val="400"/>
               </a:spcAft>
@@ -13851,7 +13587,7 @@
             <a:endParaRPr lang="en-US" sz="1600" dirty="0"/>
           </a:p>
           <a:p>
-            <a:pPr indent="0" marL="0">
+            <a:pPr marL="0" indent="0">
               <a:spcAft>
                 <a:spcPts val="400"/>
               </a:spcAft>
@@ -13871,7 +13607,7 @@
             <a:endParaRPr lang="en-US" sz="1600" dirty="0"/>
           </a:p>
           <a:p>
-            <a:pPr indent="0" marL="0">
+            <a:pPr marL="0" indent="0">
               <a:spcAft>
                 <a:spcPts val="400"/>
               </a:spcAft>
@@ -13891,7 +13627,7 @@
             <a:endParaRPr lang="en-US" sz="1600" dirty="0"/>
           </a:p>
           <a:p>
-            <a:pPr indent="0" marL="0">
+            <a:pPr marL="0" indent="0">
               <a:spcAft>
                 <a:spcPts val="400"/>
               </a:spcAft>
@@ -13911,7 +13647,7 @@
             <a:endParaRPr lang="en-US" sz="1600" dirty="0"/>
           </a:p>
           <a:p>
-            <a:pPr indent="0" marL="0">
+            <a:pPr marL="0" indent="0">
               <a:spcAft>
                 <a:spcPts val="400"/>
               </a:spcAft>
@@ -13931,7 +13667,7 @@
             <a:endParaRPr lang="en-US" sz="1600" dirty="0"/>
           </a:p>
           <a:p>
-            <a:pPr indent="0" marL="0">
+            <a:pPr marL="0" indent="0">
               <a:spcAft>
                 <a:spcPts val="400"/>
               </a:spcAft>
@@ -13954,14 +13690,14 @@
       </p:sp>
       <p:pic>
         <p:nvPicPr>
-          <p:cNvPr id="5" name="Image 0" descr="/sessions/gracious-blissful-pasteur/mnt/claude_code_presentation/numericor.png">    </p:cNvPr>
+          <p:cNvPr id="5" name="Image 0" descr="/sessions/gracious-blissful-pasteur/mnt/claude_code_presentation/numericor.png"/>
           <p:cNvPicPr>
             <a:picLocks noChangeAspect="1"/>
           </p:cNvPicPr>
           <p:nvPr/>
         </p:nvPicPr>
         <p:blipFill>
-          <a:blip r:embed="rId1"/>
+          <a:blip r:embed="rId3"/>
           <a:stretch>
             <a:fillRect/>
           </a:stretch>
@@ -13997,7 +13733,7 @@
           <a:bodyPr wrap="square" rtlCol="0" anchor="ctr"/>
           <a:lstStyle/>
           <a:p>
-            <a:pPr algn="r" indent="0" marL="0">
+            <a:pPr marL="0" indent="0" algn="r">
               <a:buNone/>
             </a:pPr>
             <a:r>
@@ -14031,6 +13767,7 @@
         <a:solidFill>
           <a:srgbClr val="FFFFFF"/>
         </a:solidFill>
+        <a:effectLst/>
       </p:bgPr>
     </p:bg>
     <p:spTree>
@@ -14068,7 +13805,7 @@
           <a:bodyPr wrap="square" lIns="0" tIns="0" rIns="0" bIns="0" rtlCol="0" anchor="ctr"/>
           <a:lstStyle/>
           <a:p>
-            <a:pPr indent="0" marL="0">
+            <a:pPr marL="0" indent="0">
               <a:buNone/>
             </a:pPr>
             <a:r>
@@ -14107,7 +13844,7 @@
           <a:bodyPr wrap="square" lIns="0" tIns="0" rIns="0" bIns="0" rtlCol="0" anchor="ctr"/>
           <a:lstStyle/>
           <a:p>
-            <a:pPr indent="0" marL="0">
+            <a:pPr marL="0" indent="0">
               <a:buNone/>
             </a:pPr>
             <a:r>
@@ -14146,7 +13883,7 @@
           <a:bodyPr wrap="square" lIns="0" tIns="0" rIns="0" bIns="0" rtlCol="0" anchor="t"/>
           <a:lstStyle/>
           <a:p>
-            <a:pPr indent="0" marL="0">
+            <a:pPr marL="0" indent="0">
               <a:spcAft>
                 <a:spcPts val="400"/>
               </a:spcAft>
@@ -14166,7 +13903,7 @@
             <a:endParaRPr lang="en-US" sz="1600" dirty="0"/>
           </a:p>
           <a:p>
-            <a:pPr indent="0" marL="0">
+            <a:pPr marL="0" indent="0">
               <a:spcAft>
                 <a:spcPts val="400"/>
               </a:spcAft>
@@ -14186,7 +13923,7 @@
             <a:endParaRPr lang="en-US" sz="1600" dirty="0"/>
           </a:p>
           <a:p>
-            <a:pPr indent="0" marL="0">
+            <a:pPr marL="0" indent="0">
               <a:spcAft>
                 <a:spcPts val="400"/>
               </a:spcAft>
@@ -14206,7 +13943,7 @@
             <a:endParaRPr lang="en-US" sz="1600" dirty="0"/>
           </a:p>
           <a:p>
-            <a:pPr indent="0" marL="0">
+            <a:pPr marL="0" indent="0">
               <a:spcAft>
                 <a:spcPts val="400"/>
               </a:spcAft>
@@ -14226,7 +13963,7 @@
             <a:endParaRPr lang="en-US" sz="1600" dirty="0"/>
           </a:p>
           <a:p>
-            <a:pPr indent="0" marL="0">
+            <a:pPr marL="0" indent="0">
               <a:spcAft>
                 <a:spcPts val="400"/>
               </a:spcAft>
@@ -14246,7 +13983,7 @@
             <a:endParaRPr lang="en-US" sz="1600" dirty="0"/>
           </a:p>
           <a:p>
-            <a:pPr indent="0" marL="0">
+            <a:pPr marL="0" indent="0">
               <a:spcAft>
                 <a:spcPts val="400"/>
               </a:spcAft>
@@ -14266,7 +14003,7 @@
             <a:endParaRPr lang="en-US" sz="1600" dirty="0"/>
           </a:p>
           <a:p>
-            <a:pPr indent="0" marL="0">
+            <a:pPr marL="0" indent="0">
               <a:spcAft>
                 <a:spcPts val="400"/>
               </a:spcAft>
@@ -14286,7 +14023,7 @@
             <a:endParaRPr lang="en-US" sz="1600" dirty="0"/>
           </a:p>
           <a:p>
-            <a:pPr indent="0" marL="0">
+            <a:pPr marL="0" indent="0">
               <a:spcAft>
                 <a:spcPts val="400"/>
               </a:spcAft>
@@ -14306,7 +14043,7 @@
             <a:endParaRPr lang="en-US" sz="1600" dirty="0"/>
           </a:p>
           <a:p>
-            <a:pPr indent="0" marL="0">
+            <a:pPr marL="0" indent="0">
               <a:spcAft>
                 <a:spcPts val="400"/>
               </a:spcAft>
@@ -14326,7 +14063,7 @@
             <a:endParaRPr lang="en-US" sz="1600" dirty="0"/>
           </a:p>
           <a:p>
-            <a:pPr indent="0" marL="0">
+            <a:pPr marL="0" indent="0">
               <a:spcAft>
                 <a:spcPts val="400"/>
               </a:spcAft>
@@ -14349,14 +14086,14 @@
       </p:sp>
       <p:pic>
         <p:nvPicPr>
-          <p:cNvPr id="5" name="Image 0" descr="/sessions/gracious-blissful-pasteur/mnt/claude_code_presentation/numericor.png">    </p:cNvPr>
+          <p:cNvPr id="5" name="Image 0" descr="/sessions/gracious-blissful-pasteur/mnt/claude_code_presentation/numericor.png"/>
           <p:cNvPicPr>
             <a:picLocks noChangeAspect="1"/>
           </p:cNvPicPr>
           <p:nvPr/>
         </p:nvPicPr>
         <p:blipFill>
-          <a:blip r:embed="rId1"/>
+          <a:blip r:embed="rId3"/>
           <a:stretch>
             <a:fillRect/>
           </a:stretch>
@@ -14392,7 +14129,7 @@
           <a:bodyPr wrap="square" rtlCol="0" anchor="ctr"/>
           <a:lstStyle/>
           <a:p>
-            <a:pPr algn="r" indent="0" marL="0">
+            <a:pPr marL="0" indent="0" algn="r">
               <a:buNone/>
             </a:pPr>
             <a:r>
@@ -14426,6 +14163,7 @@
         <a:solidFill>
           <a:srgbClr val="FFFFFF"/>
         </a:solidFill>
+        <a:effectLst/>
       </p:bgPr>
     </p:bg>
     <p:spTree>
@@ -14463,7 +14201,7 @@
           <a:bodyPr wrap="square" lIns="0" tIns="0" rIns="0" bIns="0" rtlCol="0" anchor="ctr"/>
           <a:lstStyle/>
           <a:p>
-            <a:pPr indent="0" marL="0">
+            <a:pPr marL="0" indent="0">
               <a:buNone/>
             </a:pPr>
             <a:r>
@@ -14502,7 +14240,7 @@
           <a:bodyPr wrap="square" lIns="0" tIns="0" rIns="0" bIns="0" rtlCol="0" anchor="ctr"/>
           <a:lstStyle/>
           <a:p>
-            <a:pPr indent="0" marL="0">
+            <a:pPr marL="0" indent="0">
               <a:buNone/>
             </a:pPr>
             <a:r>
@@ -14541,7 +14279,7 @@
           <a:bodyPr wrap="square" lIns="0" tIns="0" rIns="0" bIns="0" rtlCol="0" anchor="t"/>
           <a:lstStyle/>
           <a:p>
-            <a:pPr indent="0" marL="0">
+            <a:pPr marL="0" indent="0">
               <a:spcAft>
                 <a:spcPts val="400"/>
               </a:spcAft>
@@ -14561,7 +14299,7 @@
             <a:endParaRPr lang="en-US" sz="1600" dirty="0"/>
           </a:p>
           <a:p>
-            <a:pPr indent="0" marL="0">
+            <a:pPr marL="0" indent="0">
               <a:spcAft>
                 <a:spcPts val="400"/>
               </a:spcAft>
@@ -14581,7 +14319,7 @@
             <a:endParaRPr lang="en-US" sz="1600" dirty="0"/>
           </a:p>
           <a:p>
-            <a:pPr indent="0" marL="0">
+            <a:pPr marL="0" indent="0">
               <a:spcAft>
                 <a:spcPts val="400"/>
               </a:spcAft>
@@ -14601,7 +14339,7 @@
             <a:endParaRPr lang="en-US" sz="1600" dirty="0"/>
           </a:p>
           <a:p>
-            <a:pPr indent="0" marL="0">
+            <a:pPr marL="0" indent="0">
               <a:spcAft>
                 <a:spcPts val="400"/>
               </a:spcAft>
@@ -14726,7 +14464,7 @@
             <a:endParaRPr lang="en-US" sz="1600" dirty="0"/>
           </a:p>
           <a:p>
-            <a:pPr indent="0" marL="0">
+            <a:pPr marL="0" indent="0">
               <a:spcAft>
                 <a:spcPts val="400"/>
               </a:spcAft>
@@ -14746,7 +14484,7 @@
             <a:endParaRPr lang="en-US" sz="1600" dirty="0"/>
           </a:p>
           <a:p>
-            <a:pPr indent="0" marL="0">
+            <a:pPr marL="0" indent="0">
               <a:spcAft>
                 <a:spcPts val="400"/>
               </a:spcAft>
@@ -14766,7 +14504,7 @@
             <a:endParaRPr lang="en-US" sz="1600" dirty="0"/>
           </a:p>
           <a:p>
-            <a:pPr indent="0" marL="0">
+            <a:pPr marL="0" indent="0">
               <a:spcAft>
                 <a:spcPts val="400"/>
               </a:spcAft>
@@ -14789,14 +14527,14 @@
       </p:sp>
       <p:pic>
         <p:nvPicPr>
-          <p:cNvPr id="5" name="Image 0" descr="/sessions/gracious-blissful-pasteur/mnt/claude_code_presentation/numericor.png">    </p:cNvPr>
+          <p:cNvPr id="5" name="Image 0" descr="/sessions/gracious-blissful-pasteur/mnt/claude_code_presentation/numericor.png"/>
           <p:cNvPicPr>
             <a:picLocks noChangeAspect="1"/>
           </p:cNvPicPr>
           <p:nvPr/>
         </p:nvPicPr>
         <p:blipFill>
-          <a:blip r:embed="rId1"/>
+          <a:blip r:embed="rId3"/>
           <a:stretch>
             <a:fillRect/>
           </a:stretch>
@@ -14832,7 +14570,7 @@
           <a:bodyPr wrap="square" rtlCol="0" anchor="ctr"/>
           <a:lstStyle/>
           <a:p>
-            <a:pPr algn="r" indent="0" marL="0">
+            <a:pPr marL="0" indent="0" algn="r">
               <a:buNone/>
             </a:pPr>
             <a:r>
@@ -14866,6 +14604,7 @@
         <a:solidFill>
           <a:srgbClr val="FFFFFF"/>
         </a:solidFill>
+        <a:effectLst/>
       </p:bgPr>
     </p:bg>
     <p:spTree>
@@ -14903,7 +14642,7 @@
           <a:bodyPr wrap="square" lIns="0" tIns="0" rIns="0" bIns="0" rtlCol="0" anchor="ctr"/>
           <a:lstStyle/>
           <a:p>
-            <a:pPr indent="0" marL="0">
+            <a:pPr marL="0" indent="0">
               <a:buNone/>
             </a:pPr>
             <a:r>
@@ -14942,7 +14681,7 @@
           <a:bodyPr wrap="square" lIns="0" tIns="0" rIns="0" bIns="0" rtlCol="0" anchor="ctr"/>
           <a:lstStyle/>
           <a:p>
-            <a:pPr indent="0" marL="0">
+            <a:pPr marL="0" indent="0">
               <a:buNone/>
             </a:pPr>
             <a:r>
@@ -14981,7 +14720,7 @@
           <a:bodyPr wrap="square" lIns="0" tIns="0" rIns="0" bIns="0" rtlCol="0" anchor="t"/>
           <a:lstStyle/>
           <a:p>
-            <a:pPr indent="0" marL="0">
+            <a:pPr marL="0" indent="0">
               <a:spcAft>
                 <a:spcPts val="400"/>
               </a:spcAft>
@@ -15085,7 +14824,7 @@
             <a:endParaRPr lang="en-US" sz="1600" dirty="0"/>
           </a:p>
           <a:p>
-            <a:pPr indent="0" marL="0">
+            <a:pPr marL="0" indent="0">
               <a:spcAft>
                 <a:spcPts val="400"/>
               </a:spcAft>
@@ -15105,7 +14844,7 @@
             <a:endParaRPr lang="en-US" sz="1600" dirty="0"/>
           </a:p>
           <a:p>
-            <a:pPr indent="0" marL="0">
+            <a:pPr marL="0" indent="0">
               <a:spcAft>
                 <a:spcPts val="400"/>
               </a:spcAft>
@@ -15188,7 +14927,7 @@
             <a:endParaRPr lang="en-US" sz="1600" dirty="0"/>
           </a:p>
           <a:p>
-            <a:pPr indent="0" marL="0">
+            <a:pPr marL="0" indent="0">
               <a:spcAft>
                 <a:spcPts val="400"/>
               </a:spcAft>
@@ -15208,7 +14947,7 @@
             <a:endParaRPr lang="en-US" sz="1600" dirty="0"/>
           </a:p>
           <a:p>
-            <a:pPr indent="0" marL="0">
+            <a:pPr marL="0" indent="0">
               <a:spcAft>
                 <a:spcPts val="400"/>
               </a:spcAft>
@@ -15291,7 +15030,7 @@
             <a:endParaRPr lang="en-US" sz="1600" dirty="0"/>
           </a:p>
           <a:p>
-            <a:pPr indent="0" marL="0">
+            <a:pPr marL="0" indent="0">
               <a:spcAft>
                 <a:spcPts val="400"/>
               </a:spcAft>
@@ -15311,7 +15050,7 @@
             <a:endParaRPr lang="en-US" sz="1600" dirty="0"/>
           </a:p>
           <a:p>
-            <a:pPr indent="0" marL="0">
+            <a:pPr marL="0" indent="0">
               <a:spcAft>
                 <a:spcPts val="400"/>
               </a:spcAft>
@@ -15331,7 +15070,7 @@
             <a:endParaRPr lang="en-US" sz="1600" dirty="0"/>
           </a:p>
           <a:p>
-            <a:pPr indent="0" marL="0">
+            <a:pPr marL="0" indent="0">
               <a:spcAft>
                 <a:spcPts val="400"/>
               </a:spcAft>
@@ -15351,7 +15090,7 @@
             <a:endParaRPr lang="en-US" sz="1600" dirty="0"/>
           </a:p>
           <a:p>
-            <a:pPr indent="0" marL="0">
+            <a:pPr marL="0" indent="0">
               <a:spcAft>
                 <a:spcPts val="400"/>
               </a:spcAft>
@@ -15374,14 +15113,14 @@
       </p:sp>
       <p:pic>
         <p:nvPicPr>
-          <p:cNvPr id="5" name="Image 0" descr="/sessions/gracious-blissful-pasteur/mnt/claude_code_presentation/numericor.png">    </p:cNvPr>
+          <p:cNvPr id="5" name="Image 0" descr="/sessions/gracious-blissful-pasteur/mnt/claude_code_presentation/numericor.png"/>
           <p:cNvPicPr>
             <a:picLocks noChangeAspect="1"/>
           </p:cNvPicPr>
           <p:nvPr/>
         </p:nvPicPr>
         <p:blipFill>
-          <a:blip r:embed="rId1"/>
+          <a:blip r:embed="rId3"/>
           <a:stretch>
             <a:fillRect/>
           </a:stretch>
@@ -15417,7 +15156,7 @@
           <a:bodyPr wrap="square" rtlCol="0" anchor="ctr"/>
           <a:lstStyle/>
           <a:p>
-            <a:pPr algn="r" indent="0" marL="0">
+            <a:pPr marL="0" indent="0" algn="r">
               <a:buNone/>
             </a:pPr>
             <a:r>
@@ -15451,6 +15190,7 @@
         <a:solidFill>
           <a:srgbClr val="FFFFFF"/>
         </a:solidFill>
+        <a:effectLst/>
       </p:bgPr>
     </p:bg>
     <p:spTree>
@@ -15488,7 +15228,7 @@
           <a:bodyPr wrap="square" lIns="0" tIns="0" rIns="0" bIns="0" rtlCol="0" anchor="ctr"/>
           <a:lstStyle/>
           <a:p>
-            <a:pPr indent="0" marL="0">
+            <a:pPr marL="0" indent="0">
               <a:buNone/>
             </a:pPr>
             <a:r>
@@ -15527,7 +15267,7 @@
           <a:bodyPr wrap="square" lIns="0" tIns="0" rIns="0" bIns="0" rtlCol="0" anchor="ctr"/>
           <a:lstStyle/>
           <a:p>
-            <a:pPr indent="0" marL="0">
+            <a:pPr marL="0" indent="0">
               <a:buNone/>
             </a:pPr>
             <a:r>
@@ -15566,7 +15306,7 @@
           <a:bodyPr wrap="square" lIns="0" tIns="0" rIns="0" bIns="0" rtlCol="0" anchor="t"/>
           <a:lstStyle/>
           <a:p>
-            <a:pPr indent="0" marL="0">
+            <a:pPr marL="0" indent="0">
               <a:spcAft>
                 <a:spcPts val="400"/>
               </a:spcAft>
@@ -15586,7 +15326,7 @@
             <a:endParaRPr lang="en-US" sz="1600" dirty="0"/>
           </a:p>
           <a:p>
-            <a:pPr indent="0" marL="0">
+            <a:pPr marL="0" indent="0">
               <a:spcAft>
                 <a:spcPts val="400"/>
               </a:spcAft>
@@ -15606,7 +15346,7 @@
             <a:endParaRPr lang="en-US" sz="1600" dirty="0"/>
           </a:p>
           <a:p>
-            <a:pPr indent="0" marL="0">
+            <a:pPr marL="0" indent="0">
               <a:spcAft>
                 <a:spcPts val="400"/>
               </a:spcAft>
@@ -15734,14 +15474,14 @@
       </p:sp>
       <p:pic>
         <p:nvPicPr>
-          <p:cNvPr id="5" name="Image 0" descr="/sessions/gracious-blissful-pasteur/mnt/claude_code_presentation/numericor.png">    </p:cNvPr>
+          <p:cNvPr id="5" name="Image 0" descr="/sessions/gracious-blissful-pasteur/mnt/claude_code_presentation/numericor.png"/>
           <p:cNvPicPr>
             <a:picLocks noChangeAspect="1"/>
           </p:cNvPicPr>
           <p:nvPr/>
         </p:nvPicPr>
         <p:blipFill>
-          <a:blip r:embed="rId1"/>
+          <a:blip r:embed="rId3"/>
           <a:stretch>
             <a:fillRect/>
           </a:stretch>
@@ -15777,7 +15517,7 @@
           <a:bodyPr wrap="square" rtlCol="0" anchor="ctr"/>
           <a:lstStyle/>
           <a:p>
-            <a:pPr algn="r" indent="0" marL="0">
+            <a:pPr marL="0" indent="0" algn="r">
               <a:buNone/>
             </a:pPr>
             <a:r>
@@ -15811,6 +15551,7 @@
         <a:solidFill>
           <a:srgbClr val="FFFFFF"/>
         </a:solidFill>
+        <a:effectLst/>
       </p:bgPr>
     </p:bg>
     <p:spTree>
@@ -15848,7 +15589,7 @@
           <a:bodyPr wrap="square" lIns="0" tIns="0" rIns="0" bIns="0" rtlCol="0" anchor="ctr"/>
           <a:lstStyle/>
           <a:p>
-            <a:pPr indent="0" marL="0">
+            <a:pPr marL="0" indent="0">
               <a:buNone/>
             </a:pPr>
             <a:r>
@@ -15887,7 +15628,7 @@
           <a:bodyPr wrap="square" lIns="0" tIns="0" rIns="0" bIns="0" rtlCol="0" anchor="ctr"/>
           <a:lstStyle/>
           <a:p>
-            <a:pPr indent="0" marL="0">
+            <a:pPr marL="0" indent="0">
               <a:buNone/>
             </a:pPr>
             <a:r>
@@ -15926,7 +15667,7 @@
           <a:bodyPr wrap="square" lIns="0" tIns="0" rIns="0" bIns="0" rtlCol="0" anchor="t"/>
           <a:lstStyle/>
           <a:p>
-            <a:pPr indent="0" marL="0">
+            <a:pPr marL="0" indent="0">
               <a:spcAft>
                 <a:spcPts val="400"/>
               </a:spcAft>
@@ -15967,7 +15708,7 @@
             <a:endParaRPr lang="en-US" sz="1600" dirty="0"/>
           </a:p>
           <a:p>
-            <a:pPr indent="0" marL="0">
+            <a:pPr marL="0" indent="0">
               <a:spcAft>
                 <a:spcPts val="400"/>
               </a:spcAft>
@@ -15987,7 +15728,7 @@
             <a:endParaRPr lang="en-US" sz="1600" dirty="0"/>
           </a:p>
           <a:p>
-            <a:pPr indent="0" marL="0">
+            <a:pPr marL="0" indent="0">
               <a:spcAft>
                 <a:spcPts val="400"/>
               </a:spcAft>
@@ -16007,7 +15748,7 @@
             <a:endParaRPr lang="en-US" sz="1600" dirty="0"/>
           </a:p>
           <a:p>
-            <a:pPr indent="0" marL="0">
+            <a:pPr marL="0" indent="0">
               <a:spcAft>
                 <a:spcPts val="400"/>
               </a:spcAft>
@@ -16027,7 +15768,7 @@
             <a:endParaRPr lang="en-US" sz="1600" dirty="0"/>
           </a:p>
           <a:p>
-            <a:pPr indent="0" marL="0">
+            <a:pPr marL="0" indent="0">
               <a:spcAft>
                 <a:spcPts val="400"/>
               </a:spcAft>
@@ -16047,7 +15788,7 @@
             <a:endParaRPr lang="en-US" sz="1600" dirty="0"/>
           </a:p>
           <a:p>
-            <a:pPr indent="0" marL="0">
+            <a:pPr marL="0" indent="0">
               <a:spcAft>
                 <a:spcPts val="400"/>
               </a:spcAft>
@@ -16067,7 +15808,7 @@
             <a:endParaRPr lang="en-US" sz="1600" dirty="0"/>
           </a:p>
           <a:p>
-            <a:pPr indent="0" marL="0">
+            <a:pPr marL="0" indent="0">
               <a:spcAft>
                 <a:spcPts val="400"/>
               </a:spcAft>
@@ -16087,7 +15828,7 @@
             <a:endParaRPr lang="en-US" sz="1600" dirty="0"/>
           </a:p>
           <a:p>
-            <a:pPr indent="0" marL="0">
+            <a:pPr marL="0" indent="0">
               <a:spcAft>
                 <a:spcPts val="400"/>
               </a:spcAft>
@@ -16107,7 +15848,7 @@
             <a:endParaRPr lang="en-US" sz="1600" dirty="0"/>
           </a:p>
           <a:p>
-            <a:pPr indent="0" marL="0">
+            <a:pPr marL="0" indent="0">
               <a:spcAft>
                 <a:spcPts val="400"/>
               </a:spcAft>
@@ -16127,7 +15868,7 @@
             <a:endParaRPr lang="en-US" sz="1600" dirty="0"/>
           </a:p>
           <a:p>
-            <a:pPr indent="0" marL="0">
+            <a:pPr marL="0" indent="0">
               <a:spcAft>
                 <a:spcPts val="400"/>
               </a:spcAft>
@@ -16147,7 +15888,7 @@
             <a:endParaRPr lang="en-US" sz="1600" dirty="0"/>
           </a:p>
           <a:p>
-            <a:pPr indent="0" marL="0">
+            <a:pPr marL="0" indent="0">
               <a:spcAft>
                 <a:spcPts val="400"/>
               </a:spcAft>
@@ -16170,14 +15911,14 @@
       </p:sp>
       <p:pic>
         <p:nvPicPr>
-          <p:cNvPr id="5" name="Image 0" descr="/sessions/gracious-blissful-pasteur/mnt/claude_code_presentation/numericor.png">    </p:cNvPr>
+          <p:cNvPr id="5" name="Image 0" descr="/sessions/gracious-blissful-pasteur/mnt/claude_code_presentation/numericor.png"/>
           <p:cNvPicPr>
             <a:picLocks noChangeAspect="1"/>
           </p:cNvPicPr>
           <p:nvPr/>
         </p:nvPicPr>
         <p:blipFill>
-          <a:blip r:embed="rId1"/>
+          <a:blip r:embed="rId3"/>
           <a:stretch>
             <a:fillRect/>
           </a:stretch>
@@ -16213,7 +15954,7 @@
           <a:bodyPr wrap="square" rtlCol="0" anchor="ctr"/>
           <a:lstStyle/>
           <a:p>
-            <a:pPr algn="r" indent="0" marL="0">
+            <a:pPr marL="0" indent="0" algn="r">
               <a:buNone/>
             </a:pPr>
             <a:r>
@@ -16247,6 +15988,7 @@
         <a:solidFill>
           <a:srgbClr val="FFFFFF"/>
         </a:solidFill>
+        <a:effectLst/>
       </p:bgPr>
     </p:bg>
     <p:spTree>
@@ -16284,7 +16026,7 @@
           <a:bodyPr wrap="square" lIns="0" tIns="0" rIns="0" bIns="0" rtlCol="0" anchor="ctr"/>
           <a:lstStyle/>
           <a:p>
-            <a:pPr indent="0" marL="0">
+            <a:pPr marL="0" indent="0">
               <a:buNone/>
             </a:pPr>
             <a:r>
@@ -16323,7 +16065,7 @@
           <a:bodyPr wrap="square" lIns="0" tIns="0" rIns="0" bIns="0" rtlCol="0" anchor="ctr"/>
           <a:lstStyle/>
           <a:p>
-            <a:pPr indent="0" marL="0">
+            <a:pPr marL="0" indent="0">
               <a:buNone/>
             </a:pPr>
             <a:r>
@@ -16362,7 +16104,7 @@
           <a:bodyPr wrap="square" lIns="0" tIns="0" rIns="0" bIns="0" rtlCol="0" anchor="t"/>
           <a:lstStyle/>
           <a:p>
-            <a:pPr indent="0" marL="0">
+            <a:pPr marL="0" indent="0">
               <a:spcAft>
                 <a:spcPts val="400"/>
               </a:spcAft>
@@ -16382,7 +16124,7 @@
             <a:endParaRPr lang="en-US" sz="1600" dirty="0"/>
           </a:p>
           <a:p>
-            <a:pPr indent="0" marL="0">
+            <a:pPr marL="0" indent="0">
               <a:spcAft>
                 <a:spcPts val="400"/>
               </a:spcAft>
@@ -16402,7 +16144,7 @@
             <a:endParaRPr lang="en-US" sz="1600" dirty="0"/>
           </a:p>
           <a:p>
-            <a:pPr indent="0" marL="0">
+            <a:pPr marL="0" indent="0">
               <a:spcAft>
                 <a:spcPts val="400"/>
               </a:spcAft>
@@ -16422,7 +16164,7 @@
             <a:endParaRPr lang="en-US" sz="1600" dirty="0"/>
           </a:p>
           <a:p>
-            <a:pPr indent="0" marL="0">
+            <a:pPr marL="0" indent="0">
               <a:spcAft>
                 <a:spcPts val="400"/>
               </a:spcAft>
@@ -16442,7 +16184,7 @@
             <a:endParaRPr lang="en-US" sz="1600" dirty="0"/>
           </a:p>
           <a:p>
-            <a:pPr indent="0" marL="0">
+            <a:pPr marL="0" indent="0">
               <a:spcAft>
                 <a:spcPts val="400"/>
               </a:spcAft>
@@ -16462,7 +16204,7 @@
             <a:endParaRPr lang="en-US" sz="1600" dirty="0"/>
           </a:p>
           <a:p>
-            <a:pPr indent="0" marL="0">
+            <a:pPr marL="0" indent="0">
               <a:spcAft>
                 <a:spcPts val="400"/>
               </a:spcAft>
@@ -16482,7 +16224,7 @@
             <a:endParaRPr lang="en-US" sz="1600" dirty="0"/>
           </a:p>
           <a:p>
-            <a:pPr indent="0" marL="0">
+            <a:pPr marL="0" indent="0">
               <a:spcAft>
                 <a:spcPts val="400"/>
               </a:spcAft>
@@ -16502,7 +16244,7 @@
             <a:endParaRPr lang="en-US" sz="1600" dirty="0"/>
           </a:p>
           <a:p>
-            <a:pPr indent="0" marL="0">
+            <a:pPr marL="0" indent="0">
               <a:spcAft>
                 <a:spcPts val="400"/>
               </a:spcAft>
@@ -16522,7 +16264,7 @@
             <a:endParaRPr lang="en-US" sz="1600" dirty="0"/>
           </a:p>
           <a:p>
-            <a:pPr indent="0" marL="0">
+            <a:pPr marL="0" indent="0">
               <a:spcAft>
                 <a:spcPts val="400"/>
               </a:spcAft>
@@ -16542,7 +16284,7 @@
             <a:endParaRPr lang="en-US" sz="1600" dirty="0"/>
           </a:p>
           <a:p>
-            <a:pPr indent="0" marL="0">
+            <a:pPr marL="0" indent="0">
               <a:spcAft>
                 <a:spcPts val="400"/>
               </a:spcAft>
@@ -16562,7 +16304,7 @@
             <a:endParaRPr lang="en-US" sz="1600" dirty="0"/>
           </a:p>
           <a:p>
-            <a:pPr indent="0" marL="0">
+            <a:pPr marL="0" indent="0">
               <a:spcAft>
                 <a:spcPts val="400"/>
               </a:spcAft>
@@ -16582,7 +16324,7 @@
             <a:endParaRPr lang="en-US" sz="1600" dirty="0"/>
           </a:p>
           <a:p>
-            <a:pPr indent="0" marL="0">
+            <a:pPr marL="0" indent="0">
               <a:spcAft>
                 <a:spcPts val="400"/>
               </a:spcAft>
@@ -16602,7 +16344,7 @@
             <a:endParaRPr lang="en-US" sz="1600" dirty="0"/>
           </a:p>
           <a:p>
-            <a:pPr indent="0" marL="0">
+            <a:pPr marL="0" indent="0">
               <a:spcAft>
                 <a:spcPts val="400"/>
               </a:spcAft>
@@ -16622,7 +16364,7 @@
             <a:endParaRPr lang="en-US" sz="1600" dirty="0"/>
           </a:p>
           <a:p>
-            <a:pPr indent="0" marL="0">
+            <a:pPr marL="0" indent="0">
               <a:spcAft>
                 <a:spcPts val="400"/>
               </a:spcAft>
@@ -16645,14 +16387,14 @@
       </p:sp>
       <p:pic>
         <p:nvPicPr>
-          <p:cNvPr id="5" name="Image 0" descr="/sessions/gracious-blissful-pasteur/mnt/claude_code_presentation/numericor.png">    </p:cNvPr>
+          <p:cNvPr id="5" name="Image 0" descr="/sessions/gracious-blissful-pasteur/mnt/claude_code_presentation/numericor.png"/>
           <p:cNvPicPr>
             <a:picLocks noChangeAspect="1"/>
           </p:cNvPicPr>
           <p:nvPr/>
         </p:nvPicPr>
         <p:blipFill>
-          <a:blip r:embed="rId1"/>
+          <a:blip r:embed="rId3"/>
           <a:stretch>
             <a:fillRect/>
           </a:stretch>
@@ -16688,7 +16430,7 @@
           <a:bodyPr wrap="square" rtlCol="0" anchor="ctr"/>
           <a:lstStyle/>
           <a:p>
-            <a:pPr algn="r" indent="0" marL="0">
+            <a:pPr marL="0" indent="0" algn="r">
               <a:buNone/>
             </a:pPr>
             <a:r>
@@ -16722,6 +16464,7 @@
         <a:solidFill>
           <a:srgbClr val="FFFFFF"/>
         </a:solidFill>
+        <a:effectLst/>
       </p:bgPr>
     </p:bg>
     <p:spTree>
@@ -16759,7 +16502,7 @@
           <a:bodyPr wrap="square" lIns="0" tIns="0" rIns="0" bIns="0" rtlCol="0" anchor="ctr"/>
           <a:lstStyle/>
           <a:p>
-            <a:pPr indent="0" marL="0">
+            <a:pPr marL="0" indent="0">
               <a:buNone/>
             </a:pPr>
             <a:r>
@@ -16798,7 +16541,7 @@
           <a:bodyPr wrap="square" lIns="0" tIns="0" rIns="0" bIns="0" rtlCol="0" anchor="ctr"/>
           <a:lstStyle/>
           <a:p>
-            <a:pPr indent="0" marL="0">
+            <a:pPr marL="0" indent="0">
               <a:buNone/>
             </a:pPr>
             <a:r>
@@ -16837,7 +16580,7 @@
           <a:bodyPr wrap="square" lIns="0" tIns="0" rIns="0" bIns="0" rtlCol="0" anchor="t"/>
           <a:lstStyle/>
           <a:p>
-            <a:pPr indent="0" marL="0">
+            <a:pPr marL="0" indent="0">
               <a:spcAft>
                 <a:spcPts val="400"/>
               </a:spcAft>
@@ -17004,7 +16747,7 @@
             <a:endParaRPr lang="en-US" sz="1600" dirty="0"/>
           </a:p>
           <a:p>
-            <a:pPr indent="0" marL="0">
+            <a:pPr marL="0" indent="0">
               <a:spcAft>
                 <a:spcPts val="400"/>
               </a:spcAft>
@@ -17024,7 +16767,7 @@
             <a:endParaRPr lang="en-US" sz="1600" dirty="0"/>
           </a:p>
           <a:p>
-            <a:pPr indent="0" marL="0">
+            <a:pPr marL="0" indent="0">
               <a:spcAft>
                 <a:spcPts val="400"/>
               </a:spcAft>
@@ -17107,7 +16850,7 @@
             <a:endParaRPr lang="en-US" sz="1600" dirty="0"/>
           </a:p>
           <a:p>
-            <a:pPr indent="0" marL="0">
+            <a:pPr marL="0" indent="0">
               <a:spcAft>
                 <a:spcPts val="400"/>
               </a:spcAft>
@@ -17127,7 +16870,7 @@
             <a:endParaRPr lang="en-US" sz="1600" dirty="0"/>
           </a:p>
           <a:p>
-            <a:pPr indent="0" marL="0">
+            <a:pPr marL="0" indent="0">
               <a:spcAft>
                 <a:spcPts val="400"/>
               </a:spcAft>
@@ -17192,14 +16935,14 @@
       </p:sp>
       <p:pic>
         <p:nvPicPr>
-          <p:cNvPr id="5" name="Image 0" descr="/sessions/gracious-blissful-pasteur/mnt/claude_code_presentation/numericor.png">    </p:cNvPr>
+          <p:cNvPr id="5" name="Image 0" descr="/sessions/gracious-blissful-pasteur/mnt/claude_code_presentation/numericor.png"/>
           <p:cNvPicPr>
             <a:picLocks noChangeAspect="1"/>
           </p:cNvPicPr>
           <p:nvPr/>
         </p:nvPicPr>
         <p:blipFill>
-          <a:blip r:embed="rId1"/>
+          <a:blip r:embed="rId3"/>
           <a:stretch>
             <a:fillRect/>
           </a:stretch>
@@ -17235,7 +16978,7 @@
           <a:bodyPr wrap="square" rtlCol="0" anchor="ctr"/>
           <a:lstStyle/>
           <a:p>
-            <a:pPr algn="r" indent="0" marL="0">
+            <a:pPr marL="0" indent="0" algn="r">
               <a:buNone/>
             </a:pPr>
             <a:r>
@@ -17269,6 +17012,7 @@
         <a:solidFill>
           <a:srgbClr val="FFFFFF"/>
         </a:solidFill>
+        <a:effectLst/>
       </p:bgPr>
     </p:bg>
     <p:spTree>
@@ -17306,7 +17050,7 @@
           <a:bodyPr wrap="square" lIns="0" tIns="0" rIns="0" bIns="0" rtlCol="0" anchor="ctr"/>
           <a:lstStyle/>
           <a:p>
-            <a:pPr indent="0" marL="0">
+            <a:pPr marL="0" indent="0">
               <a:buNone/>
             </a:pPr>
             <a:r>
@@ -17345,7 +17089,7 @@
           <a:bodyPr wrap="square" lIns="0" tIns="0" rIns="0" bIns="0" rtlCol="0" anchor="ctr"/>
           <a:lstStyle/>
           <a:p>
-            <a:pPr indent="0" marL="0">
+            <a:pPr marL="0" indent="0">
               <a:buNone/>
             </a:pPr>
             <a:r>
@@ -17384,7 +17128,7 @@
           <a:bodyPr wrap="square" lIns="0" tIns="0" rIns="0" bIns="0" rtlCol="0" anchor="t"/>
           <a:lstStyle/>
           <a:p>
-            <a:pPr indent="0" marL="0">
+            <a:pPr marL="0" indent="0">
               <a:spcAft>
                 <a:spcPts val="400"/>
               </a:spcAft>
@@ -17404,7 +17148,7 @@
             <a:endParaRPr lang="en-US" sz="1600" dirty="0"/>
           </a:p>
           <a:p>
-            <a:pPr indent="0" marL="0">
+            <a:pPr marL="0" indent="0">
               <a:spcAft>
                 <a:spcPts val="400"/>
               </a:spcAft>
@@ -17424,7 +17168,7 @@
             <a:endParaRPr lang="en-US" sz="1600" dirty="0"/>
           </a:p>
           <a:p>
-            <a:pPr indent="0" marL="0">
+            <a:pPr marL="0" indent="0">
               <a:spcAft>
                 <a:spcPts val="400"/>
               </a:spcAft>
@@ -17444,7 +17188,7 @@
             <a:endParaRPr lang="en-US" sz="1600" dirty="0"/>
           </a:p>
           <a:p>
-            <a:pPr indent="0" marL="0">
+            <a:pPr marL="0" indent="0">
               <a:spcAft>
                 <a:spcPts val="400"/>
               </a:spcAft>
@@ -17464,7 +17208,7 @@
             <a:endParaRPr lang="en-US" sz="1600" dirty="0"/>
           </a:p>
           <a:p>
-            <a:pPr indent="0" marL="0">
+            <a:pPr marL="0" indent="0">
               <a:spcAft>
                 <a:spcPts val="400"/>
               </a:spcAft>
@@ -17547,7 +17291,7 @@
             <a:endParaRPr lang="en-US" sz="1600" dirty="0"/>
           </a:p>
           <a:p>
-            <a:pPr indent="0" marL="0">
+            <a:pPr marL="0" indent="0">
               <a:spcAft>
                 <a:spcPts val="400"/>
               </a:spcAft>
@@ -17567,7 +17311,7 @@
             <a:endParaRPr lang="en-US" sz="1600" dirty="0"/>
           </a:p>
           <a:p>
-            <a:pPr indent="0" marL="0">
+            <a:pPr marL="0" indent="0">
               <a:spcAft>
                 <a:spcPts val="400"/>
               </a:spcAft>
@@ -17587,7 +17331,7 @@
             <a:endParaRPr lang="en-US" sz="1600" dirty="0"/>
           </a:p>
           <a:p>
-            <a:pPr indent="0" marL="0">
+            <a:pPr marL="0" indent="0">
               <a:spcAft>
                 <a:spcPts val="400"/>
               </a:spcAft>
@@ -17607,7 +17351,7 @@
             <a:endParaRPr lang="en-US" sz="1600" dirty="0"/>
           </a:p>
           <a:p>
-            <a:pPr indent="0" marL="0">
+            <a:pPr marL="0" indent="0">
               <a:spcAft>
                 <a:spcPts val="400"/>
               </a:spcAft>
@@ -17630,14 +17374,14 @@
       </p:sp>
       <p:pic>
         <p:nvPicPr>
-          <p:cNvPr id="5" name="Image 0" descr="/sessions/gracious-blissful-pasteur/mnt/claude_code_presentation/numericor.png">    </p:cNvPr>
+          <p:cNvPr id="5" name="Image 0" descr="/sessions/gracious-blissful-pasteur/mnt/claude_code_presentation/numericor.png"/>
           <p:cNvPicPr>
             <a:picLocks noChangeAspect="1"/>
           </p:cNvPicPr>
           <p:nvPr/>
         </p:nvPicPr>
         <p:blipFill>
-          <a:blip r:embed="rId1"/>
+          <a:blip r:embed="rId3"/>
           <a:stretch>
             <a:fillRect/>
           </a:stretch>
@@ -17673,7 +17417,7 @@
           <a:bodyPr wrap="square" rtlCol="0" anchor="ctr"/>
           <a:lstStyle/>
           <a:p>
-            <a:pPr algn="r" indent="0" marL="0">
+            <a:pPr marL="0" indent="0" algn="r">
               <a:buNone/>
             </a:pPr>
             <a:r>
@@ -17707,6 +17451,7 @@
         <a:solidFill>
           <a:srgbClr val="FFFFFF"/>
         </a:solidFill>
+        <a:effectLst/>
       </p:bgPr>
     </p:bg>
     <p:spTree>
@@ -17744,7 +17489,7 @@
           <a:bodyPr wrap="square" lIns="0" tIns="0" rIns="0" bIns="0" rtlCol="0" anchor="ctr"/>
           <a:lstStyle/>
           <a:p>
-            <a:pPr indent="0" marL="0">
+            <a:pPr marL="0" indent="0">
               <a:buNone/>
             </a:pPr>
             <a:r>
@@ -17783,7 +17528,7 @@
           <a:bodyPr wrap="square" lIns="0" tIns="0" rIns="0" bIns="0" rtlCol="0" anchor="ctr"/>
           <a:lstStyle/>
           <a:p>
-            <a:pPr indent="0" marL="0">
+            <a:pPr marL="0" indent="0">
               <a:buNone/>
             </a:pPr>
             <a:r>
@@ -17822,7 +17567,7 @@
           <a:bodyPr wrap="square" lIns="0" tIns="0" rIns="0" bIns="0" rtlCol="0" anchor="t"/>
           <a:lstStyle/>
           <a:p>
-            <a:pPr indent="0" marL="0">
+            <a:pPr marL="0" indent="0">
               <a:spcAft>
                 <a:spcPts val="400"/>
               </a:spcAft>
@@ -17842,7 +17587,7 @@
             <a:endParaRPr lang="en-US" sz="1600" dirty="0"/>
           </a:p>
           <a:p>
-            <a:pPr indent="0" marL="0">
+            <a:pPr marL="0" indent="0">
               <a:spcAft>
                 <a:spcPts val="400"/>
               </a:spcAft>
@@ -17862,7 +17607,7 @@
             <a:endParaRPr lang="en-US" sz="1600" dirty="0"/>
           </a:p>
           <a:p>
-            <a:pPr indent="0" marL="0">
+            <a:pPr marL="0" indent="0">
               <a:spcAft>
                 <a:spcPts val="400"/>
               </a:spcAft>
@@ -17882,7 +17627,7 @@
             <a:endParaRPr lang="en-US" sz="1600" dirty="0"/>
           </a:p>
           <a:p>
-            <a:pPr indent="0" marL="0">
+            <a:pPr marL="0" indent="0">
               <a:spcAft>
                 <a:spcPts val="400"/>
               </a:spcAft>
@@ -17902,7 +17647,7 @@
             <a:endParaRPr lang="en-US" sz="1600" dirty="0"/>
           </a:p>
           <a:p>
-            <a:pPr indent="0" marL="0">
+            <a:pPr marL="0" indent="0">
               <a:spcAft>
                 <a:spcPts val="400"/>
               </a:spcAft>
@@ -17922,7 +17667,7 @@
             <a:endParaRPr lang="en-US" sz="1600" dirty="0"/>
           </a:p>
           <a:p>
-            <a:pPr indent="0" marL="0">
+            <a:pPr marL="0" indent="0">
               <a:spcAft>
                 <a:spcPts val="400"/>
               </a:spcAft>
@@ -17942,7 +17687,7 @@
             <a:endParaRPr lang="en-US" sz="1600" dirty="0"/>
           </a:p>
           <a:p>
-            <a:pPr indent="0" marL="0">
+            <a:pPr marL="0" indent="0">
               <a:spcAft>
                 <a:spcPts val="400"/>
               </a:spcAft>
@@ -17962,7 +17707,7 @@
             <a:endParaRPr lang="en-US" sz="1600" dirty="0"/>
           </a:p>
           <a:p>
-            <a:pPr indent="0" marL="0">
+            <a:pPr marL="0" indent="0">
               <a:spcAft>
                 <a:spcPts val="400"/>
               </a:spcAft>
@@ -17982,7 +17727,7 @@
             <a:endParaRPr lang="en-US" sz="1600" dirty="0"/>
           </a:p>
           <a:p>
-            <a:pPr indent="0" marL="0">
+            <a:pPr marL="0" indent="0">
               <a:spcAft>
                 <a:spcPts val="400"/>
               </a:spcAft>
@@ -18002,7 +17747,7 @@
             <a:endParaRPr lang="en-US" sz="1600" dirty="0"/>
           </a:p>
           <a:p>
-            <a:pPr indent="0" marL="0">
+            <a:pPr marL="0" indent="0">
               <a:spcAft>
                 <a:spcPts val="400"/>
               </a:spcAft>
@@ -18064,7 +17809,7 @@
             <a:endParaRPr lang="en-US" sz="1600" dirty="0"/>
           </a:p>
           <a:p>
-            <a:pPr indent="0" marL="0">
+            <a:pPr marL="0" indent="0">
               <a:spcAft>
                 <a:spcPts val="400"/>
               </a:spcAft>
@@ -18087,14 +17832,14 @@
       </p:sp>
       <p:pic>
         <p:nvPicPr>
-          <p:cNvPr id="5" name="Image 0" descr="/sessions/gracious-blissful-pasteur/mnt/claude_code_presentation/numericor.png">    </p:cNvPr>
+          <p:cNvPr id="5" name="Image 0" descr="/sessions/gracious-blissful-pasteur/mnt/claude_code_presentation/numericor.png"/>
           <p:cNvPicPr>
             <a:picLocks noChangeAspect="1"/>
           </p:cNvPicPr>
           <p:nvPr/>
         </p:nvPicPr>
         <p:blipFill>
-          <a:blip r:embed="rId1"/>
+          <a:blip r:embed="rId3"/>
           <a:stretch>
             <a:fillRect/>
           </a:stretch>
@@ -18130,7 +17875,7 @@
           <a:bodyPr wrap="square" rtlCol="0" anchor="ctr"/>
           <a:lstStyle/>
           <a:p>
-            <a:pPr algn="r" indent="0" marL="0">
+            <a:pPr marL="0" indent="0" algn="r">
               <a:buNone/>
             </a:pPr>
             <a:r>
@@ -18449,4 +18194,319 @@
     </a:ext>
   </a:extLst>
 </a:theme>
+</file>
+
+<file path=ppt/theme/theme2.xml><?xml version="1.0" encoding="utf-8"?>
+<a:theme xmlns:a="http://schemas.openxmlformats.org/drawingml/2006/main" name="Office">
+  <a:themeElements>
+    <a:clrScheme name="Office">
+      <a:dk1>
+        <a:sysClr val="windowText" lastClr="000000"/>
+      </a:dk1>
+      <a:lt1>
+        <a:sysClr val="window" lastClr="FFFFFF"/>
+      </a:lt1>
+      <a:dk2>
+        <a:srgbClr val="0E2841"/>
+      </a:dk2>
+      <a:lt2>
+        <a:srgbClr val="E8E8E8"/>
+      </a:lt2>
+      <a:accent1>
+        <a:srgbClr val="156082"/>
+      </a:accent1>
+      <a:accent2>
+        <a:srgbClr val="E97132"/>
+      </a:accent2>
+      <a:accent3>
+        <a:srgbClr val="196B24"/>
+      </a:accent3>
+      <a:accent4>
+        <a:srgbClr val="0F9ED5"/>
+      </a:accent4>
+      <a:accent5>
+        <a:srgbClr val="A02B93"/>
+      </a:accent5>
+      <a:accent6>
+        <a:srgbClr val="4EA72E"/>
+      </a:accent6>
+      <a:hlink>
+        <a:srgbClr val="467886"/>
+      </a:hlink>
+      <a:folHlink>
+        <a:srgbClr val="96607D"/>
+      </a:folHlink>
+    </a:clrScheme>
+    <a:fontScheme name="Office">
+      <a:majorFont>
+        <a:latin typeface="Aptos Display" panose="02110004020202020204"/>
+        <a:ea typeface=""/>
+        <a:cs typeface=""/>
+        <a:font script="Jpan" typeface="游ゴシック Light"/>
+        <a:font script="Hang" typeface="맑은 고딕"/>
+        <a:font script="Hans" typeface="等线 Light"/>
+        <a:font script="Hant" typeface="新細明體"/>
+        <a:font script="Arab" typeface="Times New Roman"/>
+        <a:font script="Hebr" typeface="Times New Roman"/>
+        <a:font script="Thai" typeface="Angsana New"/>
+        <a:font script="Ethi" typeface="Nyala"/>
+        <a:font script="Beng" typeface="Vrinda"/>
+        <a:font script="Gujr" typeface="Shruti"/>
+        <a:font script="Khmr" typeface="MoolBoran"/>
+        <a:font script="Knda" typeface="Tunga"/>
+        <a:font script="Guru" typeface="Raavi"/>
+        <a:font script="Cans" typeface="Euphemia"/>
+        <a:font script="Cher" typeface="Plantagenet Cherokee"/>
+        <a:font script="Yiii" typeface="Microsoft Yi Baiti"/>
+        <a:font script="Tibt" typeface="Microsoft Himalaya"/>
+        <a:font script="Thaa" typeface="MV Boli"/>
+        <a:font script="Deva" typeface="Mangal"/>
+        <a:font script="Telu" typeface="Gautami"/>
+        <a:font script="Taml" typeface="Latha"/>
+        <a:font script="Syrc" typeface="Estrangelo Edessa"/>
+        <a:font script="Orya" typeface="Kalinga"/>
+        <a:font script="Mlym" typeface="Kartika"/>
+        <a:font script="Laoo" typeface="DokChampa"/>
+        <a:font script="Sinh" typeface="Iskoola Pota"/>
+        <a:font script="Mong" typeface="Mongolian Baiti"/>
+        <a:font script="Viet" typeface="Times New Roman"/>
+        <a:font script="Uigh" typeface="Microsoft Uighur"/>
+        <a:font script="Geor" typeface="Sylfaen"/>
+        <a:font script="Armn" typeface="Arial"/>
+        <a:font script="Bugi" typeface="Leelawadee UI"/>
+        <a:font script="Bopo" typeface="Microsoft JhengHei"/>
+        <a:font script="Java" typeface="Javanese Text"/>
+        <a:font script="Lisu" typeface="Segoe UI"/>
+        <a:font script="Mymr" typeface="Myanmar Text"/>
+        <a:font script="Nkoo" typeface="Ebrima"/>
+        <a:font script="Olck" typeface="Nirmala UI"/>
+        <a:font script="Osma" typeface="Ebrima"/>
+        <a:font script="Phag" typeface="Phagspa"/>
+        <a:font script="Syrn" typeface="Estrangelo Edessa"/>
+        <a:font script="Syrj" typeface="Estrangelo Edessa"/>
+        <a:font script="Syre" typeface="Estrangelo Edessa"/>
+        <a:font script="Sora" typeface="Nirmala UI"/>
+        <a:font script="Tale" typeface="Microsoft Tai Le"/>
+        <a:font script="Talu" typeface="Microsoft New Tai Lue"/>
+        <a:font script="Tfng" typeface="Ebrima"/>
+      </a:majorFont>
+      <a:minorFont>
+        <a:latin typeface="Aptos" panose="02110004020202020204"/>
+        <a:ea typeface=""/>
+        <a:cs typeface=""/>
+        <a:font script="Jpan" typeface="游ゴシック"/>
+        <a:font script="Hang" typeface="맑은 고딕"/>
+        <a:font script="Hans" typeface="等线"/>
+        <a:font script="Hant" typeface="新細明體"/>
+        <a:font script="Arab" typeface="Arial"/>
+        <a:font script="Hebr" typeface="Arial"/>
+        <a:font script="Thai" typeface="Cordia New"/>
+        <a:font script="Ethi" typeface="Nyala"/>
+        <a:font script="Beng" typeface="Vrinda"/>
+        <a:font script="Gujr" typeface="Shruti"/>
+        <a:font script="Khmr" typeface="DaunPenh"/>
+        <a:font script="Knda" typeface="Tunga"/>
+        <a:font script="Guru" typeface="Raavi"/>
+        <a:font script="Cans" typeface="Euphemia"/>
+        <a:font script="Cher" typeface="Plantagenet Cherokee"/>
+        <a:font script="Yiii" typeface="Microsoft Yi Baiti"/>
+        <a:font script="Tibt" typeface="Microsoft Himalaya"/>
+        <a:font script="Thaa" typeface="MV Boli"/>
+        <a:font script="Deva" typeface="Mangal"/>
+        <a:font script="Telu" typeface="Gautami"/>
+        <a:font script="Taml" typeface="Latha"/>
+        <a:font script="Syrc" typeface="Estrangelo Edessa"/>
+        <a:font script="Orya" typeface="Kalinga"/>
+        <a:font script="Mlym" typeface="Kartika"/>
+        <a:font script="Laoo" typeface="DokChampa"/>
+        <a:font script="Sinh" typeface="Iskoola Pota"/>
+        <a:font script="Mong" typeface="Mongolian Baiti"/>
+        <a:font script="Viet" typeface="Arial"/>
+        <a:font script="Uigh" typeface="Microsoft Uighur"/>
+        <a:font script="Geor" typeface="Sylfaen"/>
+        <a:font script="Armn" typeface="Arial"/>
+        <a:font script="Bugi" typeface="Leelawadee UI"/>
+        <a:font script="Bopo" typeface="Microsoft JhengHei"/>
+        <a:font script="Java" typeface="Javanese Text"/>
+        <a:font script="Lisu" typeface="Segoe UI"/>
+        <a:font script="Mymr" typeface="Myanmar Text"/>
+        <a:font script="Nkoo" typeface="Ebrima"/>
+        <a:font script="Olck" typeface="Nirmala UI"/>
+        <a:font script="Osma" typeface="Ebrima"/>
+        <a:font script="Phag" typeface="Phagspa"/>
+        <a:font script="Syrn" typeface="Estrangelo Edessa"/>
+        <a:font script="Syrj" typeface="Estrangelo Edessa"/>
+        <a:font script="Syre" typeface="Estrangelo Edessa"/>
+        <a:font script="Sora" typeface="Nirmala UI"/>
+        <a:font script="Tale" typeface="Microsoft Tai Le"/>
+        <a:font script="Talu" typeface="Microsoft New Tai Lue"/>
+        <a:font script="Tfng" typeface="Ebrima"/>
+      </a:minorFont>
+    </a:fontScheme>
+    <a:fmtScheme name="Office">
+      <a:fillStyleLst>
+        <a:solidFill>
+          <a:schemeClr val="phClr"/>
+        </a:solidFill>
+        <a:gradFill rotWithShape="1">
+          <a:gsLst>
+            <a:gs pos="0">
+              <a:schemeClr val="phClr">
+                <a:lumMod val="110000"/>
+                <a:satMod val="105000"/>
+                <a:tint val="67000"/>
+              </a:schemeClr>
+            </a:gs>
+            <a:gs pos="50000">
+              <a:schemeClr val="phClr">
+                <a:lumMod val="105000"/>
+                <a:satMod val="103000"/>
+                <a:tint val="73000"/>
+              </a:schemeClr>
+            </a:gs>
+            <a:gs pos="100000">
+              <a:schemeClr val="phClr">
+                <a:lumMod val="105000"/>
+                <a:satMod val="109000"/>
+                <a:tint val="81000"/>
+              </a:schemeClr>
+            </a:gs>
+          </a:gsLst>
+          <a:lin ang="5400000" scaled="0"/>
+        </a:gradFill>
+        <a:gradFill rotWithShape="1">
+          <a:gsLst>
+            <a:gs pos="0">
+              <a:schemeClr val="phClr">
+                <a:satMod val="103000"/>
+                <a:lumMod val="102000"/>
+                <a:tint val="94000"/>
+              </a:schemeClr>
+            </a:gs>
+            <a:gs pos="50000">
+              <a:schemeClr val="phClr">
+                <a:satMod val="110000"/>
+                <a:lumMod val="100000"/>
+                <a:shade val="100000"/>
+              </a:schemeClr>
+            </a:gs>
+            <a:gs pos="100000">
+              <a:schemeClr val="phClr">
+                <a:lumMod val="99000"/>
+                <a:satMod val="120000"/>
+                <a:shade val="78000"/>
+              </a:schemeClr>
+            </a:gs>
+          </a:gsLst>
+          <a:lin ang="5400000" scaled="0"/>
+        </a:gradFill>
+      </a:fillStyleLst>
+      <a:lnStyleLst>
+        <a:ln w="12700" cap="flat" cmpd="sng" algn="ctr">
+          <a:solidFill>
+            <a:schemeClr val="phClr"/>
+          </a:solidFill>
+          <a:prstDash val="solid"/>
+          <a:miter lim="800000"/>
+        </a:ln>
+        <a:ln w="19050" cap="flat" cmpd="sng" algn="ctr">
+          <a:solidFill>
+            <a:schemeClr val="phClr"/>
+          </a:solidFill>
+          <a:prstDash val="solid"/>
+          <a:miter lim="800000"/>
+        </a:ln>
+        <a:ln w="25400" cap="flat" cmpd="sng" algn="ctr">
+          <a:solidFill>
+            <a:schemeClr val="phClr"/>
+          </a:solidFill>
+          <a:prstDash val="solid"/>
+          <a:miter lim="800000"/>
+        </a:ln>
+      </a:lnStyleLst>
+      <a:effectStyleLst>
+        <a:effectStyle>
+          <a:effectLst/>
+        </a:effectStyle>
+        <a:effectStyle>
+          <a:effectLst/>
+        </a:effectStyle>
+        <a:effectStyle>
+          <a:effectLst>
+            <a:outerShdw blurRad="57150" dist="19050" dir="5400000" algn="ctr" rotWithShape="0">
+              <a:srgbClr val="000000">
+                <a:alpha val="63000"/>
+              </a:srgbClr>
+            </a:outerShdw>
+          </a:effectLst>
+        </a:effectStyle>
+      </a:effectStyleLst>
+      <a:bgFillStyleLst>
+        <a:solidFill>
+          <a:schemeClr val="phClr"/>
+        </a:solidFill>
+        <a:solidFill>
+          <a:schemeClr val="phClr">
+            <a:tint val="95000"/>
+            <a:satMod val="170000"/>
+          </a:schemeClr>
+        </a:solidFill>
+        <a:gradFill rotWithShape="1">
+          <a:gsLst>
+            <a:gs pos="0">
+              <a:schemeClr val="phClr">
+                <a:tint val="93000"/>
+                <a:satMod val="150000"/>
+                <a:shade val="98000"/>
+                <a:lumMod val="102000"/>
+              </a:schemeClr>
+            </a:gs>
+            <a:gs pos="50000">
+              <a:schemeClr val="phClr">
+                <a:tint val="98000"/>
+                <a:satMod val="130000"/>
+                <a:shade val="90000"/>
+                <a:lumMod val="103000"/>
+              </a:schemeClr>
+            </a:gs>
+            <a:gs pos="100000">
+              <a:schemeClr val="phClr">
+                <a:shade val="63000"/>
+                <a:satMod val="120000"/>
+              </a:schemeClr>
+            </a:gs>
+          </a:gsLst>
+          <a:lin ang="5400000" scaled="0"/>
+        </a:gradFill>
+      </a:bgFillStyleLst>
+    </a:fmtScheme>
+  </a:themeElements>
+  <a:objectDefaults>
+    <a:lnDef>
+      <a:spPr/>
+      <a:bodyPr/>
+      <a:lstStyle/>
+      <a:style>
+        <a:lnRef idx="2">
+          <a:schemeClr val="accent1"/>
+        </a:lnRef>
+        <a:fillRef idx="0">
+          <a:schemeClr val="accent1"/>
+        </a:fillRef>
+        <a:effectRef idx="1">
+          <a:schemeClr val="accent1"/>
+        </a:effectRef>
+        <a:fontRef idx="minor">
+          <a:schemeClr val="tx1"/>
+        </a:fontRef>
+      </a:style>
+    </a:lnDef>
+  </a:objectDefaults>
+  <a:extraClrSchemeLst/>
+  <a:extLst>
+    <a:ext uri="{05A4C25C-085E-4340-85A3-A5531E510DB2}">
+      <thm15:themeFamily xmlns:thm15="http://schemas.microsoft.com/office/thememl/2012/main" name="Office Theme" id="{2E142A2C-CD16-42D6-873A-C26D2A0506FA}" vid="{1BDDFF52-6CD6-40A5-AB3C-68EB2F1E4D0A}"/>
+    </a:ext>
+  </a:extLst>
+</a:theme>
 </file>
--- a/claude_code_workshop_v2.pptx
+++ b/claude_code_workshop_v2.pptx
@@ -5,7 +5,7 @@
     <p:sldMasterId id="2147483648" r:id="rId1"/>
   </p:sldMasterIdLst>
   <p:notesMasterIdLst>
-    <p:notesMasterId r:id="rId36"/>
+    <p:notesMasterId r:id="rId37"/>
   </p:notesMasterIdLst>
   <p:sldIdLst>
     <p:sldId id="256" r:id="rId2"/>
@@ -42,6 +42,7 @@
     <p:sldId id="287" r:id="rId33"/>
     <p:sldId id="288" r:id="rId34"/>
     <p:sldId id="289" r:id="rId35"/>
+    <p:sldId id="290" r:id="rId36"/>
   </p:sldIdLst>
   <p:sldSz cx="12192000" cy="6858000"/>
   <p:notesSz cx="6858000" cy="12192000"/>
@@ -15057,26 +15058,6 @@
               <a:buNone/>
             </a:pPr>
             <a:r>
-              <a:rPr lang="en-US" sz="2800" b="1" dirty="0">
-                <a:solidFill>
-                  <a:srgbClr val="000000"/>
-                </a:solidFill>
-                <a:latin typeface="Inter" pitchFamily="34" charset="0"/>
-                <a:ea typeface="Inter" pitchFamily="34" charset="-122"/>
-                <a:cs typeface="Inter" pitchFamily="34" charset="-120"/>
-              </a:rPr>
-              <a:t>Questions?</a:t>
-            </a:r>
-            <a:endParaRPr lang="en-US" sz="1600" dirty="0"/>
-          </a:p>
-          <a:p>
-            <a:pPr marL="0" indent="0">
-              <a:spcAft>
-                <a:spcPts val="400"/>
-              </a:spcAft>
-              <a:buNone/>
-            </a:pPr>
-            <a:r>
               <a:rPr lang="en-US" sz="800" dirty="0">
                 <a:solidFill>
                   <a:srgbClr val="000000"/>
@@ -15086,26 +15067,6 @@
                 <a:cs typeface="Inter" pitchFamily="34" charset="-120"/>
               </a:rPr>
               <a:t> </a:t>
-            </a:r>
-            <a:endParaRPr lang="en-US" sz="1600" dirty="0"/>
-          </a:p>
-          <a:p>
-            <a:pPr marL="0" indent="0">
-              <a:spcAft>
-                <a:spcPts val="400"/>
-              </a:spcAft>
-              <a:buNone/>
-            </a:pPr>
-            <a:r>
-              <a:rPr lang="en-US" sz="900" dirty="0">
-                <a:solidFill>
-                  <a:srgbClr val="CCCCCC"/>
-                </a:solidFill>
-                <a:latin typeface="Inter" pitchFamily="34" charset="0"/>
-                <a:ea typeface="Inter" pitchFamily="34" charset="-122"/>
-                <a:cs typeface="Inter" pitchFamily="34" charset="-120"/>
-              </a:rPr>
-              <a:t>© 2026 Elias Karabelas · NumeriCor GmbH · All rights reserved · No warranties expressed or implied</a:t>
             </a:r>
             <a:endParaRPr lang="en-US" sz="1600" dirty="0"/>
           </a:p>
@@ -15175,6 +15136,85 @@
         </p:txBody>
       </p:sp>
     </p:spTree>
+  </p:cSld>
+  <p:clrMapOvr>
+    <a:masterClrMapping/>
+  </p:clrMapOvr>
+</p:sld>
+</file>
+
+<file path=ppt/slides/slide35.xml><?xml version="1.0" encoding="utf-8"?>
+<p:sld xmlns:a="http://schemas.openxmlformats.org/drawingml/2006/main" xmlns:r="http://schemas.openxmlformats.org/officeDocument/2006/relationships" xmlns:p="http://schemas.openxmlformats.org/presentationml/2006/main">
+  <p:cSld>
+    <p:spTree>
+      <p:nvGrpSpPr>
+        <p:cNvPr id="1" name=""/>
+        <p:cNvGrpSpPr/>
+        <p:nvPr/>
+      </p:nvGrpSpPr>
+      <p:grpSpPr>
+        <a:xfrm>
+          <a:off x="0" y="0"/>
+          <a:ext cx="0" cy="0"/>
+          <a:chOff x="0" y="0"/>
+          <a:chExt cx="0" cy="0"/>
+        </a:xfrm>
+      </p:grpSpPr>
+      <p:sp>
+        <p:nvSpPr>
+          <p:cNvPr id="3" name="Textfeld 2">
+            <a:extLst>
+              <a:ext uri="{FF2B5EF4-FFF2-40B4-BE49-F238E27FC236}">
+                <a16:creationId xmlns:a16="http://schemas.microsoft.com/office/drawing/2014/main" id="{58052E29-F5B7-7262-4259-D6D14E5F83E0}"/>
+              </a:ext>
+            </a:extLst>
+          </p:cNvPr>
+          <p:cNvSpPr txBox="1"/>
+          <p:nvPr/>
+        </p:nvSpPr>
+        <p:spPr>
+          <a:xfrm>
+            <a:off x="3714750" y="2921168"/>
+            <a:ext cx="4762499" cy="1015663"/>
+          </a:xfrm>
+          <a:prstGeom prst="rect">
+            <a:avLst/>
+          </a:prstGeom>
+          <a:noFill/>
+        </p:spPr>
+        <p:txBody>
+          <a:bodyPr wrap="square">
+            <a:spAutoFit/>
+          </a:bodyPr>
+          <a:lstStyle/>
+          <a:p>
+            <a:pPr marL="0" indent="0">
+              <a:spcAft>
+                <a:spcPts val="400"/>
+              </a:spcAft>
+              <a:buNone/>
+            </a:pPr>
+            <a:r>
+              <a:rPr lang="en-US" sz="6000" b="1" dirty="0">
+                <a:solidFill>
+                  <a:srgbClr val="000000"/>
+                </a:solidFill>
+                <a:latin typeface="Inter" pitchFamily="34" charset="0"/>
+                <a:ea typeface="Inter" pitchFamily="34" charset="-122"/>
+                <a:cs typeface="Inter" pitchFamily="34" charset="-120"/>
+              </a:rPr>
+              <a:t>Questions?</a:t>
+            </a:r>
+            <a:endParaRPr lang="en-US" sz="6000" dirty="0"/>
+          </a:p>
+        </p:txBody>
+      </p:sp>
+    </p:spTree>
+    <p:extLst>
+      <p:ext uri="{BB962C8B-B14F-4D97-AF65-F5344CB8AC3E}">
+        <p14:creationId xmlns:p14="http://schemas.microsoft.com/office/powerpoint/2010/main" val="148522738"/>
+      </p:ext>
+    </p:extLst>
   </p:cSld>
   <p:clrMapOvr>
     <a:masterClrMapping/>

--- a/claude_code_workshop_v2.pptx
+++ b/claude_code_workshop_v2.pptx
@@ -39,9 +39,10 @@
     <p:sldId id="287" r:id="rId33"/>
     <p:sldId id="288" r:id="rId34"/>
     <p:sldId id="289" r:id="rId35"/>
+    <p:sldId id="290" r:id="rId36"/>
   </p:sldIdLst>
   <p:notesMasterIdLst>
-    <p:notesMasterId r:id="rId36"/>
+    <p:notesMasterId r:id="rId37"/>
   </p:notesMasterIdLst>
   <p:sldSz cx="12192000" cy="6858000"/>
   <p:notesSz cx="6858000" cy="12192000"/>
@@ -1599,7 +1600,9 @@
           <a:p>
             <a:r>
               <a:rPr lang="en-US" dirty="0"/>
-              <a:t/>
+              <a:t>Open with a pause and ask: 'think of a decision in your own work — algorithmic, numerical, architectural — that you made two or three years ago. When did you last revisit it?' Almost everyone has a stale one. That is the whole point of this section.
+The key insight: lab notebooks and ADRs are STATIC artifacts. They have no expiration mechanism. The field moves but your documented commitments don't. haft is about closing that gap.
+If someone pushes back with 'we just re-evaluate when we write the next paper' — fine, but that's reactive. haft makes it proactive: the decision itself surfaces when its evidence ages out.</a:t>
             </a:r>
             <a:endParaRPr lang="en-US" dirty="0"/>
           </a:p>
@@ -1687,7 +1690,10 @@
           <a:p>
             <a:r>
               <a:rPr lang="en-US" dirty="0"/>
-              <a:t/>
+              <a:t>Pareto-front (one sentence): when tradeoffs are genuinely incommensurable — accuracy vs runtime vs memory — you can't reduce them to a weighted sum without smuggling in a value judgement. The Pareto front shows which alternatives are not dominated by any other. Domain knowledge picks among them. That's more honest than a scalar score.
+Trust score (R_eff): a single number per decision that decays as evidence ages. Not a p-value. Think of it as: 'how confident should I still be in the rationale for this?' When it drops past a threshold, the decision surfaces for review.
+FPF is “eternal alpha” per Levenchuk's own phrasing — a working methodology still evolving. haft is inspired-by, not implementation-of. Be honest about this if someone asks.
+Don't go deep on R_eff math or FPF's seven foundational ideas — the audience can google those. The point is the cycle and the expiration mechanism.</a:t>
             </a:r>
             <a:endParaRPr lang="en-US" dirty="0"/>
           </a:p>
@@ -1775,9 +1781,9 @@
           <a:p>
             <a:r>
               <a:rPr lang="en-US" dirty="0"/>
-              <a:t>My daily workflow: I use /h-frame for tough architectural decisions where I want to drive each step myself. /h-note for quick rationale captures. /h-reason when I want Claude to figure out the right depth.
-/h-onboard scans an existing project for architecture knowledge. /h-search is full-text search across all artifacts.
-Note: renamed from Quint Codes in v6.0 — all /q-* commands are now /h-*. The .quint/ directory migrates automatically to .haft/ on first haft init.</a:t>
+              <a:t>The PhD-churn bullet is the one the room will recognize instantly. Every researcher has inherited code they didn't understand — either from a predecessor, or from their own past self. Name that explicitly.
+The 'publish on top of them' point is the sharpest: research compounds. If decision A underpins result B, and A's evidence decays silently, then B's foundation has cracked and you didn't notice. haft makes that visible.
+This is the slide where the audience should feel 'yes, this is my problem.' If you're getting nods, move on quickly. If you're getting blank stares, ask them to name a time they inherited someone else's code and couldn't tell why a specific choice was made.</a:t>
             </a:r>
             <a:endParaRPr lang="en-US" dirty="0"/>
           </a:p>
@@ -1865,7 +1871,11 @@
           <a:p>
             <a:r>
               <a:rPr lang="en-US" dirty="0"/>
-              <a:t/>
+              <a:t>My own workflow: /h-note maybe once a day — tolerances, hyperparameter sweeps, small solver tweaks. /h-reason for mid-weight calls where I'm not sure how deep to go and want Claude to suggest. Full /h-frame → /h-verify cycle maybe once a month, reserved for real architectural calls.
+The .haft/ directory is safe to commit — it's the decision graph in human-readable form. Git-diffable, reviewable, audit-compatible.
+If someone used Quint Codes (v5 or earlier): .quint/ and /q-* migrate automatically to .haft/ and /h-* on first haft init. No manual work needed.
+Honest caveat to mention: haft doesn't run your benchmarks for you. It doesn't verify your claims — you still have to do the work. What it does is make sure your decisions don't silently rot.
+Compatible tools list: name Cursor and Gemini CLI at least — shows it's not Claude-Code-locked. Full /h-* command table is in the cheatsheet; don't read it out loud.</a:t>
             </a:r>
             <a:endParaRPr lang="en-US" dirty="0"/>
           </a:p>
@@ -2217,7 +2227,7 @@
           <a:p>
             <a:r>
               <a:rPr lang="en-US" dirty="0"/>
-              <a:t>This is a good moment for a short break if you haven't had one — people can grab coffee while tools install. Common issue: Beads plugin needs uv installed first (the install.sh handles this, but if someone skipped it: curl -LsSf https://astral.sh/uv/install.sh | sh).</a:t>
+              <a:t/>
             </a:r>
             <a:endParaRPr lang="en-US" dirty="0"/>
           </a:p>
@@ -2305,7 +2315,7 @@
           <a:p>
             <a:r>
               <a:rPr lang="en-US" dirty="0"/>
-              <a:t/>
+              <a:t>This is a good moment for a short break if you haven't had one — people can grab coffee while tools install. Common issue: Beads plugin needs uv installed first (the install.sh handles this, but if someone skipped it: curl -LsSf https://astral.sh/uv/install.sh | sh).</a:t>
             </a:r>
             <a:endParaRPr lang="en-US" dirty="0"/>
           </a:p>
@@ -2393,11 +2403,7 @@
           <a:p>
             <a:r>
               <a:rPr lang="en-US" dirty="0"/>
-              <a:t>Research references:
-- Kim (2026): 'From Algorithm Aversion to AI Dependence' — framework of Division of Cognitive Labor + Metacognitive Oversight
-- Psychology Today (2026): 'Adults Lose Skills to AI. Children Never Build Them.'
-- MDPI (2025): 'Cognitive Atrophy Paradox of AI–Human Interaction'
-Discussion prompt for audience: When did you last solve a problem without reaching for an AI tool first?</a:t>
+              <a:t/>
             </a:r>
             <a:endParaRPr lang="en-US" dirty="0"/>
           </a:p>
@@ -2573,11 +2579,11 @@
           <a:p>
             <a:r>
               <a:rPr lang="en-US" dirty="0"/>
-              <a:t>Sources:
-- Amodei at Davos (Jan 2026): cnbc.com/2026/01/27/dario-amodei-warns-ai-cause-unusually-painful-disruption-jobs.html
-- 'Machines of Loving Grace' essay: darioamodei.com/essay/machines-of-loving-grace
-- David Deutsch pencil quote via Ivan Zakutnii (haft developer)
-Discussion prompt: Do you agree with the 50% prediction? What does it mean for your field specifically?</a:t>
+              <a:t>Research references:
+- Kim (2026): 'From Algorithm Aversion to AI Dependence' — framework of Division of Cognitive Labor + Metacognitive Oversight
+- Psychology Today (2026): 'Adults Lose Skills to AI. Children Never Build Them.'
+- MDPI (2025): 'Cognitive Atrophy Paradox of AI–Human Interaction'
+Discussion prompt for audience: When did you last solve a problem without reaching for an AI tool first?</a:t>
             </a:r>
             <a:endParaRPr lang="en-US" dirty="0"/>
           </a:p>
@@ -2665,7 +2671,11 @@
           <a:p>
             <a:r>
               <a:rPr lang="en-US" dirty="0"/>
-              <a:t/>
+              <a:t>Sources:
+- Amodei at Davos (Jan 2026): cnbc.com/2026/01/27/dario-amodei-warns-ai-cause-unusually-painful-disruption-jobs.html
+- 'Machines of Loving Grace' essay: darioamodei.com/essay/machines-of-loving-grace
+- David Deutsch pencil quote via Ivan Zakutnii (haft developer)
+Discussion prompt: Do you agree with the 50% prediction? What does it mean for your field specifically?</a:t>
             </a:r>
             <a:endParaRPr lang="en-US" dirty="0"/>
           </a:p>
@@ -2753,16 +2763,7 @@
           <a:p>
             <a:r>
               <a:rPr lang="en-US" dirty="0"/>
-              <a:t>Ivan Zakutnii (haft developer) on the complementarity:
-'If you have deskilling gates, something that forces you to stop and S2-think about the problem — do it before the /h-frame. Then put everything you thought and wrote into the h-frame as a prompt. The FPF cycle will validate and structure your thinking rather than replace it.'
-haft commands in this context:
-- /h-frame: you drive the decision step by step (HITL approach)
-- /h-reason: Claude auto-selects depth — might just think, or run the full cycle
-- /h-note: quick micro-decision capture for smaller calls
-Per-project config example (.anti-deskilling/config.yaml):
-hitl: [FE formulation, solver debugging, MPI patterns]
-hotl: [CMake config, test scaffolding, code review]
-hootl: [formatting, boilerplate, doc scaffolding]</a:t>
+              <a:t/>
             </a:r>
             <a:endParaRPr lang="en-US" dirty="0"/>
           </a:p>
@@ -2850,9 +2851,16 @@
           <a:p>
             <a:r>
               <a:rPr lang="en-US" dirty="0"/>
-              <a:t>Description optimization: the skill creator can also auto-optimize a skill's trigger description. It generates 20 test queries (10 should-trigger, 10 should-not), then iterates up to 5 times to maximize triggering accuracy.
-Repo: github.com/anthropics/skills
-Paper: arxiv.org/abs/2602.12670 (SkillsBench)</a:t>
+              <a:t>Ivan Zakutnii (haft developer) on the complementarity:
+'If you have deskilling gates, something that forces you to stop and S2-think about the problem — do it before the /h-frame. Then put everything you thought and wrote into the h-frame as a prompt. The FPF cycle will validate and structure your thinking rather than replace it.'
+haft commands in this context:
+- /h-frame: you drive the decision step by step (HITL approach)
+- /h-reason: Claude auto-selects depth — might just think, or run the full cycle
+- /h-note: quick micro-decision capture for smaller calls
+Per-project config example (.anti-deskilling/config.yaml):
+hitl: [FE formulation, solver debugging, MPI patterns]
+hotl: [CMake config, test scaffolding, code review]
+hootl: [formatting, boilerplate, doc scaffolding]</a:t>
             </a:r>
             <a:endParaRPr lang="en-US" dirty="0"/>
           </a:p>
@@ -2940,6 +2948,96 @@
           <a:p>
             <a:r>
               <a:rPr lang="en-US" dirty="0"/>
+              <a:t>Description optimization: the skill creator can also auto-optimize a skill's trigger description. It generates 20 test queries (10 should-trigger, 10 should-not), then iterates up to 5 times to maximize triggering accuracy.
+Repo: github.com/anthropics/skills
+Paper: arxiv.org/abs/2602.12670 (SkillsBench)</a:t>
+            </a:r>
+            <a:endParaRPr lang="en-US" dirty="0"/>
+          </a:p>
+        </p:txBody>
+      </p:sp>
+      <p:sp>
+        <p:nvSpPr>
+          <p:cNvPr id="4" name="Slide Number Placeholder 3"/>
+          <p:cNvSpPr>
+            <a:spLocks noGrp="1"/>
+          </p:cNvSpPr>
+          <p:nvPr>
+            <p:ph type="sldNum" sz="quarter" idx="10"/>
+          </p:nvPr>
+        </p:nvSpPr>
+        <p:spPr/>
+        <p:txBody>
+          <a:bodyPr/>
+          <a:lstStyle/>
+          <a:p>
+            <a:fld id="{F7021451-1387-4CA6-816F-3879F97B5CBC}" type="slidenum">
+              <a:rPr lang="en-US"/>
+              <a:t>34</a:t>
+            </a:fld>
+            <a:endParaRPr lang="en-US"/>
+          </a:p>
+        </p:txBody>
+      </p:sp>
+    </p:spTree>
+    <p:extLst>
+      <p:ext uri="{BB962C8B-B14F-4D97-AF65-F5344CB8AC3E}">
+        <p14:creationId xmlns:p14="http://schemas.microsoft.com/office/powerpoint/2010/main" val="1024086991"/>
+      </p:ext>
+    </p:extLst>
+  </p:cSld>
+  <p:clrMapOvr>
+    <a:masterClrMapping/>
+  </p:clrMapOvr>
+</p:notes>
+</file>
+
+<file path=ppt/notesSlides/notesSlide35.xml><?xml version="1.0" encoding="utf-8"?>
+<p:notes xmlns:a="http://schemas.openxmlformats.org/drawingml/2006/main" xmlns:r="http://schemas.openxmlformats.org/officeDocument/2006/relationships" xmlns:p="http://schemas.openxmlformats.org/presentationml/2006/main">
+  <p:cSld>
+    <p:spTree>
+      <p:nvGrpSpPr>
+        <p:cNvPr id="1" name=""/>
+        <p:cNvGrpSpPr/>
+        <p:nvPr/>
+      </p:nvGrpSpPr>
+      <p:grpSpPr>
+        <a:xfrm>
+          <a:off x="0" y="0"/>
+          <a:ext cx="0" cy="0"/>
+          <a:chOff x="0" y="0"/>
+          <a:chExt cx="0" cy="0"/>
+        </a:xfrm>
+      </p:grpSpPr>
+      <p:sp>
+        <p:nvSpPr>
+          <p:cNvPr id="2" name="Slide Image Placeholder 1"/>
+          <p:cNvSpPr>
+            <a:spLocks noGrp="1" noRot="1" noChangeAspect="1"/>
+          </p:cNvSpPr>
+          <p:nvPr>
+            <p:ph type="sldImg"/>
+          </p:nvPr>
+        </p:nvSpPr>
+        <p:spPr/>
+      </p:sp>
+      <p:sp>
+        <p:nvSpPr>
+          <p:cNvPr id="3" name="Notes Placeholder 2"/>
+          <p:cNvSpPr>
+            <a:spLocks noGrp="1"/>
+          </p:cNvSpPr>
+          <p:nvPr>
+            <p:ph type="body" idx="1"/>
+          </p:nvPr>
+        </p:nvSpPr>
+        <p:spPr/>
+        <p:txBody>
+          <a:bodyPr/>
+          <a:lstStyle/>
+          <a:p>
+            <a:r>
+              <a:rPr lang="en-US" dirty="0"/>
               <a:t>Ollama integration: You can run Claude Code against local open-source models via Ollama. It provides an Anthropic-compatible API.
 Quick start: ollama launch claude
 Or with a specific model: ollama launch claude --model kimi-k2.5:cloud
@@ -2974,7 +3072,7 @@
           <a:p>
             <a:fld id="{F7021451-1387-4CA6-816F-3879F97B5CBC}" type="slidenum">
               <a:rPr lang="en-US"/>
-              <a:t>34</a:t>
+              <a:t>35</a:t>
             </a:fld>
             <a:endParaRPr lang="en-US"/>
           </a:p>
@@ -3932,33 +4030,48 @@
           </a:p>
         </p:txBody>
       </p:sp>
-      <p:pic>
-        <p:nvPicPr>
-          <p:cNvPr id="4" name="Image 0" descr="/sessions/gracious-blissful-pasteur/mnt/claude_code_presentation/numericor.png">    </p:cNvPr>
-          <p:cNvPicPr>
-            <a:picLocks noChangeAspect="1"/>
-          </p:cNvPicPr>
-          <p:nvPr/>
-        </p:nvPicPr>
-        <p:blipFill>
-          <a:blip r:embed="rId1"/>
-          <a:stretch>
-            <a:fillRect/>
-          </a:stretch>
-        </p:blipFill>
-        <p:spPr>
-          <a:xfrm>
-            <a:off x="914400" y="6419088"/>
-            <a:ext cx="1371600" cy="214884"/>
-          </a:xfrm>
-          <a:prstGeom prst="rect">
-            <a:avLst/>
-          </a:prstGeom>
-        </p:spPr>
-      </p:pic>
-      <p:sp>
-        <p:nvSpPr>
-          <p:cNvPr id="5" name="Text 2"/>
+      <p:sp>
+        <p:nvSpPr>
+          <p:cNvPr id="4" name="Text 2"/>
+          <p:cNvSpPr/>
+          <p:nvPr/>
+        </p:nvSpPr>
+        <p:spPr>
+          <a:xfrm>
+            <a:off x="914400" y="6400800"/>
+            <a:ext cx="1645920" cy="365760"/>
+          </a:xfrm>
+          <a:prstGeom prst="rect">
+            <a:avLst/>
+          </a:prstGeom>
+          <a:noFill/>
+          <a:ln/>
+        </p:spPr>
+        <p:txBody>
+          <a:bodyPr wrap="square" rtlCol="0" anchor="ctr"/>
+          <a:lstStyle/>
+          <a:p>
+            <a:pPr algn="l" indent="0" marL="0">
+              <a:buNone/>
+            </a:pPr>
+            <a:r>
+              <a:rPr lang="en-US" sz="1100" dirty="0">
+                <a:solidFill>
+                  <a:srgbClr val="888888"/>
+                </a:solidFill>
+                <a:latin typeface="Inter" pitchFamily="34" charset="0"/>
+                <a:ea typeface="Inter" pitchFamily="34" charset="-122"/>
+                <a:cs typeface="Inter" pitchFamily="34" charset="-120"/>
+              </a:rPr>
+              <a:t>NumeriCor GmbH</a:t>
+            </a:r>
+            <a:endParaRPr lang="en-US" sz="1100" dirty="0"/>
+          </a:p>
+        </p:txBody>
+      </p:sp>
+      <p:sp>
+        <p:nvSpPr>
+          <p:cNvPr id="5" name="Text 3"/>
           <p:cNvSpPr/>
           <p:nvPr/>
         </p:nvSpPr>
@@ -4439,33 +4552,48 @@
           </a:p>
         </p:txBody>
       </p:sp>
-      <p:pic>
-        <p:nvPicPr>
-          <p:cNvPr id="6" name="Image 0" descr="/sessions/gracious-blissful-pasteur/mnt/claude_code_presentation/numericor.png">    </p:cNvPr>
-          <p:cNvPicPr>
-            <a:picLocks noChangeAspect="1"/>
-          </p:cNvPicPr>
-          <p:nvPr/>
-        </p:nvPicPr>
-        <p:blipFill>
-          <a:blip r:embed="rId1"/>
-          <a:stretch>
-            <a:fillRect/>
-          </a:stretch>
-        </p:blipFill>
-        <p:spPr>
-          <a:xfrm>
-            <a:off x="914400" y="6419088"/>
-            <a:ext cx="1371600" cy="214884"/>
-          </a:xfrm>
-          <a:prstGeom prst="rect">
-            <a:avLst/>
-          </a:prstGeom>
-        </p:spPr>
-      </p:pic>
-      <p:sp>
-        <p:nvSpPr>
-          <p:cNvPr id="7" name="Text 4"/>
+      <p:sp>
+        <p:nvSpPr>
+          <p:cNvPr id="6" name="Text 4"/>
+          <p:cNvSpPr/>
+          <p:nvPr/>
+        </p:nvSpPr>
+        <p:spPr>
+          <a:xfrm>
+            <a:off x="914400" y="6400800"/>
+            <a:ext cx="1645920" cy="365760"/>
+          </a:xfrm>
+          <a:prstGeom prst="rect">
+            <a:avLst/>
+          </a:prstGeom>
+          <a:noFill/>
+          <a:ln/>
+        </p:spPr>
+        <p:txBody>
+          <a:bodyPr wrap="square" rtlCol="0" anchor="ctr"/>
+          <a:lstStyle/>
+          <a:p>
+            <a:pPr algn="l" indent="0" marL="0">
+              <a:buNone/>
+            </a:pPr>
+            <a:r>
+              <a:rPr lang="en-US" sz="1100" dirty="0">
+                <a:solidFill>
+                  <a:srgbClr val="888888"/>
+                </a:solidFill>
+                <a:latin typeface="Inter" pitchFamily="34" charset="0"/>
+                <a:ea typeface="Inter" pitchFamily="34" charset="-122"/>
+                <a:cs typeface="Inter" pitchFamily="34" charset="-120"/>
+              </a:rPr>
+              <a:t>NumeriCor GmbH</a:t>
+            </a:r>
+            <a:endParaRPr lang="en-US" sz="1100" dirty="0"/>
+          </a:p>
+        </p:txBody>
+      </p:sp>
+      <p:sp>
+        <p:nvSpPr>
+          <p:cNvPr id="7" name="Text 5"/>
           <p:cNvSpPr/>
           <p:nvPr/>
         </p:nvSpPr>
@@ -5023,33 +5151,48 @@
           </a:p>
         </p:txBody>
       </p:sp>
-      <p:pic>
-        <p:nvPicPr>
-          <p:cNvPr id="6" name="Image 0" descr="/sessions/gracious-blissful-pasteur/mnt/claude_code_presentation/numericor.png">    </p:cNvPr>
-          <p:cNvPicPr>
-            <a:picLocks noChangeAspect="1"/>
-          </p:cNvPicPr>
-          <p:nvPr/>
-        </p:nvPicPr>
-        <p:blipFill>
-          <a:blip r:embed="rId1"/>
-          <a:stretch>
-            <a:fillRect/>
-          </a:stretch>
-        </p:blipFill>
-        <p:spPr>
-          <a:xfrm>
-            <a:off x="914400" y="6419088"/>
-            <a:ext cx="1371600" cy="214884"/>
-          </a:xfrm>
-          <a:prstGeom prst="rect">
-            <a:avLst/>
-          </a:prstGeom>
-        </p:spPr>
-      </p:pic>
-      <p:sp>
-        <p:nvSpPr>
-          <p:cNvPr id="7" name="Text 4"/>
+      <p:sp>
+        <p:nvSpPr>
+          <p:cNvPr id="6" name="Text 4"/>
+          <p:cNvSpPr/>
+          <p:nvPr/>
+        </p:nvSpPr>
+        <p:spPr>
+          <a:xfrm>
+            <a:off x="914400" y="6400800"/>
+            <a:ext cx="1645920" cy="365760"/>
+          </a:xfrm>
+          <a:prstGeom prst="rect">
+            <a:avLst/>
+          </a:prstGeom>
+          <a:noFill/>
+          <a:ln/>
+        </p:spPr>
+        <p:txBody>
+          <a:bodyPr wrap="square" rtlCol="0" anchor="ctr"/>
+          <a:lstStyle/>
+          <a:p>
+            <a:pPr algn="l" indent="0" marL="0">
+              <a:buNone/>
+            </a:pPr>
+            <a:r>
+              <a:rPr lang="en-US" sz="1100" dirty="0">
+                <a:solidFill>
+                  <a:srgbClr val="888888"/>
+                </a:solidFill>
+                <a:latin typeface="Inter" pitchFamily="34" charset="0"/>
+                <a:ea typeface="Inter" pitchFamily="34" charset="-122"/>
+                <a:cs typeface="Inter" pitchFamily="34" charset="-120"/>
+              </a:rPr>
+              <a:t>NumeriCor GmbH</a:t>
+            </a:r>
+            <a:endParaRPr lang="en-US" sz="1100" dirty="0"/>
+          </a:p>
+        </p:txBody>
+      </p:sp>
+      <p:sp>
+        <p:nvSpPr>
+          <p:cNvPr id="7" name="Text 5"/>
           <p:cNvSpPr/>
           <p:nvPr/>
         </p:nvSpPr>
@@ -5486,33 +5629,48 @@
           </a:p>
         </p:txBody>
       </p:sp>
-      <p:pic>
-        <p:nvPicPr>
-          <p:cNvPr id="6" name="Image 0" descr="/sessions/gracious-blissful-pasteur/mnt/claude_code_presentation/numericor.png">    </p:cNvPr>
-          <p:cNvPicPr>
-            <a:picLocks noChangeAspect="1"/>
-          </p:cNvPicPr>
-          <p:nvPr/>
-        </p:nvPicPr>
-        <p:blipFill>
-          <a:blip r:embed="rId1"/>
-          <a:stretch>
-            <a:fillRect/>
-          </a:stretch>
-        </p:blipFill>
-        <p:spPr>
-          <a:xfrm>
-            <a:off x="914400" y="6419088"/>
-            <a:ext cx="1371600" cy="214884"/>
-          </a:xfrm>
-          <a:prstGeom prst="rect">
-            <a:avLst/>
-          </a:prstGeom>
-        </p:spPr>
-      </p:pic>
-      <p:sp>
-        <p:nvSpPr>
-          <p:cNvPr id="7" name="Text 4"/>
+      <p:sp>
+        <p:nvSpPr>
+          <p:cNvPr id="6" name="Text 4"/>
+          <p:cNvSpPr/>
+          <p:nvPr/>
+        </p:nvSpPr>
+        <p:spPr>
+          <a:xfrm>
+            <a:off x="914400" y="6400800"/>
+            <a:ext cx="1645920" cy="365760"/>
+          </a:xfrm>
+          <a:prstGeom prst="rect">
+            <a:avLst/>
+          </a:prstGeom>
+          <a:noFill/>
+          <a:ln/>
+        </p:spPr>
+        <p:txBody>
+          <a:bodyPr wrap="square" rtlCol="0" anchor="ctr"/>
+          <a:lstStyle/>
+          <a:p>
+            <a:pPr algn="l" indent="0" marL="0">
+              <a:buNone/>
+            </a:pPr>
+            <a:r>
+              <a:rPr lang="en-US" sz="1100" dirty="0">
+                <a:solidFill>
+                  <a:srgbClr val="888888"/>
+                </a:solidFill>
+                <a:latin typeface="Inter" pitchFamily="34" charset="0"/>
+                <a:ea typeface="Inter" pitchFamily="34" charset="-122"/>
+                <a:cs typeface="Inter" pitchFamily="34" charset="-120"/>
+              </a:rPr>
+              <a:t>NumeriCor GmbH</a:t>
+            </a:r>
+            <a:endParaRPr lang="en-US" sz="1100" dirty="0"/>
+          </a:p>
+        </p:txBody>
+      </p:sp>
+      <p:sp>
+        <p:nvSpPr>
+          <p:cNvPr id="7" name="Text 5"/>
           <p:cNvSpPr/>
           <p:nvPr/>
         </p:nvSpPr>
@@ -5929,33 +6087,48 @@
           </a:p>
         </p:txBody>
       </p:sp>
-      <p:pic>
-        <p:nvPicPr>
-          <p:cNvPr id="6" name="Image 0" descr="/sessions/gracious-blissful-pasteur/mnt/claude_code_presentation/numericor.png">    </p:cNvPr>
-          <p:cNvPicPr>
-            <a:picLocks noChangeAspect="1"/>
-          </p:cNvPicPr>
-          <p:nvPr/>
-        </p:nvPicPr>
-        <p:blipFill>
-          <a:blip r:embed="rId1"/>
-          <a:stretch>
-            <a:fillRect/>
-          </a:stretch>
-        </p:blipFill>
-        <p:spPr>
-          <a:xfrm>
-            <a:off x="914400" y="6419088"/>
-            <a:ext cx="1371600" cy="214884"/>
-          </a:xfrm>
-          <a:prstGeom prst="rect">
-            <a:avLst/>
-          </a:prstGeom>
-        </p:spPr>
-      </p:pic>
-      <p:sp>
-        <p:nvSpPr>
-          <p:cNvPr id="7" name="Text 4"/>
+      <p:sp>
+        <p:nvSpPr>
+          <p:cNvPr id="6" name="Text 4"/>
+          <p:cNvSpPr/>
+          <p:nvPr/>
+        </p:nvSpPr>
+        <p:spPr>
+          <a:xfrm>
+            <a:off x="914400" y="6400800"/>
+            <a:ext cx="1645920" cy="365760"/>
+          </a:xfrm>
+          <a:prstGeom prst="rect">
+            <a:avLst/>
+          </a:prstGeom>
+          <a:noFill/>
+          <a:ln/>
+        </p:spPr>
+        <p:txBody>
+          <a:bodyPr wrap="square" rtlCol="0" anchor="ctr"/>
+          <a:lstStyle/>
+          <a:p>
+            <a:pPr algn="l" indent="0" marL="0">
+              <a:buNone/>
+            </a:pPr>
+            <a:r>
+              <a:rPr lang="en-US" sz="1100" dirty="0">
+                <a:solidFill>
+                  <a:srgbClr val="888888"/>
+                </a:solidFill>
+                <a:latin typeface="Inter" pitchFamily="34" charset="0"/>
+                <a:ea typeface="Inter" pitchFamily="34" charset="-122"/>
+                <a:cs typeface="Inter" pitchFamily="34" charset="-120"/>
+              </a:rPr>
+              <a:t>NumeriCor GmbH</a:t>
+            </a:r>
+            <a:endParaRPr lang="en-US" sz="1100" dirty="0"/>
+          </a:p>
+        </p:txBody>
+      </p:sp>
+      <p:sp>
+        <p:nvSpPr>
+          <p:cNvPr id="7" name="Text 5"/>
           <p:cNvSpPr/>
           <p:nvPr/>
         </p:nvSpPr>
@@ -6332,33 +6505,48 @@
           </a:p>
         </p:txBody>
       </p:sp>
-      <p:pic>
-        <p:nvPicPr>
-          <p:cNvPr id="6" name="Image 0" descr="/sessions/gracious-blissful-pasteur/mnt/claude_code_presentation/numericor.png">    </p:cNvPr>
-          <p:cNvPicPr>
-            <a:picLocks noChangeAspect="1"/>
-          </p:cNvPicPr>
-          <p:nvPr/>
-        </p:nvPicPr>
-        <p:blipFill>
-          <a:blip r:embed="rId1"/>
-          <a:stretch>
-            <a:fillRect/>
-          </a:stretch>
-        </p:blipFill>
-        <p:spPr>
-          <a:xfrm>
-            <a:off x="914400" y="6419088"/>
-            <a:ext cx="1371600" cy="214884"/>
-          </a:xfrm>
-          <a:prstGeom prst="rect">
-            <a:avLst/>
-          </a:prstGeom>
-        </p:spPr>
-      </p:pic>
-      <p:sp>
-        <p:nvSpPr>
-          <p:cNvPr id="7" name="Text 4"/>
+      <p:sp>
+        <p:nvSpPr>
+          <p:cNvPr id="6" name="Text 4"/>
+          <p:cNvSpPr/>
+          <p:nvPr/>
+        </p:nvSpPr>
+        <p:spPr>
+          <a:xfrm>
+            <a:off x="914400" y="6400800"/>
+            <a:ext cx="1645920" cy="365760"/>
+          </a:xfrm>
+          <a:prstGeom prst="rect">
+            <a:avLst/>
+          </a:prstGeom>
+          <a:noFill/>
+          <a:ln/>
+        </p:spPr>
+        <p:txBody>
+          <a:bodyPr wrap="square" rtlCol="0" anchor="ctr"/>
+          <a:lstStyle/>
+          <a:p>
+            <a:pPr algn="l" indent="0" marL="0">
+              <a:buNone/>
+            </a:pPr>
+            <a:r>
+              <a:rPr lang="en-US" sz="1100" dirty="0">
+                <a:solidFill>
+                  <a:srgbClr val="888888"/>
+                </a:solidFill>
+                <a:latin typeface="Inter" pitchFamily="34" charset="0"/>
+                <a:ea typeface="Inter" pitchFamily="34" charset="-122"/>
+                <a:cs typeface="Inter" pitchFamily="34" charset="-120"/>
+              </a:rPr>
+              <a:t>NumeriCor GmbH</a:t>
+            </a:r>
+            <a:endParaRPr lang="en-US" sz="1100" dirty="0"/>
+          </a:p>
+        </p:txBody>
+      </p:sp>
+      <p:sp>
+        <p:nvSpPr>
+          <p:cNvPr id="7" name="Text 5"/>
           <p:cNvSpPr/>
           <p:nvPr/>
         </p:nvSpPr>
@@ -6860,33 +7048,48 @@
           </a:p>
         </p:txBody>
       </p:sp>
-      <p:pic>
-        <p:nvPicPr>
-          <p:cNvPr id="6" name="Image 0" descr="/sessions/gracious-blissful-pasteur/mnt/claude_code_presentation/numericor.png">    </p:cNvPr>
-          <p:cNvPicPr>
-            <a:picLocks noChangeAspect="1"/>
-          </p:cNvPicPr>
-          <p:nvPr/>
-        </p:nvPicPr>
-        <p:blipFill>
-          <a:blip r:embed="rId1"/>
-          <a:stretch>
-            <a:fillRect/>
-          </a:stretch>
-        </p:blipFill>
-        <p:spPr>
-          <a:xfrm>
-            <a:off x="914400" y="6419088"/>
-            <a:ext cx="1371600" cy="214884"/>
-          </a:xfrm>
-          <a:prstGeom prst="rect">
-            <a:avLst/>
-          </a:prstGeom>
-        </p:spPr>
-      </p:pic>
-      <p:sp>
-        <p:nvSpPr>
-          <p:cNvPr id="7" name="Text 4"/>
+      <p:sp>
+        <p:nvSpPr>
+          <p:cNvPr id="6" name="Text 4"/>
+          <p:cNvSpPr/>
+          <p:nvPr/>
+        </p:nvSpPr>
+        <p:spPr>
+          <a:xfrm>
+            <a:off x="914400" y="6400800"/>
+            <a:ext cx="1645920" cy="365760"/>
+          </a:xfrm>
+          <a:prstGeom prst="rect">
+            <a:avLst/>
+          </a:prstGeom>
+          <a:noFill/>
+          <a:ln/>
+        </p:spPr>
+        <p:txBody>
+          <a:bodyPr wrap="square" rtlCol="0" anchor="ctr"/>
+          <a:lstStyle/>
+          <a:p>
+            <a:pPr algn="l" indent="0" marL="0">
+              <a:buNone/>
+            </a:pPr>
+            <a:r>
+              <a:rPr lang="en-US" sz="1100" dirty="0">
+                <a:solidFill>
+                  <a:srgbClr val="888888"/>
+                </a:solidFill>
+                <a:latin typeface="Inter" pitchFamily="34" charset="0"/>
+                <a:ea typeface="Inter" pitchFamily="34" charset="-122"/>
+                <a:cs typeface="Inter" pitchFamily="34" charset="-120"/>
+              </a:rPr>
+              <a:t>NumeriCor GmbH</a:t>
+            </a:r>
+            <a:endParaRPr lang="en-US" sz="1100" dirty="0"/>
+          </a:p>
+        </p:txBody>
+      </p:sp>
+      <p:sp>
+        <p:nvSpPr>
+          <p:cNvPr id="7" name="Text 5"/>
           <p:cNvSpPr/>
           <p:nvPr/>
         </p:nvSpPr>
@@ -7418,33 +7621,48 @@
           </a:p>
         </p:txBody>
       </p:sp>
-      <p:pic>
-        <p:nvPicPr>
-          <p:cNvPr id="6" name="Image 0" descr="/sessions/gracious-blissful-pasteur/mnt/claude_code_presentation/numericor.png">    </p:cNvPr>
-          <p:cNvPicPr>
-            <a:picLocks noChangeAspect="1"/>
-          </p:cNvPicPr>
-          <p:nvPr/>
-        </p:nvPicPr>
-        <p:blipFill>
-          <a:blip r:embed="rId1"/>
-          <a:stretch>
-            <a:fillRect/>
-          </a:stretch>
-        </p:blipFill>
-        <p:spPr>
-          <a:xfrm>
-            <a:off x="914400" y="6419088"/>
-            <a:ext cx="1371600" cy="214884"/>
-          </a:xfrm>
-          <a:prstGeom prst="rect">
-            <a:avLst/>
-          </a:prstGeom>
-        </p:spPr>
-      </p:pic>
-      <p:sp>
-        <p:nvSpPr>
-          <p:cNvPr id="7" name="Text 4"/>
+      <p:sp>
+        <p:nvSpPr>
+          <p:cNvPr id="6" name="Text 4"/>
+          <p:cNvSpPr/>
+          <p:nvPr/>
+        </p:nvSpPr>
+        <p:spPr>
+          <a:xfrm>
+            <a:off x="914400" y="6400800"/>
+            <a:ext cx="1645920" cy="365760"/>
+          </a:xfrm>
+          <a:prstGeom prst="rect">
+            <a:avLst/>
+          </a:prstGeom>
+          <a:noFill/>
+          <a:ln/>
+        </p:spPr>
+        <p:txBody>
+          <a:bodyPr wrap="square" rtlCol="0" anchor="ctr"/>
+          <a:lstStyle/>
+          <a:p>
+            <a:pPr algn="l" indent="0" marL="0">
+              <a:buNone/>
+            </a:pPr>
+            <a:r>
+              <a:rPr lang="en-US" sz="1100" dirty="0">
+                <a:solidFill>
+                  <a:srgbClr val="888888"/>
+                </a:solidFill>
+                <a:latin typeface="Inter" pitchFamily="34" charset="0"/>
+                <a:ea typeface="Inter" pitchFamily="34" charset="-122"/>
+                <a:cs typeface="Inter" pitchFamily="34" charset="-120"/>
+              </a:rPr>
+              <a:t>NumeriCor GmbH</a:t>
+            </a:r>
+            <a:endParaRPr lang="en-US" sz="1100" dirty="0"/>
+          </a:p>
+        </p:txBody>
+      </p:sp>
+      <p:sp>
+        <p:nvSpPr>
+          <p:cNvPr id="7" name="Text 5"/>
           <p:cNvSpPr/>
           <p:nvPr/>
         </p:nvSpPr>
@@ -7881,33 +8099,48 @@
           </a:p>
         </p:txBody>
       </p:sp>
-      <p:pic>
-        <p:nvPicPr>
-          <p:cNvPr id="6" name="Image 0" descr="/sessions/gracious-blissful-pasteur/mnt/claude_code_presentation/numericor.png">    </p:cNvPr>
-          <p:cNvPicPr>
-            <a:picLocks noChangeAspect="1"/>
-          </p:cNvPicPr>
-          <p:nvPr/>
-        </p:nvPicPr>
-        <p:blipFill>
-          <a:blip r:embed="rId1"/>
-          <a:stretch>
-            <a:fillRect/>
-          </a:stretch>
-        </p:blipFill>
-        <p:spPr>
-          <a:xfrm>
-            <a:off x="914400" y="6419088"/>
-            <a:ext cx="1371600" cy="214884"/>
-          </a:xfrm>
-          <a:prstGeom prst="rect">
-            <a:avLst/>
-          </a:prstGeom>
-        </p:spPr>
-      </p:pic>
-      <p:sp>
-        <p:nvSpPr>
-          <p:cNvPr id="7" name="Text 4"/>
+      <p:sp>
+        <p:nvSpPr>
+          <p:cNvPr id="6" name="Text 4"/>
+          <p:cNvSpPr/>
+          <p:nvPr/>
+        </p:nvSpPr>
+        <p:spPr>
+          <a:xfrm>
+            <a:off x="914400" y="6400800"/>
+            <a:ext cx="1645920" cy="365760"/>
+          </a:xfrm>
+          <a:prstGeom prst="rect">
+            <a:avLst/>
+          </a:prstGeom>
+          <a:noFill/>
+          <a:ln/>
+        </p:spPr>
+        <p:txBody>
+          <a:bodyPr wrap="square" rtlCol="0" anchor="ctr"/>
+          <a:lstStyle/>
+          <a:p>
+            <a:pPr algn="l" indent="0" marL="0">
+              <a:buNone/>
+            </a:pPr>
+            <a:r>
+              <a:rPr lang="en-US" sz="1100" dirty="0">
+                <a:solidFill>
+                  <a:srgbClr val="888888"/>
+                </a:solidFill>
+                <a:latin typeface="Inter" pitchFamily="34" charset="0"/>
+                <a:ea typeface="Inter" pitchFamily="34" charset="-122"/>
+                <a:cs typeface="Inter" pitchFamily="34" charset="-120"/>
+              </a:rPr>
+              <a:t>NumeriCor GmbH</a:t>
+            </a:r>
+            <a:endParaRPr lang="en-US" sz="1100" dirty="0"/>
+          </a:p>
+        </p:txBody>
+      </p:sp>
+      <p:sp>
+        <p:nvSpPr>
+          <p:cNvPr id="7" name="Text 5"/>
           <p:cNvSpPr/>
           <p:nvPr/>
         </p:nvSpPr>
@@ -8465,33 +8698,48 @@
           </a:p>
         </p:txBody>
       </p:sp>
-      <p:pic>
-        <p:nvPicPr>
-          <p:cNvPr id="6" name="Image 0" descr="/sessions/gracious-blissful-pasteur/mnt/claude_code_presentation/numericor.png">    </p:cNvPr>
-          <p:cNvPicPr>
-            <a:picLocks noChangeAspect="1"/>
-          </p:cNvPicPr>
-          <p:nvPr/>
-        </p:nvPicPr>
-        <p:blipFill>
-          <a:blip r:embed="rId1"/>
-          <a:stretch>
-            <a:fillRect/>
-          </a:stretch>
-        </p:blipFill>
-        <p:spPr>
-          <a:xfrm>
-            <a:off x="914400" y="6419088"/>
-            <a:ext cx="1371600" cy="214884"/>
-          </a:xfrm>
-          <a:prstGeom prst="rect">
-            <a:avLst/>
-          </a:prstGeom>
-        </p:spPr>
-      </p:pic>
-      <p:sp>
-        <p:nvSpPr>
-          <p:cNvPr id="7" name="Text 4"/>
+      <p:sp>
+        <p:nvSpPr>
+          <p:cNvPr id="6" name="Text 4"/>
+          <p:cNvSpPr/>
+          <p:nvPr/>
+        </p:nvSpPr>
+        <p:spPr>
+          <a:xfrm>
+            <a:off x="914400" y="6400800"/>
+            <a:ext cx="1645920" cy="365760"/>
+          </a:xfrm>
+          <a:prstGeom prst="rect">
+            <a:avLst/>
+          </a:prstGeom>
+          <a:noFill/>
+          <a:ln/>
+        </p:spPr>
+        <p:txBody>
+          <a:bodyPr wrap="square" rtlCol="0" anchor="ctr"/>
+          <a:lstStyle/>
+          <a:p>
+            <a:pPr algn="l" indent="0" marL="0">
+              <a:buNone/>
+            </a:pPr>
+            <a:r>
+              <a:rPr lang="en-US" sz="1100" dirty="0">
+                <a:solidFill>
+                  <a:srgbClr val="888888"/>
+                </a:solidFill>
+                <a:latin typeface="Inter" pitchFamily="34" charset="0"/>
+                <a:ea typeface="Inter" pitchFamily="34" charset="-122"/>
+                <a:cs typeface="Inter" pitchFamily="34" charset="-120"/>
+              </a:rPr>
+              <a:t>NumeriCor GmbH</a:t>
+            </a:r>
+            <a:endParaRPr lang="en-US" sz="1100" dirty="0"/>
+          </a:p>
+        </p:txBody>
+      </p:sp>
+      <p:sp>
+        <p:nvSpPr>
+          <p:cNvPr id="7" name="Text 5"/>
           <p:cNvSpPr/>
           <p:nvPr/>
         </p:nvSpPr>
@@ -9053,33 +9301,48 @@
           </a:p>
         </p:txBody>
       </p:sp>
-      <p:pic>
-        <p:nvPicPr>
-          <p:cNvPr id="5" name="Image 0" descr="/sessions/gracious-blissful-pasteur/mnt/claude_code_presentation/numericor.png">    </p:cNvPr>
-          <p:cNvPicPr>
-            <a:picLocks noChangeAspect="1"/>
-          </p:cNvPicPr>
-          <p:nvPr/>
-        </p:nvPicPr>
-        <p:blipFill>
-          <a:blip r:embed="rId1"/>
-          <a:stretch>
-            <a:fillRect/>
-          </a:stretch>
-        </p:blipFill>
-        <p:spPr>
-          <a:xfrm>
-            <a:off x="914400" y="6419088"/>
-            <a:ext cx="1371600" cy="214884"/>
-          </a:xfrm>
-          <a:prstGeom prst="rect">
-            <a:avLst/>
-          </a:prstGeom>
-        </p:spPr>
-      </p:pic>
-      <p:sp>
-        <p:nvSpPr>
-          <p:cNvPr id="6" name="Text 3"/>
+      <p:sp>
+        <p:nvSpPr>
+          <p:cNvPr id="5" name="Text 3"/>
+          <p:cNvSpPr/>
+          <p:nvPr/>
+        </p:nvSpPr>
+        <p:spPr>
+          <a:xfrm>
+            <a:off x="914400" y="6400800"/>
+            <a:ext cx="1645920" cy="365760"/>
+          </a:xfrm>
+          <a:prstGeom prst="rect">
+            <a:avLst/>
+          </a:prstGeom>
+          <a:noFill/>
+          <a:ln/>
+        </p:spPr>
+        <p:txBody>
+          <a:bodyPr wrap="square" rtlCol="0" anchor="ctr"/>
+          <a:lstStyle/>
+          <a:p>
+            <a:pPr algn="l" indent="0" marL="0">
+              <a:buNone/>
+            </a:pPr>
+            <a:r>
+              <a:rPr lang="en-US" sz="1100" dirty="0">
+                <a:solidFill>
+                  <a:srgbClr val="888888"/>
+                </a:solidFill>
+                <a:latin typeface="Inter" pitchFamily="34" charset="0"/>
+                <a:ea typeface="Inter" pitchFamily="34" charset="-122"/>
+                <a:cs typeface="Inter" pitchFamily="34" charset="-120"/>
+              </a:rPr>
+              <a:t>NumeriCor GmbH</a:t>
+            </a:r>
+            <a:endParaRPr lang="en-US" sz="1100" dirty="0"/>
+          </a:p>
+        </p:txBody>
+      </p:sp>
+      <p:sp>
+        <p:nvSpPr>
+          <p:cNvPr id="6" name="Text 4"/>
           <p:cNvSpPr/>
           <p:nvPr/>
         </p:nvSpPr>
@@ -9181,7 +9444,7 @@
                 <a:ea typeface="Inter" pitchFamily="34" charset="-122"/>
                 <a:cs typeface="Inter" pitchFamily="34" charset="-120"/>
               </a:rPr>
-              <a:t>Why Decision Engineering?</a:t>
+              <a:t>When Decisions Go Stale</a:t>
             </a:r>
             <a:endParaRPr lang="en-US" sz="3000" dirty="0"/>
           </a:p>
@@ -9279,6 +9542,26 @@
               <a:buNone/>
             </a:pPr>
             <a:r>
+              <a:rPr lang="en-US" sz="1700" b="1" dirty="0">
+                <a:solidFill>
+                  <a:srgbClr val="000000"/>
+                </a:solidFill>
+                <a:latin typeface="Inter" pitchFamily="34" charset="0"/>
+                <a:ea typeface="Inter" pitchFamily="34" charset="-122"/>
+                <a:cs typeface="Inter" pitchFamily="34" charset="-120"/>
+              </a:rPr>
+              <a:t>Cardiac electromechanics, 2022</a:t>
+            </a:r>
+            <a:endParaRPr lang="en-US" sz="1600" dirty="0"/>
+          </a:p>
+          <a:p>
+            <a:pPr indent="0" marL="0">
+              <a:spcAft>
+                <a:spcPts val="400"/>
+              </a:spcAft>
+              <a:buNone/>
+            </a:pPr>
+            <a:r>
               <a:rPr lang="en-US" sz="1600" dirty="0">
                 <a:solidFill>
                   <a:srgbClr val="000000"/>
@@ -9287,7 +9570,7 @@
                 <a:ea typeface="Inter" pitchFamily="34" charset="-122"/>
                 <a:cs typeface="Inter" pitchFamily="34" charset="-120"/>
               </a:rPr>
-              <a:t>AI assistants generate code fast, but the reasoning behind decisions gets lost. When you revisit a codebase months later, you can’t tell why an approach was chosen.</a:t>
+              <a:t>You pick a tissue constitutive model and a time-stepping scheme. Three papers read, two benchmarks run, one ADR written. By 2024 a better-conditioned scheme is out and two of the original papers have been superseded. Your pipeline still runs the 2022 choice.</a:t>
             </a:r>
             <a:endParaRPr lang="en-US" sz="1600" dirty="0"/>
           </a:p>
@@ -9327,17 +9610,16 @@
                 <a:ea typeface="Inter" pitchFamily="34" charset="-122"/>
                 <a:cs typeface="Inter" pitchFamily="34" charset="-120"/>
               </a:rPr>
-              <a:t>haft provides</a:t>
-            </a:r>
-            <a:endParaRPr lang="en-US" sz="1600" dirty="0"/>
-          </a:p>
-          <a:p>
-            <a:pPr marL="342900" indent="-342900">
-              <a:spcAft>
-                <a:spcPts val="400"/>
-              </a:spcAft>
-              <a:buSzPct val="100000"/>
-              <a:buChar char="→"/>
+              <a:t>AI segmentation, 2022</a:t>
+            </a:r>
+            <a:endParaRPr lang="en-US" sz="1600" dirty="0"/>
+          </a:p>
+          <a:p>
+            <a:pPr indent="0" marL="0">
+              <a:spcAft>
+                <a:spcPts val="400"/>
+              </a:spcAft>
+              <a:buNone/>
             </a:pPr>
             <a:r>
               <a:rPr lang="en-US" sz="1600" dirty="0">
@@ -9348,17 +9630,56 @@
                 <a:ea typeface="Inter" pitchFamily="34" charset="-122"/>
                 <a:cs typeface="Inter" pitchFamily="34" charset="-120"/>
               </a:rPr>
-              <a:t>Structured decision records with traceability and lifecycle awareness</a:t>
-            </a:r>
-            <a:endParaRPr lang="en-US" sz="1600" dirty="0"/>
-          </a:p>
-          <a:p>
-            <a:pPr marL="342900" indent="-342900">
-              <a:spcAft>
-                <a:spcPts val="400"/>
-              </a:spcAft>
-              <a:buSzPct val="100000"/>
-              <a:buChar char="→"/>
+              <a:t>You pick a U-Net variant for cardiac MRI, benchmark it, document the rationale. By 2024 transformer- and foundation-model-based segmenters outperform it. Every downstream result — registration, volumetry, classifier training — still rests on the 2022 segmentations.</a:t>
+            </a:r>
+            <a:endParaRPr lang="en-US" sz="1600" dirty="0"/>
+          </a:p>
+          <a:p>
+            <a:pPr indent="0" marL="0">
+              <a:spcAft>
+                <a:spcPts val="400"/>
+              </a:spcAft>
+              <a:buNone/>
+            </a:pPr>
+            <a:r>
+              <a:rPr lang="en-US" sz="700" dirty="0">
+                <a:solidFill>
+                  <a:srgbClr val="000000"/>
+                </a:solidFill>
+                <a:latin typeface="Inter" pitchFamily="34" charset="0"/>
+                <a:ea typeface="Inter" pitchFamily="34" charset="-122"/>
+                <a:cs typeface="Inter" pitchFamily="34" charset="-120"/>
+              </a:rPr>
+              <a:t> </a:t>
+            </a:r>
+            <a:endParaRPr lang="en-US" sz="1600" dirty="0"/>
+          </a:p>
+          <a:p>
+            <a:pPr indent="0" marL="0">
+              <a:spcAft>
+                <a:spcPts val="400"/>
+              </a:spcAft>
+              <a:buNone/>
+            </a:pPr>
+            <a:r>
+              <a:rPr lang="en-US" sz="1700" b="1" dirty="0">
+                <a:solidFill>
+                  <a:srgbClr val="000000"/>
+                </a:solidFill>
+                <a:latin typeface="Inter" pitchFamily="34" charset="0"/>
+                <a:ea typeface="Inter" pitchFamily="34" charset="-122"/>
+                <a:cs typeface="Inter" pitchFamily="34" charset="-120"/>
+              </a:rPr>
+              <a:t>In both cases</a:t>
+            </a:r>
+            <a:endParaRPr lang="en-US" sz="1600" dirty="0"/>
+          </a:p>
+          <a:p>
+            <a:pPr indent="0" marL="0">
+              <a:spcAft>
+                <a:spcPts val="400"/>
+              </a:spcAft>
+              <a:buNone/>
             </a:pPr>
             <a:r>
               <a:rPr lang="en-US" sz="1600" dirty="0">
@@ -9369,162 +9690,54 @@
                 <a:ea typeface="Inter" pitchFamily="34" charset="-122"/>
                 <a:cs typeface="Inter" pitchFamily="34" charset="-120"/>
               </a:rPr>
-              <a:t>Pareto-front analysis to compare genuinely different solution variants</a:t>
-            </a:r>
-            <a:endParaRPr lang="en-US" sz="1600" dirty="0"/>
-          </a:p>
-          <a:p>
-            <a:pPr marL="342900" indent="-342900">
-              <a:spcAft>
-                <a:spcPts val="400"/>
-              </a:spcAft>
-              <a:buSzPct val="100000"/>
-              <a:buChar char="→"/>
-            </a:pPr>
-            <a:r>
-              <a:rPr lang="en-US" sz="1600" dirty="0">
-                <a:solidFill>
-                  <a:srgbClr val="000000"/>
-                </a:solidFill>
-                <a:latin typeface="Inter" pitchFamily="34" charset="0"/>
-                <a:ea typeface="Inter" pitchFamily="34" charset="-122"/>
-                <a:cs typeface="Inter" pitchFamily="34" charset="-120"/>
-              </a:rPr>
-              <a:t>Trust scores (R_eff) that degrade over time, surfacing stale decisions</a:t>
-            </a:r>
-            <a:endParaRPr lang="en-US" sz="1600" dirty="0"/>
-          </a:p>
-          <a:p>
-            <a:pPr marL="342900" indent="-342900">
-              <a:spcAft>
-                <a:spcPts val="400"/>
-              </a:spcAft>
-              <a:buSzPct val="100000"/>
-              <a:buChar char="→"/>
-            </a:pPr>
-            <a:r>
-              <a:rPr lang="en-US" sz="1600" dirty="0">
-                <a:solidFill>
-                  <a:srgbClr val="000000"/>
-                </a:solidFill>
-                <a:latin typeface="Inter" pitchFamily="34" charset="0"/>
-                <a:ea typeface="Inter" pitchFamily="34" charset="-122"/>
-                <a:cs typeface="Inter" pitchFamily="34" charset="-120"/>
-              </a:rPr>
-              <a:t>Codebase awareness with module detection and dependency graphs</a:t>
-            </a:r>
-            <a:endParaRPr lang="en-US" sz="1600" dirty="0"/>
-          </a:p>
-          <a:p>
-            <a:pPr marL="342900" indent="-342900">
-              <a:spcAft>
-                <a:spcPts val="400"/>
-              </a:spcAft>
-              <a:buSzPct val="100000"/>
-              <a:buChar char="→"/>
-            </a:pPr>
-            <a:r>
-              <a:rPr lang="en-US" sz="1600" dirty="0">
-                <a:solidFill>
-                  <a:srgbClr val="000000"/>
-                </a:solidFill>
-                <a:latin typeface="Inter" pitchFamily="34" charset="0"/>
-                <a:ea typeface="Inter" pitchFamily="34" charset="-122"/>
-                <a:cs typeface="Inter" pitchFamily="34" charset="-120"/>
-              </a:rPr>
-              <a:t>Cross-project recall — decisions from other projects surface when relevant</a:t>
-            </a:r>
-            <a:endParaRPr lang="en-US" sz="1600" dirty="0"/>
-          </a:p>
-          <a:p>
-            <a:pPr indent="0" marL="0">
-              <a:spcAft>
-                <a:spcPts val="400"/>
-              </a:spcAft>
-              <a:buNone/>
-            </a:pPr>
-            <a:r>
-              <a:rPr lang="en-US" sz="700" dirty="0">
-                <a:solidFill>
-                  <a:srgbClr val="000000"/>
-                </a:solidFill>
-                <a:latin typeface="Inter" pitchFamily="34" charset="0"/>
-                <a:ea typeface="Inter" pitchFamily="34" charset="-122"/>
-                <a:cs typeface="Inter" pitchFamily="34" charset="-120"/>
-              </a:rPr>
-              <a:t> </a:t>
-            </a:r>
-            <a:endParaRPr lang="en-US" sz="1600" dirty="0"/>
-          </a:p>
-          <a:p>
-            <a:pPr indent="0" marL="0">
-              <a:spcAft>
-                <a:spcPts val="400"/>
-              </a:spcAft>
-              <a:buNone/>
-            </a:pPr>
-            <a:r>
-              <a:rPr lang="en-US" sz="1700" b="1" dirty="0">
-                <a:solidFill>
-                  <a:srgbClr val="000000"/>
-                </a:solidFill>
-                <a:latin typeface="Inter" pitchFamily="34" charset="0"/>
-                <a:ea typeface="Inter" pitchFamily="34" charset="-122"/>
-                <a:cs typeface="Inter" pitchFamily="34" charset="-120"/>
-              </a:rPr>
-              <a:t>How it integrates</a:t>
-            </a:r>
-            <a:endParaRPr lang="en-US" sz="1600" dirty="0"/>
-          </a:p>
-          <a:p>
-            <a:pPr indent="0" marL="0">
-              <a:spcAft>
-                <a:spcPts val="400"/>
-              </a:spcAft>
-              <a:buNone/>
-            </a:pPr>
-            <a:r>
-              <a:rPr lang="en-US" sz="1600" dirty="0">
-                <a:solidFill>
-                  <a:srgbClr val="000000"/>
-                </a:solidFill>
-                <a:latin typeface="Inter" pitchFamily="34" charset="0"/>
-                <a:ea typeface="Inter" pitchFamily="34" charset="-122"/>
-                <a:cs typeface="Inter" pitchFamily="34" charset="-120"/>
-              </a:rPr>
-              <a:t>haft runs as an MCP server. Install it, and a full set of slash commands appears directly in Claude Code.</a:t>
-            </a:r>
-            <a:endParaRPr lang="en-US" sz="1600" dirty="0"/>
-          </a:p>
-        </p:txBody>
-      </p:sp>
-      <p:pic>
-        <p:nvPicPr>
-          <p:cNvPr id="6" name="Image 0" descr="/sessions/gracious-blissful-pasteur/mnt/claude_code_presentation/numericor.png">    </p:cNvPr>
-          <p:cNvPicPr>
-            <a:picLocks noChangeAspect="1"/>
-          </p:cNvPicPr>
-          <p:nvPr/>
-        </p:nvPicPr>
-        <p:blipFill>
-          <a:blip r:embed="rId1"/>
-          <a:stretch>
-            <a:fillRect/>
-          </a:stretch>
-        </p:blipFill>
-        <p:spPr>
-          <a:xfrm>
-            <a:off x="914400" y="6419088"/>
-            <a:ext cx="1371600" cy="214884"/>
-          </a:xfrm>
-          <a:prstGeom prst="rect">
-            <a:avLst/>
-          </a:prstGeom>
-        </p:spPr>
-      </p:pic>
-      <p:sp>
-        <p:nvSpPr>
-          <p:cNvPr id="7" name="Text 4"/>
+              <a:t>The ADR is intact. The evidence underneath it isn’t. Nothing told you to revisit.</a:t>
+            </a:r>
+            <a:endParaRPr lang="en-US" sz="1600" dirty="0"/>
+          </a:p>
+        </p:txBody>
+      </p:sp>
+      <p:sp>
+        <p:nvSpPr>
+          <p:cNvPr id="6" name="Text 4"/>
+          <p:cNvSpPr/>
+          <p:nvPr/>
+        </p:nvSpPr>
+        <p:spPr>
+          <a:xfrm>
+            <a:off x="914400" y="6400800"/>
+            <a:ext cx="1645920" cy="365760"/>
+          </a:xfrm>
+          <a:prstGeom prst="rect">
+            <a:avLst/>
+          </a:prstGeom>
+          <a:noFill/>
+          <a:ln/>
+        </p:spPr>
+        <p:txBody>
+          <a:bodyPr wrap="square" rtlCol="0" anchor="ctr"/>
+          <a:lstStyle/>
+          <a:p>
+            <a:pPr algn="l" indent="0" marL="0">
+              <a:buNone/>
+            </a:pPr>
+            <a:r>
+              <a:rPr lang="en-US" sz="1100" dirty="0">
+                <a:solidFill>
+                  <a:srgbClr val="888888"/>
+                </a:solidFill>
+                <a:latin typeface="Inter" pitchFamily="34" charset="0"/>
+                <a:ea typeface="Inter" pitchFamily="34" charset="-122"/>
+                <a:cs typeface="Inter" pitchFamily="34" charset="-120"/>
+              </a:rPr>
+              <a:t>NumeriCor GmbH</a:t>
+            </a:r>
+            <a:endParaRPr lang="en-US" sz="1100" dirty="0"/>
+          </a:p>
+        </p:txBody>
+      </p:sp>
+      <p:sp>
+        <p:nvSpPr>
+          <p:cNvPr id="7" name="Text 5"/>
           <p:cNvSpPr/>
           <p:nvPr/>
         </p:nvSpPr>
@@ -9626,7 +9839,7 @@
                 <a:ea typeface="Inter" pitchFamily="34" charset="-122"/>
                 <a:cs typeface="Inter" pitchFamily="34" charset="-120"/>
               </a:rPr>
-              <a:t>Installing haft</a:t>
+              <a:t>Decisions as Hypotheses</a:t>
             </a:r>
             <a:endParaRPr lang="en-US" sz="3000" dirty="0"/>
           </a:p>
@@ -9690,7 +9903,7 @@
                 <a:ea typeface="Inter" pitchFamily="34" charset="-122"/>
                 <a:cs typeface="Inter" pitchFamily="34" charset="-120"/>
               </a:rPr>
-              <a:t>Works with Claude Code, Cursor, Gemini CLI, JetBrains Air, and more</a:t>
+              <a:t>haft makes decisions expire — the way hypotheses should</a:t>
             </a:r>
             <a:endParaRPr lang="en-US" sz="1500" dirty="0"/>
           </a:p>
@@ -9724,6 +9937,46 @@
               <a:buNone/>
             </a:pPr>
             <a:r>
+              <a:rPr lang="en-US" sz="1600" dirty="0">
+                <a:solidFill>
+                  <a:srgbClr val="000000"/>
+                </a:solidFill>
+                <a:latin typeface="Inter" pitchFamily="34" charset="0"/>
+                <a:ea typeface="Inter" pitchFamily="34" charset="-122"/>
+                <a:cs typeface="Inter" pitchFamily="34" charset="-120"/>
+              </a:rPr>
+              <a:t>haft is an MCP server that treats consequential decisions the way you already treat hypotheses: explicit claims, evidence bounds, expiration dates, supersession when the field moves.</a:t>
+            </a:r>
+            <a:endParaRPr lang="en-US" sz="1600" dirty="0"/>
+          </a:p>
+          <a:p>
+            <a:pPr indent="0" marL="0">
+              <a:spcAft>
+                <a:spcPts val="400"/>
+              </a:spcAft>
+              <a:buNone/>
+            </a:pPr>
+            <a:r>
+              <a:rPr lang="en-US" sz="700" dirty="0">
+                <a:solidFill>
+                  <a:srgbClr val="000000"/>
+                </a:solidFill>
+                <a:latin typeface="Inter" pitchFamily="34" charset="0"/>
+                <a:ea typeface="Inter" pitchFamily="34" charset="-122"/>
+                <a:cs typeface="Inter" pitchFamily="34" charset="-120"/>
+              </a:rPr>
+              <a:t> </a:t>
+            </a:r>
+            <a:endParaRPr lang="en-US" sz="1600" dirty="0"/>
+          </a:p>
+          <a:p>
+            <a:pPr indent="0" marL="0">
+              <a:spcAft>
+                <a:spcPts val="400"/>
+              </a:spcAft>
+              <a:buNone/>
+            </a:pPr>
+            <a:r>
               <a:rPr lang="en-US" sz="1700" b="1" dirty="0">
                 <a:solidFill>
                   <a:srgbClr val="000000"/>
@@ -9732,30 +9985,27 @@
                 <a:ea typeface="Inter" pitchFamily="34" charset="-122"/>
                 <a:cs typeface="Inter" pitchFamily="34" charset="-120"/>
               </a:rPr>
-              <a:t>Step 1: Install</a:t>
-            </a:r>
-            <a:endParaRPr lang="en-US" sz="1600" dirty="0"/>
-          </a:p>
-          <a:p>
-            <a:pPr indent="0" marL="0">
-              <a:spcAft>
-                <a:spcPts val="400"/>
-              </a:spcAft>
-              <a:buNone/>
-            </a:pPr>
-            <a:r>
-              <a:rPr lang="en-US" sz="1300" dirty="0">
-                <a:solidFill>
-                  <a:srgbClr val="1A1A1A"/>
-                </a:solidFill>
-                <a:highlight>
-                  <a:srgbClr val="EFEFEF"/>
-                </a:highlight>
-                <a:latin typeface="Consolas" pitchFamily="34" charset="0"/>
-                <a:ea typeface="Consolas" pitchFamily="34" charset="-122"/>
-                <a:cs typeface="Consolas" pitchFamily="34" charset="-120"/>
-              </a:rPr>
-              <a:t> curl -fsSL https://quint.codes/install.sh | bash </a:t>
+              <a:t>Lineage</a:t>
+            </a:r>
+            <a:endParaRPr lang="en-US" sz="1600" dirty="0"/>
+          </a:p>
+          <a:p>
+            <a:pPr indent="0" marL="0">
+              <a:spcAft>
+                <a:spcPts val="400"/>
+              </a:spcAft>
+              <a:buNone/>
+            </a:pPr>
+            <a:r>
+              <a:rPr lang="en-US" sz="1600" dirty="0">
+                <a:solidFill>
+                  <a:srgbClr val="000000"/>
+                </a:solidFill>
+                <a:latin typeface="Inter" pitchFamily="34" charset="0"/>
+                <a:ea typeface="Inter" pitchFamily="34" charset="-122"/>
+                <a:cs typeface="Inter" pitchFamily="34" charset="-120"/>
+              </a:rPr>
+              <a:t>Inspired by FPF (First Principles Framework, Anatoly Levenchuk) — systems engineering with an epistemic-governance mindset. haft implements an opinionated subset as an MCP server; FPF is broader.</a:t>
             </a:r>
             <a:endParaRPr lang="en-US" sz="1600" dirty="0"/>
           </a:p>
@@ -9795,150 +10045,7 @@
                 <a:ea typeface="Inter" pitchFamily="34" charset="-122"/>
                 <a:cs typeface="Inter" pitchFamily="34" charset="-120"/>
               </a:rPr>
-              <a:t>Step 2: Initialize in your project</a:t>
-            </a:r>
-            <a:endParaRPr lang="en-US" sz="1600" dirty="0"/>
-          </a:p>
-          <a:p>
-            <a:pPr indent="0" marL="0">
-              <a:spcAft>
-                <a:spcPts val="400"/>
-              </a:spcAft>
-              <a:buNone/>
-            </a:pPr>
-            <a:r>
-              <a:rPr lang="en-US" sz="1300" dirty="0">
-                <a:solidFill>
-                  <a:srgbClr val="1A1A1A"/>
-                </a:solidFill>
-                <a:highlight>
-                  <a:srgbClr val="EFEFEF"/>
-                </a:highlight>
-                <a:latin typeface="Consolas" pitchFamily="34" charset="0"/>
-                <a:ea typeface="Consolas" pitchFamily="34" charset="-122"/>
-                <a:cs typeface="Consolas" pitchFamily="34" charset="-120"/>
-              </a:rPr>
-              <a:t> haft init </a:t>
-            </a:r>
-            <a:endParaRPr lang="en-US" sz="1600" dirty="0"/>
-          </a:p>
-          <a:p>
-            <a:pPr indent="0" marL="0">
-              <a:spcAft>
-                <a:spcPts val="400"/>
-              </a:spcAft>
-              <a:buNone/>
-            </a:pPr>
-            <a:r>
-              <a:rPr lang="en-US" sz="1600" dirty="0">
-                <a:solidFill>
-                  <a:srgbClr val="000000"/>
-                </a:solidFill>
-                <a:latin typeface="Inter" pitchFamily="34" charset="0"/>
-                <a:ea typeface="Inter" pitchFamily="34" charset="-122"/>
-                <a:cs typeface="Inter" pitchFamily="34" charset="-120"/>
-              </a:rPr>
-              <a:t>Creates a .haft/ directory — safe to commit to version control.</a:t>
-            </a:r>
-            <a:endParaRPr lang="en-US" sz="1600" dirty="0"/>
-          </a:p>
-          <a:p>
-            <a:pPr indent="0" marL="0">
-              <a:spcAft>
-                <a:spcPts val="400"/>
-              </a:spcAft>
-              <a:buNone/>
-            </a:pPr>
-            <a:r>
-              <a:rPr lang="en-US" sz="700" dirty="0">
-                <a:solidFill>
-                  <a:srgbClr val="000000"/>
-                </a:solidFill>
-                <a:latin typeface="Inter" pitchFamily="34" charset="0"/>
-                <a:ea typeface="Inter" pitchFamily="34" charset="-122"/>
-                <a:cs typeface="Inter" pitchFamily="34" charset="-120"/>
-              </a:rPr>
-              <a:t> </a:t>
-            </a:r>
-            <a:endParaRPr lang="en-US" sz="1600" dirty="0"/>
-          </a:p>
-          <a:p>
-            <a:pPr indent="0" marL="0">
-              <a:spcAft>
-                <a:spcPts val="400"/>
-              </a:spcAft>
-              <a:buNone/>
-            </a:pPr>
-            <a:r>
-              <a:rPr lang="en-US" sz="1700" b="1" dirty="0">
-                <a:solidFill>
-                  <a:srgbClr val="000000"/>
-                </a:solidFill>
-                <a:latin typeface="Inter" pitchFamily="34" charset="0"/>
-                <a:ea typeface="Inter" pitchFamily="34" charset="-122"/>
-                <a:cs typeface="Inter" pitchFamily="34" charset="-120"/>
-              </a:rPr>
-              <a:t>Step 3: Verify</a:t>
-            </a:r>
-            <a:endParaRPr lang="en-US" sz="1600" dirty="0"/>
-          </a:p>
-          <a:p>
-            <a:pPr indent="0" marL="0">
-              <a:spcAft>
-                <a:spcPts val="400"/>
-              </a:spcAft>
-              <a:buNone/>
-            </a:pPr>
-            <a:r>
-              <a:rPr lang="en-US" sz="1600" dirty="0">
-                <a:solidFill>
-                  <a:srgbClr val="000000"/>
-                </a:solidFill>
-                <a:latin typeface="Inter" pitchFamily="34" charset="0"/>
-                <a:ea typeface="Inter" pitchFamily="34" charset="-122"/>
-                <a:cs typeface="Inter" pitchFamily="34" charset="-120"/>
-              </a:rPr>
-              <a:t>Type /h-status inside Claude Code. An empty dashboard confirms it’s connected as an MCP server.</a:t>
-            </a:r>
-            <a:endParaRPr lang="en-US" sz="1600" dirty="0"/>
-          </a:p>
-          <a:p>
-            <a:pPr indent="0" marL="0">
-              <a:spcAft>
-                <a:spcPts val="400"/>
-              </a:spcAft>
-              <a:buNone/>
-            </a:pPr>
-            <a:r>
-              <a:rPr lang="en-US" sz="700" dirty="0">
-                <a:solidFill>
-                  <a:srgbClr val="000000"/>
-                </a:solidFill>
-                <a:latin typeface="Inter" pitchFamily="34" charset="0"/>
-                <a:ea typeface="Inter" pitchFamily="34" charset="-122"/>
-                <a:cs typeface="Inter" pitchFamily="34" charset="-120"/>
-              </a:rPr>
-              <a:t> </a:t>
-            </a:r>
-            <a:endParaRPr lang="en-US" sz="1600" dirty="0"/>
-          </a:p>
-          <a:p>
-            <a:pPr indent="0" marL="0">
-              <a:spcAft>
-                <a:spcPts val="400"/>
-              </a:spcAft>
-              <a:buNone/>
-            </a:pPr>
-            <a:r>
-              <a:rPr lang="en-US" sz="1700" b="1" dirty="0">
-                <a:solidFill>
-                  <a:srgbClr val="000000"/>
-                </a:solidFill>
-                <a:latin typeface="Inter" pitchFamily="34" charset="0"/>
-                <a:ea typeface="Inter" pitchFamily="34" charset="-122"/>
-                <a:cs typeface="Inter" pitchFamily="34" charset="-120"/>
-              </a:rPr>
-              <a:t>Compatible tools</a:t>
+              <a:t>The cycle, mapped onto research practice</a:t>
             </a:r>
             <a:endParaRPr lang="en-US" sz="1600" dirty="0"/>
           </a:p>
@@ -9959,7 +10066,7 @@
                 <a:ea typeface="Inter" pitchFamily="34" charset="-122"/>
                 <a:cs typeface="Inter" pitchFamily="34" charset="-120"/>
               </a:rPr>
-              <a:t>Claude Code (full support, default)</a:t>
+              <a:t>Frame — problem, constraints, acceptance criteria (a testable hypothesis)</a:t>
             </a:r>
             <a:endParaRPr lang="en-US" sz="1600" dirty="0"/>
           </a:p>
@@ -9980,39 +10087,117 @@
                 <a:ea typeface="Inter" pitchFamily="34" charset="-122"/>
                 <a:cs typeface="Inter" pitchFamily="34" charset="-120"/>
               </a:rPr>
-              <a:t>Cursor, Gemini CLI, Codex CLI / Air, JetBrains Air</a:t>
-            </a:r>
-            <a:endParaRPr lang="en-US" sz="1600" dirty="0"/>
-          </a:p>
-        </p:txBody>
-      </p:sp>
-      <p:pic>
-        <p:nvPicPr>
-          <p:cNvPr id="6" name="Image 0" descr="/sessions/gracious-blissful-pasteur/mnt/claude_code_presentation/numericor.png">    </p:cNvPr>
-          <p:cNvPicPr>
-            <a:picLocks noChangeAspect="1"/>
-          </p:cNvPicPr>
-          <p:nvPr/>
-        </p:nvPicPr>
-        <p:blipFill>
-          <a:blip r:embed="rId1"/>
-          <a:stretch>
-            <a:fillRect/>
-          </a:stretch>
-        </p:blipFill>
-        <p:spPr>
-          <a:xfrm>
-            <a:off x="914400" y="6419088"/>
-            <a:ext cx="1371600" cy="214884"/>
-          </a:xfrm>
-          <a:prstGeom prst="rect">
-            <a:avLst/>
-          </a:prstGeom>
-        </p:spPr>
-      </p:pic>
-      <p:sp>
-        <p:nvSpPr>
-          <p:cNvPr id="7" name="Text 4"/>
+              <a:t>Explore — a portfolio of methods (no premature winner)</a:t>
+            </a:r>
+            <a:endParaRPr lang="en-US" sz="1600" dirty="0"/>
+          </a:p>
+          <a:p>
+            <a:pPr marL="342900" indent="-342900">
+              <a:spcAft>
+                <a:spcPts val="400"/>
+              </a:spcAft>
+              <a:buSzPct val="100000"/>
+              <a:buChar char="→"/>
+            </a:pPr>
+            <a:r>
+              <a:rPr lang="en-US" sz="1600" dirty="0">
+                <a:solidFill>
+                  <a:srgbClr val="000000"/>
+                </a:solidFill>
+                <a:latin typeface="Inter" pitchFamily="34" charset="0"/>
+                <a:ea typeface="Inter" pitchFamily="34" charset="-122"/>
+                <a:cs typeface="Inter" pitchFamily="34" charset="-120"/>
+              </a:rPr>
+              <a:t>Compare — Pareto-front across accuracy, runtime, memory, stability</a:t>
+            </a:r>
+            <a:endParaRPr lang="en-US" sz="1600" dirty="0"/>
+          </a:p>
+          <a:p>
+            <a:pPr marL="342900" indent="-342900">
+              <a:spcAft>
+                <a:spcPts val="400"/>
+              </a:spcAft>
+              <a:buSzPct val="100000"/>
+              <a:buChar char="→"/>
+            </a:pPr>
+            <a:r>
+              <a:rPr lang="en-US" sz="1600" dirty="0">
+                <a:solidFill>
+                  <a:srgbClr val="000000"/>
+                </a:solidFill>
+                <a:latin typeface="Inter" pitchFamily="34" charset="0"/>
+                <a:ea typeface="Inter" pitchFamily="34" charset="-122"/>
+                <a:cs typeface="Inter" pitchFamily="34" charset="-120"/>
+              </a:rPr>
+              <a:t>Decide — record with invariants and a verify_after date</a:t>
+            </a:r>
+            <a:endParaRPr lang="en-US" sz="1600" dirty="0"/>
+          </a:p>
+          <a:p>
+            <a:pPr marL="342900" indent="-342900">
+              <a:spcAft>
+                <a:spcPts val="400"/>
+              </a:spcAft>
+              <a:buSzPct val="100000"/>
+              <a:buChar char="→"/>
+            </a:pPr>
+            <a:r>
+              <a:rPr lang="en-US" sz="1600" dirty="0">
+                <a:solidFill>
+                  <a:srgbClr val="000000"/>
+                </a:solidFill>
+                <a:latin typeface="Inter" pitchFamily="34" charset="0"/>
+                <a:ea typeface="Inter" pitchFamily="34" charset="-122"/>
+                <a:cs typeface="Inter" pitchFamily="34" charset="-120"/>
+              </a:rPr>
+              <a:t>Verify — re-check claims as evidence ages; trust score decays</a:t>
+            </a:r>
+            <a:endParaRPr lang="en-US" sz="1600" dirty="0"/>
+          </a:p>
+        </p:txBody>
+      </p:sp>
+      <p:sp>
+        <p:nvSpPr>
+          <p:cNvPr id="6" name="Text 4"/>
+          <p:cNvSpPr/>
+          <p:nvPr/>
+        </p:nvSpPr>
+        <p:spPr>
+          <a:xfrm>
+            <a:off x="914400" y="6400800"/>
+            <a:ext cx="1645920" cy="365760"/>
+          </a:xfrm>
+          <a:prstGeom prst="rect">
+            <a:avLst/>
+          </a:prstGeom>
+          <a:noFill/>
+          <a:ln/>
+        </p:spPr>
+        <p:txBody>
+          <a:bodyPr wrap="square" rtlCol="0" anchor="ctr"/>
+          <a:lstStyle/>
+          <a:p>
+            <a:pPr algn="l" indent="0" marL="0">
+              <a:buNone/>
+            </a:pPr>
+            <a:r>
+              <a:rPr lang="en-US" sz="1100" dirty="0">
+                <a:solidFill>
+                  <a:srgbClr val="888888"/>
+                </a:solidFill>
+                <a:latin typeface="Inter" pitchFamily="34" charset="0"/>
+                <a:ea typeface="Inter" pitchFamily="34" charset="-122"/>
+                <a:cs typeface="Inter" pitchFamily="34" charset="-120"/>
+              </a:rPr>
+              <a:t>NumeriCor GmbH</a:t>
+            </a:r>
+            <a:endParaRPr lang="en-US" sz="1100" dirty="0"/>
+          </a:p>
+        </p:txBody>
+      </p:sp>
+      <p:sp>
+        <p:nvSpPr>
+          <p:cNvPr id="7" name="Text 5"/>
           <p:cNvSpPr/>
           <p:nvPr/>
         </p:nvSpPr>
@@ -10114,7 +10299,7 @@
                 <a:ea typeface="Inter" pitchFamily="34" charset="-122"/>
                 <a:cs typeface="Inter" pitchFamily="34" charset="-120"/>
               </a:rPr>
-              <a:t>haft in Action</a:t>
+              <a:t>Why This Matters in a Research Group</a:t>
             </a:r>
             <a:endParaRPr lang="en-US" sz="3000" dirty="0"/>
           </a:p>
@@ -10178,7 +10363,7 @@
                 <a:ea typeface="Inter" pitchFamily="34" charset="-122"/>
                 <a:cs typeface="Inter" pitchFamily="34" charset="-120"/>
               </a:rPr>
-              <a:t>A full toolkit, not just one command</a:t>
+              <a:t>Decisions outlive the people who made them</a:t>
             </a:r>
             <a:endParaRPr lang="en-US" sz="1500" dirty="0"/>
           </a:p>
@@ -10205,26 +10390,6 @@
           <a:bodyPr wrap="square" lIns="0" tIns="0" rIns="0" bIns="0" rtlCol="0" anchor="t"/>
           <a:lstStyle/>
           <a:p>
-            <a:pPr indent="0" marL="0">
-              <a:spcAft>
-                <a:spcPts val="400"/>
-              </a:spcAft>
-              <a:buNone/>
-            </a:pPr>
-            <a:r>
-              <a:rPr lang="en-US" sz="1700" b="1" dirty="0">
-                <a:solidFill>
-                  <a:srgbClr val="000000"/>
-                </a:solidFill>
-                <a:latin typeface="Inter" pitchFamily="34" charset="0"/>
-                <a:ea typeface="Inter" pitchFamily="34" charset="-122"/>
-                <a:cs typeface="Inter" pitchFamily="34" charset="-120"/>
-              </a:rPr>
-              <a:t>The decision cycle (manual, step by step)</a:t>
-            </a:r>
-            <a:endParaRPr lang="en-US" sz="1600" dirty="0"/>
-          </a:p>
-          <a:p>
             <a:pPr marL="342900" indent="-342900">
               <a:spcAft>
                 <a:spcPts val="400"/>
@@ -10241,7 +10406,27 @@
                 <a:ea typeface="Inter" pitchFamily="34" charset="-122"/>
                 <a:cs typeface="Inter" pitchFamily="34" charset="-120"/>
               </a:rPr>
-              <a:t>/h-frame — Frame the problem: signal, constraints, acceptance criteria</a:t>
+              <a:t>PhD students and postdocs cycle every 2–4 years — the decision graph outlives them</a:t>
+            </a:r>
+            <a:endParaRPr lang="en-US" sz="1600" dirty="0"/>
+          </a:p>
+          <a:p>
+            <a:pPr indent="0" marL="0">
+              <a:spcAft>
+                <a:spcPts val="400"/>
+              </a:spcAft>
+              <a:buNone/>
+            </a:pPr>
+            <a:r>
+              <a:rPr lang="en-US" sz="700" dirty="0">
+                <a:solidFill>
+                  <a:srgbClr val="000000"/>
+                </a:solidFill>
+                <a:latin typeface="Inter" pitchFamily="34" charset="0"/>
+                <a:ea typeface="Inter" pitchFamily="34" charset="-122"/>
+                <a:cs typeface="Inter" pitchFamily="34" charset="-120"/>
+              </a:rPr>
+              <a:t> </a:t>
             </a:r>
             <a:endParaRPr lang="en-US" sz="1600" dirty="0"/>
           </a:p>
@@ -10262,7 +10447,27 @@
                 <a:ea typeface="Inter" pitchFamily="34" charset="-122"/>
                 <a:cs typeface="Inter" pitchFamily="34" charset="-120"/>
               </a:rPr>
-              <a:t>/h-char — Define comparison dimensions</a:t>
+              <a:t>Reviewer and advisor questions (“why this solver?”, “why this architecture?”) get a principled trail instead of post-hoc rationalization</a:t>
+            </a:r>
+            <a:endParaRPr lang="en-US" sz="1600" dirty="0"/>
+          </a:p>
+          <a:p>
+            <a:pPr indent="0" marL="0">
+              <a:spcAft>
+                <a:spcPts val="400"/>
+              </a:spcAft>
+              <a:buNone/>
+            </a:pPr>
+            <a:r>
+              <a:rPr lang="en-US" sz="700" dirty="0">
+                <a:solidFill>
+                  <a:srgbClr val="000000"/>
+                </a:solidFill>
+                <a:latin typeface="Inter" pitchFamily="34" charset="0"/>
+                <a:ea typeface="Inter" pitchFamily="34" charset="-122"/>
+                <a:cs typeface="Inter" pitchFamily="34" charset="-120"/>
+              </a:rPr>
+              <a:t> </a:t>
             </a:r>
             <a:endParaRPr lang="en-US" sz="1600" dirty="0"/>
           </a:p>
@@ -10283,7 +10488,27 @@
                 <a:ea typeface="Inter" pitchFamily="34" charset="-122"/>
                 <a:cs typeface="Inter" pitchFamily="34" charset="-120"/>
               </a:rPr>
-              <a:t>/h-explore — Generate genuinely distinct solution variants</a:t>
+              <a:t>State of the art shifts — haft surfaces decisions whose evidence has aged out, so you revisit before you publish on top of them</a:t>
+            </a:r>
+            <a:endParaRPr lang="en-US" sz="1600" dirty="0"/>
+          </a:p>
+          <a:p>
+            <a:pPr indent="0" marL="0">
+              <a:spcAft>
+                <a:spcPts val="400"/>
+              </a:spcAft>
+              <a:buNone/>
+            </a:pPr>
+            <a:r>
+              <a:rPr lang="en-US" sz="700" dirty="0">
+                <a:solidFill>
+                  <a:srgbClr val="000000"/>
+                </a:solidFill>
+                <a:latin typeface="Inter" pitchFamily="34" charset="0"/>
+                <a:ea typeface="Inter" pitchFamily="34" charset="-122"/>
+                <a:cs typeface="Inter" pitchFamily="34" charset="-120"/>
+              </a:rPr>
+              <a:t> </a:t>
             </a:r>
             <a:endParaRPr lang="en-US" sz="1600" dirty="0"/>
           </a:p>
@@ -10304,266 +10529,54 @@
                 <a:ea typeface="Inter" pitchFamily="34" charset="-122"/>
                 <a:cs typeface="Inter" pitchFamily="34" charset="-120"/>
               </a:rPr>
-              <a:t>/h-compare — Pareto-front comparison across your criteria</a:t>
-            </a:r>
-            <a:endParaRPr lang="en-US" sz="1600" dirty="0"/>
-          </a:p>
-          <a:p>
-            <a:pPr marL="342900" indent="-342900">
-              <a:spcAft>
-                <a:spcPts val="400"/>
-              </a:spcAft>
-              <a:buSzPct val="100000"/>
-              <a:buChar char="→"/>
-            </a:pPr>
-            <a:r>
-              <a:rPr lang="en-US" sz="1600" dirty="0">
-                <a:solidFill>
-                  <a:srgbClr val="000000"/>
-                </a:solidFill>
-                <a:latin typeface="Inter" pitchFamily="34" charset="0"/>
-                <a:ea typeface="Inter" pitchFamily="34" charset="-122"/>
-                <a:cs typeface="Inter" pitchFamily="34" charset="-120"/>
-              </a:rPr>
-              <a:t>/h-decide — Record the decision as a contract with invariants</a:t>
-            </a:r>
-            <a:endParaRPr lang="en-US" sz="1600" dirty="0"/>
-          </a:p>
-          <a:p>
-            <a:pPr marL="342900" indent="-342900">
-              <a:spcAft>
-                <a:spcPts val="400"/>
-              </a:spcAft>
-              <a:buSzPct val="100000"/>
-              <a:buChar char="→"/>
-            </a:pPr>
-            <a:r>
-              <a:rPr lang="en-US" sz="1600" dirty="0">
-                <a:solidFill>
-                  <a:srgbClr val="000000"/>
-                </a:solidFill>
-                <a:latin typeface="Inter" pitchFamily="34" charset="0"/>
-                <a:ea typeface="Inter" pitchFamily="34" charset="-122"/>
-                <a:cs typeface="Inter" pitchFamily="34" charset="-120"/>
-              </a:rPr>
-              <a:t>/h-verify — Check claims against reality; scan for code drift and stale decisions</a:t>
-            </a:r>
-            <a:endParaRPr lang="en-US" sz="1600" dirty="0"/>
-          </a:p>
-          <a:p>
-            <a:pPr indent="0" marL="0">
-              <a:spcAft>
-                <a:spcPts val="400"/>
-              </a:spcAft>
-              <a:buNone/>
-            </a:pPr>
-            <a:r>
-              <a:rPr lang="en-US" sz="700" dirty="0">
-                <a:solidFill>
-                  <a:srgbClr val="000000"/>
-                </a:solidFill>
-                <a:latin typeface="Inter" pitchFamily="34" charset="0"/>
-                <a:ea typeface="Inter" pitchFamily="34" charset="-122"/>
-                <a:cs typeface="Inter" pitchFamily="34" charset="-120"/>
-              </a:rPr>
-              <a:t> </a:t>
-            </a:r>
-            <a:endParaRPr lang="en-US" sz="1600" dirty="0"/>
-          </a:p>
-          <a:p>
-            <a:pPr indent="0" marL="0">
-              <a:spcAft>
-                <a:spcPts val="400"/>
-              </a:spcAft>
-              <a:buNone/>
-            </a:pPr>
-            <a:r>
-              <a:rPr lang="en-US" sz="1700" b="1" dirty="0">
-                <a:solidFill>
-                  <a:srgbClr val="000000"/>
-                </a:solidFill>
-                <a:latin typeface="Inter" pitchFamily="34" charset="0"/>
-                <a:ea typeface="Inter" pitchFamily="34" charset="-122"/>
-                <a:cs typeface="Inter" pitchFamily="34" charset="-120"/>
-              </a:rPr>
-              <a:t>Smart entry point</a:t>
-            </a:r>
-            <a:endParaRPr lang="en-US" sz="1600" dirty="0"/>
-          </a:p>
-          <a:p>
-            <a:pPr marL="342900" indent="-342900">
-              <a:spcAft>
-                <a:spcPts val="400"/>
-              </a:spcAft>
-              <a:buSzPct val="100000"/>
-              <a:buChar char="→"/>
-            </a:pPr>
-            <a:r>
-              <a:rPr lang="en-US" sz="1600" dirty="0">
-                <a:solidFill>
-                  <a:srgbClr val="000000"/>
-                </a:solidFill>
-                <a:latin typeface="Inter" pitchFamily="34" charset="0"/>
-                <a:ea typeface="Inter" pitchFamily="34" charset="-122"/>
-                <a:cs typeface="Inter" pitchFamily="34" charset="-120"/>
-              </a:rPr>
-              <a:t>/h-reason — Auto-selects depth: just think, step-by-step, or full autonomous cycle</a:t>
-            </a:r>
-            <a:endParaRPr lang="en-US" sz="1600" dirty="0"/>
-          </a:p>
-          <a:p>
-            <a:pPr indent="0" marL="0">
-              <a:spcAft>
-                <a:spcPts val="400"/>
-              </a:spcAft>
-              <a:buNone/>
-            </a:pPr>
-            <a:r>
-              <a:rPr lang="en-US" sz="700" dirty="0">
-                <a:solidFill>
-                  <a:srgbClr val="000000"/>
-                </a:solidFill>
-                <a:latin typeface="Inter" pitchFamily="34" charset="0"/>
-                <a:ea typeface="Inter" pitchFamily="34" charset="-122"/>
-                <a:cs typeface="Inter" pitchFamily="34" charset="-120"/>
-              </a:rPr>
-              <a:t> </a:t>
-            </a:r>
-            <a:endParaRPr lang="en-US" sz="1600" dirty="0"/>
-          </a:p>
-          <a:p>
-            <a:pPr indent="0" marL="0">
-              <a:spcAft>
-                <a:spcPts val="400"/>
-              </a:spcAft>
-              <a:buNone/>
-            </a:pPr>
-            <a:r>
-              <a:rPr lang="en-US" sz="1700" b="1" dirty="0">
-                <a:solidFill>
-                  <a:srgbClr val="000000"/>
-                </a:solidFill>
-                <a:latin typeface="Inter" pitchFamily="34" charset="0"/>
-                <a:ea typeface="Inter" pitchFamily="34" charset="-122"/>
-                <a:cs typeface="Inter" pitchFamily="34" charset="-120"/>
-              </a:rPr>
-              <a:t>Day-to-day commands</a:t>
-            </a:r>
-            <a:endParaRPr lang="en-US" sz="1600" dirty="0"/>
-          </a:p>
-          <a:p>
-            <a:pPr marL="342900" indent="-342900">
-              <a:spcAft>
-                <a:spcPts val="400"/>
-              </a:spcAft>
-              <a:buSzPct val="100000"/>
-              <a:buChar char="→"/>
-            </a:pPr>
-            <a:r>
-              <a:rPr lang="en-US" sz="1600" dirty="0">
-                <a:solidFill>
-                  <a:srgbClr val="000000"/>
-                </a:solidFill>
-                <a:latin typeface="Inter" pitchFamily="34" charset="0"/>
-                <a:ea typeface="Inter" pitchFamily="34" charset="-122"/>
-                <a:cs typeface="Inter" pitchFamily="34" charset="-120"/>
-              </a:rPr>
-              <a:t>/h-note — Record a quick micro-decision (auto-expires in 90 days)</a:t>
-            </a:r>
-            <a:endParaRPr lang="en-US" sz="1600" dirty="0"/>
-          </a:p>
-          <a:p>
-            <a:pPr marL="342900" indent="-342900">
-              <a:spcAft>
-                <a:spcPts val="400"/>
-              </a:spcAft>
-              <a:buSzPct val="100000"/>
-              <a:buChar char="→"/>
-            </a:pPr>
-            <a:r>
-              <a:rPr lang="en-US" sz="1600" dirty="0">
-                <a:solidFill>
-                  <a:srgbClr val="000000"/>
-                </a:solidFill>
-                <a:latin typeface="Inter" pitchFamily="34" charset="0"/>
-                <a:ea typeface="Inter" pitchFamily="34" charset="-122"/>
-                <a:cs typeface="Inter" pitchFamily="34" charset="-120"/>
-              </a:rPr>
-              <a:t>/h-status — Dashboard: active decisions, problems, coverage</a:t>
-            </a:r>
-            <a:endParaRPr lang="en-US" sz="1600" dirty="0"/>
-          </a:p>
-          <a:p>
-            <a:pPr marL="342900" indent="-342900">
-              <a:spcAft>
-                <a:spcPts val="400"/>
-              </a:spcAft>
-              <a:buSzPct val="100000"/>
-              <a:buChar char="→"/>
-            </a:pPr>
-            <a:r>
-              <a:rPr lang="en-US" sz="1600" dirty="0">
-                <a:solidFill>
-                  <a:srgbClr val="000000"/>
-                </a:solidFill>
-                <a:latin typeface="Inter" pitchFamily="34" charset="0"/>
-                <a:ea typeface="Inter" pitchFamily="34" charset="-122"/>
-                <a:cs typeface="Inter" pitchFamily="34" charset="-120"/>
-              </a:rPr>
-              <a:t>/h-problems — List active problems with readiness signals</a:t>
-            </a:r>
-            <a:endParaRPr lang="en-US" sz="1600" dirty="0"/>
-          </a:p>
-          <a:p>
-            <a:pPr marL="342900" indent="-342900">
-              <a:spcAft>
-                <a:spcPts val="400"/>
-              </a:spcAft>
-              <a:buSzPct val="100000"/>
-              <a:buChar char="→"/>
-            </a:pPr>
-            <a:r>
-              <a:rPr lang="en-US" sz="1600" dirty="0">
-                <a:solidFill>
-                  <a:srgbClr val="000000"/>
-                </a:solidFill>
-                <a:latin typeface="Inter" pitchFamily="34" charset="0"/>
-                <a:ea typeface="Inter" pitchFamily="34" charset="-122"/>
-                <a:cs typeface="Inter" pitchFamily="34" charset="-120"/>
-              </a:rPr>
-              <a:t>/h-view — Audience projections: engineer, manager, audit</a:t>
-            </a:r>
-            <a:endParaRPr lang="en-US" sz="1600" dirty="0"/>
-          </a:p>
-        </p:txBody>
-      </p:sp>
-      <p:pic>
-        <p:nvPicPr>
-          <p:cNvPr id="6" name="Image 0" descr="/sessions/gracious-blissful-pasteur/mnt/claude_code_presentation/numericor.png">    </p:cNvPr>
-          <p:cNvPicPr>
-            <a:picLocks noChangeAspect="1"/>
-          </p:cNvPicPr>
-          <p:nvPr/>
-        </p:nvPicPr>
-        <p:blipFill>
-          <a:blip r:embed="rId1"/>
-          <a:stretch>
-            <a:fillRect/>
-          </a:stretch>
-        </p:blipFill>
-        <p:spPr>
-          <a:xfrm>
-            <a:off x="914400" y="6419088"/>
-            <a:ext cx="1371600" cy="214884"/>
-          </a:xfrm>
-          <a:prstGeom prst="rect">
-            <a:avLst/>
-          </a:prstGeom>
-        </p:spPr>
-      </p:pic>
-      <p:sp>
-        <p:nvSpPr>
-          <p:cNvPr id="7" name="Text 4"/>
+              <a:t>Handoff: when someone inherits your Python or C++ pipeline, the why travels with the code</a:t>
+            </a:r>
+            <a:endParaRPr lang="en-US" sz="1600" dirty="0"/>
+          </a:p>
+        </p:txBody>
+      </p:sp>
+      <p:sp>
+        <p:nvSpPr>
+          <p:cNvPr id="6" name="Text 4"/>
+          <p:cNvSpPr/>
+          <p:nvPr/>
+        </p:nvSpPr>
+        <p:spPr>
+          <a:xfrm>
+            <a:off x="914400" y="6400800"/>
+            <a:ext cx="1645920" cy="365760"/>
+          </a:xfrm>
+          <a:prstGeom prst="rect">
+            <a:avLst/>
+          </a:prstGeom>
+          <a:noFill/>
+          <a:ln/>
+        </p:spPr>
+        <p:txBody>
+          <a:bodyPr wrap="square" rtlCol="0" anchor="ctr"/>
+          <a:lstStyle/>
+          <a:p>
+            <a:pPr algn="l" indent="0" marL="0">
+              <a:buNone/>
+            </a:pPr>
+            <a:r>
+              <a:rPr lang="en-US" sz="1100" dirty="0">
+                <a:solidFill>
+                  <a:srgbClr val="888888"/>
+                </a:solidFill>
+                <a:latin typeface="Inter" pitchFamily="34" charset="0"/>
+                <a:ea typeface="Inter" pitchFamily="34" charset="-122"/>
+                <a:cs typeface="Inter" pitchFamily="34" charset="-120"/>
+              </a:rPr>
+              <a:t>NumeriCor GmbH</a:t>
+            </a:r>
+            <a:endParaRPr lang="en-US" sz="1100" dirty="0"/>
+          </a:p>
+        </p:txBody>
+      </p:sp>
+      <p:sp>
+        <p:nvSpPr>
+          <p:cNvPr id="7" name="Text 5"/>
           <p:cNvSpPr/>
           <p:nvPr/>
         </p:nvSpPr>
@@ -10611,6 +10624,470 @@
 <file path=ppt/slides/slide23.xml><?xml version="1.0" encoding="utf-8"?>
 <p:sld xmlns:a="http://schemas.openxmlformats.org/drawingml/2006/main" xmlns:r="http://schemas.openxmlformats.org/officeDocument/2006/relationships" xmlns:p="http://schemas.openxmlformats.org/presentationml/2006/main">
   <p:cSld name="Slide 23">
+    <p:bg>
+      <p:bgPr>
+        <a:solidFill>
+          <a:srgbClr val="FFFFFF"/>
+        </a:solidFill>
+      </p:bgPr>
+    </p:bg>
+    <p:spTree>
+      <p:nvGrpSpPr>
+        <p:cNvPr id="1" name=""/>
+        <p:cNvGrpSpPr/>
+        <p:nvPr/>
+      </p:nvGrpSpPr>
+      <p:grpSpPr>
+        <a:xfrm>
+          <a:off x="0" y="0"/>
+          <a:ext cx="0" cy="0"/>
+          <a:chOff x="0" y="0"/>
+          <a:chExt cx="0" cy="0"/>
+        </a:xfrm>
+      </p:grpSpPr>
+      <p:sp>
+        <p:nvSpPr>
+          <p:cNvPr id="2" name="Text 0"/>
+          <p:cNvSpPr/>
+          <p:nvPr/>
+        </p:nvSpPr>
+        <p:spPr>
+          <a:xfrm>
+            <a:off x="914400" y="438912"/>
+            <a:ext cx="10332720" cy="621792"/>
+          </a:xfrm>
+          <a:prstGeom prst="rect">
+            <a:avLst/>
+          </a:prstGeom>
+          <a:noFill/>
+          <a:ln/>
+        </p:spPr>
+        <p:txBody>
+          <a:bodyPr wrap="square" lIns="0" tIns="0" rIns="0" bIns="0" rtlCol="0" anchor="ctr"/>
+          <a:lstStyle/>
+          <a:p>
+            <a:pPr indent="0" marL="0">
+              <a:buNone/>
+            </a:pPr>
+            <a:r>
+              <a:rPr lang="en-US" sz="3000" b="1" dirty="0">
+                <a:solidFill>
+                  <a:srgbClr val="000000"/>
+                </a:solidFill>
+                <a:latin typeface="Inter" pitchFamily="34" charset="0"/>
+                <a:ea typeface="Inter" pitchFamily="34" charset="-122"/>
+                <a:cs typeface="Inter" pitchFamily="34" charset="-120"/>
+              </a:rPr>
+              <a:t>Install and Daily Rhythm</a:t>
+            </a:r>
+            <a:endParaRPr lang="en-US" sz="3000" dirty="0"/>
+          </a:p>
+        </p:txBody>
+      </p:sp>
+      <p:sp>
+        <p:nvSpPr>
+          <p:cNvPr id="3" name="Shape 1"/>
+          <p:cNvSpPr/>
+          <p:nvPr/>
+        </p:nvSpPr>
+        <p:spPr>
+          <a:xfrm>
+            <a:off x="914400" y="1115568"/>
+            <a:ext cx="10332720" cy="20117"/>
+          </a:xfrm>
+          <a:prstGeom prst="rect">
+            <a:avLst/>
+          </a:prstGeom>
+          <a:solidFill>
+            <a:srgbClr val="E4E4E4"/>
+          </a:solidFill>
+          <a:ln w="12700">
+            <a:solidFill>
+              <a:srgbClr val="E4E4E4"/>
+            </a:solidFill>
+            <a:prstDash val="solid"/>
+          </a:ln>
+        </p:spPr>
+      </p:sp>
+      <p:sp>
+        <p:nvSpPr>
+          <p:cNvPr id="4" name="Text 2"/>
+          <p:cNvSpPr/>
+          <p:nvPr/>
+        </p:nvSpPr>
+        <p:spPr>
+          <a:xfrm>
+            <a:off x="914400" y="1188720"/>
+            <a:ext cx="10332720" cy="347472"/>
+          </a:xfrm>
+          <a:prstGeom prst="rect">
+            <a:avLst/>
+          </a:prstGeom>
+          <a:noFill/>
+          <a:ln/>
+        </p:spPr>
+        <p:txBody>
+          <a:bodyPr wrap="square" lIns="0" tIns="0" rIns="0" bIns="0" rtlCol="0" anchor="ctr"/>
+          <a:lstStyle/>
+          <a:p>
+            <a:pPr indent="0" marL="0">
+              <a:buNone/>
+            </a:pPr>
+            <a:r>
+              <a:rPr lang="en-US" sz="1500" dirty="0">
+                <a:solidFill>
+                  <a:srgbClr val="888888"/>
+                </a:solidFill>
+                <a:latin typeface="Inter" pitchFamily="34" charset="0"/>
+                <a:ea typeface="Inter" pitchFamily="34" charset="-122"/>
+                <a:cs typeface="Inter" pitchFamily="34" charset="-120"/>
+              </a:rPr>
+              <a:t>Two minutes to install — used at three different depths</a:t>
+            </a:r>
+            <a:endParaRPr lang="en-US" sz="1500" dirty="0"/>
+          </a:p>
+        </p:txBody>
+      </p:sp>
+      <p:sp>
+        <p:nvSpPr>
+          <p:cNvPr id="5" name="Text 3"/>
+          <p:cNvSpPr/>
+          <p:nvPr/>
+        </p:nvSpPr>
+        <p:spPr>
+          <a:xfrm>
+            <a:off x="914400" y="1627632"/>
+            <a:ext cx="10332720" cy="4681728"/>
+          </a:xfrm>
+          <a:prstGeom prst="rect">
+            <a:avLst/>
+          </a:prstGeom>
+          <a:noFill/>
+          <a:ln/>
+        </p:spPr>
+        <p:txBody>
+          <a:bodyPr wrap="square" lIns="0" tIns="0" rIns="0" bIns="0" rtlCol="0" anchor="t"/>
+          <a:lstStyle/>
+          <a:p>
+            <a:pPr indent="0" marL="0">
+              <a:spcAft>
+                <a:spcPts val="400"/>
+              </a:spcAft>
+              <a:buNone/>
+            </a:pPr>
+            <a:r>
+              <a:rPr lang="en-US" sz="1700" b="1" dirty="0">
+                <a:solidFill>
+                  <a:srgbClr val="000000"/>
+                </a:solidFill>
+                <a:latin typeface="Inter" pitchFamily="34" charset="0"/>
+                <a:ea typeface="Inter" pitchFamily="34" charset="-122"/>
+                <a:cs typeface="Inter" pitchFamily="34" charset="-120"/>
+              </a:rPr>
+              <a:t>Install</a:t>
+            </a:r>
+            <a:endParaRPr lang="en-US" sz="1600" dirty="0"/>
+          </a:p>
+          <a:p>
+            <a:pPr indent="0" marL="0">
+              <a:spcAft>
+                <a:spcPts val="400"/>
+              </a:spcAft>
+              <a:buNone/>
+            </a:pPr>
+            <a:r>
+              <a:rPr lang="en-US" sz="1300" dirty="0">
+                <a:solidFill>
+                  <a:srgbClr val="1A1A1A"/>
+                </a:solidFill>
+                <a:highlight>
+                  <a:srgbClr val="EFEFEF"/>
+                </a:highlight>
+                <a:latin typeface="Consolas" pitchFamily="34" charset="0"/>
+                <a:ea typeface="Consolas" pitchFamily="34" charset="-122"/>
+                <a:cs typeface="Consolas" pitchFamily="34" charset="-120"/>
+              </a:rPr>
+              <a:t> curl -fsSL https://quint.codes/install.sh | bash </a:t>
+            </a:r>
+            <a:endParaRPr lang="en-US" sz="1600" dirty="0"/>
+          </a:p>
+          <a:p>
+            <a:pPr indent="0" marL="0">
+              <a:spcAft>
+                <a:spcPts val="400"/>
+              </a:spcAft>
+              <a:buNone/>
+            </a:pPr>
+            <a:r>
+              <a:rPr lang="en-US" sz="1300" dirty="0">
+                <a:solidFill>
+                  <a:srgbClr val="1A1A1A"/>
+                </a:solidFill>
+                <a:highlight>
+                  <a:srgbClr val="EFEFEF"/>
+                </a:highlight>
+                <a:latin typeface="Consolas" pitchFamily="34" charset="0"/>
+                <a:ea typeface="Consolas" pitchFamily="34" charset="-122"/>
+                <a:cs typeface="Consolas" pitchFamily="34" charset="-120"/>
+              </a:rPr>
+              <a:t> haft init </a:t>
+            </a:r>
+            <a:endParaRPr lang="en-US" sz="1600" dirty="0"/>
+          </a:p>
+          <a:p>
+            <a:pPr indent="0" marL="0">
+              <a:spcAft>
+                <a:spcPts val="400"/>
+              </a:spcAft>
+              <a:buNone/>
+            </a:pPr>
+            <a:r>
+              <a:rPr lang="en-US" sz="1600" dirty="0">
+                <a:solidFill>
+                  <a:srgbClr val="000000"/>
+                </a:solidFill>
+                <a:latin typeface="Inter" pitchFamily="34" charset="0"/>
+                <a:ea typeface="Inter" pitchFamily="34" charset="-122"/>
+                <a:cs typeface="Inter" pitchFamily="34" charset="-120"/>
+              </a:rPr>
+              <a:t>Creates a .haft/ directory — safe to commit.</a:t>
+            </a:r>
+            <a:endParaRPr lang="en-US" sz="1600" dirty="0"/>
+          </a:p>
+          <a:p>
+            <a:pPr indent="0" marL="0">
+              <a:spcAft>
+                <a:spcPts val="400"/>
+              </a:spcAft>
+              <a:buNone/>
+            </a:pPr>
+            <a:r>
+              <a:rPr lang="en-US" sz="700" dirty="0">
+                <a:solidFill>
+                  <a:srgbClr val="000000"/>
+                </a:solidFill>
+                <a:latin typeface="Inter" pitchFamily="34" charset="0"/>
+                <a:ea typeface="Inter" pitchFamily="34" charset="-122"/>
+                <a:cs typeface="Inter" pitchFamily="34" charset="-120"/>
+              </a:rPr>
+              <a:t> </a:t>
+            </a:r>
+            <a:endParaRPr lang="en-US" sz="1600" dirty="0"/>
+          </a:p>
+          <a:p>
+            <a:pPr indent="0" marL="0">
+              <a:spcAft>
+                <a:spcPts val="400"/>
+              </a:spcAft>
+              <a:buNone/>
+            </a:pPr>
+            <a:r>
+              <a:rPr lang="en-US" sz="1700" b="1" dirty="0">
+                <a:solidFill>
+                  <a:srgbClr val="000000"/>
+                </a:solidFill>
+                <a:latin typeface="Inter" pitchFamily="34" charset="0"/>
+                <a:ea typeface="Inter" pitchFamily="34" charset="-122"/>
+                <a:cs typeface="Inter" pitchFamily="34" charset="-120"/>
+              </a:rPr>
+              <a:t>Three depths for three kinds of decisions</a:t>
+            </a:r>
+            <a:endParaRPr lang="en-US" sz="1600" dirty="0"/>
+          </a:p>
+          <a:p>
+            <a:pPr marL="342900" indent="-342900">
+              <a:spcAft>
+                <a:spcPts val="400"/>
+              </a:spcAft>
+              <a:buSzPct val="100000"/>
+              <a:buChar char="→"/>
+            </a:pPr>
+            <a:r>
+              <a:rPr lang="en-US" sz="1600" dirty="0">
+                <a:solidFill>
+                  <a:srgbClr val="000000"/>
+                </a:solidFill>
+                <a:latin typeface="Inter" pitchFamily="34" charset="0"/>
+                <a:ea typeface="Inter" pitchFamily="34" charset="-122"/>
+                <a:cs typeface="Inter" pitchFamily="34" charset="-120"/>
+              </a:rPr>
+              <a:t>/h-note — lightweight captures: hyperparameters, tolerances, solver settings (90-day auto-expiry)</a:t>
+            </a:r>
+            <a:endParaRPr lang="en-US" sz="1600" dirty="0"/>
+          </a:p>
+          <a:p>
+            <a:pPr marL="342900" indent="-342900">
+              <a:spcAft>
+                <a:spcPts val="400"/>
+              </a:spcAft>
+              <a:buSzPct val="100000"/>
+              <a:buChar char="→"/>
+            </a:pPr>
+            <a:r>
+              <a:rPr lang="en-US" sz="1600" dirty="0">
+                <a:solidFill>
+                  <a:srgbClr val="000000"/>
+                </a:solidFill>
+                <a:latin typeface="Inter" pitchFamily="34" charset="0"/>
+                <a:ea typeface="Inter" pitchFamily="34" charset="-122"/>
+                <a:cs typeface="Inter" pitchFamily="34" charset="-120"/>
+              </a:rPr>
+              <a:t>/h-reason — Claude picks depth: just think, step-by-step, or full cycle</a:t>
+            </a:r>
+            <a:endParaRPr lang="en-US" sz="1600" dirty="0"/>
+          </a:p>
+          <a:p>
+            <a:pPr marL="342900" indent="-342900">
+              <a:spcAft>
+                <a:spcPts val="400"/>
+              </a:spcAft>
+              <a:buSzPct val="100000"/>
+              <a:buChar char="→"/>
+            </a:pPr>
+            <a:r>
+              <a:rPr lang="en-US" sz="1600" dirty="0">
+                <a:solidFill>
+                  <a:srgbClr val="000000"/>
+                </a:solidFill>
+                <a:latin typeface="Inter" pitchFamily="34" charset="0"/>
+                <a:ea typeface="Inter" pitchFamily="34" charset="-122"/>
+                <a:cs typeface="Inter" pitchFamily="34" charset="-120"/>
+              </a:rPr>
+              <a:t>/h-frame → /h-verify — full cycle for algorithm choice, architecture, numerical-method commitments you will publish on top of</a:t>
+            </a:r>
+            <a:endParaRPr lang="en-US" sz="1600" dirty="0"/>
+          </a:p>
+          <a:p>
+            <a:pPr indent="0" marL="0">
+              <a:spcAft>
+                <a:spcPts val="400"/>
+              </a:spcAft>
+              <a:buNone/>
+            </a:pPr>
+            <a:r>
+              <a:rPr lang="en-US" sz="700" dirty="0">
+                <a:solidFill>
+                  <a:srgbClr val="000000"/>
+                </a:solidFill>
+                <a:latin typeface="Inter" pitchFamily="34" charset="0"/>
+                <a:ea typeface="Inter" pitchFamily="34" charset="-122"/>
+                <a:cs typeface="Inter" pitchFamily="34" charset="-120"/>
+              </a:rPr>
+              <a:t> </a:t>
+            </a:r>
+            <a:endParaRPr lang="en-US" sz="1600" dirty="0"/>
+          </a:p>
+          <a:p>
+            <a:pPr indent="0" marL="0">
+              <a:spcAft>
+                <a:spcPts val="400"/>
+              </a:spcAft>
+              <a:buNone/>
+            </a:pPr>
+            <a:r>
+              <a:rPr lang="en-US" sz="1300" i="1" dirty="0">
+                <a:solidFill>
+                  <a:srgbClr val="888888"/>
+                </a:solidFill>
+                <a:latin typeface="Inter" pitchFamily="34" charset="0"/>
+                <a:ea typeface="Inter" pitchFamily="34" charset="-122"/>
+                <a:cs typeface="Inter" pitchFamily="34" charset="-120"/>
+              </a:rPr>
+              <a:t>Compatible with Cursor, Gemini CLI, Codex / Air, JetBrains Air. Full command table in the cheatsheet.</a:t>
+            </a:r>
+            <a:endParaRPr lang="en-US" sz="1600" dirty="0"/>
+          </a:p>
+        </p:txBody>
+      </p:sp>
+      <p:sp>
+        <p:nvSpPr>
+          <p:cNvPr id="6" name="Text 4"/>
+          <p:cNvSpPr/>
+          <p:nvPr/>
+        </p:nvSpPr>
+        <p:spPr>
+          <a:xfrm>
+            <a:off x="914400" y="6400800"/>
+            <a:ext cx="1645920" cy="365760"/>
+          </a:xfrm>
+          <a:prstGeom prst="rect">
+            <a:avLst/>
+          </a:prstGeom>
+          <a:noFill/>
+          <a:ln/>
+        </p:spPr>
+        <p:txBody>
+          <a:bodyPr wrap="square" rtlCol="0" anchor="ctr"/>
+          <a:lstStyle/>
+          <a:p>
+            <a:pPr algn="l" indent="0" marL="0">
+              <a:buNone/>
+            </a:pPr>
+            <a:r>
+              <a:rPr lang="en-US" sz="1100" dirty="0">
+                <a:solidFill>
+                  <a:srgbClr val="888888"/>
+                </a:solidFill>
+                <a:latin typeface="Inter" pitchFamily="34" charset="0"/>
+                <a:ea typeface="Inter" pitchFamily="34" charset="-122"/>
+                <a:cs typeface="Inter" pitchFamily="34" charset="-120"/>
+              </a:rPr>
+              <a:t>NumeriCor GmbH</a:t>
+            </a:r>
+            <a:endParaRPr lang="en-US" sz="1100" dirty="0"/>
+          </a:p>
+        </p:txBody>
+      </p:sp>
+      <p:sp>
+        <p:nvSpPr>
+          <p:cNvPr id="7" name="Text 5"/>
+          <p:cNvSpPr/>
+          <p:nvPr/>
+        </p:nvSpPr>
+        <p:spPr>
+          <a:xfrm>
+            <a:off x="11064240" y="6400800"/>
+            <a:ext cx="640080" cy="365760"/>
+          </a:xfrm>
+          <a:prstGeom prst="rect">
+            <a:avLst/>
+          </a:prstGeom>
+          <a:noFill/>
+          <a:ln/>
+        </p:spPr>
+        <p:txBody>
+          <a:bodyPr wrap="square" rtlCol="0" anchor="ctr"/>
+          <a:lstStyle/>
+          <a:p>
+            <a:pPr algn="r" indent="0" marL="0">
+              <a:buNone/>
+            </a:pPr>
+            <a:r>
+              <a:rPr lang="en-US" sz="1100" dirty="0">
+                <a:solidFill>
+                  <a:srgbClr val="CCCCCC"/>
+                </a:solidFill>
+                <a:latin typeface="Inter" pitchFamily="34" charset="0"/>
+                <a:ea typeface="Inter" pitchFamily="34" charset="-122"/>
+                <a:cs typeface="Inter" pitchFamily="34" charset="-120"/>
+              </a:rPr>
+              <a:t>23</a:t>
+            </a:r>
+            <a:endParaRPr lang="en-US" sz="1100" dirty="0"/>
+          </a:p>
+        </p:txBody>
+      </p:sp>
+    </p:spTree>
+  </p:cSld>
+  <p:clrMapOvr>
+    <a:masterClrMapping/>
+  </p:clrMapOvr>
+</p:sld>
+</file>
+
+<file path=ppt/slides/slide24.xml><?xml version="1.0" encoding="utf-8"?>
+<p:sld xmlns:a="http://schemas.openxmlformats.org/drawingml/2006/main" xmlns:r="http://schemas.openxmlformats.org/officeDocument/2006/relationships" xmlns:p="http://schemas.openxmlformats.org/presentationml/2006/main">
+  <p:cSld name="Slide 24">
     <p:bg>
       <p:bgPr>
         <a:solidFill>
@@ -10665,7 +11142,7 @@
                 <a:ea typeface="Inter" pitchFamily="34" charset="-122"/>
                 <a:cs typeface="Inter" pitchFamily="34" charset="-120"/>
               </a:rPr>
-              <a:t>23</a:t>
+              <a:t>24</a:t>
             </a:r>
             <a:endParaRPr lang="en-US" sz="24000" dirty="0"/>
           </a:p>
@@ -10816,490 +11293,6 @@
               <a:rPr lang="en-US" sz="1100" dirty="0">
                 <a:solidFill>
                   <a:srgbClr val="555555"/>
-                </a:solidFill>
-                <a:latin typeface="Inter" pitchFamily="34" charset="0"/>
-                <a:ea typeface="Inter" pitchFamily="34" charset="-122"/>
-                <a:cs typeface="Inter" pitchFamily="34" charset="-120"/>
-              </a:rPr>
-              <a:t>23</a:t>
-            </a:r>
-            <a:endParaRPr lang="en-US" sz="1100" dirty="0"/>
-          </a:p>
-        </p:txBody>
-      </p:sp>
-    </p:spTree>
-  </p:cSld>
-  <p:clrMapOvr>
-    <a:masterClrMapping/>
-  </p:clrMapOvr>
-</p:sld>
-</file>
-
-<file path=ppt/slides/slide24.xml><?xml version="1.0" encoding="utf-8"?>
-<p:sld xmlns:a="http://schemas.openxmlformats.org/drawingml/2006/main" xmlns:r="http://schemas.openxmlformats.org/officeDocument/2006/relationships" xmlns:p="http://schemas.openxmlformats.org/presentationml/2006/main">
-  <p:cSld name="Slide 24">
-    <p:bg>
-      <p:bgPr>
-        <a:solidFill>
-          <a:srgbClr val="FFFFFF"/>
-        </a:solidFill>
-      </p:bgPr>
-    </p:bg>
-    <p:spTree>
-      <p:nvGrpSpPr>
-        <p:cNvPr id="1" name=""/>
-        <p:cNvGrpSpPr/>
-        <p:nvPr/>
-      </p:nvGrpSpPr>
-      <p:grpSpPr>
-        <a:xfrm>
-          <a:off x="0" y="0"/>
-          <a:ext cx="0" cy="0"/>
-          <a:chOff x="0" y="0"/>
-          <a:chExt cx="0" cy="0"/>
-        </a:xfrm>
-      </p:grpSpPr>
-      <p:sp>
-        <p:nvSpPr>
-          <p:cNvPr id="2" name="Text 0"/>
-          <p:cNvSpPr/>
-          <p:nvPr/>
-        </p:nvSpPr>
-        <p:spPr>
-          <a:xfrm>
-            <a:off x="914400" y="438912"/>
-            <a:ext cx="10332720" cy="621792"/>
-          </a:xfrm>
-          <a:prstGeom prst="rect">
-            <a:avLst/>
-          </a:prstGeom>
-          <a:noFill/>
-          <a:ln/>
-        </p:spPr>
-        <p:txBody>
-          <a:bodyPr wrap="square" lIns="0" tIns="0" rIns="0" bIns="0" rtlCol="0" anchor="ctr"/>
-          <a:lstStyle/>
-          <a:p>
-            <a:pPr indent="0" marL="0">
-              <a:buNone/>
-            </a:pPr>
-            <a:r>
-              <a:rPr lang="en-US" sz="3000" b="1" dirty="0">
-                <a:solidFill>
-                  <a:srgbClr val="000000"/>
-                </a:solidFill>
-                <a:latin typeface="Inter" pitchFamily="34" charset="0"/>
-                <a:ea typeface="Inter" pitchFamily="34" charset="-122"/>
-                <a:cs typeface="Inter" pitchFamily="34" charset="-120"/>
-              </a:rPr>
-              <a:t>What is Beads?</a:t>
-            </a:r>
-            <a:endParaRPr lang="en-US" sz="3000" dirty="0"/>
-          </a:p>
-        </p:txBody>
-      </p:sp>
-      <p:sp>
-        <p:nvSpPr>
-          <p:cNvPr id="3" name="Shape 1"/>
-          <p:cNvSpPr/>
-          <p:nvPr/>
-        </p:nvSpPr>
-        <p:spPr>
-          <a:xfrm>
-            <a:off x="914400" y="1115568"/>
-            <a:ext cx="10332720" cy="20117"/>
-          </a:xfrm>
-          <a:prstGeom prst="rect">
-            <a:avLst/>
-          </a:prstGeom>
-          <a:solidFill>
-            <a:srgbClr val="E4E4E4"/>
-          </a:solidFill>
-          <a:ln w="12700">
-            <a:solidFill>
-              <a:srgbClr val="E4E4E4"/>
-            </a:solidFill>
-            <a:prstDash val="solid"/>
-          </a:ln>
-        </p:spPr>
-      </p:sp>
-      <p:sp>
-        <p:nvSpPr>
-          <p:cNvPr id="4" name="Text 2"/>
-          <p:cNvSpPr/>
-          <p:nvPr/>
-        </p:nvSpPr>
-        <p:spPr>
-          <a:xfrm>
-            <a:off x="914400" y="1188720"/>
-            <a:ext cx="10332720" cy="347472"/>
-          </a:xfrm>
-          <a:prstGeom prst="rect">
-            <a:avLst/>
-          </a:prstGeom>
-          <a:noFill/>
-          <a:ln/>
-        </p:spPr>
-        <p:txBody>
-          <a:bodyPr wrap="square" lIns="0" tIns="0" rIns="0" bIns="0" rtlCol="0" anchor="ctr"/>
-          <a:lstStyle/>
-          <a:p>
-            <a:pPr indent="0" marL="0">
-              <a:buNone/>
-            </a:pPr>
-            <a:r>
-              <a:rPr lang="en-US" sz="1500" dirty="0">
-                <a:solidFill>
-                  <a:srgbClr val="888888"/>
-                </a:solidFill>
-                <a:latin typeface="Inter" pitchFamily="34" charset="0"/>
-                <a:ea typeface="Inter" pitchFamily="34" charset="-122"/>
-                <a:cs typeface="Inter" pitchFamily="34" charset="-120"/>
-              </a:rPr>
-              <a:t>A graph issue tracker that Claude Code manages for you</a:t>
-            </a:r>
-            <a:endParaRPr lang="en-US" sz="1500" dirty="0"/>
-          </a:p>
-        </p:txBody>
-      </p:sp>
-      <p:sp>
-        <p:nvSpPr>
-          <p:cNvPr id="5" name="Text 3"/>
-          <p:cNvSpPr/>
-          <p:nvPr/>
-        </p:nvSpPr>
-        <p:spPr>
-          <a:xfrm>
-            <a:off x="914400" y="1627632"/>
-            <a:ext cx="10332720" cy="4681728"/>
-          </a:xfrm>
-          <a:prstGeom prst="rect">
-            <a:avLst/>
-          </a:prstGeom>
-          <a:noFill/>
-          <a:ln/>
-        </p:spPr>
-        <p:txBody>
-          <a:bodyPr wrap="square" lIns="0" tIns="0" rIns="0" bIns="0" rtlCol="0" anchor="t"/>
-          <a:lstStyle/>
-          <a:p>
-            <a:pPr indent="0" marL="0">
-              <a:spcAft>
-                <a:spcPts val="400"/>
-              </a:spcAft>
-              <a:buNone/>
-            </a:pPr>
-            <a:r>
-              <a:rPr lang="en-US" sz="1600" dirty="0">
-                <a:solidFill>
-                  <a:srgbClr val="000000"/>
-                </a:solidFill>
-                <a:latin typeface="Inter" pitchFamily="34" charset="0"/>
-                <a:ea typeface="Inter" pitchFamily="34" charset="-122"/>
-                <a:cs typeface="Inter" pitchFamily="34" charset="-120"/>
-              </a:rPr>
-              <a:t>Beads (bd) replaces flat TODO lists with a dependency-aware graph backed by Dolt, a version-controlled SQL database. Once set up, Claude Code handles all issue tracking automatically—you rarely touch bd commands yourself.</a:t>
-            </a:r>
-            <a:endParaRPr lang="en-US" sz="1600" dirty="0"/>
-          </a:p>
-          <a:p>
-            <a:pPr indent="0" marL="0">
-              <a:spcAft>
-                <a:spcPts val="400"/>
-              </a:spcAft>
-              <a:buNone/>
-            </a:pPr>
-            <a:r>
-              <a:rPr lang="en-US" sz="700" dirty="0">
-                <a:solidFill>
-                  <a:srgbClr val="000000"/>
-                </a:solidFill>
-                <a:latin typeface="Inter" pitchFamily="34" charset="0"/>
-                <a:ea typeface="Inter" pitchFamily="34" charset="-122"/>
-                <a:cs typeface="Inter" pitchFamily="34" charset="-120"/>
-              </a:rPr>
-              <a:t> </a:t>
-            </a:r>
-            <a:endParaRPr lang="en-US" sz="1600" dirty="0"/>
-          </a:p>
-          <a:p>
-            <a:pPr indent="0" marL="0">
-              <a:spcAft>
-                <a:spcPts val="400"/>
-              </a:spcAft>
-              <a:buNone/>
-            </a:pPr>
-            <a:r>
-              <a:rPr lang="en-US" sz="1700" b="1" dirty="0">
-                <a:solidFill>
-                  <a:srgbClr val="000000"/>
-                </a:solidFill>
-                <a:latin typeface="Inter" pitchFamily="34" charset="0"/>
-                <a:ea typeface="Inter" pitchFamily="34" charset="-122"/>
-                <a:cs typeface="Inter" pitchFamily="34" charset="-120"/>
-              </a:rPr>
-              <a:t>Why Beads?</a:t>
-            </a:r>
-            <a:endParaRPr lang="en-US" sz="1600" dirty="0"/>
-          </a:p>
-          <a:p>
-            <a:pPr marL="342900" indent="-342900">
-              <a:spcAft>
-                <a:spcPts val="400"/>
-              </a:spcAft>
-              <a:buSzPct val="100000"/>
-              <a:buChar char="→"/>
-            </a:pPr>
-            <a:r>
-              <a:rPr lang="en-US" sz="1600" dirty="0">
-                <a:solidFill>
-                  <a:srgbClr val="000000"/>
-                </a:solidFill>
-                <a:latin typeface="Inter" pitchFamily="34" charset="0"/>
-                <a:ea typeface="Inter" pitchFamily="34" charset="-122"/>
-                <a:cs typeface="Inter" pitchFamily="34" charset="-120"/>
-              </a:rPr>
-              <a:t>Hash-based task IDs prevent merge collisions in multi-agent work</a:t>
-            </a:r>
-            <a:endParaRPr lang="en-US" sz="1600" dirty="0"/>
-          </a:p>
-          <a:p>
-            <a:pPr marL="342900" indent="-342900">
-              <a:spcAft>
-                <a:spcPts val="400"/>
-              </a:spcAft>
-              <a:buSzPct val="100000"/>
-              <a:buChar char="→"/>
-            </a:pPr>
-            <a:r>
-              <a:rPr lang="en-US" sz="1600" dirty="0">
-                <a:solidFill>
-                  <a:srgbClr val="000000"/>
-                </a:solidFill>
-                <a:latin typeface="Inter" pitchFamily="34" charset="0"/>
-                <a:ea typeface="Inter" pitchFamily="34" charset="-122"/>
-                <a:cs typeface="Inter" pitchFamily="34" charset="-120"/>
-              </a:rPr>
-              <a:t>Dependency tracking and blocker detection built in</a:t>
-            </a:r>
-            <a:endParaRPr lang="en-US" sz="1600" dirty="0"/>
-          </a:p>
-          <a:p>
-            <a:pPr marL="342900" indent="-342900">
-              <a:spcAft>
-                <a:spcPts val="400"/>
-              </a:spcAft>
-              <a:buSzPct val="100000"/>
-              <a:buChar char="→"/>
-            </a:pPr>
-            <a:r>
-              <a:rPr lang="en-US" sz="1600" dirty="0">
-                <a:solidFill>
-                  <a:srgbClr val="000000"/>
-                </a:solidFill>
-                <a:latin typeface="Inter" pitchFamily="34" charset="0"/>
-                <a:ea typeface="Inter" pitchFamily="34" charset="-122"/>
-                <a:cs typeface="Inter" pitchFamily="34" charset="-120"/>
-              </a:rPr>
-              <a:t>Atomic task claiming — bd update &lt;id&gt; --claim prevents two agents grabbing the same task</a:t>
-            </a:r>
-            <a:endParaRPr lang="en-US" sz="1600" dirty="0"/>
-          </a:p>
-          <a:p>
-            <a:pPr marL="342900" indent="-342900">
-              <a:spcAft>
-                <a:spcPts val="400"/>
-              </a:spcAft>
-              <a:buSzPct val="100000"/>
-              <a:buChar char="→"/>
-            </a:pPr>
-            <a:r>
-              <a:rPr lang="en-US" sz="1600" dirty="0">
-                <a:solidFill>
-                  <a:srgbClr val="000000"/>
-                </a:solidFill>
-                <a:latin typeface="Inter" pitchFamily="34" charset="0"/>
-                <a:ea typeface="Inter" pitchFamily="34" charset="-122"/>
-                <a:cs typeface="Inter" pitchFamily="34" charset="-120"/>
-              </a:rPr>
-              <a:t>bd prime feeds open issues and context into Claude at session start</a:t>
-            </a:r>
-            <a:endParaRPr lang="en-US" sz="1600" dirty="0"/>
-          </a:p>
-          <a:p>
-            <a:pPr indent="0" marL="0">
-              <a:spcAft>
-                <a:spcPts val="400"/>
-              </a:spcAft>
-              <a:buNone/>
-            </a:pPr>
-            <a:r>
-              <a:rPr lang="en-US" sz="700" dirty="0">
-                <a:solidFill>
-                  <a:srgbClr val="000000"/>
-                </a:solidFill>
-                <a:latin typeface="Inter" pitchFamily="34" charset="0"/>
-                <a:ea typeface="Inter" pitchFamily="34" charset="-122"/>
-                <a:cs typeface="Inter" pitchFamily="34" charset="-120"/>
-              </a:rPr>
-              <a:t> </a:t>
-            </a:r>
-            <a:endParaRPr lang="en-US" sz="1600" dirty="0"/>
-          </a:p>
-          <a:p>
-            <a:pPr indent="0" marL="0">
-              <a:spcAft>
-                <a:spcPts val="400"/>
-              </a:spcAft>
-              <a:buNone/>
-            </a:pPr>
-            <a:r>
-              <a:rPr lang="en-US" sz="1700" b="1" dirty="0">
-                <a:solidFill>
-                  <a:srgbClr val="000000"/>
-                </a:solidFill>
-                <a:latin typeface="Inter" pitchFamily="34" charset="0"/>
-                <a:ea typeface="Inter" pitchFamily="34" charset="-122"/>
-                <a:cs typeface="Inter" pitchFamily="34" charset="-120"/>
-              </a:rPr>
-              <a:t>Storage model</a:t>
-            </a:r>
-            <a:endParaRPr lang="en-US" sz="1600" dirty="0"/>
-          </a:p>
-          <a:p>
-            <a:pPr indent="0" marL="0">
-              <a:spcAft>
-                <a:spcPts val="400"/>
-              </a:spcAft>
-              <a:buNone/>
-            </a:pPr>
-            <a:r>
-              <a:rPr lang="en-US" sz="1600" dirty="0">
-                <a:solidFill>
-                  <a:srgbClr val="000000"/>
-                </a:solidFill>
-                <a:latin typeface="Inter" pitchFamily="34" charset="0"/>
-                <a:ea typeface="Inter" pitchFamily="34" charset="-122"/>
-                <a:cs typeface="Inter" pitchFamily="34" charset="-120"/>
-              </a:rPr>
-              <a:t>Issues live in a local Dolt database under .beads/ — gitignored by default. For solo work that’s all you need. Teams sync via a separate Dolt remote (DoltHub, S3, GCS). The database is independent of your git history.</a:t>
-            </a:r>
-            <a:endParaRPr lang="en-US" sz="1600" dirty="0"/>
-          </a:p>
-          <a:p>
-            <a:pPr indent="0" marL="0">
-              <a:spcAft>
-                <a:spcPts val="400"/>
-              </a:spcAft>
-              <a:buNone/>
-            </a:pPr>
-            <a:r>
-              <a:rPr lang="en-US" sz="700" dirty="0">
-                <a:solidFill>
-                  <a:srgbClr val="000000"/>
-                </a:solidFill>
-                <a:latin typeface="Inter" pitchFamily="34" charset="0"/>
-                <a:ea typeface="Inter" pitchFamily="34" charset="-122"/>
-                <a:cs typeface="Inter" pitchFamily="34" charset="-120"/>
-              </a:rPr>
-              <a:t> </a:t>
-            </a:r>
-            <a:endParaRPr lang="en-US" sz="1600" dirty="0"/>
-          </a:p>
-          <a:p>
-            <a:pPr indent="0" marL="0">
-              <a:spcAft>
-                <a:spcPts val="400"/>
-              </a:spcAft>
-              <a:buNone/>
-            </a:pPr>
-            <a:r>
-              <a:rPr lang="en-US" sz="1700" b="1" dirty="0">
-                <a:solidFill>
-                  <a:srgbClr val="000000"/>
-                </a:solidFill>
-                <a:latin typeface="Inter" pitchFamily="34" charset="0"/>
-                <a:ea typeface="Inter" pitchFamily="34" charset="-122"/>
-                <a:cs typeface="Inter" pitchFamily="34" charset="-120"/>
-              </a:rPr>
-              <a:t>The key idea</a:t>
-            </a:r>
-            <a:endParaRPr lang="en-US" sz="1600" dirty="0"/>
-          </a:p>
-          <a:p>
-            <a:pPr indent="0" marL="0">
-              <a:spcAft>
-                <a:spcPts val="400"/>
-              </a:spcAft>
-              <a:buNone/>
-            </a:pPr>
-            <a:r>
-              <a:rPr lang="en-US" sz="1600" dirty="0">
-                <a:solidFill>
-                  <a:srgbClr val="000000"/>
-                </a:solidFill>
-                <a:latin typeface="Inter" pitchFamily="34" charset="0"/>
-                <a:ea typeface="Inter" pitchFamily="34" charset="-122"/>
-                <a:cs typeface="Inter" pitchFamily="34" charset="-120"/>
-              </a:rPr>
-              <a:t>You tell Claude what to build. Claude creates tasks in Beads, tracks progress, closes issues. Beads is the agent’s memory, not another tool for you to manage.</a:t>
-            </a:r>
-            <a:endParaRPr lang="en-US" sz="1600" dirty="0"/>
-          </a:p>
-        </p:txBody>
-      </p:sp>
-      <p:pic>
-        <p:nvPicPr>
-          <p:cNvPr id="6" name="Image 0" descr="/sessions/gracious-blissful-pasteur/mnt/claude_code_presentation/numericor.png">    </p:cNvPr>
-          <p:cNvPicPr>
-            <a:picLocks noChangeAspect="1"/>
-          </p:cNvPicPr>
-          <p:nvPr/>
-        </p:nvPicPr>
-        <p:blipFill>
-          <a:blip r:embed="rId1"/>
-          <a:stretch>
-            <a:fillRect/>
-          </a:stretch>
-        </p:blipFill>
-        <p:spPr>
-          <a:xfrm>
-            <a:off x="914400" y="6419088"/>
-            <a:ext cx="1371600" cy="214884"/>
-          </a:xfrm>
-          <a:prstGeom prst="rect">
-            <a:avLst/>
-          </a:prstGeom>
-        </p:spPr>
-      </p:pic>
-      <p:sp>
-        <p:nvSpPr>
-          <p:cNvPr id="7" name="Text 4"/>
-          <p:cNvSpPr/>
-          <p:nvPr/>
-        </p:nvSpPr>
-        <p:spPr>
-          <a:xfrm>
-            <a:off x="11064240" y="6400800"/>
-            <a:ext cx="640080" cy="365760"/>
-          </a:xfrm>
-          <a:prstGeom prst="rect">
-            <a:avLst/>
-          </a:prstGeom>
-          <a:noFill/>
-          <a:ln/>
-        </p:spPr>
-        <p:txBody>
-          <a:bodyPr wrap="square" rtlCol="0" anchor="ctr"/>
-          <a:lstStyle/>
-          <a:p>
-            <a:pPr algn="r" indent="0" marL="0">
-              <a:buNone/>
-            </a:pPr>
-            <a:r>
-              <a:rPr lang="en-US" sz="1100" dirty="0">
-                <a:solidFill>
-                  <a:srgbClr val="CCCCCC"/>
                 </a:solidFill>
                 <a:latin typeface="Inter" pitchFamily="34" charset="0"/>
                 <a:ea typeface="Inter" pitchFamily="34" charset="-122"/>
@@ -11376,7 +11369,7 @@
                 <a:ea typeface="Inter" pitchFamily="34" charset="-122"/>
                 <a:cs typeface="Inter" pitchFamily="34" charset="-120"/>
               </a:rPr>
-              <a:t>Setting Up Beads — Solo</a:t>
+              <a:t>What is Beads?</a:t>
             </a:r>
             <a:endParaRPr lang="en-US" sz="3000" dirty="0"/>
           </a:p>
@@ -11440,7 +11433,7 @@
                 <a:ea typeface="Inter" pitchFamily="34" charset="-122"/>
                 <a:cs typeface="Inter" pitchFamily="34" charset="-120"/>
               </a:rPr>
-              <a:t>Personal projects: install, init, done</a:t>
+              <a:t>A graph issue tracker that Claude Code manages for you</a:t>
             </a:r>
             <a:endParaRPr lang="en-US" sz="1500" dirty="0"/>
           </a:p>
@@ -11474,6 +11467,46 @@
               <a:buNone/>
             </a:pPr>
             <a:r>
+              <a:rPr lang="en-US" sz="1600" dirty="0">
+                <a:solidFill>
+                  <a:srgbClr val="000000"/>
+                </a:solidFill>
+                <a:latin typeface="Inter" pitchFamily="34" charset="0"/>
+                <a:ea typeface="Inter" pitchFamily="34" charset="-122"/>
+                <a:cs typeface="Inter" pitchFamily="34" charset="-120"/>
+              </a:rPr>
+              <a:t>Beads (bd) replaces flat TODO lists with a dependency-aware graph backed by Dolt, a version-controlled SQL database. Once set up, Claude Code handles all issue tracking automatically—you rarely touch bd commands yourself.</a:t>
+            </a:r>
+            <a:endParaRPr lang="en-US" sz="1600" dirty="0"/>
+          </a:p>
+          <a:p>
+            <a:pPr indent="0" marL="0">
+              <a:spcAft>
+                <a:spcPts val="400"/>
+              </a:spcAft>
+              <a:buNone/>
+            </a:pPr>
+            <a:r>
+              <a:rPr lang="en-US" sz="700" dirty="0">
+                <a:solidFill>
+                  <a:srgbClr val="000000"/>
+                </a:solidFill>
+                <a:latin typeface="Inter" pitchFamily="34" charset="0"/>
+                <a:ea typeface="Inter" pitchFamily="34" charset="-122"/>
+                <a:cs typeface="Inter" pitchFamily="34" charset="-120"/>
+              </a:rPr>
+              <a:t> </a:t>
+            </a:r>
+            <a:endParaRPr lang="en-US" sz="1600" dirty="0"/>
+          </a:p>
+          <a:p>
+            <a:pPr indent="0" marL="0">
+              <a:spcAft>
+                <a:spcPts val="400"/>
+              </a:spcAft>
+              <a:buNone/>
+            </a:pPr>
+            <a:r>
               <a:rPr lang="en-US" sz="1700" b="1" dirty="0">
                 <a:solidFill>
                   <a:srgbClr val="000000"/>
@@ -11482,153 +11515,7 @@
                 <a:ea typeface="Inter" pitchFamily="34" charset="-122"/>
                 <a:cs typeface="Inter" pitchFamily="34" charset="-120"/>
               </a:rPr>
-              <a:t>Step 1: Install (Dolt is bundled — no separate install)</a:t>
-            </a:r>
-            <a:endParaRPr lang="en-US" sz="1600" dirty="0"/>
-          </a:p>
-          <a:p>
-            <a:pPr indent="0" marL="0">
-              <a:spcAft>
-                <a:spcPts val="400"/>
-              </a:spcAft>
-              <a:buNone/>
-            </a:pPr>
-            <a:r>
-              <a:rPr lang="en-US" sz="1300" dirty="0">
-                <a:solidFill>
-                  <a:srgbClr val="1A1A1A"/>
-                </a:solidFill>
-                <a:highlight>
-                  <a:srgbClr val="EFEFEF"/>
-                </a:highlight>
-                <a:latin typeface="Consolas" pitchFamily="34" charset="0"/>
-                <a:ea typeface="Consolas" pitchFamily="34" charset="-122"/>
-                <a:cs typeface="Consolas" pitchFamily="34" charset="-120"/>
-              </a:rPr>
-              <a:t> curl -sSL https://raw.githubusercontent.com/steveyegge/beads/main/scripts/install.sh | bash </a:t>
-            </a:r>
-            <a:endParaRPr lang="en-US" sz="1600" dirty="0"/>
-          </a:p>
-          <a:p>
-            <a:pPr indent="0" marL="0">
-              <a:spcAft>
-                <a:spcPts val="400"/>
-              </a:spcAft>
-              <a:buNone/>
-            </a:pPr>
-            <a:r>
-              <a:rPr lang="en-US" sz="700" dirty="0">
-                <a:solidFill>
-                  <a:srgbClr val="000000"/>
-                </a:solidFill>
-                <a:latin typeface="Inter" pitchFamily="34" charset="0"/>
-                <a:ea typeface="Inter" pitchFamily="34" charset="-122"/>
-                <a:cs typeface="Inter" pitchFamily="34" charset="-120"/>
-              </a:rPr>
-              <a:t> </a:t>
-            </a:r>
-            <a:endParaRPr lang="en-US" sz="1600" dirty="0"/>
-          </a:p>
-          <a:p>
-            <a:pPr indent="0" marL="0">
-              <a:spcAft>
-                <a:spcPts val="400"/>
-              </a:spcAft>
-              <a:buNone/>
-            </a:pPr>
-            <a:r>
-              <a:rPr lang="en-US" sz="1700" b="1" dirty="0">
-                <a:solidFill>
-                  <a:srgbClr val="000000"/>
-                </a:solidFill>
-                <a:latin typeface="Inter" pitchFamily="34" charset="0"/>
-                <a:ea typeface="Inter" pitchFamily="34" charset="-122"/>
-                <a:cs typeface="Inter" pitchFamily="34" charset="-120"/>
-              </a:rPr>
-              <a:t>Step 2: Initialize in your project</a:t>
-            </a:r>
-            <a:endParaRPr lang="en-US" sz="1600" dirty="0"/>
-          </a:p>
-          <a:p>
-            <a:pPr indent="0" marL="0">
-              <a:spcAft>
-                <a:spcPts val="400"/>
-              </a:spcAft>
-              <a:buNone/>
-            </a:pPr>
-            <a:r>
-              <a:rPr lang="en-US" sz="1300" dirty="0">
-                <a:solidFill>
-                  <a:srgbClr val="1A1A1A"/>
-                </a:solidFill>
-                <a:highlight>
-                  <a:srgbClr val="EFEFEF"/>
-                </a:highlight>
-                <a:latin typeface="Consolas" pitchFamily="34" charset="0"/>
-                <a:ea typeface="Consolas" pitchFamily="34" charset="-122"/>
-                <a:cs typeface="Consolas" pitchFamily="34" charset="-120"/>
-              </a:rPr>
-              <a:t> cd your-project &amp;&amp; bd init --quiet </a:t>
-            </a:r>
-            <a:endParaRPr lang="en-US" sz="1600" dirty="0"/>
-          </a:p>
-          <a:p>
-            <a:pPr indent="0" marL="0">
-              <a:spcAft>
-                <a:spcPts val="400"/>
-              </a:spcAft>
-              <a:buNone/>
-            </a:pPr>
-            <a:r>
-              <a:rPr lang="en-US" sz="1600" dirty="0">
-                <a:solidFill>
-                  <a:srgbClr val="000000"/>
-                </a:solidFill>
-                <a:latin typeface="Inter" pitchFamily="34" charset="0"/>
-                <a:ea typeface="Inter" pitchFamily="34" charset="-122"/>
-                <a:cs typeface="Inter" pitchFamily="34" charset="-120"/>
-              </a:rPr>
-              <a:t>Creates a .beads/ directory with a local Dolt database. This directory is gitignored — your issue data stays local, separate from your code history.</a:t>
-            </a:r>
-            <a:endParaRPr lang="en-US" sz="1600" dirty="0"/>
-          </a:p>
-          <a:p>
-            <a:pPr indent="0" marL="0">
-              <a:spcAft>
-                <a:spcPts val="400"/>
-              </a:spcAft>
-              <a:buNone/>
-            </a:pPr>
-            <a:r>
-              <a:rPr lang="en-US" sz="700" dirty="0">
-                <a:solidFill>
-                  <a:srgbClr val="000000"/>
-                </a:solidFill>
-                <a:latin typeface="Inter" pitchFamily="34" charset="0"/>
-                <a:ea typeface="Inter" pitchFamily="34" charset="-122"/>
-                <a:cs typeface="Inter" pitchFamily="34" charset="-120"/>
-              </a:rPr>
-              <a:t> </a:t>
-            </a:r>
-            <a:endParaRPr lang="en-US" sz="1600" dirty="0"/>
-          </a:p>
-          <a:p>
-            <a:pPr indent="0" marL="0">
-              <a:spcAft>
-                <a:spcPts val="400"/>
-              </a:spcAft>
-              <a:buNone/>
-            </a:pPr>
-            <a:r>
-              <a:rPr lang="en-US" sz="1700" b="1" dirty="0">
-                <a:solidFill>
-                  <a:srgbClr val="000000"/>
-                </a:solidFill>
-                <a:latin typeface="Inter" pitchFamily="34" charset="0"/>
-                <a:ea typeface="Inter" pitchFamily="34" charset="-122"/>
-                <a:cs typeface="Inter" pitchFamily="34" charset="-120"/>
-              </a:rPr>
-              <a:t>Step 3: Wire into Claude Code</a:t>
+              <a:t>Why Beads?</a:t>
             </a:r>
             <a:endParaRPr lang="en-US" sz="1600" dirty="0"/>
           </a:p>
@@ -11649,7 +11536,7 @@
                 <a:ea typeface="Inter" pitchFamily="34" charset="-122"/>
                 <a:cs typeface="Inter" pitchFamily="34" charset="-120"/>
               </a:rPr>
-              <a:t>CLAUDE.md — Beads auto-generates a project CLAUDE.md with issue tracking instructions</a:t>
+              <a:t>Hash-based task IDs prevent merge collisions in multi-agent work</a:t>
             </a:r>
             <a:endParaRPr lang="en-US" sz="1600" dirty="0"/>
           </a:p>
@@ -11670,19 +11557,200 @@
                 <a:ea typeface="Inter" pitchFamily="34" charset="-122"/>
                 <a:cs typeface="Inter" pitchFamily="34" charset="-120"/>
               </a:rPr>
-              <a:t>Plugin — /plugin marketplace add steveyegge/beads → /plugin install beads</a:t>
-            </a:r>
-            <a:endParaRPr lang="en-US" sz="1600" dirty="0"/>
-          </a:p>
-          <a:p>
-            <a:pPr indent="0" marL="0">
-              <a:spcAft>
-                <a:spcPts val="400"/>
-              </a:spcAft>
-              <a:buNone/>
-            </a:pPr>
-            <a:r>
-              <a:rPr lang="en-US" sz="1300" i="1" dirty="0">
+              <a:t>Dependency tracking and blocker detection built in</a:t>
+            </a:r>
+            <a:endParaRPr lang="en-US" sz="1600" dirty="0"/>
+          </a:p>
+          <a:p>
+            <a:pPr marL="342900" indent="-342900">
+              <a:spcAft>
+                <a:spcPts val="400"/>
+              </a:spcAft>
+              <a:buSzPct val="100000"/>
+              <a:buChar char="→"/>
+            </a:pPr>
+            <a:r>
+              <a:rPr lang="en-US" sz="1600" dirty="0">
+                <a:solidFill>
+                  <a:srgbClr val="000000"/>
+                </a:solidFill>
+                <a:latin typeface="Inter" pitchFamily="34" charset="0"/>
+                <a:ea typeface="Inter" pitchFamily="34" charset="-122"/>
+                <a:cs typeface="Inter" pitchFamily="34" charset="-120"/>
+              </a:rPr>
+              <a:t>Atomic task claiming — bd update &lt;id&gt; --claim prevents two agents grabbing the same task</a:t>
+            </a:r>
+            <a:endParaRPr lang="en-US" sz="1600" dirty="0"/>
+          </a:p>
+          <a:p>
+            <a:pPr marL="342900" indent="-342900">
+              <a:spcAft>
+                <a:spcPts val="400"/>
+              </a:spcAft>
+              <a:buSzPct val="100000"/>
+              <a:buChar char="→"/>
+            </a:pPr>
+            <a:r>
+              <a:rPr lang="en-US" sz="1600" dirty="0">
+                <a:solidFill>
+                  <a:srgbClr val="000000"/>
+                </a:solidFill>
+                <a:latin typeface="Inter" pitchFamily="34" charset="0"/>
+                <a:ea typeface="Inter" pitchFamily="34" charset="-122"/>
+                <a:cs typeface="Inter" pitchFamily="34" charset="-120"/>
+              </a:rPr>
+              <a:t>bd prime feeds open issues and context into Claude at session start</a:t>
+            </a:r>
+            <a:endParaRPr lang="en-US" sz="1600" dirty="0"/>
+          </a:p>
+          <a:p>
+            <a:pPr indent="0" marL="0">
+              <a:spcAft>
+                <a:spcPts val="400"/>
+              </a:spcAft>
+              <a:buNone/>
+            </a:pPr>
+            <a:r>
+              <a:rPr lang="en-US" sz="700" dirty="0">
+                <a:solidFill>
+                  <a:srgbClr val="000000"/>
+                </a:solidFill>
+                <a:latin typeface="Inter" pitchFamily="34" charset="0"/>
+                <a:ea typeface="Inter" pitchFamily="34" charset="-122"/>
+                <a:cs typeface="Inter" pitchFamily="34" charset="-120"/>
+              </a:rPr>
+              <a:t> </a:t>
+            </a:r>
+            <a:endParaRPr lang="en-US" sz="1600" dirty="0"/>
+          </a:p>
+          <a:p>
+            <a:pPr indent="0" marL="0">
+              <a:spcAft>
+                <a:spcPts val="400"/>
+              </a:spcAft>
+              <a:buNone/>
+            </a:pPr>
+            <a:r>
+              <a:rPr lang="en-US" sz="1700" b="1" dirty="0">
+                <a:solidFill>
+                  <a:srgbClr val="000000"/>
+                </a:solidFill>
+                <a:latin typeface="Inter" pitchFamily="34" charset="0"/>
+                <a:ea typeface="Inter" pitchFamily="34" charset="-122"/>
+                <a:cs typeface="Inter" pitchFamily="34" charset="-120"/>
+              </a:rPr>
+              <a:t>Storage model</a:t>
+            </a:r>
+            <a:endParaRPr lang="en-US" sz="1600" dirty="0"/>
+          </a:p>
+          <a:p>
+            <a:pPr indent="0" marL="0">
+              <a:spcAft>
+                <a:spcPts val="400"/>
+              </a:spcAft>
+              <a:buNone/>
+            </a:pPr>
+            <a:r>
+              <a:rPr lang="en-US" sz="1600" dirty="0">
+                <a:solidFill>
+                  <a:srgbClr val="000000"/>
+                </a:solidFill>
+                <a:latin typeface="Inter" pitchFamily="34" charset="0"/>
+                <a:ea typeface="Inter" pitchFamily="34" charset="-122"/>
+                <a:cs typeface="Inter" pitchFamily="34" charset="-120"/>
+              </a:rPr>
+              <a:t>Issues live in a local Dolt database under .beads/ — gitignored by default. For solo work that’s all you need. Teams sync via a separate Dolt remote (DoltHub, S3, GCS). The database is independent of your git history.</a:t>
+            </a:r>
+            <a:endParaRPr lang="en-US" sz="1600" dirty="0"/>
+          </a:p>
+          <a:p>
+            <a:pPr indent="0" marL="0">
+              <a:spcAft>
+                <a:spcPts val="400"/>
+              </a:spcAft>
+              <a:buNone/>
+            </a:pPr>
+            <a:r>
+              <a:rPr lang="en-US" sz="700" dirty="0">
+                <a:solidFill>
+                  <a:srgbClr val="000000"/>
+                </a:solidFill>
+                <a:latin typeface="Inter" pitchFamily="34" charset="0"/>
+                <a:ea typeface="Inter" pitchFamily="34" charset="-122"/>
+                <a:cs typeface="Inter" pitchFamily="34" charset="-120"/>
+              </a:rPr>
+              <a:t> </a:t>
+            </a:r>
+            <a:endParaRPr lang="en-US" sz="1600" dirty="0"/>
+          </a:p>
+          <a:p>
+            <a:pPr indent="0" marL="0">
+              <a:spcAft>
+                <a:spcPts val="400"/>
+              </a:spcAft>
+              <a:buNone/>
+            </a:pPr>
+            <a:r>
+              <a:rPr lang="en-US" sz="1700" b="1" dirty="0">
+                <a:solidFill>
+                  <a:srgbClr val="000000"/>
+                </a:solidFill>
+                <a:latin typeface="Inter" pitchFamily="34" charset="0"/>
+                <a:ea typeface="Inter" pitchFamily="34" charset="-122"/>
+                <a:cs typeface="Inter" pitchFamily="34" charset="-120"/>
+              </a:rPr>
+              <a:t>The key idea</a:t>
+            </a:r>
+            <a:endParaRPr lang="en-US" sz="1600" dirty="0"/>
+          </a:p>
+          <a:p>
+            <a:pPr indent="0" marL="0">
+              <a:spcAft>
+                <a:spcPts val="400"/>
+              </a:spcAft>
+              <a:buNone/>
+            </a:pPr>
+            <a:r>
+              <a:rPr lang="en-US" sz="1600" dirty="0">
+                <a:solidFill>
+                  <a:srgbClr val="000000"/>
+                </a:solidFill>
+                <a:latin typeface="Inter" pitchFamily="34" charset="0"/>
+                <a:ea typeface="Inter" pitchFamily="34" charset="-122"/>
+                <a:cs typeface="Inter" pitchFamily="34" charset="-120"/>
+              </a:rPr>
+              <a:t>You tell Claude what to build. Claude creates tasks in Beads, tracks progress, closes issues. Beads is the agent’s memory, not another tool for you to manage.</a:t>
+            </a:r>
+            <a:endParaRPr lang="en-US" sz="1600" dirty="0"/>
+          </a:p>
+        </p:txBody>
+      </p:sp>
+      <p:sp>
+        <p:nvSpPr>
+          <p:cNvPr id="6" name="Text 4"/>
+          <p:cNvSpPr/>
+          <p:nvPr/>
+        </p:nvSpPr>
+        <p:spPr>
+          <a:xfrm>
+            <a:off x="914400" y="6400800"/>
+            <a:ext cx="1645920" cy="365760"/>
+          </a:xfrm>
+          <a:prstGeom prst="rect">
+            <a:avLst/>
+          </a:prstGeom>
+          <a:noFill/>
+          <a:ln/>
+        </p:spPr>
+        <p:txBody>
+          <a:bodyPr wrap="square" rtlCol="0" anchor="ctr"/>
+          <a:lstStyle/>
+          <a:p>
+            <a:pPr algn="l" indent="0" marL="0">
+              <a:buNone/>
+            </a:pPr>
+            <a:r>
+              <a:rPr lang="en-US" sz="1100" dirty="0">
                 <a:solidFill>
                   <a:srgbClr val="888888"/>
                 </a:solidFill>
@@ -11690,79 +11758,15 @@
                 <a:ea typeface="Inter" pitchFamily="34" charset="-122"/>
                 <a:cs typeface="Inter" pitchFamily="34" charset="-120"/>
               </a:rPr>
-              <a:t>Plugin also needs uv: curl -LsSf https://astral.sh/uv/install.sh | sh</a:t>
-            </a:r>
-            <a:endParaRPr lang="en-US" sz="1600" dirty="0"/>
-          </a:p>
-          <a:p>
-            <a:pPr indent="0" marL="0">
-              <a:spcAft>
-                <a:spcPts val="400"/>
-              </a:spcAft>
-              <a:buNone/>
-            </a:pPr>
-            <a:r>
-              <a:rPr lang="en-US" sz="700" dirty="0">
-                <a:solidFill>
-                  <a:srgbClr val="000000"/>
-                </a:solidFill>
-                <a:latin typeface="Inter" pitchFamily="34" charset="0"/>
-                <a:ea typeface="Inter" pitchFamily="34" charset="-122"/>
-                <a:cs typeface="Inter" pitchFamily="34" charset="-120"/>
-              </a:rPr>
-              <a:t> </a:t>
-            </a:r>
-            <a:endParaRPr lang="en-US" sz="1600" dirty="0"/>
-          </a:p>
-          <a:p>
-            <a:pPr indent="0" marL="0">
-              <a:spcAft>
-                <a:spcPts val="400"/>
-              </a:spcAft>
-              <a:buNone/>
-            </a:pPr>
-            <a:r>
-              <a:rPr lang="en-US" sz="1300" i="1" dirty="0">
-                <a:solidFill>
-                  <a:srgbClr val="888888"/>
-                </a:solidFill>
-                <a:latin typeface="Inter" pitchFamily="34" charset="0"/>
-                <a:ea typeface="Inter" pitchFamily="34" charset="-122"/>
-                <a:cs typeface="Inter" pitchFamily="34" charset="-120"/>
-              </a:rPr>
-              <a:t>That’s it. Claude creates/updates/closes issues as it works. You rarely touch bd yourself.</a:t>
-            </a:r>
-            <a:endParaRPr lang="en-US" sz="1600" dirty="0"/>
-          </a:p>
-        </p:txBody>
-      </p:sp>
-      <p:pic>
-        <p:nvPicPr>
-          <p:cNvPr id="6" name="Image 0" descr="/sessions/gracious-blissful-pasteur/mnt/claude_code_presentation/numericor.png">    </p:cNvPr>
-          <p:cNvPicPr>
-            <a:picLocks noChangeAspect="1"/>
-          </p:cNvPicPr>
-          <p:nvPr/>
-        </p:nvPicPr>
-        <p:blipFill>
-          <a:blip r:embed="rId1"/>
-          <a:stretch>
-            <a:fillRect/>
-          </a:stretch>
-        </p:blipFill>
-        <p:spPr>
-          <a:xfrm>
-            <a:off x="914400" y="6419088"/>
-            <a:ext cx="1371600" cy="214884"/>
-          </a:xfrm>
-          <a:prstGeom prst="rect">
-            <a:avLst/>
-          </a:prstGeom>
-        </p:spPr>
-      </p:pic>
-      <p:sp>
-        <p:nvSpPr>
-          <p:cNvPr id="7" name="Text 4"/>
+              <a:t>NumeriCor GmbH</a:t>
+            </a:r>
+            <a:endParaRPr lang="en-US" sz="1100" dirty="0"/>
+          </a:p>
+        </p:txBody>
+      </p:sp>
+      <p:sp>
+        <p:nvSpPr>
+          <p:cNvPr id="7" name="Text 5"/>
           <p:cNvSpPr/>
           <p:nvPr/>
         </p:nvSpPr>
@@ -11864,7 +11868,7 @@
                 <a:ea typeface="Inter" pitchFamily="34" charset="-122"/>
                 <a:cs typeface="Inter" pitchFamily="34" charset="-120"/>
               </a:rPr>
-              <a:t>Setting Up Beads — Teams</a:t>
+              <a:t>Setting Up Beads — Solo</a:t>
             </a:r>
             <a:endParaRPr lang="en-US" sz="3000" dirty="0"/>
           </a:p>
@@ -11928,7 +11932,7 @@
                 <a:ea typeface="Inter" pitchFamily="34" charset="-122"/>
                 <a:cs typeface="Inter" pitchFamily="34" charset="-120"/>
               </a:rPr>
-              <a:t>bd init --team is all you need</a:t>
+              <a:t>Personal projects: install, init, done</a:t>
             </a:r>
             <a:endParaRPr lang="en-US" sz="1500" dirty="0"/>
           </a:p>
@@ -11970,7 +11974,7 @@
                 <a:ea typeface="Inter" pitchFamily="34" charset="-122"/>
                 <a:cs typeface="Inter" pitchFamily="34" charset="-120"/>
               </a:rPr>
-              <a:t>Step 1: Project owner runs the wizard once</a:t>
+              <a:t>Step 1: Install (Dolt is bundled — no separate install)</a:t>
             </a:r>
             <a:endParaRPr lang="en-US" sz="1600" dirty="0"/>
           </a:p>
@@ -11993,27 +11997,7 @@
                 <a:ea typeface="Consolas" pitchFamily="34" charset="-122"/>
                 <a:cs typeface="Consolas" pitchFamily="34" charset="-120"/>
               </a:rPr>
-              <a:t> cd your-project &amp;&amp; bd init --team </a:t>
-            </a:r>
-            <a:endParaRPr lang="en-US" sz="1600" dirty="0"/>
-          </a:p>
-          <a:p>
-            <a:pPr indent="0" marL="0">
-              <a:spcAft>
-                <a:spcPts val="400"/>
-              </a:spcAft>
-              <a:buNone/>
-            </a:pPr>
-            <a:r>
-              <a:rPr lang="en-US" sz="1600" dirty="0">
-                <a:solidFill>
-                  <a:srgbClr val="000000"/>
-                </a:solidFill>
-                <a:latin typeface="Inter" pitchFamily="34" charset="0"/>
-                <a:ea typeface="Inter" pitchFamily="34" charset="-122"/>
-                <a:cs typeface="Inter" pitchFamily="34" charset="-120"/>
-              </a:rPr>
-              <a:t>Asks if main is protected. If yes, creates a beads-metadata branch for issue commits. Sets team.enabled = true. No external services, no DoltHub account — issues ride on your existing git repo.</a:t>
+              <a:t> curl -sSL https://raw.githubusercontent.com/steveyegge/beads/main/scripts/install.sh | bash </a:t>
             </a:r>
             <a:endParaRPr lang="en-US" sz="1600" dirty="0"/>
           </a:p>
@@ -12053,7 +12037,7 @@
                 <a:ea typeface="Inter" pitchFamily="34" charset="-122"/>
                 <a:cs typeface="Inter" pitchFamily="34" charset="-120"/>
               </a:rPr>
-              <a:t>Step 2: Team members join</a:t>
+              <a:t>Step 2: Initialize in your project</a:t>
             </a:r>
             <a:endParaRPr lang="en-US" sz="1600" dirty="0"/>
           </a:p>
@@ -12076,30 +12060,7 @@
                 <a:ea typeface="Consolas" pitchFamily="34" charset="-122"/>
                 <a:cs typeface="Consolas" pitchFamily="34" charset="-120"/>
               </a:rPr>
-              <a:t> git clone https://github.com/org/project &amp;&amp; cd project </a:t>
-            </a:r>
-            <a:endParaRPr lang="en-US" sz="1600" dirty="0"/>
-          </a:p>
-          <a:p>
-            <a:pPr indent="0" marL="0">
-              <a:spcAft>
-                <a:spcPts val="400"/>
-              </a:spcAft>
-              <a:buNone/>
-            </a:pPr>
-            <a:r>
-              <a:rPr lang="en-US" sz="1300" dirty="0">
-                <a:solidFill>
-                  <a:srgbClr val="1A1A1A"/>
-                </a:solidFill>
-                <a:highlight>
-                  <a:srgbClr val="EFEFEF"/>
-                </a:highlight>
-                <a:latin typeface="Consolas" pitchFamily="34" charset="0"/>
-                <a:ea typeface="Consolas" pitchFamily="34" charset="-122"/>
-                <a:cs typeface="Consolas" pitchFamily="34" charset="-120"/>
-              </a:rPr>
-              <a:t> bd init </a:t>
+              <a:t> cd your-project &amp;&amp; bd init --quiet </a:t>
             </a:r>
             <a:endParaRPr lang="en-US" sz="1600" dirty="0"/>
           </a:p>
@@ -12119,7 +12080,7 @@
                 <a:ea typeface="Inter" pitchFamily="34" charset="-122"/>
                 <a:cs typeface="Inter" pitchFamily="34" charset="-120"/>
               </a:rPr>
-              <a:t>That’s it. bd init auto-imports existing issues from the repo. No extra configuration needed.</a:t>
+              <a:t>Creates a .beads/ directory with a local Dolt database. This directory is gitignored — your issue data stays local, separate from your code history.</a:t>
             </a:r>
             <a:endParaRPr lang="en-US" sz="1600" dirty="0"/>
           </a:p>
@@ -12159,7 +12120,7 @@
                 <a:ea typeface="Inter" pitchFamily="34" charset="-122"/>
                 <a:cs typeface="Inter" pitchFamily="34" charset="-120"/>
               </a:rPr>
-              <a:t>Ongoing sync</a:t>
+              <a:t>Step 3: Wire into Claude Code</a:t>
             </a:r>
             <a:endParaRPr lang="en-US" sz="1600" dirty="0"/>
           </a:p>
@@ -12180,7 +12141,7 @@
                 <a:ea typeface="Inter" pitchFamily="34" charset="-122"/>
                 <a:cs typeface="Inter" pitchFamily="34" charset="-120"/>
               </a:rPr>
-              <a:t>Issues commit to main (or beads-metadata if main is protected)</a:t>
+              <a:t>CLAUDE.md — Beads auto-generates a project CLAUDE.md with issue tracking instructions</a:t>
             </a:r>
             <a:endParaRPr lang="en-US" sz="1600" dirty="0"/>
           </a:p>
@@ -12201,28 +12162,27 @@
                 <a:ea typeface="Inter" pitchFamily="34" charset="-122"/>
                 <a:cs typeface="Inter" pitchFamily="34" charset="-120"/>
               </a:rPr>
-              <a:t>bd dolt push / bd dolt pull — or enable auto-commit in .beads/config.yaml</a:t>
-            </a:r>
-            <a:endParaRPr lang="en-US" sz="1600" dirty="0"/>
-          </a:p>
-          <a:p>
-            <a:pPr marL="342900" indent="-342900">
-              <a:spcAft>
-                <a:spcPts val="400"/>
-              </a:spcAft>
-              <a:buSzPct val="100000"/>
-              <a:buChar char="→"/>
-            </a:pPr>
-            <a:r>
-              <a:rPr lang="en-US" sz="1600" dirty="0">
-                <a:solidFill>
-                  <a:srgbClr val="000000"/>
-                </a:solidFill>
-                <a:latin typeface="Inter" pitchFamily="34" charset="0"/>
-                <a:ea typeface="Inter" pitchFamily="34" charset="-122"/>
-                <a:cs typeface="Inter" pitchFamily="34" charset="-120"/>
-              </a:rPr>
-              <a:t>Regular git push/pull keeps everyone in sync</a:t>
+              <a:t>Plugin — /plugin marketplace add steveyegge/beads → /plugin install beads</a:t>
+            </a:r>
+            <a:endParaRPr lang="en-US" sz="1600" dirty="0"/>
+          </a:p>
+          <a:p>
+            <a:pPr indent="0" marL="0">
+              <a:spcAft>
+                <a:spcPts val="400"/>
+              </a:spcAft>
+              <a:buNone/>
+            </a:pPr>
+            <a:r>
+              <a:rPr lang="en-US" sz="1300" i="1" dirty="0">
+                <a:solidFill>
+                  <a:srgbClr val="888888"/>
+                </a:solidFill>
+                <a:latin typeface="Inter" pitchFamily="34" charset="0"/>
+                <a:ea typeface="Inter" pitchFamily="34" charset="-122"/>
+                <a:cs typeface="Inter" pitchFamily="34" charset="-120"/>
+              </a:rPr>
+              <a:t>Plugin also needs uv: curl -LsSf https://astral.sh/uv/install.sh | sh</a:t>
             </a:r>
             <a:endParaRPr lang="en-US" sz="1600" dirty="0"/>
           </a:p>
@@ -12262,39 +12222,54 @@
                 <a:ea typeface="Inter" pitchFamily="34" charset="-122"/>
                 <a:cs typeface="Inter" pitchFamily="34" charset="-120"/>
               </a:rPr>
-              <a:t>Protected main? The wizard creates a beads-metadata branch. Merge it to main periodically via PR.</a:t>
-            </a:r>
-            <a:endParaRPr lang="en-US" sz="1600" dirty="0"/>
-          </a:p>
-        </p:txBody>
-      </p:sp>
-      <p:pic>
-        <p:nvPicPr>
-          <p:cNvPr id="6" name="Image 0" descr="/sessions/gracious-blissful-pasteur/mnt/claude_code_presentation/numericor.png">    </p:cNvPr>
-          <p:cNvPicPr>
-            <a:picLocks noChangeAspect="1"/>
-          </p:cNvPicPr>
-          <p:nvPr/>
-        </p:nvPicPr>
-        <p:blipFill>
-          <a:blip r:embed="rId1"/>
-          <a:stretch>
-            <a:fillRect/>
-          </a:stretch>
-        </p:blipFill>
-        <p:spPr>
-          <a:xfrm>
-            <a:off x="914400" y="6419088"/>
-            <a:ext cx="1371600" cy="214884"/>
-          </a:xfrm>
-          <a:prstGeom prst="rect">
-            <a:avLst/>
-          </a:prstGeom>
-        </p:spPr>
-      </p:pic>
-      <p:sp>
-        <p:nvSpPr>
-          <p:cNvPr id="7" name="Text 4"/>
+              <a:t>That’s it. Claude creates/updates/closes issues as it works. You rarely touch bd yourself.</a:t>
+            </a:r>
+            <a:endParaRPr lang="en-US" sz="1600" dirty="0"/>
+          </a:p>
+        </p:txBody>
+      </p:sp>
+      <p:sp>
+        <p:nvSpPr>
+          <p:cNvPr id="6" name="Text 4"/>
+          <p:cNvSpPr/>
+          <p:nvPr/>
+        </p:nvSpPr>
+        <p:spPr>
+          <a:xfrm>
+            <a:off x="914400" y="6400800"/>
+            <a:ext cx="1645920" cy="365760"/>
+          </a:xfrm>
+          <a:prstGeom prst="rect">
+            <a:avLst/>
+          </a:prstGeom>
+          <a:noFill/>
+          <a:ln/>
+        </p:spPr>
+        <p:txBody>
+          <a:bodyPr wrap="square" rtlCol="0" anchor="ctr"/>
+          <a:lstStyle/>
+          <a:p>
+            <a:pPr algn="l" indent="0" marL="0">
+              <a:buNone/>
+            </a:pPr>
+            <a:r>
+              <a:rPr lang="en-US" sz="1100" dirty="0">
+                <a:solidFill>
+                  <a:srgbClr val="888888"/>
+                </a:solidFill>
+                <a:latin typeface="Inter" pitchFamily="34" charset="0"/>
+                <a:ea typeface="Inter" pitchFamily="34" charset="-122"/>
+                <a:cs typeface="Inter" pitchFamily="34" charset="-120"/>
+              </a:rPr>
+              <a:t>NumeriCor GmbH</a:t>
+            </a:r>
+            <a:endParaRPr lang="en-US" sz="1100" dirty="0"/>
+          </a:p>
+        </p:txBody>
+      </p:sp>
+      <p:sp>
+        <p:nvSpPr>
+          <p:cNvPr id="7" name="Text 5"/>
           <p:cNvSpPr/>
           <p:nvPr/>
         </p:nvSpPr>
@@ -12342,6 +12317,553 @@
 <file path=ppt/slides/slide27.xml><?xml version="1.0" encoding="utf-8"?>
 <p:sld xmlns:a="http://schemas.openxmlformats.org/drawingml/2006/main" xmlns:r="http://schemas.openxmlformats.org/officeDocument/2006/relationships" xmlns:p="http://schemas.openxmlformats.org/presentationml/2006/main">
   <p:cSld name="Slide 27">
+    <p:bg>
+      <p:bgPr>
+        <a:solidFill>
+          <a:srgbClr val="FFFFFF"/>
+        </a:solidFill>
+      </p:bgPr>
+    </p:bg>
+    <p:spTree>
+      <p:nvGrpSpPr>
+        <p:cNvPr id="1" name=""/>
+        <p:cNvGrpSpPr/>
+        <p:nvPr/>
+      </p:nvGrpSpPr>
+      <p:grpSpPr>
+        <a:xfrm>
+          <a:off x="0" y="0"/>
+          <a:ext cx="0" cy="0"/>
+          <a:chOff x="0" y="0"/>
+          <a:chExt cx="0" cy="0"/>
+        </a:xfrm>
+      </p:grpSpPr>
+      <p:sp>
+        <p:nvSpPr>
+          <p:cNvPr id="2" name="Text 0"/>
+          <p:cNvSpPr/>
+          <p:nvPr/>
+        </p:nvSpPr>
+        <p:spPr>
+          <a:xfrm>
+            <a:off x="914400" y="438912"/>
+            <a:ext cx="10332720" cy="621792"/>
+          </a:xfrm>
+          <a:prstGeom prst="rect">
+            <a:avLst/>
+          </a:prstGeom>
+          <a:noFill/>
+          <a:ln/>
+        </p:spPr>
+        <p:txBody>
+          <a:bodyPr wrap="square" lIns="0" tIns="0" rIns="0" bIns="0" rtlCol="0" anchor="ctr"/>
+          <a:lstStyle/>
+          <a:p>
+            <a:pPr indent="0" marL="0">
+              <a:buNone/>
+            </a:pPr>
+            <a:r>
+              <a:rPr lang="en-US" sz="3000" b="1" dirty="0">
+                <a:solidFill>
+                  <a:srgbClr val="000000"/>
+                </a:solidFill>
+                <a:latin typeface="Inter" pitchFamily="34" charset="0"/>
+                <a:ea typeface="Inter" pitchFamily="34" charset="-122"/>
+                <a:cs typeface="Inter" pitchFamily="34" charset="-120"/>
+              </a:rPr>
+              <a:t>Setting Up Beads — Teams</a:t>
+            </a:r>
+            <a:endParaRPr lang="en-US" sz="3000" dirty="0"/>
+          </a:p>
+        </p:txBody>
+      </p:sp>
+      <p:sp>
+        <p:nvSpPr>
+          <p:cNvPr id="3" name="Shape 1"/>
+          <p:cNvSpPr/>
+          <p:nvPr/>
+        </p:nvSpPr>
+        <p:spPr>
+          <a:xfrm>
+            <a:off x="914400" y="1115568"/>
+            <a:ext cx="10332720" cy="20117"/>
+          </a:xfrm>
+          <a:prstGeom prst="rect">
+            <a:avLst/>
+          </a:prstGeom>
+          <a:solidFill>
+            <a:srgbClr val="E4E4E4"/>
+          </a:solidFill>
+          <a:ln w="12700">
+            <a:solidFill>
+              <a:srgbClr val="E4E4E4"/>
+            </a:solidFill>
+            <a:prstDash val="solid"/>
+          </a:ln>
+        </p:spPr>
+      </p:sp>
+      <p:sp>
+        <p:nvSpPr>
+          <p:cNvPr id="4" name="Text 2"/>
+          <p:cNvSpPr/>
+          <p:nvPr/>
+        </p:nvSpPr>
+        <p:spPr>
+          <a:xfrm>
+            <a:off x="914400" y="1188720"/>
+            <a:ext cx="10332720" cy="347472"/>
+          </a:xfrm>
+          <a:prstGeom prst="rect">
+            <a:avLst/>
+          </a:prstGeom>
+          <a:noFill/>
+          <a:ln/>
+        </p:spPr>
+        <p:txBody>
+          <a:bodyPr wrap="square" lIns="0" tIns="0" rIns="0" bIns="0" rtlCol="0" anchor="ctr"/>
+          <a:lstStyle/>
+          <a:p>
+            <a:pPr indent="0" marL="0">
+              <a:buNone/>
+            </a:pPr>
+            <a:r>
+              <a:rPr lang="en-US" sz="1500" dirty="0">
+                <a:solidFill>
+                  <a:srgbClr val="888888"/>
+                </a:solidFill>
+                <a:latin typeface="Inter" pitchFamily="34" charset="0"/>
+                <a:ea typeface="Inter" pitchFamily="34" charset="-122"/>
+                <a:cs typeface="Inter" pitchFamily="34" charset="-120"/>
+              </a:rPr>
+              <a:t>bd init --team is all you need</a:t>
+            </a:r>
+            <a:endParaRPr lang="en-US" sz="1500" dirty="0"/>
+          </a:p>
+        </p:txBody>
+      </p:sp>
+      <p:sp>
+        <p:nvSpPr>
+          <p:cNvPr id="5" name="Text 3"/>
+          <p:cNvSpPr/>
+          <p:nvPr/>
+        </p:nvSpPr>
+        <p:spPr>
+          <a:xfrm>
+            <a:off x="914400" y="1627632"/>
+            <a:ext cx="10332720" cy="4681728"/>
+          </a:xfrm>
+          <a:prstGeom prst="rect">
+            <a:avLst/>
+          </a:prstGeom>
+          <a:noFill/>
+          <a:ln/>
+        </p:spPr>
+        <p:txBody>
+          <a:bodyPr wrap="square" lIns="0" tIns="0" rIns="0" bIns="0" rtlCol="0" anchor="t"/>
+          <a:lstStyle/>
+          <a:p>
+            <a:pPr indent="0" marL="0">
+              <a:spcAft>
+                <a:spcPts val="400"/>
+              </a:spcAft>
+              <a:buNone/>
+            </a:pPr>
+            <a:r>
+              <a:rPr lang="en-US" sz="1700" b="1" dirty="0">
+                <a:solidFill>
+                  <a:srgbClr val="000000"/>
+                </a:solidFill>
+                <a:latin typeface="Inter" pitchFamily="34" charset="0"/>
+                <a:ea typeface="Inter" pitchFamily="34" charset="-122"/>
+                <a:cs typeface="Inter" pitchFamily="34" charset="-120"/>
+              </a:rPr>
+              <a:t>Step 1: Project owner runs the wizard once</a:t>
+            </a:r>
+            <a:endParaRPr lang="en-US" sz="1600" dirty="0"/>
+          </a:p>
+          <a:p>
+            <a:pPr indent="0" marL="0">
+              <a:spcAft>
+                <a:spcPts val="400"/>
+              </a:spcAft>
+              <a:buNone/>
+            </a:pPr>
+            <a:r>
+              <a:rPr lang="en-US" sz="1300" dirty="0">
+                <a:solidFill>
+                  <a:srgbClr val="1A1A1A"/>
+                </a:solidFill>
+                <a:highlight>
+                  <a:srgbClr val="EFEFEF"/>
+                </a:highlight>
+                <a:latin typeface="Consolas" pitchFamily="34" charset="0"/>
+                <a:ea typeface="Consolas" pitchFamily="34" charset="-122"/>
+                <a:cs typeface="Consolas" pitchFamily="34" charset="-120"/>
+              </a:rPr>
+              <a:t> cd your-project &amp;&amp; bd init --team </a:t>
+            </a:r>
+            <a:endParaRPr lang="en-US" sz="1600" dirty="0"/>
+          </a:p>
+          <a:p>
+            <a:pPr indent="0" marL="0">
+              <a:spcAft>
+                <a:spcPts val="400"/>
+              </a:spcAft>
+              <a:buNone/>
+            </a:pPr>
+            <a:r>
+              <a:rPr lang="en-US" sz="1600" dirty="0">
+                <a:solidFill>
+                  <a:srgbClr val="000000"/>
+                </a:solidFill>
+                <a:latin typeface="Inter" pitchFamily="34" charset="0"/>
+                <a:ea typeface="Inter" pitchFamily="34" charset="-122"/>
+                <a:cs typeface="Inter" pitchFamily="34" charset="-120"/>
+              </a:rPr>
+              <a:t>Asks if main is protected. If yes, creates a beads-metadata branch for issue commits. Sets team.enabled = true. No external services, no DoltHub account — issues ride on your existing git repo.</a:t>
+            </a:r>
+            <a:endParaRPr lang="en-US" sz="1600" dirty="0"/>
+          </a:p>
+          <a:p>
+            <a:pPr indent="0" marL="0">
+              <a:spcAft>
+                <a:spcPts val="400"/>
+              </a:spcAft>
+              <a:buNone/>
+            </a:pPr>
+            <a:r>
+              <a:rPr lang="en-US" sz="700" dirty="0">
+                <a:solidFill>
+                  <a:srgbClr val="000000"/>
+                </a:solidFill>
+                <a:latin typeface="Inter" pitchFamily="34" charset="0"/>
+                <a:ea typeface="Inter" pitchFamily="34" charset="-122"/>
+                <a:cs typeface="Inter" pitchFamily="34" charset="-120"/>
+              </a:rPr>
+              <a:t> </a:t>
+            </a:r>
+            <a:endParaRPr lang="en-US" sz="1600" dirty="0"/>
+          </a:p>
+          <a:p>
+            <a:pPr indent="0" marL="0">
+              <a:spcAft>
+                <a:spcPts val="400"/>
+              </a:spcAft>
+              <a:buNone/>
+            </a:pPr>
+            <a:r>
+              <a:rPr lang="en-US" sz="1700" b="1" dirty="0">
+                <a:solidFill>
+                  <a:srgbClr val="000000"/>
+                </a:solidFill>
+                <a:latin typeface="Inter" pitchFamily="34" charset="0"/>
+                <a:ea typeface="Inter" pitchFamily="34" charset="-122"/>
+                <a:cs typeface="Inter" pitchFamily="34" charset="-120"/>
+              </a:rPr>
+              <a:t>Step 2: Team members join</a:t>
+            </a:r>
+            <a:endParaRPr lang="en-US" sz="1600" dirty="0"/>
+          </a:p>
+          <a:p>
+            <a:pPr indent="0" marL="0">
+              <a:spcAft>
+                <a:spcPts val="400"/>
+              </a:spcAft>
+              <a:buNone/>
+            </a:pPr>
+            <a:r>
+              <a:rPr lang="en-US" sz="1300" dirty="0">
+                <a:solidFill>
+                  <a:srgbClr val="1A1A1A"/>
+                </a:solidFill>
+                <a:highlight>
+                  <a:srgbClr val="EFEFEF"/>
+                </a:highlight>
+                <a:latin typeface="Consolas" pitchFamily="34" charset="0"/>
+                <a:ea typeface="Consolas" pitchFamily="34" charset="-122"/>
+                <a:cs typeface="Consolas" pitchFamily="34" charset="-120"/>
+              </a:rPr>
+              <a:t> git clone https://github.com/org/project &amp;&amp; cd project </a:t>
+            </a:r>
+            <a:endParaRPr lang="en-US" sz="1600" dirty="0"/>
+          </a:p>
+          <a:p>
+            <a:pPr indent="0" marL="0">
+              <a:spcAft>
+                <a:spcPts val="400"/>
+              </a:spcAft>
+              <a:buNone/>
+            </a:pPr>
+            <a:r>
+              <a:rPr lang="en-US" sz="1300" dirty="0">
+                <a:solidFill>
+                  <a:srgbClr val="1A1A1A"/>
+                </a:solidFill>
+                <a:highlight>
+                  <a:srgbClr val="EFEFEF"/>
+                </a:highlight>
+                <a:latin typeface="Consolas" pitchFamily="34" charset="0"/>
+                <a:ea typeface="Consolas" pitchFamily="34" charset="-122"/>
+                <a:cs typeface="Consolas" pitchFamily="34" charset="-120"/>
+              </a:rPr>
+              <a:t> bd init </a:t>
+            </a:r>
+            <a:endParaRPr lang="en-US" sz="1600" dirty="0"/>
+          </a:p>
+          <a:p>
+            <a:pPr indent="0" marL="0">
+              <a:spcAft>
+                <a:spcPts val="400"/>
+              </a:spcAft>
+              <a:buNone/>
+            </a:pPr>
+            <a:r>
+              <a:rPr lang="en-US" sz="1600" dirty="0">
+                <a:solidFill>
+                  <a:srgbClr val="000000"/>
+                </a:solidFill>
+                <a:latin typeface="Inter" pitchFamily="34" charset="0"/>
+                <a:ea typeface="Inter" pitchFamily="34" charset="-122"/>
+                <a:cs typeface="Inter" pitchFamily="34" charset="-120"/>
+              </a:rPr>
+              <a:t>That’s it. bd init auto-imports existing issues from the repo. No extra configuration needed.</a:t>
+            </a:r>
+            <a:endParaRPr lang="en-US" sz="1600" dirty="0"/>
+          </a:p>
+          <a:p>
+            <a:pPr indent="0" marL="0">
+              <a:spcAft>
+                <a:spcPts val="400"/>
+              </a:spcAft>
+              <a:buNone/>
+            </a:pPr>
+            <a:r>
+              <a:rPr lang="en-US" sz="700" dirty="0">
+                <a:solidFill>
+                  <a:srgbClr val="000000"/>
+                </a:solidFill>
+                <a:latin typeface="Inter" pitchFamily="34" charset="0"/>
+                <a:ea typeface="Inter" pitchFamily="34" charset="-122"/>
+                <a:cs typeface="Inter" pitchFamily="34" charset="-120"/>
+              </a:rPr>
+              <a:t> </a:t>
+            </a:r>
+            <a:endParaRPr lang="en-US" sz="1600" dirty="0"/>
+          </a:p>
+          <a:p>
+            <a:pPr indent="0" marL="0">
+              <a:spcAft>
+                <a:spcPts val="400"/>
+              </a:spcAft>
+              <a:buNone/>
+            </a:pPr>
+            <a:r>
+              <a:rPr lang="en-US" sz="1700" b="1" dirty="0">
+                <a:solidFill>
+                  <a:srgbClr val="000000"/>
+                </a:solidFill>
+                <a:latin typeface="Inter" pitchFamily="34" charset="0"/>
+                <a:ea typeface="Inter" pitchFamily="34" charset="-122"/>
+                <a:cs typeface="Inter" pitchFamily="34" charset="-120"/>
+              </a:rPr>
+              <a:t>Ongoing sync</a:t>
+            </a:r>
+            <a:endParaRPr lang="en-US" sz="1600" dirty="0"/>
+          </a:p>
+          <a:p>
+            <a:pPr marL="342900" indent="-342900">
+              <a:spcAft>
+                <a:spcPts val="400"/>
+              </a:spcAft>
+              <a:buSzPct val="100000"/>
+              <a:buChar char="→"/>
+            </a:pPr>
+            <a:r>
+              <a:rPr lang="en-US" sz="1600" dirty="0">
+                <a:solidFill>
+                  <a:srgbClr val="000000"/>
+                </a:solidFill>
+                <a:latin typeface="Inter" pitchFamily="34" charset="0"/>
+                <a:ea typeface="Inter" pitchFamily="34" charset="-122"/>
+                <a:cs typeface="Inter" pitchFamily="34" charset="-120"/>
+              </a:rPr>
+              <a:t>Issues commit to main (or beads-metadata if main is protected)</a:t>
+            </a:r>
+            <a:endParaRPr lang="en-US" sz="1600" dirty="0"/>
+          </a:p>
+          <a:p>
+            <a:pPr marL="342900" indent="-342900">
+              <a:spcAft>
+                <a:spcPts val="400"/>
+              </a:spcAft>
+              <a:buSzPct val="100000"/>
+              <a:buChar char="→"/>
+            </a:pPr>
+            <a:r>
+              <a:rPr lang="en-US" sz="1600" dirty="0">
+                <a:solidFill>
+                  <a:srgbClr val="000000"/>
+                </a:solidFill>
+                <a:latin typeface="Inter" pitchFamily="34" charset="0"/>
+                <a:ea typeface="Inter" pitchFamily="34" charset="-122"/>
+                <a:cs typeface="Inter" pitchFamily="34" charset="-120"/>
+              </a:rPr>
+              <a:t>bd dolt push / bd dolt pull — or enable auto-commit in .beads/config.yaml</a:t>
+            </a:r>
+            <a:endParaRPr lang="en-US" sz="1600" dirty="0"/>
+          </a:p>
+          <a:p>
+            <a:pPr marL="342900" indent="-342900">
+              <a:spcAft>
+                <a:spcPts val="400"/>
+              </a:spcAft>
+              <a:buSzPct val="100000"/>
+              <a:buChar char="→"/>
+            </a:pPr>
+            <a:r>
+              <a:rPr lang="en-US" sz="1600" dirty="0">
+                <a:solidFill>
+                  <a:srgbClr val="000000"/>
+                </a:solidFill>
+                <a:latin typeface="Inter" pitchFamily="34" charset="0"/>
+                <a:ea typeface="Inter" pitchFamily="34" charset="-122"/>
+                <a:cs typeface="Inter" pitchFamily="34" charset="-120"/>
+              </a:rPr>
+              <a:t>Regular git push/pull keeps everyone in sync</a:t>
+            </a:r>
+            <a:endParaRPr lang="en-US" sz="1600" dirty="0"/>
+          </a:p>
+          <a:p>
+            <a:pPr indent="0" marL="0">
+              <a:spcAft>
+                <a:spcPts val="400"/>
+              </a:spcAft>
+              <a:buNone/>
+            </a:pPr>
+            <a:r>
+              <a:rPr lang="en-US" sz="700" dirty="0">
+                <a:solidFill>
+                  <a:srgbClr val="000000"/>
+                </a:solidFill>
+                <a:latin typeface="Inter" pitchFamily="34" charset="0"/>
+                <a:ea typeface="Inter" pitchFamily="34" charset="-122"/>
+                <a:cs typeface="Inter" pitchFamily="34" charset="-120"/>
+              </a:rPr>
+              <a:t> </a:t>
+            </a:r>
+            <a:endParaRPr lang="en-US" sz="1600" dirty="0"/>
+          </a:p>
+          <a:p>
+            <a:pPr indent="0" marL="0">
+              <a:spcAft>
+                <a:spcPts val="400"/>
+              </a:spcAft>
+              <a:buNone/>
+            </a:pPr>
+            <a:r>
+              <a:rPr lang="en-US" sz="1300" i="1" dirty="0">
+                <a:solidFill>
+                  <a:srgbClr val="888888"/>
+                </a:solidFill>
+                <a:latin typeface="Inter" pitchFamily="34" charset="0"/>
+                <a:ea typeface="Inter" pitchFamily="34" charset="-122"/>
+                <a:cs typeface="Inter" pitchFamily="34" charset="-120"/>
+              </a:rPr>
+              <a:t>Protected main? The wizard creates a beads-metadata branch. Merge it to main periodically via PR.</a:t>
+            </a:r>
+            <a:endParaRPr lang="en-US" sz="1600" dirty="0"/>
+          </a:p>
+        </p:txBody>
+      </p:sp>
+      <p:sp>
+        <p:nvSpPr>
+          <p:cNvPr id="6" name="Text 4"/>
+          <p:cNvSpPr/>
+          <p:nvPr/>
+        </p:nvSpPr>
+        <p:spPr>
+          <a:xfrm>
+            <a:off x="914400" y="6400800"/>
+            <a:ext cx="1645920" cy="365760"/>
+          </a:xfrm>
+          <a:prstGeom prst="rect">
+            <a:avLst/>
+          </a:prstGeom>
+          <a:noFill/>
+          <a:ln/>
+        </p:spPr>
+        <p:txBody>
+          <a:bodyPr wrap="square" rtlCol="0" anchor="ctr"/>
+          <a:lstStyle/>
+          <a:p>
+            <a:pPr algn="l" indent="0" marL="0">
+              <a:buNone/>
+            </a:pPr>
+            <a:r>
+              <a:rPr lang="en-US" sz="1100" dirty="0">
+                <a:solidFill>
+                  <a:srgbClr val="888888"/>
+                </a:solidFill>
+                <a:latin typeface="Inter" pitchFamily="34" charset="0"/>
+                <a:ea typeface="Inter" pitchFamily="34" charset="-122"/>
+                <a:cs typeface="Inter" pitchFamily="34" charset="-120"/>
+              </a:rPr>
+              <a:t>NumeriCor GmbH</a:t>
+            </a:r>
+            <a:endParaRPr lang="en-US" sz="1100" dirty="0"/>
+          </a:p>
+        </p:txBody>
+      </p:sp>
+      <p:sp>
+        <p:nvSpPr>
+          <p:cNvPr id="7" name="Text 5"/>
+          <p:cNvSpPr/>
+          <p:nvPr/>
+        </p:nvSpPr>
+        <p:spPr>
+          <a:xfrm>
+            <a:off x="11064240" y="6400800"/>
+            <a:ext cx="640080" cy="365760"/>
+          </a:xfrm>
+          <a:prstGeom prst="rect">
+            <a:avLst/>
+          </a:prstGeom>
+          <a:noFill/>
+          <a:ln/>
+        </p:spPr>
+        <p:txBody>
+          <a:bodyPr wrap="square" rtlCol="0" anchor="ctr"/>
+          <a:lstStyle/>
+          <a:p>
+            <a:pPr algn="r" indent="0" marL="0">
+              <a:buNone/>
+            </a:pPr>
+            <a:r>
+              <a:rPr lang="en-US" sz="1100" dirty="0">
+                <a:solidFill>
+                  <a:srgbClr val="CCCCCC"/>
+                </a:solidFill>
+                <a:latin typeface="Inter" pitchFamily="34" charset="0"/>
+                <a:ea typeface="Inter" pitchFamily="34" charset="-122"/>
+                <a:cs typeface="Inter" pitchFamily="34" charset="-120"/>
+              </a:rPr>
+              <a:t>27</a:t>
+            </a:r>
+            <a:endParaRPr lang="en-US" sz="1100" dirty="0"/>
+          </a:p>
+        </p:txBody>
+      </p:sp>
+    </p:spTree>
+  </p:cSld>
+  <p:clrMapOvr>
+    <a:masterClrMapping/>
+  </p:clrMapOvr>
+</p:sld>
+</file>
+
+<file path=ppt/slides/slide28.xml><?xml version="1.0" encoding="utf-8"?>
+<p:sld xmlns:a="http://schemas.openxmlformats.org/drawingml/2006/main" xmlns:r="http://schemas.openxmlformats.org/officeDocument/2006/relationships" xmlns:p="http://schemas.openxmlformats.org/presentationml/2006/main">
+  <p:cSld name="Slide 28">
     <p:bg>
       <p:bgPr>
         <a:solidFill>
@@ -12826,33 +13348,48 @@
           </a:p>
         </p:txBody>
       </p:sp>
-      <p:pic>
-        <p:nvPicPr>
-          <p:cNvPr id="6" name="Image 0" descr="/sessions/gracious-blissful-pasteur/mnt/claude_code_presentation/numericor.png">    </p:cNvPr>
-          <p:cNvPicPr>
-            <a:picLocks noChangeAspect="1"/>
-          </p:cNvPicPr>
-          <p:nvPr/>
-        </p:nvPicPr>
-        <p:blipFill>
-          <a:blip r:embed="rId1"/>
-          <a:stretch>
-            <a:fillRect/>
-          </a:stretch>
-        </p:blipFill>
-        <p:spPr>
-          <a:xfrm>
-            <a:off x="914400" y="6419088"/>
-            <a:ext cx="1371600" cy="214884"/>
-          </a:xfrm>
-          <a:prstGeom prst="rect">
-            <a:avLst/>
-          </a:prstGeom>
-        </p:spPr>
-      </p:pic>
-      <p:sp>
-        <p:nvSpPr>
-          <p:cNvPr id="7" name="Text 4"/>
+      <p:sp>
+        <p:nvSpPr>
+          <p:cNvPr id="6" name="Text 4"/>
+          <p:cNvSpPr/>
+          <p:nvPr/>
+        </p:nvSpPr>
+        <p:spPr>
+          <a:xfrm>
+            <a:off x="914400" y="6400800"/>
+            <a:ext cx="1645920" cy="365760"/>
+          </a:xfrm>
+          <a:prstGeom prst="rect">
+            <a:avLst/>
+          </a:prstGeom>
+          <a:noFill/>
+          <a:ln/>
+        </p:spPr>
+        <p:txBody>
+          <a:bodyPr wrap="square" rtlCol="0" anchor="ctr"/>
+          <a:lstStyle/>
+          <a:p>
+            <a:pPr algn="l" indent="0" marL="0">
+              <a:buNone/>
+            </a:pPr>
+            <a:r>
+              <a:rPr lang="en-US" sz="1100" dirty="0">
+                <a:solidFill>
+                  <a:srgbClr val="888888"/>
+                </a:solidFill>
+                <a:latin typeface="Inter" pitchFamily="34" charset="0"/>
+                <a:ea typeface="Inter" pitchFamily="34" charset="-122"/>
+                <a:cs typeface="Inter" pitchFamily="34" charset="-120"/>
+              </a:rPr>
+              <a:t>NumeriCor GmbH</a:t>
+            </a:r>
+            <a:endParaRPr lang="en-US" sz="1100" dirty="0"/>
+          </a:p>
+        </p:txBody>
+      </p:sp>
+      <p:sp>
+        <p:nvSpPr>
+          <p:cNvPr id="7" name="Text 5"/>
           <p:cNvSpPr/>
           <p:nvPr/>
         </p:nvSpPr>
@@ -12883,7 +13420,7 @@
                 <a:ea typeface="Inter" pitchFamily="34" charset="-122"/>
                 <a:cs typeface="Inter" pitchFamily="34" charset="-120"/>
               </a:rPr>
-              <a:t>27</a:t>
+              <a:t>28</a:t>
             </a:r>
             <a:endParaRPr lang="en-US" sz="1100" dirty="0"/>
           </a:p>
@@ -12897,9 +13434,9 @@
 </p:sld>
 </file>
 
-<file path=ppt/slides/slide28.xml><?xml version="1.0" encoding="utf-8"?>
+<file path=ppt/slides/slide29.xml><?xml version="1.0" encoding="utf-8"?>
 <p:sld xmlns:a="http://schemas.openxmlformats.org/drawingml/2006/main" xmlns:r="http://schemas.openxmlformats.org/officeDocument/2006/relationships" xmlns:p="http://schemas.openxmlformats.org/presentationml/2006/main">
-  <p:cSld name="Slide 28">
+  <p:cSld name="Slide 29">
     <p:bg>
       <p:bgPr>
         <a:solidFill>
@@ -12954,7 +13491,7 @@
                 <a:ea typeface="Inter" pitchFamily="34" charset="-122"/>
                 <a:cs typeface="Inter" pitchFamily="34" charset="-120"/>
               </a:rPr>
-              <a:t>28</a:t>
+              <a:t>29</a:t>
             </a:r>
             <a:endParaRPr lang="en-US" sz="24000" dirty="0"/>
           </a:p>
@@ -13105,406 +13642,6 @@
               <a:rPr lang="en-US" sz="1100" dirty="0">
                 <a:solidFill>
                   <a:srgbClr val="555555"/>
-                </a:solidFill>
-                <a:latin typeface="Inter" pitchFamily="34" charset="0"/>
-                <a:ea typeface="Inter" pitchFamily="34" charset="-122"/>
-                <a:cs typeface="Inter" pitchFamily="34" charset="-120"/>
-              </a:rPr>
-              <a:t>28</a:t>
-            </a:r>
-            <a:endParaRPr lang="en-US" sz="1100" dirty="0"/>
-          </a:p>
-        </p:txBody>
-      </p:sp>
-    </p:spTree>
-  </p:cSld>
-  <p:clrMapOvr>
-    <a:masterClrMapping/>
-  </p:clrMapOvr>
-</p:sld>
-</file>
-
-<file path=ppt/slides/slide29.xml><?xml version="1.0" encoding="utf-8"?>
-<p:sld xmlns:a="http://schemas.openxmlformats.org/drawingml/2006/main" xmlns:r="http://schemas.openxmlformats.org/officeDocument/2006/relationships" xmlns:p="http://schemas.openxmlformats.org/presentationml/2006/main">
-  <p:cSld name="Slide 29">
-    <p:bg>
-      <p:bgPr>
-        <a:solidFill>
-          <a:srgbClr val="FFFFFF"/>
-        </a:solidFill>
-      </p:bgPr>
-    </p:bg>
-    <p:spTree>
-      <p:nvGrpSpPr>
-        <p:cNvPr id="1" name=""/>
-        <p:cNvGrpSpPr/>
-        <p:nvPr/>
-      </p:nvGrpSpPr>
-      <p:grpSpPr>
-        <a:xfrm>
-          <a:off x="0" y="0"/>
-          <a:ext cx="0" cy="0"/>
-          <a:chOff x="0" y="0"/>
-          <a:chExt cx="0" cy="0"/>
-        </a:xfrm>
-      </p:grpSpPr>
-      <p:sp>
-        <p:nvSpPr>
-          <p:cNvPr id="2" name="Text 0"/>
-          <p:cNvSpPr/>
-          <p:nvPr/>
-        </p:nvSpPr>
-        <p:spPr>
-          <a:xfrm>
-            <a:off x="914400" y="438912"/>
-            <a:ext cx="10332720" cy="621792"/>
-          </a:xfrm>
-          <a:prstGeom prst="rect">
-            <a:avLst/>
-          </a:prstGeom>
-          <a:noFill/>
-          <a:ln/>
-        </p:spPr>
-        <p:txBody>
-          <a:bodyPr wrap="square" lIns="0" tIns="0" rIns="0" bIns="0" rtlCol="0" anchor="ctr"/>
-          <a:lstStyle/>
-          <a:p>
-            <a:pPr indent="0" marL="0">
-              <a:buNone/>
-            </a:pPr>
-            <a:r>
-              <a:rPr lang="en-US" sz="3000" b="1" dirty="0">
-                <a:solidFill>
-                  <a:srgbClr val="000000"/>
-                </a:solidFill>
-                <a:latin typeface="Inter" pitchFamily="34" charset="0"/>
-                <a:ea typeface="Inter" pitchFamily="34" charset="-122"/>
-                <a:cs typeface="Inter" pitchFamily="34" charset="-120"/>
-              </a:rPr>
-              <a:t>Why We Offload</a:t>
-            </a:r>
-            <a:endParaRPr lang="en-US" sz="3000" dirty="0"/>
-          </a:p>
-        </p:txBody>
-      </p:sp>
-      <p:sp>
-        <p:nvSpPr>
-          <p:cNvPr id="3" name="Shape 1"/>
-          <p:cNvSpPr/>
-          <p:nvPr/>
-        </p:nvSpPr>
-        <p:spPr>
-          <a:xfrm>
-            <a:off x="914400" y="1115568"/>
-            <a:ext cx="10332720" cy="20117"/>
-          </a:xfrm>
-          <a:prstGeom prst="rect">
-            <a:avLst/>
-          </a:prstGeom>
-          <a:solidFill>
-            <a:srgbClr val="E4E4E4"/>
-          </a:solidFill>
-          <a:ln w="12700">
-            <a:solidFill>
-              <a:srgbClr val="E4E4E4"/>
-            </a:solidFill>
-            <a:prstDash val="solid"/>
-          </a:ln>
-        </p:spPr>
-      </p:sp>
-      <p:sp>
-        <p:nvSpPr>
-          <p:cNvPr id="4" name="Text 2"/>
-          <p:cNvSpPr/>
-          <p:nvPr/>
-        </p:nvSpPr>
-        <p:spPr>
-          <a:xfrm>
-            <a:off x="914400" y="1188720"/>
-            <a:ext cx="10332720" cy="347472"/>
-          </a:xfrm>
-          <a:prstGeom prst="rect">
-            <a:avLst/>
-          </a:prstGeom>
-          <a:noFill/>
-          <a:ln/>
-        </p:spPr>
-        <p:txBody>
-          <a:bodyPr wrap="square" lIns="0" tIns="0" rIns="0" bIns="0" rtlCol="0" anchor="ctr"/>
-          <a:lstStyle/>
-          <a:p>
-            <a:pPr indent="0" marL="0">
-              <a:buNone/>
-            </a:pPr>
-            <a:r>
-              <a:rPr lang="en-US" sz="1500" dirty="0">
-                <a:solidFill>
-                  <a:srgbClr val="888888"/>
-                </a:solidFill>
-                <a:latin typeface="Inter" pitchFamily="34" charset="0"/>
-                <a:ea typeface="Inter" pitchFamily="34" charset="-122"/>
-                <a:cs typeface="Inter" pitchFamily="34" charset="-120"/>
-              </a:rPr>
-              <a:t>We are wired to delegate to tools — this is not a flaw</a:t>
-            </a:r>
-            <a:endParaRPr lang="en-US" sz="1500" dirty="0"/>
-          </a:p>
-        </p:txBody>
-      </p:sp>
-      <p:sp>
-        <p:nvSpPr>
-          <p:cNvPr id="5" name="Text 3"/>
-          <p:cNvSpPr/>
-          <p:nvPr/>
-        </p:nvSpPr>
-        <p:spPr>
-          <a:xfrm>
-            <a:off x="914400" y="1627632"/>
-            <a:ext cx="10332720" cy="4681728"/>
-          </a:xfrm>
-          <a:prstGeom prst="rect">
-            <a:avLst/>
-          </a:prstGeom>
-          <a:noFill/>
-          <a:ln/>
-        </p:spPr>
-        <p:txBody>
-          <a:bodyPr wrap="square" lIns="0" tIns="0" rIns="0" bIns="0" rtlCol="0" anchor="t"/>
-          <a:lstStyle/>
-          <a:p>
-            <a:pPr indent="0" marL="0">
-              <a:spcAft>
-                <a:spcPts val="400"/>
-              </a:spcAft>
-              <a:buNone/>
-            </a:pPr>
-            <a:r>
-              <a:rPr lang="en-US" sz="1600" dirty="0">
-                <a:solidFill>
-                  <a:srgbClr val="000000"/>
-                </a:solidFill>
-                <a:latin typeface="Inter" pitchFamily="34" charset="0"/>
-                <a:ea typeface="Inter" pitchFamily="34" charset="-122"/>
-                <a:cs typeface="Inter" pitchFamily="34" charset="-120"/>
-              </a:rPr>
-              <a:t>Humans have always outsourced cognition. Writing replaced memorization. Calculators replaced mental arithmetic. GPS replaced spatial navigation. Each time, we traded a skill for efficiency. This is how we’re wired — if a tool makes something easier, we use it.</a:t>
-            </a:r>
-            <a:endParaRPr lang="en-US" sz="1600" dirty="0"/>
-          </a:p>
-          <a:p>
-            <a:pPr indent="0" marL="0">
-              <a:spcAft>
-                <a:spcPts val="400"/>
-              </a:spcAft>
-              <a:buNone/>
-            </a:pPr>
-            <a:r>
-              <a:rPr lang="en-US" sz="700" dirty="0">
-                <a:solidFill>
-                  <a:srgbClr val="000000"/>
-                </a:solidFill>
-                <a:latin typeface="Inter" pitchFamily="34" charset="0"/>
-                <a:ea typeface="Inter" pitchFamily="34" charset="-122"/>
-                <a:cs typeface="Inter" pitchFamily="34" charset="-120"/>
-              </a:rPr>
-              <a:t> </a:t>
-            </a:r>
-            <a:endParaRPr lang="en-US" sz="1600" dirty="0"/>
-          </a:p>
-          <a:p>
-            <a:pPr indent="0" marL="0">
-              <a:spcAft>
-                <a:spcPts val="400"/>
-              </a:spcAft>
-              <a:buNone/>
-            </a:pPr>
-            <a:r>
-              <a:rPr lang="en-US" sz="1600" dirty="0">
-                <a:solidFill>
-                  <a:srgbClr val="000000"/>
-                </a:solidFill>
-                <a:latin typeface="Inter" pitchFamily="34" charset="0"/>
-                <a:ea typeface="Inter" pitchFamily="34" charset="-122"/>
-                <a:cs typeface="Inter" pitchFamily="34" charset="-120"/>
-              </a:rPr>
-              <a:t>AI is different in one critical way: it doesn’t just offload mechanical work, it offloads thinking itself. The research calls this the “Cognitive Atrophy Paradox” — moderate AI use enhances your capability, but over-delegation erodes your analytical autonomy.</a:t>
-            </a:r>
-            <a:endParaRPr lang="en-US" sz="1600" dirty="0"/>
-          </a:p>
-          <a:p>
-            <a:pPr indent="0" marL="0">
-              <a:spcAft>
-                <a:spcPts val="400"/>
-              </a:spcAft>
-              <a:buNone/>
-            </a:pPr>
-            <a:r>
-              <a:rPr lang="en-US" sz="700" dirty="0">
-                <a:solidFill>
-                  <a:srgbClr val="000000"/>
-                </a:solidFill>
-                <a:latin typeface="Inter" pitchFamily="34" charset="0"/>
-                <a:ea typeface="Inter" pitchFamily="34" charset="-122"/>
-                <a:cs typeface="Inter" pitchFamily="34" charset="-120"/>
-              </a:rPr>
-              <a:t> </a:t>
-            </a:r>
-            <a:endParaRPr lang="en-US" sz="1600" dirty="0"/>
-          </a:p>
-          <a:p>
-            <a:pPr indent="0" marL="0">
-              <a:spcAft>
-                <a:spcPts val="400"/>
-              </a:spcAft>
-              <a:buNone/>
-            </a:pPr>
-            <a:r>
-              <a:rPr lang="en-US" sz="1700" b="1" dirty="0">
-                <a:solidFill>
-                  <a:srgbClr val="000000"/>
-                </a:solidFill>
-                <a:latin typeface="Inter" pitchFamily="34" charset="0"/>
-                <a:ea typeface="Inter" pitchFamily="34" charset="-122"/>
-                <a:cs typeface="Inter" pitchFamily="34" charset="-120"/>
-              </a:rPr>
-              <a:t>The feedback loop</a:t>
-            </a:r>
-            <a:endParaRPr lang="en-US" sz="1600" dirty="0"/>
-          </a:p>
-          <a:p>
-            <a:pPr indent="0" marL="0">
-              <a:spcAft>
-                <a:spcPts val="400"/>
-              </a:spcAft>
-              <a:buNone/>
-            </a:pPr>
-            <a:r>
-              <a:rPr lang="en-US" sz="1600" dirty="0">
-                <a:solidFill>
-                  <a:srgbClr val="000000"/>
-                </a:solidFill>
-                <a:latin typeface="Inter" pitchFamily="34" charset="0"/>
-                <a:ea typeface="Inter" pitchFamily="34" charset="-122"/>
-                <a:cs typeface="Inter" pitchFamily="34" charset="-120"/>
-              </a:rPr>
-              <a:t>AI gives fluent, confident answers → you stop checking → your judgment atrophies → you depend more on AI → you stop checking even less. This is not hypothetical. It is measurable.</a:t>
-            </a:r>
-            <a:endParaRPr lang="en-US" sz="1600" dirty="0"/>
-          </a:p>
-          <a:p>
-            <a:pPr indent="0" marL="0">
-              <a:spcAft>
-                <a:spcPts val="400"/>
-              </a:spcAft>
-              <a:buNone/>
-            </a:pPr>
-            <a:r>
-              <a:rPr lang="en-US" sz="700" dirty="0">
-                <a:solidFill>
-                  <a:srgbClr val="000000"/>
-                </a:solidFill>
-                <a:latin typeface="Inter" pitchFamily="34" charset="0"/>
-                <a:ea typeface="Inter" pitchFamily="34" charset="-122"/>
-                <a:cs typeface="Inter" pitchFamily="34" charset="-120"/>
-              </a:rPr>
-              <a:t> </a:t>
-            </a:r>
-            <a:endParaRPr lang="en-US" sz="1600" dirty="0"/>
-          </a:p>
-          <a:p>
-            <a:pPr indent="0" marL="0">
-              <a:spcAft>
-                <a:spcPts val="400"/>
-              </a:spcAft>
-              <a:buNone/>
-            </a:pPr>
-            <a:r>
-              <a:rPr lang="en-US" sz="1700" b="1" dirty="0">
-                <a:solidFill>
-                  <a:srgbClr val="000000"/>
-                </a:solidFill>
-                <a:latin typeface="Inter" pitchFamily="34" charset="0"/>
-                <a:ea typeface="Inter" pitchFamily="34" charset="-122"/>
-                <a:cs typeface="Inter" pitchFamily="34" charset="-120"/>
-              </a:rPr>
-              <a:t>The key distinction</a:t>
-            </a:r>
-            <a:endParaRPr lang="en-US" sz="1600" dirty="0"/>
-          </a:p>
-          <a:p>
-            <a:pPr indent="0" marL="0">
-              <a:spcAft>
-                <a:spcPts val="400"/>
-              </a:spcAft>
-              <a:buNone/>
-            </a:pPr>
-            <a:r>
-              <a:rPr lang="en-US" sz="1600" dirty="0">
-                <a:solidFill>
-                  <a:srgbClr val="000000"/>
-                </a:solidFill>
-                <a:latin typeface="Inter" pitchFamily="34" charset="0"/>
-                <a:ea typeface="Inter" pitchFamily="34" charset="-122"/>
-                <a:cs typeface="Inter" pitchFamily="34" charset="-120"/>
-              </a:rPr>
-              <a:t>An expert who offloads a task they understand is making a tradeoff. A junior who offloads a task they’ve never learned is skipping a developmental step. The capacity doesn’t exist yet. That’s where the real damage happens.</a:t>
-            </a:r>
-            <a:endParaRPr lang="en-US" sz="1600" dirty="0"/>
-          </a:p>
-        </p:txBody>
-      </p:sp>
-      <p:pic>
-        <p:nvPicPr>
-          <p:cNvPr id="6" name="Image 0" descr="/sessions/gracious-blissful-pasteur/mnt/claude_code_presentation/numericor.png">    </p:cNvPr>
-          <p:cNvPicPr>
-            <a:picLocks noChangeAspect="1"/>
-          </p:cNvPicPr>
-          <p:nvPr/>
-        </p:nvPicPr>
-        <p:blipFill>
-          <a:blip r:embed="rId1"/>
-          <a:stretch>
-            <a:fillRect/>
-          </a:stretch>
-        </p:blipFill>
-        <p:spPr>
-          <a:xfrm>
-            <a:off x="914400" y="6419088"/>
-            <a:ext cx="1371600" cy="214884"/>
-          </a:xfrm>
-          <a:prstGeom prst="rect">
-            <a:avLst/>
-          </a:prstGeom>
-        </p:spPr>
-      </p:pic>
-      <p:sp>
-        <p:nvSpPr>
-          <p:cNvPr id="7" name="Text 4"/>
-          <p:cNvSpPr/>
-          <p:nvPr/>
-        </p:nvSpPr>
-        <p:spPr>
-          <a:xfrm>
-            <a:off x="11064240" y="6400800"/>
-            <a:ext cx="640080" cy="365760"/>
-          </a:xfrm>
-          <a:prstGeom prst="rect">
-            <a:avLst/>
-          </a:prstGeom>
-          <a:noFill/>
-          <a:ln/>
-        </p:spPr>
-        <p:txBody>
-          <a:bodyPr wrap="square" rtlCol="0" anchor="ctr"/>
-          <a:lstStyle/>
-          <a:p>
-            <a:pPr algn="r" indent="0" marL="0">
-              <a:buNone/>
-            </a:pPr>
-            <a:r>
-              <a:rPr lang="en-US" sz="1100" dirty="0">
-                <a:solidFill>
-                  <a:srgbClr val="CCCCCC"/>
                 </a:solidFill>
                 <a:latin typeface="Inter" pitchFamily="34" charset="0"/>
                 <a:ea typeface="Inter" pitchFamily="34" charset="-122"/>
@@ -13859,33 +13996,48 @@
           </a:p>
         </p:txBody>
       </p:sp>
-      <p:pic>
-        <p:nvPicPr>
-          <p:cNvPr id="6" name="Image 0" descr="/sessions/gracious-blissful-pasteur/mnt/claude_code_presentation/numericor.png">    </p:cNvPr>
-          <p:cNvPicPr>
-            <a:picLocks noChangeAspect="1"/>
-          </p:cNvPicPr>
-          <p:nvPr/>
-        </p:nvPicPr>
-        <p:blipFill>
-          <a:blip r:embed="rId1"/>
-          <a:stretch>
-            <a:fillRect/>
-          </a:stretch>
-        </p:blipFill>
-        <p:spPr>
-          <a:xfrm>
-            <a:off x="914400" y="6419088"/>
-            <a:ext cx="1371600" cy="214884"/>
-          </a:xfrm>
-          <a:prstGeom prst="rect">
-            <a:avLst/>
-          </a:prstGeom>
-        </p:spPr>
-      </p:pic>
-      <p:sp>
-        <p:nvSpPr>
-          <p:cNvPr id="7" name="Text 4"/>
+      <p:sp>
+        <p:nvSpPr>
+          <p:cNvPr id="6" name="Text 4"/>
+          <p:cNvSpPr/>
+          <p:nvPr/>
+        </p:nvSpPr>
+        <p:spPr>
+          <a:xfrm>
+            <a:off x="914400" y="6400800"/>
+            <a:ext cx="1645920" cy="365760"/>
+          </a:xfrm>
+          <a:prstGeom prst="rect">
+            <a:avLst/>
+          </a:prstGeom>
+          <a:noFill/>
+          <a:ln/>
+        </p:spPr>
+        <p:txBody>
+          <a:bodyPr wrap="square" rtlCol="0" anchor="ctr"/>
+          <a:lstStyle/>
+          <a:p>
+            <a:pPr algn="l" indent="0" marL="0">
+              <a:buNone/>
+            </a:pPr>
+            <a:r>
+              <a:rPr lang="en-US" sz="1100" dirty="0">
+                <a:solidFill>
+                  <a:srgbClr val="888888"/>
+                </a:solidFill>
+                <a:latin typeface="Inter" pitchFamily="34" charset="0"/>
+                <a:ea typeface="Inter" pitchFamily="34" charset="-122"/>
+                <a:cs typeface="Inter" pitchFamily="34" charset="-120"/>
+              </a:rPr>
+              <a:t>NumeriCor GmbH</a:t>
+            </a:r>
+            <a:endParaRPr lang="en-US" sz="1100" dirty="0"/>
+          </a:p>
+        </p:txBody>
+      </p:sp>
+      <p:sp>
+        <p:nvSpPr>
+          <p:cNvPr id="7" name="Text 5"/>
           <p:cNvSpPr/>
           <p:nvPr/>
         </p:nvSpPr>
@@ -13987,7 +14139,7 @@
                 <a:ea typeface="Inter" pitchFamily="34" charset="-122"/>
                 <a:cs typeface="Inter" pitchFamily="34" charset="-120"/>
               </a:rPr>
-              <a:t>The Landscape Is Shifting</a:t>
+              <a:t>Why We Offload</a:t>
             </a:r>
             <a:endParaRPr lang="en-US" sz="3000" dirty="0"/>
           </a:p>
@@ -14051,7 +14203,7 @@
                 <a:ea typeface="Inter" pitchFamily="34" charset="-122"/>
                 <a:cs typeface="Inter" pitchFamily="34" charset="-120"/>
               </a:rPr>
-              <a:t>AI tools are here to stay — the question is how you use them</a:t>
+              <a:t>We are wired to delegate to tools — this is not a flaw</a:t>
             </a:r>
             <a:endParaRPr lang="en-US" sz="1500" dirty="0"/>
           </a:p>
@@ -14085,6 +14237,86 @@
               <a:buNone/>
             </a:pPr>
             <a:r>
+              <a:rPr lang="en-US" sz="1600" dirty="0">
+                <a:solidFill>
+                  <a:srgbClr val="000000"/>
+                </a:solidFill>
+                <a:latin typeface="Inter" pitchFamily="34" charset="0"/>
+                <a:ea typeface="Inter" pitchFamily="34" charset="-122"/>
+                <a:cs typeface="Inter" pitchFamily="34" charset="-120"/>
+              </a:rPr>
+              <a:t>Humans have always outsourced cognition. Writing replaced memorization. Calculators replaced mental arithmetic. GPS replaced spatial navigation. Each time, we traded a skill for efficiency. This is how we’re wired — if a tool makes something easier, we use it.</a:t>
+            </a:r>
+            <a:endParaRPr lang="en-US" sz="1600" dirty="0"/>
+          </a:p>
+          <a:p>
+            <a:pPr indent="0" marL="0">
+              <a:spcAft>
+                <a:spcPts val="400"/>
+              </a:spcAft>
+              <a:buNone/>
+            </a:pPr>
+            <a:r>
+              <a:rPr lang="en-US" sz="700" dirty="0">
+                <a:solidFill>
+                  <a:srgbClr val="000000"/>
+                </a:solidFill>
+                <a:latin typeface="Inter" pitchFamily="34" charset="0"/>
+                <a:ea typeface="Inter" pitchFamily="34" charset="-122"/>
+                <a:cs typeface="Inter" pitchFamily="34" charset="-120"/>
+              </a:rPr>
+              <a:t> </a:t>
+            </a:r>
+            <a:endParaRPr lang="en-US" sz="1600" dirty="0"/>
+          </a:p>
+          <a:p>
+            <a:pPr indent="0" marL="0">
+              <a:spcAft>
+                <a:spcPts val="400"/>
+              </a:spcAft>
+              <a:buNone/>
+            </a:pPr>
+            <a:r>
+              <a:rPr lang="en-US" sz="1600" dirty="0">
+                <a:solidFill>
+                  <a:srgbClr val="000000"/>
+                </a:solidFill>
+                <a:latin typeface="Inter" pitchFamily="34" charset="0"/>
+                <a:ea typeface="Inter" pitchFamily="34" charset="-122"/>
+                <a:cs typeface="Inter" pitchFamily="34" charset="-120"/>
+              </a:rPr>
+              <a:t>AI is different in one critical way: it doesn’t just offload mechanical work, it offloads thinking itself. The research calls this the “Cognitive Atrophy Paradox” — moderate AI use enhances your capability, but over-delegation erodes your analytical autonomy.</a:t>
+            </a:r>
+            <a:endParaRPr lang="en-US" sz="1600" dirty="0"/>
+          </a:p>
+          <a:p>
+            <a:pPr indent="0" marL="0">
+              <a:spcAft>
+                <a:spcPts val="400"/>
+              </a:spcAft>
+              <a:buNone/>
+            </a:pPr>
+            <a:r>
+              <a:rPr lang="en-US" sz="700" dirty="0">
+                <a:solidFill>
+                  <a:srgbClr val="000000"/>
+                </a:solidFill>
+                <a:latin typeface="Inter" pitchFamily="34" charset="0"/>
+                <a:ea typeface="Inter" pitchFamily="34" charset="-122"/>
+                <a:cs typeface="Inter" pitchFamily="34" charset="-120"/>
+              </a:rPr>
+              <a:t> </a:t>
+            </a:r>
+            <a:endParaRPr lang="en-US" sz="1600" dirty="0"/>
+          </a:p>
+          <a:p>
+            <a:pPr indent="0" marL="0">
+              <a:spcAft>
+                <a:spcPts val="400"/>
+              </a:spcAft>
+              <a:buNone/>
+            </a:pPr>
+            <a:r>
               <a:rPr lang="en-US" sz="1700" b="1" dirty="0">
                 <a:solidFill>
                   <a:srgbClr val="000000"/>
@@ -14093,7 +14325,7 @@
                 <a:ea typeface="Inter" pitchFamily="34" charset="-122"/>
                 <a:cs typeface="Inter" pitchFamily="34" charset="-120"/>
               </a:rPr>
-              <a:t>The macro picture</a:t>
+              <a:t>The feedback loop</a:t>
             </a:r>
             <a:endParaRPr lang="en-US" sz="1600" dirty="0"/>
           </a:p>
@@ -14113,7 +14345,7 @@
                 <a:ea typeface="Inter" pitchFamily="34" charset="-122"/>
                 <a:cs typeface="Inter" pitchFamily="34" charset="-120"/>
               </a:rPr>
-              <a:t>Dario Amodei (Anthropic CEO) at Davos 2026: AI will cause “unusually painful” workforce disruption. His estimate: 50% of entry-level white-collar jobs eliminated within 1–5 years. Other CEOs are more skeptical, but the direction is not in dispute.</a:t>
+              <a:t>AI gives fluent, confident answers → you stop checking → your judgment atrophies → you depend more on AI → you stop checking even less. This is not hypothetical. It is measurable.</a:t>
             </a:r>
             <a:endParaRPr lang="en-US" sz="1600" dirty="0"/>
           </a:p>
@@ -14145,6 +14377,26 @@
               <a:buNone/>
             </a:pPr>
             <a:r>
+              <a:rPr lang="en-US" sz="1700" b="1" dirty="0">
+                <a:solidFill>
+                  <a:srgbClr val="000000"/>
+                </a:solidFill>
+                <a:latin typeface="Inter" pitchFamily="34" charset="0"/>
+                <a:ea typeface="Inter" pitchFamily="34" charset="-122"/>
+                <a:cs typeface="Inter" pitchFamily="34" charset="-120"/>
+              </a:rPr>
+              <a:t>The key distinction</a:t>
+            </a:r>
+            <a:endParaRPr lang="en-US" sz="1600" dirty="0"/>
+          </a:p>
+          <a:p>
+            <a:pPr indent="0" marL="0">
+              <a:spcAft>
+                <a:spcPts val="400"/>
+              </a:spcAft>
+              <a:buNone/>
+            </a:pPr>
+            <a:r>
               <a:rPr lang="en-US" sz="1600" dirty="0">
                 <a:solidFill>
                   <a:srgbClr val="000000"/>
@@ -14153,159 +14405,54 @@
                 <a:ea typeface="Inter" pitchFamily="34" charset="-122"/>
                 <a:cs typeface="Inter" pitchFamily="34" charset="-120"/>
               </a:rPr>
-              <a:t>His core argument: we are compressing a century of economic evolution into 5–10 years. The speed is the problem, not the change itself.</a:t>
-            </a:r>
-            <a:endParaRPr lang="en-US" sz="1600" dirty="0"/>
-          </a:p>
-          <a:p>
-            <a:pPr indent="0" marL="0">
-              <a:spcAft>
-                <a:spcPts val="400"/>
-              </a:spcAft>
-              <a:buNone/>
-            </a:pPr>
-            <a:r>
-              <a:rPr lang="en-US" sz="700" dirty="0">
-                <a:solidFill>
-                  <a:srgbClr val="000000"/>
-                </a:solidFill>
-                <a:latin typeface="Inter" pitchFamily="34" charset="0"/>
-                <a:ea typeface="Inter" pitchFamily="34" charset="-122"/>
-                <a:cs typeface="Inter" pitchFamily="34" charset="-120"/>
-              </a:rPr>
-              <a:t> </a:t>
-            </a:r>
-            <a:endParaRPr lang="en-US" sz="1600" dirty="0"/>
-          </a:p>
-          <a:p>
-            <a:pPr indent="0" marL="0">
-              <a:spcAft>
-                <a:spcPts val="400"/>
-              </a:spcAft>
-              <a:buNone/>
-            </a:pPr>
-            <a:r>
-              <a:rPr lang="en-US" sz="1700" b="1" dirty="0">
-                <a:solidFill>
-                  <a:srgbClr val="000000"/>
-                </a:solidFill>
-                <a:latin typeface="Inter" pitchFamily="34" charset="0"/>
-                <a:ea typeface="Inter" pitchFamily="34" charset="-122"/>
-                <a:cs typeface="Inter" pitchFamily="34" charset="-120"/>
-              </a:rPr>
-              <a:t>The pencil argument</a:t>
-            </a:r>
-            <a:endParaRPr lang="en-US" sz="1600" dirty="0"/>
-          </a:p>
-          <a:p>
-            <a:pPr indent="0" marL="0">
-              <a:spcAft>
-                <a:spcPts val="400"/>
-              </a:spcAft>
-              <a:buNone/>
-            </a:pPr>
-            <a:r>
-              <a:rPr lang="en-US" sz="1600" dirty="0">
-                <a:solidFill>
-                  <a:srgbClr val="000000"/>
-                </a:solidFill>
-                <a:latin typeface="Inter" pitchFamily="34" charset="0"/>
-                <a:ea typeface="Inter" pitchFamily="34" charset="-122"/>
-                <a:cs typeface="Inter" pitchFamily="34" charset="-120"/>
-              </a:rPr>
-              <a:t>“Me and my pencil are smarter than just myself.” (David Deutsch) — There is nothing different with AI. Me and AI are a lot smarter than just myself. The tool amplifies you. But only if you remain the one thinking.</a:t>
-            </a:r>
-            <a:endParaRPr lang="en-US" sz="1600" dirty="0"/>
-          </a:p>
-          <a:p>
-            <a:pPr indent="0" marL="0">
-              <a:spcAft>
-                <a:spcPts val="400"/>
-              </a:spcAft>
-              <a:buNone/>
-            </a:pPr>
-            <a:r>
-              <a:rPr lang="en-US" sz="700" dirty="0">
-                <a:solidFill>
-                  <a:srgbClr val="000000"/>
-                </a:solidFill>
-                <a:latin typeface="Inter" pitchFamily="34" charset="0"/>
-                <a:ea typeface="Inter" pitchFamily="34" charset="-122"/>
-                <a:cs typeface="Inter" pitchFamily="34" charset="-120"/>
-              </a:rPr>
-              <a:t> </a:t>
-            </a:r>
-            <a:endParaRPr lang="en-US" sz="1600" dirty="0"/>
-          </a:p>
-          <a:p>
-            <a:pPr indent="0" marL="0">
-              <a:spcAft>
-                <a:spcPts val="400"/>
-              </a:spcAft>
-              <a:buNone/>
-            </a:pPr>
-            <a:r>
-              <a:rPr lang="en-US" sz="1700" b="1" dirty="0">
-                <a:solidFill>
-                  <a:srgbClr val="000000"/>
-                </a:solidFill>
-                <a:latin typeface="Inter" pitchFamily="34" charset="0"/>
-                <a:ea typeface="Inter" pitchFamily="34" charset="-122"/>
-                <a:cs typeface="Inter" pitchFamily="34" charset="-120"/>
-              </a:rPr>
-              <a:t>The bottom line</a:t>
-            </a:r>
-            <a:endParaRPr lang="en-US" sz="1600" dirty="0"/>
-          </a:p>
-          <a:p>
-            <a:pPr indent="0" marL="0">
-              <a:spcAft>
-                <a:spcPts val="400"/>
-              </a:spcAft>
-              <a:buNone/>
-            </a:pPr>
-            <a:r>
-              <a:rPr lang="en-US" sz="1600" dirty="0">
-                <a:solidFill>
-                  <a:srgbClr val="000000"/>
-                </a:solidFill>
-                <a:latin typeface="Inter" pitchFamily="34" charset="0"/>
-                <a:ea typeface="Inter" pitchFamily="34" charset="-122"/>
-                <a:cs typeface="Inter" pitchFamily="34" charset="-120"/>
-              </a:rPr>
-              <a:t>Either you learn to work with these tools effectively, or you lose out. But “effectively” does not mean “delegate everything.” It means knowing when to think and when to let the tool think.</a:t>
-            </a:r>
-            <a:endParaRPr lang="en-US" sz="1600" dirty="0"/>
-          </a:p>
-        </p:txBody>
-      </p:sp>
-      <p:pic>
-        <p:nvPicPr>
-          <p:cNvPr id="6" name="Image 0" descr="/sessions/gracious-blissful-pasteur/mnt/claude_code_presentation/numericor.png">    </p:cNvPr>
-          <p:cNvPicPr>
-            <a:picLocks noChangeAspect="1"/>
-          </p:cNvPicPr>
-          <p:nvPr/>
-        </p:nvPicPr>
-        <p:blipFill>
-          <a:blip r:embed="rId1"/>
-          <a:stretch>
-            <a:fillRect/>
-          </a:stretch>
-        </p:blipFill>
-        <p:spPr>
-          <a:xfrm>
-            <a:off x="914400" y="6419088"/>
-            <a:ext cx="1371600" cy="214884"/>
-          </a:xfrm>
-          <a:prstGeom prst="rect">
-            <a:avLst/>
-          </a:prstGeom>
-        </p:spPr>
-      </p:pic>
-      <p:sp>
-        <p:nvSpPr>
-          <p:cNvPr id="7" name="Text 4"/>
+              <a:t>An expert who offloads a task they understand is making a tradeoff. A junior who offloads a task they’ve never learned is skipping a developmental step. The capacity doesn’t exist yet. That’s where the real damage happens.</a:t>
+            </a:r>
+            <a:endParaRPr lang="en-US" sz="1600" dirty="0"/>
+          </a:p>
+        </p:txBody>
+      </p:sp>
+      <p:sp>
+        <p:nvSpPr>
+          <p:cNvPr id="6" name="Text 4"/>
+          <p:cNvSpPr/>
+          <p:nvPr/>
+        </p:nvSpPr>
+        <p:spPr>
+          <a:xfrm>
+            <a:off x="914400" y="6400800"/>
+            <a:ext cx="1645920" cy="365760"/>
+          </a:xfrm>
+          <a:prstGeom prst="rect">
+            <a:avLst/>
+          </a:prstGeom>
+          <a:noFill/>
+          <a:ln/>
+        </p:spPr>
+        <p:txBody>
+          <a:bodyPr wrap="square" rtlCol="0" anchor="ctr"/>
+          <a:lstStyle/>
+          <a:p>
+            <a:pPr algn="l" indent="0" marL="0">
+              <a:buNone/>
+            </a:pPr>
+            <a:r>
+              <a:rPr lang="en-US" sz="1100" dirty="0">
+                <a:solidFill>
+                  <a:srgbClr val="888888"/>
+                </a:solidFill>
+                <a:latin typeface="Inter" pitchFamily="34" charset="0"/>
+                <a:ea typeface="Inter" pitchFamily="34" charset="-122"/>
+                <a:cs typeface="Inter" pitchFamily="34" charset="-120"/>
+              </a:rPr>
+              <a:t>NumeriCor GmbH</a:t>
+            </a:r>
+            <a:endParaRPr lang="en-US" sz="1100" dirty="0"/>
+          </a:p>
+        </p:txBody>
+      </p:sp>
+      <p:sp>
+        <p:nvSpPr>
+          <p:cNvPr id="7" name="Text 5"/>
           <p:cNvSpPr/>
           <p:nvPr/>
         </p:nvSpPr>
@@ -14407,7 +14554,7 @@
                 <a:ea typeface="Inter" pitchFamily="34" charset="-122"/>
                 <a:cs typeface="Inter" pitchFamily="34" charset="-120"/>
               </a:rPr>
-              <a:t>Three Engagement Levels</a:t>
+              <a:t>The Landscape Is Shifting</a:t>
             </a:r>
             <a:endParaRPr lang="en-US" sz="3000" dirty="0"/>
           </a:p>
@@ -14471,7 +14618,7 @@
                 <a:ea typeface="Inter" pitchFamily="34" charset="-122"/>
                 <a:cs typeface="Inter" pitchFamily="34" charset="-120"/>
               </a:rPr>
-              <a:t>A framework for calibrating how much AI does vs. you do</a:t>
+              <a:t>AI tools are here to stay — the question is how you use them</a:t>
             </a:r>
             <a:endParaRPr lang="en-US" sz="1500" dirty="0"/>
           </a:p>
@@ -14513,7 +14660,7 @@
                 <a:ea typeface="Inter" pitchFamily="34" charset="-122"/>
                 <a:cs typeface="Inter" pitchFamily="34" charset="-120"/>
               </a:rPr>
-              <a:t>HITL — Human-in-the-Loop</a:t>
+              <a:t>The macro picture</a:t>
             </a:r>
             <a:endParaRPr lang="en-US" sz="1600" dirty="0"/>
           </a:p>
@@ -14533,7 +14680,7 @@
                 <a:ea typeface="Inter" pitchFamily="34" charset="-122"/>
                 <a:cs typeface="Inter" pitchFamily="34" charset="-120"/>
               </a:rPr>
-              <a:t>You do the thinking and writing. AI assists only when asked. For skills that define your professional identity: architecture, debugging, domain modeling.</a:t>
+              <a:t>Dario Amodei (Anthropic CEO) at Davos 2026: AI will cause “unusually painful” workforce disruption. His estimate: 50% of entry-level white-collar jobs eliminated within 1–5 years. Other CEOs are more skeptical, but the direction is not in dispute.</a:t>
             </a:r>
             <a:endParaRPr lang="en-US" sz="1600" dirty="0"/>
           </a:p>
@@ -14565,6 +14712,46 @@
               <a:buNone/>
             </a:pPr>
             <a:r>
+              <a:rPr lang="en-US" sz="1600" dirty="0">
+                <a:solidFill>
+                  <a:srgbClr val="000000"/>
+                </a:solidFill>
+                <a:latin typeface="Inter" pitchFamily="34" charset="0"/>
+                <a:ea typeface="Inter" pitchFamily="34" charset="-122"/>
+                <a:cs typeface="Inter" pitchFamily="34" charset="-120"/>
+              </a:rPr>
+              <a:t>His core argument: we are compressing a century of economic evolution into 5–10 years. The speed is the problem, not the change itself.</a:t>
+            </a:r>
+            <a:endParaRPr lang="en-US" sz="1600" dirty="0"/>
+          </a:p>
+          <a:p>
+            <a:pPr indent="0" marL="0">
+              <a:spcAft>
+                <a:spcPts val="400"/>
+              </a:spcAft>
+              <a:buNone/>
+            </a:pPr>
+            <a:r>
+              <a:rPr lang="en-US" sz="700" dirty="0">
+                <a:solidFill>
+                  <a:srgbClr val="000000"/>
+                </a:solidFill>
+                <a:latin typeface="Inter" pitchFamily="34" charset="0"/>
+                <a:ea typeface="Inter" pitchFamily="34" charset="-122"/>
+                <a:cs typeface="Inter" pitchFamily="34" charset="-120"/>
+              </a:rPr>
+              <a:t> </a:t>
+            </a:r>
+            <a:endParaRPr lang="en-US" sz="1600" dirty="0"/>
+          </a:p>
+          <a:p>
+            <a:pPr indent="0" marL="0">
+              <a:spcAft>
+                <a:spcPts val="400"/>
+              </a:spcAft>
+              <a:buNone/>
+            </a:pPr>
+            <a:r>
               <a:rPr lang="en-US" sz="1700" b="1" dirty="0">
                 <a:solidFill>
                   <a:srgbClr val="000000"/>
@@ -14573,7 +14760,7 @@
                 <a:ea typeface="Inter" pitchFamily="34" charset="-122"/>
                 <a:cs typeface="Inter" pitchFamily="34" charset="-120"/>
               </a:rPr>
-              <a:t>HOTL — Human-on-the-Loop</a:t>
+              <a:t>The pencil argument</a:t>
             </a:r>
             <a:endParaRPr lang="en-US" sz="1600" dirty="0"/>
           </a:p>
@@ -14593,7 +14780,7 @@
                 <a:ea typeface="Inter" pitchFamily="34" charset="-122"/>
                 <a:cs typeface="Inter" pitchFamily="34" charset="-120"/>
               </a:rPr>
-              <a:t>AI drafts, you review and edit. Stay engaged enough to catch errors and learn from the output. Good for tasks you understand well.</a:t>
+              <a:t>“Me and my pencil are smarter than just myself.” (David Deutsch) — There is nothing different with AI. Me and AI are a lot smarter than just myself. The tool amplifies you. But only if you remain the one thinking.</a:t>
             </a:r>
             <a:endParaRPr lang="en-US" sz="1600" dirty="0"/>
           </a:p>
@@ -14633,7 +14820,7 @@
                 <a:ea typeface="Inter" pitchFamily="34" charset="-122"/>
                 <a:cs typeface="Inter" pitchFamily="34" charset="-120"/>
               </a:rPr>
-              <a:t>HOOTL — Human-out-of-the-Loop</a:t>
+              <a:t>The bottom line</a:t>
             </a:r>
             <a:endParaRPr lang="en-US" sz="1600" dirty="0"/>
           </a:p>
@@ -14653,39 +14840,38 @@
                 <a:ea typeface="Inter" pitchFamily="34" charset="-122"/>
                 <a:cs typeface="Inter" pitchFamily="34" charset="-120"/>
               </a:rPr>
-              <a:t>AI handles autonomously. Reserved for truly mechanical work: formatting, boilerplate, simple refactors, documentation scaffolding.</a:t>
-            </a:r>
-            <a:endParaRPr lang="en-US" sz="1600" dirty="0"/>
-          </a:p>
-          <a:p>
-            <a:pPr indent="0" marL="0">
-              <a:spcAft>
-                <a:spcPts val="400"/>
-              </a:spcAft>
-              <a:buNone/>
-            </a:pPr>
-            <a:r>
-              <a:rPr lang="en-US" sz="700" dirty="0">
-                <a:solidFill>
-                  <a:srgbClr val="000000"/>
-                </a:solidFill>
-                <a:latin typeface="Inter" pitchFamily="34" charset="0"/>
-                <a:ea typeface="Inter" pitchFamily="34" charset="-122"/>
-                <a:cs typeface="Inter" pitchFamily="34" charset="-120"/>
-              </a:rPr>
-              <a:t> </a:t>
-            </a:r>
-            <a:endParaRPr lang="en-US" sz="1600" dirty="0"/>
-          </a:p>
-          <a:p>
-            <a:pPr indent="0" marL="0">
-              <a:spcAft>
-                <a:spcPts val="400"/>
-              </a:spcAft>
-              <a:buNone/>
-            </a:pPr>
-            <a:r>
-              <a:rPr lang="en-US" sz="1300" i="1" dirty="0">
+              <a:t>Either you learn to work with these tools effectively, or you lose out. But “effectively” does not mean “delegate everything.” It means knowing when to think and when to let the tool think.</a:t>
+            </a:r>
+            <a:endParaRPr lang="en-US" sz="1600" dirty="0"/>
+          </a:p>
+        </p:txBody>
+      </p:sp>
+      <p:sp>
+        <p:nvSpPr>
+          <p:cNvPr id="6" name="Text 4"/>
+          <p:cNvSpPr/>
+          <p:nvPr/>
+        </p:nvSpPr>
+        <p:spPr>
+          <a:xfrm>
+            <a:off x="914400" y="6400800"/>
+            <a:ext cx="1645920" cy="365760"/>
+          </a:xfrm>
+          <a:prstGeom prst="rect">
+            <a:avLst/>
+          </a:prstGeom>
+          <a:noFill/>
+          <a:ln/>
+        </p:spPr>
+        <p:txBody>
+          <a:bodyPr wrap="square" rtlCol="0" anchor="ctr"/>
+          <a:lstStyle/>
+          <a:p>
+            <a:pPr algn="l" indent="0" marL="0">
+              <a:buNone/>
+            </a:pPr>
+            <a:r>
+              <a:rPr lang="en-US" sz="1100" dirty="0">
                 <a:solidFill>
                   <a:srgbClr val="888888"/>
                 </a:solidFill>
@@ -14693,39 +14879,15 @@
                 <a:ea typeface="Inter" pitchFamily="34" charset="-122"/>
                 <a:cs typeface="Inter" pitchFamily="34" charset="-120"/>
               </a:rPr>
-              <a:t>The classification is personal. What’s HOOTL for a senior dev might need to be HITL for a junior. Be honest about where you are.</a:t>
-            </a:r>
-            <a:endParaRPr lang="en-US" sz="1600" dirty="0"/>
-          </a:p>
-        </p:txBody>
-      </p:sp>
-      <p:pic>
-        <p:nvPicPr>
-          <p:cNvPr id="6" name="Image 0" descr="/sessions/gracious-blissful-pasteur/mnt/claude_code_presentation/numericor.png">    </p:cNvPr>
-          <p:cNvPicPr>
-            <a:picLocks noChangeAspect="1"/>
-          </p:cNvPicPr>
-          <p:nvPr/>
-        </p:nvPicPr>
-        <p:blipFill>
-          <a:blip r:embed="rId1"/>
-          <a:stretch>
-            <a:fillRect/>
-          </a:stretch>
-        </p:blipFill>
-        <p:spPr>
-          <a:xfrm>
-            <a:off x="914400" y="6419088"/>
-            <a:ext cx="1371600" cy="214884"/>
-          </a:xfrm>
-          <a:prstGeom prst="rect">
-            <a:avLst/>
-          </a:prstGeom>
-        </p:spPr>
-      </p:pic>
-      <p:sp>
-        <p:nvSpPr>
-          <p:cNvPr id="7" name="Text 4"/>
+              <a:t>NumeriCor GmbH</a:t>
+            </a:r>
+            <a:endParaRPr lang="en-US" sz="1100" dirty="0"/>
+          </a:p>
+        </p:txBody>
+      </p:sp>
+      <p:sp>
+        <p:nvSpPr>
+          <p:cNvPr id="7" name="Text 5"/>
           <p:cNvSpPr/>
           <p:nvPr/>
         </p:nvSpPr>
@@ -14827,7 +14989,7 @@
                 <a:ea typeface="Inter" pitchFamily="34" charset="-122"/>
                 <a:cs typeface="Inter" pitchFamily="34" charset="-120"/>
               </a:rPr>
-              <a:t>Your Responsibility</a:t>
+              <a:t>Three Engagement Levels</a:t>
             </a:r>
             <a:endParaRPr lang="en-US" sz="3000" dirty="0"/>
           </a:p>
@@ -14891,7 +15053,7 @@
                 <a:ea typeface="Inter" pitchFamily="34" charset="-122"/>
                 <a:cs typeface="Inter" pitchFamily="34" charset="-120"/>
               </a:rPr>
-              <a:t>The tool exists. The research exists. You choose how to use it.</a:t>
+              <a:t>A framework for calibrating how much AI does vs. you do</a:t>
             </a:r>
             <a:endParaRPr lang="en-US" sz="1500" dirty="0"/>
           </a:p>
@@ -14933,7 +15095,7 @@
                 <a:ea typeface="Inter" pitchFamily="34" charset="-122"/>
                 <a:cs typeface="Inter" pitchFamily="34" charset="-120"/>
               </a:rPr>
-              <a:t>My approach: anti-deskilling as a SKILL.md</a:t>
+              <a:t>HITL — Human-in-the-Loop</a:t>
             </a:r>
             <a:endParaRPr lang="en-US" sz="1600" dirty="0"/>
           </a:p>
@@ -14953,7 +15115,7 @@
                 <a:ea typeface="Inter" pitchFamily="34" charset="-122"/>
                 <a:cs typeface="Inter" pitchFamily="34" charset="-120"/>
               </a:rPr>
-              <a:t>I maintain a SKILL.md that Claude loads automatically. It detects HITL moments and asks me to describe my approach before it generates anything. It watches for delegation drift across a session. It’s an ongoing project, not a finished product.</a:t>
+              <a:t>You do the thinking and writing. AI assists only when asked. For skills that define your professional identity: architecture, debugging, domain modeling.</a:t>
             </a:r>
             <a:endParaRPr lang="en-US" sz="1600" dirty="0"/>
           </a:p>
@@ -14993,7 +15155,7 @@
                 <a:ea typeface="Inter" pitchFamily="34" charset="-122"/>
                 <a:cs typeface="Inter" pitchFamily="34" charset="-120"/>
               </a:rPr>
-              <a:t>How it fits with haft</a:t>
+              <a:t>HOTL — Human-on-the-Loop</a:t>
             </a:r>
             <a:endParaRPr lang="en-US" sz="1600" dirty="0"/>
           </a:p>
@@ -15013,7 +15175,7 @@
                 <a:ea typeface="Inter" pitchFamily="34" charset="-122"/>
                 <a:cs typeface="Inter" pitchFamily="34" charset="-120"/>
               </a:rPr>
-              <a:t>Anti-deskilling fires first → you think through the problem → haft captures and validates your thinking (via /h-frame or /h-reason) → the reasoning cycle structures it. The tools are complementary, not competing. Claude doesn’t drive the cycle if you didn’t ask it to.</a:t>
+              <a:t>AI drafts, you review and edit. Stay engaged enough to catch errors and learn from the output. Good for tasks you understand well.</a:t>
             </a:r>
             <a:endParaRPr lang="en-US" sz="1600" dirty="0"/>
           </a:p>
@@ -15053,7 +15215,7 @@
                 <a:ea typeface="Inter" pitchFamily="34" charset="-122"/>
                 <a:cs typeface="Inter" pitchFamily="34" charset="-120"/>
               </a:rPr>
-              <a:t>The cigarette analogy</a:t>
+              <a:t>HOOTL — Human-out-of-the-Loop</a:t>
             </a:r>
             <a:endParaRPr lang="en-US" sz="1600" dirty="0"/>
           </a:p>
@@ -15073,7 +15235,7 @@
                 <a:ea typeface="Inter" pitchFamily="34" charset="-122"/>
                 <a:cs typeface="Inter" pitchFamily="34" charset="-120"/>
               </a:rPr>
-              <a:t>We know the risks. The information is available. But ultimately, it’s your responsibility how you use these tools. No framework can force you to stay sharp. Only you can decide to think before you delegate.</a:t>
+              <a:t>AI handles autonomously. Reserved for truly mechanical work: formatting, boilerplate, simple refactors, documentation scaffolding.</a:t>
             </a:r>
             <a:endParaRPr lang="en-US" sz="1600" dirty="0"/>
           </a:p>
@@ -15113,39 +15275,54 @@
                 <a:ea typeface="Inter" pitchFamily="34" charset="-122"/>
                 <a:cs typeface="Inter" pitchFamily="34" charset="-120"/>
               </a:rPr>
-              <a:t>Human-first rounds: sketch your approach before handing a task to AI (Hosanagar, 2025).</a:t>
-            </a:r>
-            <a:endParaRPr lang="en-US" sz="1600" dirty="0"/>
-          </a:p>
-        </p:txBody>
-      </p:sp>
-      <p:pic>
-        <p:nvPicPr>
-          <p:cNvPr id="6" name="Image 0" descr="/sessions/gracious-blissful-pasteur/mnt/claude_code_presentation/numericor.png">    </p:cNvPr>
-          <p:cNvPicPr>
-            <a:picLocks noChangeAspect="1"/>
-          </p:cNvPicPr>
-          <p:nvPr/>
-        </p:nvPicPr>
-        <p:blipFill>
-          <a:blip r:embed="rId1"/>
-          <a:stretch>
-            <a:fillRect/>
-          </a:stretch>
-        </p:blipFill>
-        <p:spPr>
-          <a:xfrm>
-            <a:off x="914400" y="6419088"/>
-            <a:ext cx="1371600" cy="214884"/>
-          </a:xfrm>
-          <a:prstGeom prst="rect">
-            <a:avLst/>
-          </a:prstGeom>
-        </p:spPr>
-      </p:pic>
-      <p:sp>
-        <p:nvSpPr>
-          <p:cNvPr id="7" name="Text 4"/>
+              <a:t>The classification is personal. What’s HOOTL for a senior dev might need to be HITL for a junior. Be honest about where you are.</a:t>
+            </a:r>
+            <a:endParaRPr lang="en-US" sz="1600" dirty="0"/>
+          </a:p>
+        </p:txBody>
+      </p:sp>
+      <p:sp>
+        <p:nvSpPr>
+          <p:cNvPr id="6" name="Text 4"/>
+          <p:cNvSpPr/>
+          <p:nvPr/>
+        </p:nvSpPr>
+        <p:spPr>
+          <a:xfrm>
+            <a:off x="914400" y="6400800"/>
+            <a:ext cx="1645920" cy="365760"/>
+          </a:xfrm>
+          <a:prstGeom prst="rect">
+            <a:avLst/>
+          </a:prstGeom>
+          <a:noFill/>
+          <a:ln/>
+        </p:spPr>
+        <p:txBody>
+          <a:bodyPr wrap="square" rtlCol="0" anchor="ctr"/>
+          <a:lstStyle/>
+          <a:p>
+            <a:pPr algn="l" indent="0" marL="0">
+              <a:buNone/>
+            </a:pPr>
+            <a:r>
+              <a:rPr lang="en-US" sz="1100" dirty="0">
+                <a:solidFill>
+                  <a:srgbClr val="888888"/>
+                </a:solidFill>
+                <a:latin typeface="Inter" pitchFamily="34" charset="0"/>
+                <a:ea typeface="Inter" pitchFamily="34" charset="-122"/>
+                <a:cs typeface="Inter" pitchFamily="34" charset="-120"/>
+              </a:rPr>
+              <a:t>NumeriCor GmbH</a:t>
+            </a:r>
+            <a:endParaRPr lang="en-US" sz="1100" dirty="0"/>
+          </a:p>
+        </p:txBody>
+      </p:sp>
+      <p:sp>
+        <p:nvSpPr>
+          <p:cNvPr id="7" name="Text 5"/>
           <p:cNvSpPr/>
           <p:nvPr/>
         </p:nvSpPr>
@@ -15247,7 +15424,7 @@
                 <a:ea typeface="Inter" pitchFamily="34" charset="-122"/>
                 <a:cs typeface="Inter" pitchFamily="34" charset="-120"/>
               </a:rPr>
-              <a:t>The Skill Creator</a:t>
+              <a:t>Your Responsibility</a:t>
             </a:r>
             <a:endParaRPr lang="en-US" sz="3000" dirty="0"/>
           </a:p>
@@ -15311,7 +15488,7 @@
                 <a:ea typeface="Inter" pitchFamily="34" charset="-122"/>
                 <a:cs typeface="Inter" pitchFamily="34" charset="-120"/>
               </a:rPr>
-              <a:t>Build your own guardrails — and test them</a:t>
+              <a:t>The tool exists. The research exists. You choose how to use it.</a:t>
             </a:r>
             <a:endParaRPr lang="en-US" sz="1500" dirty="0"/>
           </a:p>
@@ -15353,7 +15530,7 @@
                 <a:ea typeface="Inter" pitchFamily="34" charset="-122"/>
                 <a:cs typeface="Inter" pitchFamily="34" charset="-120"/>
               </a:rPr>
-              <a:t>What it does</a:t>
+              <a:t>My approach: anti-deskilling as a SKILL.md</a:t>
             </a:r>
             <a:endParaRPr lang="en-US" sz="1600" dirty="0"/>
           </a:p>
@@ -15373,7 +15550,7 @@
                 <a:ea typeface="Inter" pitchFamily="34" charset="-122"/>
                 <a:cs typeface="Inter" pitchFamily="34" charset="-120"/>
               </a:rPr>
-              <a:t>Anthropic’s meta-skill for creating, testing, and iteratively improving custom skills. Available at github.com/anthropics/skills.</a:t>
+              <a:t>I maintain a SKILL.md that Claude loads automatically. It detects HITL moments and asks me to describe my approach before it generates anything. It watches for delegation drift across a session. It’s an ongoing project, not a finished product.</a:t>
             </a:r>
             <a:endParaRPr lang="en-US" sz="1600" dirty="0"/>
           </a:p>
@@ -15413,17 +15590,16 @@
                 <a:ea typeface="Inter" pitchFamily="34" charset="-122"/>
                 <a:cs typeface="Inter" pitchFamily="34" charset="-120"/>
               </a:rPr>
-              <a:t>The optimization loop</a:t>
-            </a:r>
-            <a:endParaRPr lang="en-US" sz="1600" dirty="0"/>
-          </a:p>
-          <a:p>
-            <a:pPr marL="342900" indent="-342900">
-              <a:spcAft>
-                <a:spcPts val="400"/>
-              </a:spcAft>
-              <a:buSzPct val="100000"/>
-              <a:buChar char="→"/>
+              <a:t>How it fits with haft</a:t>
+            </a:r>
+            <a:endParaRPr lang="en-US" sz="1600" dirty="0"/>
+          </a:p>
+          <a:p>
+            <a:pPr indent="0" marL="0">
+              <a:spcAft>
+                <a:spcPts val="400"/>
+              </a:spcAft>
+              <a:buNone/>
             </a:pPr>
             <a:r>
               <a:rPr lang="en-US" sz="1600" dirty="0">
@@ -15434,17 +15610,56 @@
                 <a:ea typeface="Inter" pitchFamily="34" charset="-122"/>
                 <a:cs typeface="Inter" pitchFamily="34" charset="-120"/>
               </a:rPr>
-              <a:t>1. Define skill intent → interview → write SKILL.md</a:t>
-            </a:r>
-            <a:endParaRPr lang="en-US" sz="1600" dirty="0"/>
-          </a:p>
-          <a:p>
-            <a:pPr marL="342900" indent="-342900">
-              <a:spcAft>
-                <a:spcPts val="400"/>
-              </a:spcAft>
-              <a:buSzPct val="100000"/>
-              <a:buChar char="→"/>
+              <a:t>Anti-deskilling fires first → you think through the problem → haft captures and validates your thinking (via /h-frame or /h-reason) → the reasoning cycle structures it. The tools are complementary, not competing. Claude doesn’t drive the cycle if you didn’t ask it to.</a:t>
+            </a:r>
+            <a:endParaRPr lang="en-US" sz="1600" dirty="0"/>
+          </a:p>
+          <a:p>
+            <a:pPr indent="0" marL="0">
+              <a:spcAft>
+                <a:spcPts val="400"/>
+              </a:spcAft>
+              <a:buNone/>
+            </a:pPr>
+            <a:r>
+              <a:rPr lang="en-US" sz="700" dirty="0">
+                <a:solidFill>
+                  <a:srgbClr val="000000"/>
+                </a:solidFill>
+                <a:latin typeface="Inter" pitchFamily="34" charset="0"/>
+                <a:ea typeface="Inter" pitchFamily="34" charset="-122"/>
+                <a:cs typeface="Inter" pitchFamily="34" charset="-120"/>
+              </a:rPr>
+              <a:t> </a:t>
+            </a:r>
+            <a:endParaRPr lang="en-US" sz="1600" dirty="0"/>
+          </a:p>
+          <a:p>
+            <a:pPr indent="0" marL="0">
+              <a:spcAft>
+                <a:spcPts val="400"/>
+              </a:spcAft>
+              <a:buNone/>
+            </a:pPr>
+            <a:r>
+              <a:rPr lang="en-US" sz="1700" b="1" dirty="0">
+                <a:solidFill>
+                  <a:srgbClr val="000000"/>
+                </a:solidFill>
+                <a:latin typeface="Inter" pitchFamily="34" charset="0"/>
+                <a:ea typeface="Inter" pitchFamily="34" charset="-122"/>
+                <a:cs typeface="Inter" pitchFamily="34" charset="-120"/>
+              </a:rPr>
+              <a:t>The cigarette analogy</a:t>
+            </a:r>
+            <a:endParaRPr lang="en-US" sz="1600" dirty="0"/>
+          </a:p>
+          <a:p>
+            <a:pPr indent="0" marL="0">
+              <a:spcAft>
+                <a:spcPts val="400"/>
+              </a:spcAft>
+              <a:buNone/>
             </a:pPr>
             <a:r>
               <a:rPr lang="en-US" sz="1600" dirty="0">
@@ -15455,70 +15670,7 @@
                 <a:ea typeface="Inter" pitchFamily="34" charset="-122"/>
                 <a:cs typeface="Inter" pitchFamily="34" charset="-120"/>
               </a:rPr>
-              <a:t>2. Create test cases (evals.json) with expected outputs</a:t>
-            </a:r>
-            <a:endParaRPr lang="en-US" sz="1600" dirty="0"/>
-          </a:p>
-          <a:p>
-            <a:pPr marL="342900" indent="-342900">
-              <a:spcAft>
-                <a:spcPts val="400"/>
-              </a:spcAft>
-              <a:buSzPct val="100000"/>
-              <a:buChar char="→"/>
-            </a:pPr>
-            <a:r>
-              <a:rPr lang="en-US" sz="1600" dirty="0">
-                <a:solidFill>
-                  <a:srgbClr val="000000"/>
-                </a:solidFill>
-                <a:latin typeface="Inter" pitchFamily="34" charset="0"/>
-                <a:ea typeface="Inter" pitchFamily="34" charset="-122"/>
-                <a:cs typeface="Inter" pitchFamily="34" charset="-120"/>
-              </a:rPr>
-              <a:t>3. Run A/B: with-skill vs. baseline, graded automatically</a:t>
-            </a:r>
-            <a:endParaRPr lang="en-US" sz="1600" dirty="0"/>
-          </a:p>
-          <a:p>
-            <a:pPr marL="342900" indent="-342900">
-              <a:spcAft>
-                <a:spcPts val="400"/>
-              </a:spcAft>
-              <a:buSzPct val="100000"/>
-              <a:buChar char="→"/>
-            </a:pPr>
-            <a:r>
-              <a:rPr lang="en-US" sz="1600" dirty="0">
-                <a:solidFill>
-                  <a:srgbClr val="000000"/>
-                </a:solidFill>
-                <a:latin typeface="Inter" pitchFamily="34" charset="0"/>
-                <a:ea typeface="Inter" pitchFamily="34" charset="-122"/>
-                <a:cs typeface="Inter" pitchFamily="34" charset="-120"/>
-              </a:rPr>
-              <a:t>4. Review results in HTML viewer, provide feedback</a:t>
-            </a:r>
-            <a:endParaRPr lang="en-US" sz="1600" dirty="0"/>
-          </a:p>
-          <a:p>
-            <a:pPr marL="342900" indent="-342900">
-              <a:spcAft>
-                <a:spcPts val="400"/>
-              </a:spcAft>
-              <a:buSzPct val="100000"/>
-              <a:buChar char="→"/>
-            </a:pPr>
-            <a:r>
-              <a:rPr lang="en-US" sz="1600" dirty="0">
-                <a:solidFill>
-                  <a:srgbClr val="000000"/>
-                </a:solidFill>
-                <a:latin typeface="Inter" pitchFamily="34" charset="0"/>
-                <a:ea typeface="Inter" pitchFamily="34" charset="-122"/>
-                <a:cs typeface="Inter" pitchFamily="34" charset="-120"/>
-              </a:rPr>
-              <a:t>5. Iterate: improve skill, re-run evals, compare to previous</a:t>
+              <a:t>We know the risks. The information is available. But ultimately, it’s your responsibility how you use these tools. No framework can force you to stay sharp. Only you can decide to think before you delegate.</a:t>
             </a:r>
             <a:endParaRPr lang="en-US" sz="1600" dirty="0"/>
           </a:p>
@@ -15550,67 +15702,62 @@
               <a:buNone/>
             </a:pPr>
             <a:r>
-              <a:rPr lang="en-US" sz="1700" b="1" dirty="0">
-                <a:solidFill>
-                  <a:srgbClr val="000000"/>
-                </a:solidFill>
-                <a:latin typeface="Inter" pitchFamily="34" charset="0"/>
-                <a:ea typeface="Inter" pitchFamily="34" charset="-122"/>
-                <a:cs typeface="Inter" pitchFamily="34" charset="-120"/>
-              </a:rPr>
-              <a:t>Why this matters</a:t>
-            </a:r>
-            <a:endParaRPr lang="en-US" sz="1600" dirty="0"/>
-          </a:p>
-          <a:p>
-            <a:pPr indent="0" marL="0">
-              <a:spcAft>
-                <a:spcPts val="400"/>
-              </a:spcAft>
-              <a:buNone/>
-            </a:pPr>
-            <a:r>
-              <a:rPr lang="en-US" sz="1600" dirty="0">
-                <a:solidFill>
-                  <a:srgbClr val="000000"/>
-                </a:solidFill>
-                <a:latin typeface="Inter" pitchFamily="34" charset="0"/>
-                <a:ea typeface="Inter" pitchFamily="34" charset="-122"/>
-                <a:cs typeface="Inter" pitchFamily="34" charset="-120"/>
-              </a:rPr>
-              <a:t>SkillsBench (2025): curated skills improve performance by ~16pp. Auto-generated skills give zero improvement. The lesson: craft by hand, then use the eval loop to refine. This applies to anti-deskilling skills too — build yours, test it, improve it.</a:t>
-            </a:r>
-            <a:endParaRPr lang="en-US" sz="1600" dirty="0"/>
-          </a:p>
-        </p:txBody>
-      </p:sp>
-      <p:pic>
-        <p:nvPicPr>
-          <p:cNvPr id="6" name="Image 0" descr="/sessions/gracious-blissful-pasteur/mnt/claude_code_presentation/numericor.png">    </p:cNvPr>
-          <p:cNvPicPr>
-            <a:picLocks noChangeAspect="1"/>
-          </p:cNvPicPr>
-          <p:nvPr/>
-        </p:nvPicPr>
-        <p:blipFill>
-          <a:blip r:embed="rId1"/>
-          <a:stretch>
-            <a:fillRect/>
-          </a:stretch>
-        </p:blipFill>
-        <p:spPr>
-          <a:xfrm>
-            <a:off x="914400" y="6419088"/>
-            <a:ext cx="1371600" cy="214884"/>
-          </a:xfrm>
-          <a:prstGeom prst="rect">
-            <a:avLst/>
-          </a:prstGeom>
-        </p:spPr>
-      </p:pic>
-      <p:sp>
-        <p:nvSpPr>
-          <p:cNvPr id="7" name="Text 4"/>
+              <a:rPr lang="en-US" sz="1300" i="1" dirty="0">
+                <a:solidFill>
+                  <a:srgbClr val="888888"/>
+                </a:solidFill>
+                <a:latin typeface="Inter" pitchFamily="34" charset="0"/>
+                <a:ea typeface="Inter" pitchFamily="34" charset="-122"/>
+                <a:cs typeface="Inter" pitchFamily="34" charset="-120"/>
+              </a:rPr>
+              <a:t>Human-first rounds: sketch your approach before handing a task to AI (Hosanagar, 2025).</a:t>
+            </a:r>
+            <a:endParaRPr lang="en-US" sz="1600" dirty="0"/>
+          </a:p>
+        </p:txBody>
+      </p:sp>
+      <p:sp>
+        <p:nvSpPr>
+          <p:cNvPr id="6" name="Text 4"/>
+          <p:cNvSpPr/>
+          <p:nvPr/>
+        </p:nvSpPr>
+        <p:spPr>
+          <a:xfrm>
+            <a:off x="914400" y="6400800"/>
+            <a:ext cx="1645920" cy="365760"/>
+          </a:xfrm>
+          <a:prstGeom prst="rect">
+            <a:avLst/>
+          </a:prstGeom>
+          <a:noFill/>
+          <a:ln/>
+        </p:spPr>
+        <p:txBody>
+          <a:bodyPr wrap="square" rtlCol="0" anchor="ctr"/>
+          <a:lstStyle/>
+          <a:p>
+            <a:pPr algn="l" indent="0" marL="0">
+              <a:buNone/>
+            </a:pPr>
+            <a:r>
+              <a:rPr lang="en-US" sz="1100" dirty="0">
+                <a:solidFill>
+                  <a:srgbClr val="888888"/>
+                </a:solidFill>
+                <a:latin typeface="Inter" pitchFamily="34" charset="0"/>
+                <a:ea typeface="Inter" pitchFamily="34" charset="-122"/>
+                <a:cs typeface="Inter" pitchFamily="34" charset="-120"/>
+              </a:rPr>
+              <a:t>NumeriCor GmbH</a:t>
+            </a:r>
+            <a:endParaRPr lang="en-US" sz="1100" dirty="0"/>
+          </a:p>
+        </p:txBody>
+      </p:sp>
+      <p:sp>
+        <p:nvSpPr>
+          <p:cNvPr id="7" name="Text 5"/>
           <p:cNvSpPr/>
           <p:nvPr/>
         </p:nvSpPr>
@@ -15712,7 +15859,7 @@
                 <a:ea typeface="Inter" pitchFamily="34" charset="-122"/>
                 <a:cs typeface="Inter" pitchFamily="34" charset="-120"/>
               </a:rPr>
-              <a:t>Wrap Up</a:t>
+              <a:t>The Skill Creator</a:t>
             </a:r>
             <a:endParaRPr lang="en-US" sz="3000" dirty="0"/>
           </a:p>
@@ -15776,7 +15923,7 @@
                 <a:ea typeface="Inter" pitchFamily="34" charset="-122"/>
                 <a:cs typeface="Inter" pitchFamily="34" charset="-120"/>
               </a:rPr>
-              <a:t>Resources, starter kit, and next steps</a:t>
+              <a:t>Build your own guardrails — and test them</a:t>
             </a:r>
             <a:endParaRPr lang="en-US" sz="1500" dirty="0"/>
           </a:p>
@@ -15818,7 +15965,67 @@
                 <a:ea typeface="Inter" pitchFamily="34" charset="-122"/>
                 <a:cs typeface="Inter" pitchFamily="34" charset="-120"/>
               </a:rPr>
-              <a:t>Links</a:t>
+              <a:t>What it does</a:t>
+            </a:r>
+            <a:endParaRPr lang="en-US" sz="1600" dirty="0"/>
+          </a:p>
+          <a:p>
+            <a:pPr indent="0" marL="0">
+              <a:spcAft>
+                <a:spcPts val="400"/>
+              </a:spcAft>
+              <a:buNone/>
+            </a:pPr>
+            <a:r>
+              <a:rPr lang="en-US" sz="1600" dirty="0">
+                <a:solidFill>
+                  <a:srgbClr val="000000"/>
+                </a:solidFill>
+                <a:latin typeface="Inter" pitchFamily="34" charset="0"/>
+                <a:ea typeface="Inter" pitchFamily="34" charset="-122"/>
+                <a:cs typeface="Inter" pitchFamily="34" charset="-120"/>
+              </a:rPr>
+              <a:t>Anthropic’s meta-skill for creating, testing, and iteratively improving custom skills. Available at github.com/anthropics/skills.</a:t>
+            </a:r>
+            <a:endParaRPr lang="en-US" sz="1600" dirty="0"/>
+          </a:p>
+          <a:p>
+            <a:pPr indent="0" marL="0">
+              <a:spcAft>
+                <a:spcPts val="400"/>
+              </a:spcAft>
+              <a:buNone/>
+            </a:pPr>
+            <a:r>
+              <a:rPr lang="en-US" sz="700" dirty="0">
+                <a:solidFill>
+                  <a:srgbClr val="000000"/>
+                </a:solidFill>
+                <a:latin typeface="Inter" pitchFamily="34" charset="0"/>
+                <a:ea typeface="Inter" pitchFamily="34" charset="-122"/>
+                <a:cs typeface="Inter" pitchFamily="34" charset="-120"/>
+              </a:rPr>
+              <a:t> </a:t>
+            </a:r>
+            <a:endParaRPr lang="en-US" sz="1600" dirty="0"/>
+          </a:p>
+          <a:p>
+            <a:pPr indent="0" marL="0">
+              <a:spcAft>
+                <a:spcPts val="400"/>
+              </a:spcAft>
+              <a:buNone/>
+            </a:pPr>
+            <a:r>
+              <a:rPr lang="en-US" sz="1700" b="1" dirty="0">
+                <a:solidFill>
+                  <a:srgbClr val="000000"/>
+                </a:solidFill>
+                <a:latin typeface="Inter" pitchFamily="34" charset="0"/>
+                <a:ea typeface="Inter" pitchFamily="34" charset="-122"/>
+                <a:cs typeface="Inter" pitchFamily="34" charset="-120"/>
+              </a:rPr>
+              <a:t>The optimization loop</a:t>
             </a:r>
             <a:endParaRPr lang="en-US" sz="1600" dirty="0"/>
           </a:p>
@@ -15839,7 +16046,7 @@
                 <a:ea typeface="Inter" pitchFamily="34" charset="-122"/>
                 <a:cs typeface="Inter" pitchFamily="34" charset="-120"/>
               </a:rPr>
-              <a:t>Claude Code docs: code.claude.com/docs</a:t>
+              <a:t>1. Define skill intent → interview → write SKILL.md</a:t>
             </a:r>
             <a:endParaRPr lang="en-US" sz="1600" dirty="0"/>
           </a:p>
@@ -15860,7 +16067,7 @@
                 <a:ea typeface="Inter" pitchFamily="34" charset="-122"/>
                 <a:cs typeface="Inter" pitchFamily="34" charset="-120"/>
               </a:rPr>
-              <a:t>haft: quint.codes/docs</a:t>
+              <a:t>2. Create test cases (evals.json) with expected outputs</a:t>
             </a:r>
             <a:endParaRPr lang="en-US" sz="1600" dirty="0"/>
           </a:p>
@@ -15881,7 +16088,7 @@
                 <a:ea typeface="Inter" pitchFamily="34" charset="-122"/>
                 <a:cs typeface="Inter" pitchFamily="34" charset="-120"/>
               </a:rPr>
-              <a:t>Beads: github.com/steveyegge/beads</a:t>
+              <a:t>3. Run A/B: with-skill vs. baseline, graded automatically</a:t>
             </a:r>
             <a:endParaRPr lang="en-US" sz="1600" dirty="0"/>
           </a:p>
@@ -15902,47 +16109,7 @@
                 <a:ea typeface="Inter" pitchFamily="34" charset="-122"/>
                 <a:cs typeface="Inter" pitchFamily="34" charset="-120"/>
               </a:rPr>
-              <a:t>Skill Creator: github.com/anthropics/skills</a:t>
-            </a:r>
-            <a:endParaRPr lang="en-US" sz="1600" dirty="0"/>
-          </a:p>
-          <a:p>
-            <a:pPr indent="0" marL="0">
-              <a:spcAft>
-                <a:spcPts val="400"/>
-              </a:spcAft>
-              <a:buNone/>
-            </a:pPr>
-            <a:r>
-              <a:rPr lang="en-US" sz="700" dirty="0">
-                <a:solidFill>
-                  <a:srgbClr val="000000"/>
-                </a:solidFill>
-                <a:latin typeface="Inter" pitchFamily="34" charset="0"/>
-                <a:ea typeface="Inter" pitchFamily="34" charset="-122"/>
-                <a:cs typeface="Inter" pitchFamily="34" charset="-120"/>
-              </a:rPr>
-              <a:t> </a:t>
-            </a:r>
-            <a:endParaRPr lang="en-US" sz="1600" dirty="0"/>
-          </a:p>
-          <a:p>
-            <a:pPr indent="0" marL="0">
-              <a:spcAft>
-                <a:spcPts val="400"/>
-              </a:spcAft>
-              <a:buNone/>
-            </a:pPr>
-            <a:r>
-              <a:rPr lang="en-US" sz="1700" b="1" dirty="0">
-                <a:solidFill>
-                  <a:srgbClr val="000000"/>
-                </a:solidFill>
-                <a:latin typeface="Inter" pitchFamily="34" charset="0"/>
-                <a:ea typeface="Inter" pitchFamily="34" charset="-122"/>
-                <a:cs typeface="Inter" pitchFamily="34" charset="-120"/>
-              </a:rPr>
-              <a:t>Your starter kit (provided)</a:t>
+              <a:t>4. Review results in HTML viewer, provide feedback</a:t>
             </a:r>
             <a:endParaRPr lang="en-US" sz="1600" dirty="0"/>
           </a:p>
@@ -15963,7 +16130,322 @@
                 <a:ea typeface="Inter" pitchFamily="34" charset="-122"/>
                 <a:cs typeface="Inter" pitchFamily="34" charset="-120"/>
               </a:rPr>
-              <a:t>Template settings.json files (user-level + project-level)</a:t>
+              <a:t>5. Iterate: improve skill, re-run evals, compare to previous</a:t>
+            </a:r>
+            <a:endParaRPr lang="en-US" sz="1600" dirty="0"/>
+          </a:p>
+          <a:p>
+            <a:pPr indent="0" marL="0">
+              <a:spcAft>
+                <a:spcPts val="400"/>
+              </a:spcAft>
+              <a:buNone/>
+            </a:pPr>
+            <a:r>
+              <a:rPr lang="en-US" sz="700" dirty="0">
+                <a:solidFill>
+                  <a:srgbClr val="000000"/>
+                </a:solidFill>
+                <a:latin typeface="Inter" pitchFamily="34" charset="0"/>
+                <a:ea typeface="Inter" pitchFamily="34" charset="-122"/>
+                <a:cs typeface="Inter" pitchFamily="34" charset="-120"/>
+              </a:rPr>
+              <a:t> </a:t>
+            </a:r>
+            <a:endParaRPr lang="en-US" sz="1600" dirty="0"/>
+          </a:p>
+          <a:p>
+            <a:pPr indent="0" marL="0">
+              <a:spcAft>
+                <a:spcPts val="400"/>
+              </a:spcAft>
+              <a:buNone/>
+            </a:pPr>
+            <a:r>
+              <a:rPr lang="en-US" sz="1700" b="1" dirty="0">
+                <a:solidFill>
+                  <a:srgbClr val="000000"/>
+                </a:solidFill>
+                <a:latin typeface="Inter" pitchFamily="34" charset="0"/>
+                <a:ea typeface="Inter" pitchFamily="34" charset="-122"/>
+                <a:cs typeface="Inter" pitchFamily="34" charset="-120"/>
+              </a:rPr>
+              <a:t>Why this matters</a:t>
+            </a:r>
+            <a:endParaRPr lang="en-US" sz="1600" dirty="0"/>
+          </a:p>
+          <a:p>
+            <a:pPr indent="0" marL="0">
+              <a:spcAft>
+                <a:spcPts val="400"/>
+              </a:spcAft>
+              <a:buNone/>
+            </a:pPr>
+            <a:r>
+              <a:rPr lang="en-US" sz="1600" dirty="0">
+                <a:solidFill>
+                  <a:srgbClr val="000000"/>
+                </a:solidFill>
+                <a:latin typeface="Inter" pitchFamily="34" charset="0"/>
+                <a:ea typeface="Inter" pitchFamily="34" charset="-122"/>
+                <a:cs typeface="Inter" pitchFamily="34" charset="-120"/>
+              </a:rPr>
+              <a:t>SkillsBench (2025): curated skills improve performance by ~16pp. Auto-generated skills give zero improvement. The lesson: craft by hand, then use the eval loop to refine. This applies to anti-deskilling skills too — build yours, test it, improve it.</a:t>
+            </a:r>
+            <a:endParaRPr lang="en-US" sz="1600" dirty="0"/>
+          </a:p>
+        </p:txBody>
+      </p:sp>
+      <p:sp>
+        <p:nvSpPr>
+          <p:cNvPr id="6" name="Text 4"/>
+          <p:cNvSpPr/>
+          <p:nvPr/>
+        </p:nvSpPr>
+        <p:spPr>
+          <a:xfrm>
+            <a:off x="914400" y="6400800"/>
+            <a:ext cx="1645920" cy="365760"/>
+          </a:xfrm>
+          <a:prstGeom prst="rect">
+            <a:avLst/>
+          </a:prstGeom>
+          <a:noFill/>
+          <a:ln/>
+        </p:spPr>
+        <p:txBody>
+          <a:bodyPr wrap="square" rtlCol="0" anchor="ctr"/>
+          <a:lstStyle/>
+          <a:p>
+            <a:pPr algn="l" indent="0" marL="0">
+              <a:buNone/>
+            </a:pPr>
+            <a:r>
+              <a:rPr lang="en-US" sz="1100" dirty="0">
+                <a:solidFill>
+                  <a:srgbClr val="888888"/>
+                </a:solidFill>
+                <a:latin typeface="Inter" pitchFamily="34" charset="0"/>
+                <a:ea typeface="Inter" pitchFamily="34" charset="-122"/>
+                <a:cs typeface="Inter" pitchFamily="34" charset="-120"/>
+              </a:rPr>
+              <a:t>NumeriCor GmbH</a:t>
+            </a:r>
+            <a:endParaRPr lang="en-US" sz="1100" dirty="0"/>
+          </a:p>
+        </p:txBody>
+      </p:sp>
+      <p:sp>
+        <p:nvSpPr>
+          <p:cNvPr id="7" name="Text 5"/>
+          <p:cNvSpPr/>
+          <p:nvPr/>
+        </p:nvSpPr>
+        <p:spPr>
+          <a:xfrm>
+            <a:off x="11064240" y="6400800"/>
+            <a:ext cx="640080" cy="365760"/>
+          </a:xfrm>
+          <a:prstGeom prst="rect">
+            <a:avLst/>
+          </a:prstGeom>
+          <a:noFill/>
+          <a:ln/>
+        </p:spPr>
+        <p:txBody>
+          <a:bodyPr wrap="square" rtlCol="0" anchor="ctr"/>
+          <a:lstStyle/>
+          <a:p>
+            <a:pPr algn="r" indent="0" marL="0">
+              <a:buNone/>
+            </a:pPr>
+            <a:r>
+              <a:rPr lang="en-US" sz="1100" dirty="0">
+                <a:solidFill>
+                  <a:srgbClr val="CCCCCC"/>
+                </a:solidFill>
+                <a:latin typeface="Inter" pitchFamily="34" charset="0"/>
+                <a:ea typeface="Inter" pitchFamily="34" charset="-122"/>
+                <a:cs typeface="Inter" pitchFamily="34" charset="-120"/>
+              </a:rPr>
+              <a:t>34</a:t>
+            </a:r>
+            <a:endParaRPr lang="en-US" sz="1100" dirty="0"/>
+          </a:p>
+        </p:txBody>
+      </p:sp>
+    </p:spTree>
+  </p:cSld>
+  <p:clrMapOvr>
+    <a:masterClrMapping/>
+  </p:clrMapOvr>
+</p:sld>
+</file>
+
+<file path=ppt/slides/slide35.xml><?xml version="1.0" encoding="utf-8"?>
+<p:sld xmlns:a="http://schemas.openxmlformats.org/drawingml/2006/main" xmlns:r="http://schemas.openxmlformats.org/officeDocument/2006/relationships" xmlns:p="http://schemas.openxmlformats.org/presentationml/2006/main">
+  <p:cSld name="Slide 35">
+    <p:bg>
+      <p:bgPr>
+        <a:solidFill>
+          <a:srgbClr val="FFFFFF"/>
+        </a:solidFill>
+      </p:bgPr>
+    </p:bg>
+    <p:spTree>
+      <p:nvGrpSpPr>
+        <p:cNvPr id="1" name=""/>
+        <p:cNvGrpSpPr/>
+        <p:nvPr/>
+      </p:nvGrpSpPr>
+      <p:grpSpPr>
+        <a:xfrm>
+          <a:off x="0" y="0"/>
+          <a:ext cx="0" cy="0"/>
+          <a:chOff x="0" y="0"/>
+          <a:chExt cx="0" cy="0"/>
+        </a:xfrm>
+      </p:grpSpPr>
+      <p:sp>
+        <p:nvSpPr>
+          <p:cNvPr id="2" name="Text 0"/>
+          <p:cNvSpPr/>
+          <p:nvPr/>
+        </p:nvSpPr>
+        <p:spPr>
+          <a:xfrm>
+            <a:off x="914400" y="438912"/>
+            <a:ext cx="10332720" cy="621792"/>
+          </a:xfrm>
+          <a:prstGeom prst="rect">
+            <a:avLst/>
+          </a:prstGeom>
+          <a:noFill/>
+          <a:ln/>
+        </p:spPr>
+        <p:txBody>
+          <a:bodyPr wrap="square" lIns="0" tIns="0" rIns="0" bIns="0" rtlCol="0" anchor="ctr"/>
+          <a:lstStyle/>
+          <a:p>
+            <a:pPr indent="0" marL="0">
+              <a:buNone/>
+            </a:pPr>
+            <a:r>
+              <a:rPr lang="en-US" sz="3000" b="1" dirty="0">
+                <a:solidFill>
+                  <a:srgbClr val="000000"/>
+                </a:solidFill>
+                <a:latin typeface="Inter" pitchFamily="34" charset="0"/>
+                <a:ea typeface="Inter" pitchFamily="34" charset="-122"/>
+                <a:cs typeface="Inter" pitchFamily="34" charset="-120"/>
+              </a:rPr>
+              <a:t>Wrap Up</a:t>
+            </a:r>
+            <a:endParaRPr lang="en-US" sz="3000" dirty="0"/>
+          </a:p>
+        </p:txBody>
+      </p:sp>
+      <p:sp>
+        <p:nvSpPr>
+          <p:cNvPr id="3" name="Shape 1"/>
+          <p:cNvSpPr/>
+          <p:nvPr/>
+        </p:nvSpPr>
+        <p:spPr>
+          <a:xfrm>
+            <a:off x="914400" y="1115568"/>
+            <a:ext cx="10332720" cy="20117"/>
+          </a:xfrm>
+          <a:prstGeom prst="rect">
+            <a:avLst/>
+          </a:prstGeom>
+          <a:solidFill>
+            <a:srgbClr val="E4E4E4"/>
+          </a:solidFill>
+          <a:ln w="12700">
+            <a:solidFill>
+              <a:srgbClr val="E4E4E4"/>
+            </a:solidFill>
+            <a:prstDash val="solid"/>
+          </a:ln>
+        </p:spPr>
+      </p:sp>
+      <p:sp>
+        <p:nvSpPr>
+          <p:cNvPr id="4" name="Text 2"/>
+          <p:cNvSpPr/>
+          <p:nvPr/>
+        </p:nvSpPr>
+        <p:spPr>
+          <a:xfrm>
+            <a:off x="914400" y="1188720"/>
+            <a:ext cx="10332720" cy="347472"/>
+          </a:xfrm>
+          <a:prstGeom prst="rect">
+            <a:avLst/>
+          </a:prstGeom>
+          <a:noFill/>
+          <a:ln/>
+        </p:spPr>
+        <p:txBody>
+          <a:bodyPr wrap="square" lIns="0" tIns="0" rIns="0" bIns="0" rtlCol="0" anchor="ctr"/>
+          <a:lstStyle/>
+          <a:p>
+            <a:pPr indent="0" marL="0">
+              <a:buNone/>
+            </a:pPr>
+            <a:r>
+              <a:rPr lang="en-US" sz="1500" dirty="0">
+                <a:solidFill>
+                  <a:srgbClr val="888888"/>
+                </a:solidFill>
+                <a:latin typeface="Inter" pitchFamily="34" charset="0"/>
+                <a:ea typeface="Inter" pitchFamily="34" charset="-122"/>
+                <a:cs typeface="Inter" pitchFamily="34" charset="-120"/>
+              </a:rPr>
+              <a:t>Resources, starter kit, and next steps</a:t>
+            </a:r>
+            <a:endParaRPr lang="en-US" sz="1500" dirty="0"/>
+          </a:p>
+        </p:txBody>
+      </p:sp>
+      <p:sp>
+        <p:nvSpPr>
+          <p:cNvPr id="5" name="Text 3"/>
+          <p:cNvSpPr/>
+          <p:nvPr/>
+        </p:nvSpPr>
+        <p:spPr>
+          <a:xfrm>
+            <a:off x="914400" y="1627632"/>
+            <a:ext cx="10332720" cy="4681728"/>
+          </a:xfrm>
+          <a:prstGeom prst="rect">
+            <a:avLst/>
+          </a:prstGeom>
+          <a:noFill/>
+          <a:ln/>
+        </p:spPr>
+        <p:txBody>
+          <a:bodyPr wrap="square" lIns="0" tIns="0" rIns="0" bIns="0" rtlCol="0" anchor="t"/>
+          <a:lstStyle/>
+          <a:p>
+            <a:pPr indent="0" marL="0">
+              <a:spcAft>
+                <a:spcPts val="400"/>
+              </a:spcAft>
+              <a:buNone/>
+            </a:pPr>
+            <a:r>
+              <a:rPr lang="en-US" sz="1700" b="1" dirty="0">
+                <a:solidFill>
+                  <a:srgbClr val="000000"/>
+                </a:solidFill>
+                <a:latin typeface="Inter" pitchFamily="34" charset="0"/>
+                <a:ea typeface="Inter" pitchFamily="34" charset="-122"/>
+                <a:cs typeface="Inter" pitchFamily="34" charset="-120"/>
+              </a:rPr>
+              <a:t>Links</a:t>
             </a:r>
             <a:endParaRPr lang="en-US" sz="1600" dirty="0"/>
           </a:p>
@@ -15984,7 +16466,7 @@
                 <a:ea typeface="Inter" pitchFamily="34" charset="-122"/>
                 <a:cs typeface="Inter" pitchFamily="34" charset="-120"/>
               </a:rPr>
-              <a:t>Template CLAUDE.md and SKILL.md</a:t>
+              <a:t>Claude Code docs: code.claude.com/docs</a:t>
             </a:r>
             <a:endParaRPr lang="en-US" sz="1600" dirty="0"/>
           </a:p>
@@ -16005,47 +16487,7 @@
                 <a:ea typeface="Inter" pitchFamily="34" charset="-122"/>
                 <a:cs typeface="Inter" pitchFamily="34" charset="-120"/>
               </a:rPr>
-              <a:t>CLI cheat sheet with all key flags and commands</a:t>
-            </a:r>
-            <a:endParaRPr lang="en-US" sz="1600" dirty="0"/>
-          </a:p>
-          <a:p>
-            <a:pPr indent="0" marL="0">
-              <a:spcAft>
-                <a:spcPts val="400"/>
-              </a:spcAft>
-              <a:buNone/>
-            </a:pPr>
-            <a:r>
-              <a:rPr lang="en-US" sz="700" dirty="0">
-                <a:solidFill>
-                  <a:srgbClr val="000000"/>
-                </a:solidFill>
-                <a:latin typeface="Inter" pitchFamily="34" charset="0"/>
-                <a:ea typeface="Inter" pitchFamily="34" charset="-122"/>
-                <a:cs typeface="Inter" pitchFamily="34" charset="-120"/>
-              </a:rPr>
-              <a:t> </a:t>
-            </a:r>
-            <a:endParaRPr lang="en-US" sz="1600" dirty="0"/>
-          </a:p>
-          <a:p>
-            <a:pPr indent="0" marL="0">
-              <a:spcAft>
-                <a:spcPts val="400"/>
-              </a:spcAft>
-              <a:buNone/>
-            </a:pPr>
-            <a:r>
-              <a:rPr lang="en-US" sz="1700" b="1" dirty="0">
-                <a:solidFill>
-                  <a:srgbClr val="000000"/>
-                </a:solidFill>
-                <a:latin typeface="Inter" pitchFamily="34" charset="0"/>
-                <a:ea typeface="Inter" pitchFamily="34" charset="-122"/>
-                <a:cs typeface="Inter" pitchFamily="34" charset="-120"/>
-              </a:rPr>
-              <a:t>Try it yourself</a:t>
+              <a:t>haft: quint.codes/docs</a:t>
             </a:r>
             <a:endParaRPr lang="en-US" sz="1600" dirty="0"/>
           </a:p>
@@ -16066,7 +16508,7 @@
                 <a:ea typeface="Inter" pitchFamily="34" charset="-122"/>
                 <a:cs typeface="Inter" pitchFamily="34" charset="-120"/>
               </a:rPr>
-              <a:t>1. Install Claude Code and try it on a personal project</a:t>
+              <a:t>Beads: github.com/steveyegge/beads</a:t>
             </a:r>
             <a:endParaRPr lang="en-US" sz="1600" dirty="0"/>
           </a:p>
@@ -16087,7 +16529,47 @@
                 <a:ea typeface="Inter" pitchFamily="34" charset="-122"/>
                 <a:cs typeface="Inter" pitchFamily="34" charset="-120"/>
               </a:rPr>
-              <a:t>2. Copy the template configs and adapt to your workflow</a:t>
+              <a:t>Skill Creator: github.com/anthropics/skills</a:t>
+            </a:r>
+            <a:endParaRPr lang="en-US" sz="1600" dirty="0"/>
+          </a:p>
+          <a:p>
+            <a:pPr indent="0" marL="0">
+              <a:spcAft>
+                <a:spcPts val="400"/>
+              </a:spcAft>
+              <a:buNone/>
+            </a:pPr>
+            <a:r>
+              <a:rPr lang="en-US" sz="700" dirty="0">
+                <a:solidFill>
+                  <a:srgbClr val="000000"/>
+                </a:solidFill>
+                <a:latin typeface="Inter" pitchFamily="34" charset="0"/>
+                <a:ea typeface="Inter" pitchFamily="34" charset="-122"/>
+                <a:cs typeface="Inter" pitchFamily="34" charset="-120"/>
+              </a:rPr>
+              <a:t> </a:t>
+            </a:r>
+            <a:endParaRPr lang="en-US" sz="1600" dirty="0"/>
+          </a:p>
+          <a:p>
+            <a:pPr indent="0" marL="0">
+              <a:spcAft>
+                <a:spcPts val="400"/>
+              </a:spcAft>
+              <a:buNone/>
+            </a:pPr>
+            <a:r>
+              <a:rPr lang="en-US" sz="1700" b="1" dirty="0">
+                <a:solidFill>
+                  <a:srgbClr val="000000"/>
+                </a:solidFill>
+                <a:latin typeface="Inter" pitchFamily="34" charset="0"/>
+                <a:ea typeface="Inter" pitchFamily="34" charset="-122"/>
+                <a:cs typeface="Inter" pitchFamily="34" charset="-120"/>
+              </a:rPr>
+              <a:t>Your starter kit (provided)</a:t>
             </a:r>
             <a:endParaRPr lang="en-US" sz="1600" dirty="0"/>
           </a:p>
@@ -16108,6 +16590,151 @@
                 <a:ea typeface="Inter" pitchFamily="34" charset="-122"/>
                 <a:cs typeface="Inter" pitchFamily="34" charset="-120"/>
               </a:rPr>
+              <a:t>Template settings.json files (user-level + project-level)</a:t>
+            </a:r>
+            <a:endParaRPr lang="en-US" sz="1600" dirty="0"/>
+          </a:p>
+          <a:p>
+            <a:pPr marL="342900" indent="-342900">
+              <a:spcAft>
+                <a:spcPts val="400"/>
+              </a:spcAft>
+              <a:buSzPct val="100000"/>
+              <a:buChar char="→"/>
+            </a:pPr>
+            <a:r>
+              <a:rPr lang="en-US" sz="1600" dirty="0">
+                <a:solidFill>
+                  <a:srgbClr val="000000"/>
+                </a:solidFill>
+                <a:latin typeface="Inter" pitchFamily="34" charset="0"/>
+                <a:ea typeface="Inter" pitchFamily="34" charset="-122"/>
+                <a:cs typeface="Inter" pitchFamily="34" charset="-120"/>
+              </a:rPr>
+              <a:t>Template CLAUDE.md and SKILL.md</a:t>
+            </a:r>
+            <a:endParaRPr lang="en-US" sz="1600" dirty="0"/>
+          </a:p>
+          <a:p>
+            <a:pPr marL="342900" indent="-342900">
+              <a:spcAft>
+                <a:spcPts val="400"/>
+              </a:spcAft>
+              <a:buSzPct val="100000"/>
+              <a:buChar char="→"/>
+            </a:pPr>
+            <a:r>
+              <a:rPr lang="en-US" sz="1600" dirty="0">
+                <a:solidFill>
+                  <a:srgbClr val="000000"/>
+                </a:solidFill>
+                <a:latin typeface="Inter" pitchFamily="34" charset="0"/>
+                <a:ea typeface="Inter" pitchFamily="34" charset="-122"/>
+                <a:cs typeface="Inter" pitchFamily="34" charset="-120"/>
+              </a:rPr>
+              <a:t>CLI cheat sheet with all key flags and commands</a:t>
+            </a:r>
+            <a:endParaRPr lang="en-US" sz="1600" dirty="0"/>
+          </a:p>
+          <a:p>
+            <a:pPr indent="0" marL="0">
+              <a:spcAft>
+                <a:spcPts val="400"/>
+              </a:spcAft>
+              <a:buNone/>
+            </a:pPr>
+            <a:r>
+              <a:rPr lang="en-US" sz="700" dirty="0">
+                <a:solidFill>
+                  <a:srgbClr val="000000"/>
+                </a:solidFill>
+                <a:latin typeface="Inter" pitchFamily="34" charset="0"/>
+                <a:ea typeface="Inter" pitchFamily="34" charset="-122"/>
+                <a:cs typeface="Inter" pitchFamily="34" charset="-120"/>
+              </a:rPr>
+              <a:t> </a:t>
+            </a:r>
+            <a:endParaRPr lang="en-US" sz="1600" dirty="0"/>
+          </a:p>
+          <a:p>
+            <a:pPr indent="0" marL="0">
+              <a:spcAft>
+                <a:spcPts val="400"/>
+              </a:spcAft>
+              <a:buNone/>
+            </a:pPr>
+            <a:r>
+              <a:rPr lang="en-US" sz="1700" b="1" dirty="0">
+                <a:solidFill>
+                  <a:srgbClr val="000000"/>
+                </a:solidFill>
+                <a:latin typeface="Inter" pitchFamily="34" charset="0"/>
+                <a:ea typeface="Inter" pitchFamily="34" charset="-122"/>
+                <a:cs typeface="Inter" pitchFamily="34" charset="-120"/>
+              </a:rPr>
+              <a:t>Try it yourself</a:t>
+            </a:r>
+            <a:endParaRPr lang="en-US" sz="1600" dirty="0"/>
+          </a:p>
+          <a:p>
+            <a:pPr marL="342900" indent="-342900">
+              <a:spcAft>
+                <a:spcPts val="400"/>
+              </a:spcAft>
+              <a:buSzPct val="100000"/>
+              <a:buChar char="→"/>
+            </a:pPr>
+            <a:r>
+              <a:rPr lang="en-US" sz="1600" dirty="0">
+                <a:solidFill>
+                  <a:srgbClr val="000000"/>
+                </a:solidFill>
+                <a:latin typeface="Inter" pitchFamily="34" charset="0"/>
+                <a:ea typeface="Inter" pitchFamily="34" charset="-122"/>
+                <a:cs typeface="Inter" pitchFamily="34" charset="-120"/>
+              </a:rPr>
+              <a:t>1. Install Claude Code and try it on a personal project</a:t>
+            </a:r>
+            <a:endParaRPr lang="en-US" sz="1600" dirty="0"/>
+          </a:p>
+          <a:p>
+            <a:pPr marL="342900" indent="-342900">
+              <a:spcAft>
+                <a:spcPts val="400"/>
+              </a:spcAft>
+              <a:buSzPct val="100000"/>
+              <a:buChar char="→"/>
+            </a:pPr>
+            <a:r>
+              <a:rPr lang="en-US" sz="1600" dirty="0">
+                <a:solidFill>
+                  <a:srgbClr val="000000"/>
+                </a:solidFill>
+                <a:latin typeface="Inter" pitchFamily="34" charset="0"/>
+                <a:ea typeface="Inter" pitchFamily="34" charset="-122"/>
+                <a:cs typeface="Inter" pitchFamily="34" charset="-120"/>
+              </a:rPr>
+              <a:t>2. Copy the template configs and adapt to your workflow</a:t>
+            </a:r>
+            <a:endParaRPr lang="en-US" sz="1600" dirty="0"/>
+          </a:p>
+          <a:p>
+            <a:pPr marL="342900" indent="-342900">
+              <a:spcAft>
+                <a:spcPts val="400"/>
+              </a:spcAft>
+              <a:buSzPct val="100000"/>
+              <a:buChar char="→"/>
+            </a:pPr>
+            <a:r>
+              <a:rPr lang="en-US" sz="1600" dirty="0">
+                <a:solidFill>
+                  <a:srgbClr val="000000"/>
+                </a:solidFill>
+                <a:latin typeface="Inter" pitchFamily="34" charset="0"/>
+                <a:ea typeface="Inter" pitchFamily="34" charset="-122"/>
+                <a:cs typeface="Inter" pitchFamily="34" charset="-120"/>
+              </a:rPr>
               <a:t>3. Build your own anti-deskilling SKILL.md with HITL/HOTL/HOOTL classifications</a:t>
             </a:r>
             <a:endParaRPr lang="en-US" sz="1600" dirty="0"/>
@@ -16194,33 +16821,48 @@
           </a:p>
         </p:txBody>
       </p:sp>
-      <p:pic>
-        <p:nvPicPr>
-          <p:cNvPr id="6" name="Image 0" descr="/sessions/gracious-blissful-pasteur/mnt/claude_code_presentation/numericor.png">    </p:cNvPr>
-          <p:cNvPicPr>
-            <a:picLocks noChangeAspect="1"/>
-          </p:cNvPicPr>
-          <p:nvPr/>
-        </p:nvPicPr>
-        <p:blipFill>
-          <a:blip r:embed="rId1"/>
-          <a:stretch>
-            <a:fillRect/>
-          </a:stretch>
-        </p:blipFill>
-        <p:spPr>
-          <a:xfrm>
-            <a:off x="914400" y="6419088"/>
-            <a:ext cx="1371600" cy="214884"/>
-          </a:xfrm>
-          <a:prstGeom prst="rect">
-            <a:avLst/>
-          </a:prstGeom>
-        </p:spPr>
-      </p:pic>
-      <p:sp>
-        <p:nvSpPr>
-          <p:cNvPr id="7" name="Text 4"/>
+      <p:sp>
+        <p:nvSpPr>
+          <p:cNvPr id="6" name="Text 4"/>
+          <p:cNvSpPr/>
+          <p:nvPr/>
+        </p:nvSpPr>
+        <p:spPr>
+          <a:xfrm>
+            <a:off x="914400" y="6400800"/>
+            <a:ext cx="1645920" cy="365760"/>
+          </a:xfrm>
+          <a:prstGeom prst="rect">
+            <a:avLst/>
+          </a:prstGeom>
+          <a:noFill/>
+          <a:ln/>
+        </p:spPr>
+        <p:txBody>
+          <a:bodyPr wrap="square" rtlCol="0" anchor="ctr"/>
+          <a:lstStyle/>
+          <a:p>
+            <a:pPr algn="l" indent="0" marL="0">
+              <a:buNone/>
+            </a:pPr>
+            <a:r>
+              <a:rPr lang="en-US" sz="1100" dirty="0">
+                <a:solidFill>
+                  <a:srgbClr val="888888"/>
+                </a:solidFill>
+                <a:latin typeface="Inter" pitchFamily="34" charset="0"/>
+                <a:ea typeface="Inter" pitchFamily="34" charset="-122"/>
+                <a:cs typeface="Inter" pitchFamily="34" charset="-120"/>
+              </a:rPr>
+              <a:t>NumeriCor GmbH</a:t>
+            </a:r>
+            <a:endParaRPr lang="en-US" sz="1100" dirty="0"/>
+          </a:p>
+        </p:txBody>
+      </p:sp>
+      <p:sp>
+        <p:nvSpPr>
+          <p:cNvPr id="7" name="Text 5"/>
           <p:cNvSpPr/>
           <p:nvPr/>
         </p:nvSpPr>
@@ -16251,7 +16893,7 @@
                 <a:ea typeface="Inter" pitchFamily="34" charset="-122"/>
                 <a:cs typeface="Inter" pitchFamily="34" charset="-120"/>
               </a:rPr>
-              <a:t>34</a:t>
+              <a:t>35</a:t>
             </a:r>
             <a:endParaRPr lang="en-US" sz="1100" dirty="0"/>
           </a:p>
@@ -16579,33 +17221,48 @@
           </a:p>
         </p:txBody>
       </p:sp>
-      <p:pic>
-        <p:nvPicPr>
-          <p:cNvPr id="6" name="Image 0" descr="/sessions/gracious-blissful-pasteur/mnt/claude_code_presentation/numericor.png">    </p:cNvPr>
-          <p:cNvPicPr>
-            <a:picLocks noChangeAspect="1"/>
-          </p:cNvPicPr>
-          <p:nvPr/>
-        </p:nvPicPr>
-        <p:blipFill>
-          <a:blip r:embed="rId1"/>
-          <a:stretch>
-            <a:fillRect/>
-          </a:stretch>
-        </p:blipFill>
-        <p:spPr>
-          <a:xfrm>
-            <a:off x="914400" y="6419088"/>
-            <a:ext cx="1371600" cy="214884"/>
-          </a:xfrm>
-          <a:prstGeom prst="rect">
-            <a:avLst/>
-          </a:prstGeom>
-        </p:spPr>
-      </p:pic>
-      <p:sp>
-        <p:nvSpPr>
-          <p:cNvPr id="7" name="Text 4"/>
+      <p:sp>
+        <p:nvSpPr>
+          <p:cNvPr id="6" name="Text 4"/>
+          <p:cNvSpPr/>
+          <p:nvPr/>
+        </p:nvSpPr>
+        <p:spPr>
+          <a:xfrm>
+            <a:off x="914400" y="6400800"/>
+            <a:ext cx="1645920" cy="365760"/>
+          </a:xfrm>
+          <a:prstGeom prst="rect">
+            <a:avLst/>
+          </a:prstGeom>
+          <a:noFill/>
+          <a:ln/>
+        </p:spPr>
+        <p:txBody>
+          <a:bodyPr wrap="square" rtlCol="0" anchor="ctr"/>
+          <a:lstStyle/>
+          <a:p>
+            <a:pPr algn="l" indent="0" marL="0">
+              <a:buNone/>
+            </a:pPr>
+            <a:r>
+              <a:rPr lang="en-US" sz="1100" dirty="0">
+                <a:solidFill>
+                  <a:srgbClr val="888888"/>
+                </a:solidFill>
+                <a:latin typeface="Inter" pitchFamily="34" charset="0"/>
+                <a:ea typeface="Inter" pitchFamily="34" charset="-122"/>
+                <a:cs typeface="Inter" pitchFamily="34" charset="-120"/>
+              </a:rPr>
+              <a:t>NumeriCor GmbH</a:t>
+            </a:r>
+            <a:endParaRPr lang="en-US" sz="1100" dirty="0"/>
+          </a:p>
+        </p:txBody>
+      </p:sp>
+      <p:sp>
+        <p:nvSpPr>
+          <p:cNvPr id="7" name="Text 5"/>
           <p:cNvSpPr/>
           <p:nvPr/>
         </p:nvSpPr>
@@ -17046,33 +17703,48 @@
           </a:p>
         </p:txBody>
       </p:sp>
-      <p:pic>
-        <p:nvPicPr>
-          <p:cNvPr id="6" name="Image 0" descr="/sessions/gracious-blissful-pasteur/mnt/claude_code_presentation/numericor.png">    </p:cNvPr>
-          <p:cNvPicPr>
-            <a:picLocks noChangeAspect="1"/>
-          </p:cNvPicPr>
-          <p:nvPr/>
-        </p:nvPicPr>
-        <p:blipFill>
-          <a:blip r:embed="rId1"/>
-          <a:stretch>
-            <a:fillRect/>
-          </a:stretch>
-        </p:blipFill>
-        <p:spPr>
-          <a:xfrm>
-            <a:off x="914400" y="6419088"/>
-            <a:ext cx="1371600" cy="214884"/>
-          </a:xfrm>
-          <a:prstGeom prst="rect">
-            <a:avLst/>
-          </a:prstGeom>
-        </p:spPr>
-      </p:pic>
-      <p:sp>
-        <p:nvSpPr>
-          <p:cNvPr id="7" name="Text 4"/>
+      <p:sp>
+        <p:nvSpPr>
+          <p:cNvPr id="6" name="Text 4"/>
+          <p:cNvSpPr/>
+          <p:nvPr/>
+        </p:nvSpPr>
+        <p:spPr>
+          <a:xfrm>
+            <a:off x="914400" y="6400800"/>
+            <a:ext cx="1645920" cy="365760"/>
+          </a:xfrm>
+          <a:prstGeom prst="rect">
+            <a:avLst/>
+          </a:prstGeom>
+          <a:noFill/>
+          <a:ln/>
+        </p:spPr>
+        <p:txBody>
+          <a:bodyPr wrap="square" rtlCol="0" anchor="ctr"/>
+          <a:lstStyle/>
+          <a:p>
+            <a:pPr algn="l" indent="0" marL="0">
+              <a:buNone/>
+            </a:pPr>
+            <a:r>
+              <a:rPr lang="en-US" sz="1100" dirty="0">
+                <a:solidFill>
+                  <a:srgbClr val="888888"/>
+                </a:solidFill>
+                <a:latin typeface="Inter" pitchFamily="34" charset="0"/>
+                <a:ea typeface="Inter" pitchFamily="34" charset="-122"/>
+                <a:cs typeface="Inter" pitchFamily="34" charset="-120"/>
+              </a:rPr>
+              <a:t>NumeriCor GmbH</a:t>
+            </a:r>
+            <a:endParaRPr lang="en-US" sz="1100" dirty="0"/>
+          </a:p>
+        </p:txBody>
+      </p:sp>
+      <p:sp>
+        <p:nvSpPr>
+          <p:cNvPr id="7" name="Text 5"/>
           <p:cNvSpPr/>
           <p:nvPr/>
         </p:nvSpPr>
@@ -17561,33 +18233,48 @@
           </a:p>
         </p:txBody>
       </p:sp>
-      <p:pic>
-        <p:nvPicPr>
-          <p:cNvPr id="6" name="Image 0" descr="/sessions/gracious-blissful-pasteur/mnt/claude_code_presentation/numericor.png">    </p:cNvPr>
-          <p:cNvPicPr>
-            <a:picLocks noChangeAspect="1"/>
-          </p:cNvPicPr>
-          <p:nvPr/>
-        </p:nvPicPr>
-        <p:blipFill>
-          <a:blip r:embed="rId1"/>
-          <a:stretch>
-            <a:fillRect/>
-          </a:stretch>
-        </p:blipFill>
-        <p:spPr>
-          <a:xfrm>
-            <a:off x="914400" y="6419088"/>
-            <a:ext cx="1371600" cy="214884"/>
-          </a:xfrm>
-          <a:prstGeom prst="rect">
-            <a:avLst/>
-          </a:prstGeom>
-        </p:spPr>
-      </p:pic>
-      <p:sp>
-        <p:nvSpPr>
-          <p:cNvPr id="7" name="Text 4"/>
+      <p:sp>
+        <p:nvSpPr>
+          <p:cNvPr id="6" name="Text 4"/>
+          <p:cNvSpPr/>
+          <p:nvPr/>
+        </p:nvSpPr>
+        <p:spPr>
+          <a:xfrm>
+            <a:off x="914400" y="6400800"/>
+            <a:ext cx="1645920" cy="365760"/>
+          </a:xfrm>
+          <a:prstGeom prst="rect">
+            <a:avLst/>
+          </a:prstGeom>
+          <a:noFill/>
+          <a:ln/>
+        </p:spPr>
+        <p:txBody>
+          <a:bodyPr wrap="square" rtlCol="0" anchor="ctr"/>
+          <a:lstStyle/>
+          <a:p>
+            <a:pPr algn="l" indent="0" marL="0">
+              <a:buNone/>
+            </a:pPr>
+            <a:r>
+              <a:rPr lang="en-US" sz="1100" dirty="0">
+                <a:solidFill>
+                  <a:srgbClr val="888888"/>
+                </a:solidFill>
+                <a:latin typeface="Inter" pitchFamily="34" charset="0"/>
+                <a:ea typeface="Inter" pitchFamily="34" charset="-122"/>
+                <a:cs typeface="Inter" pitchFamily="34" charset="-120"/>
+              </a:rPr>
+              <a:t>NumeriCor GmbH</a:t>
+            </a:r>
+            <a:endParaRPr lang="en-US" sz="1100" dirty="0"/>
+          </a:p>
+        </p:txBody>
+      </p:sp>
+      <p:sp>
+        <p:nvSpPr>
+          <p:cNvPr id="7" name="Text 5"/>
           <p:cNvSpPr/>
           <p:nvPr/>
         </p:nvSpPr>
@@ -18133,33 +18820,48 @@
           </a:p>
         </p:txBody>
       </p:sp>
-      <p:pic>
-        <p:nvPicPr>
-          <p:cNvPr id="6" name="Image 0" descr="/sessions/gracious-blissful-pasteur/mnt/claude_code_presentation/numericor.png">    </p:cNvPr>
-          <p:cNvPicPr>
-            <a:picLocks noChangeAspect="1"/>
-          </p:cNvPicPr>
-          <p:nvPr/>
-        </p:nvPicPr>
-        <p:blipFill>
-          <a:blip r:embed="rId1"/>
-          <a:stretch>
-            <a:fillRect/>
-          </a:stretch>
-        </p:blipFill>
-        <p:spPr>
-          <a:xfrm>
-            <a:off x="914400" y="6419088"/>
-            <a:ext cx="1371600" cy="214884"/>
-          </a:xfrm>
-          <a:prstGeom prst="rect">
-            <a:avLst/>
-          </a:prstGeom>
-        </p:spPr>
-      </p:pic>
-      <p:sp>
-        <p:nvSpPr>
-          <p:cNvPr id="7" name="Text 4"/>
+      <p:sp>
+        <p:nvSpPr>
+          <p:cNvPr id="6" name="Text 4"/>
+          <p:cNvSpPr/>
+          <p:nvPr/>
+        </p:nvSpPr>
+        <p:spPr>
+          <a:xfrm>
+            <a:off x="914400" y="6400800"/>
+            <a:ext cx="1645920" cy="365760"/>
+          </a:xfrm>
+          <a:prstGeom prst="rect">
+            <a:avLst/>
+          </a:prstGeom>
+          <a:noFill/>
+          <a:ln/>
+        </p:spPr>
+        <p:txBody>
+          <a:bodyPr wrap="square" rtlCol="0" anchor="ctr"/>
+          <a:lstStyle/>
+          <a:p>
+            <a:pPr algn="l" indent="0" marL="0">
+              <a:buNone/>
+            </a:pPr>
+            <a:r>
+              <a:rPr lang="en-US" sz="1100" dirty="0">
+                <a:solidFill>
+                  <a:srgbClr val="888888"/>
+                </a:solidFill>
+                <a:latin typeface="Inter" pitchFamily="34" charset="0"/>
+                <a:ea typeface="Inter" pitchFamily="34" charset="-122"/>
+                <a:cs typeface="Inter" pitchFamily="34" charset="-120"/>
+              </a:rPr>
+              <a:t>NumeriCor GmbH</a:t>
+            </a:r>
+            <a:endParaRPr lang="en-US" sz="1100" dirty="0"/>
+          </a:p>
+        </p:txBody>
+      </p:sp>
+      <p:sp>
+        <p:nvSpPr>
+          <p:cNvPr id="7" name="Text 5"/>
           <p:cNvSpPr/>
           <p:nvPr/>
         </p:nvSpPr>
@@ -18602,33 +19304,48 @@
           </a:p>
         </p:txBody>
       </p:sp>
-      <p:pic>
-        <p:nvPicPr>
-          <p:cNvPr id="6" name="Image 0" descr="/sessions/gracious-blissful-pasteur/mnt/claude_code_presentation/numericor.png">    </p:cNvPr>
-          <p:cNvPicPr>
-            <a:picLocks noChangeAspect="1"/>
-          </p:cNvPicPr>
-          <p:nvPr/>
-        </p:nvPicPr>
-        <p:blipFill>
-          <a:blip r:embed="rId1"/>
-          <a:stretch>
-            <a:fillRect/>
-          </a:stretch>
-        </p:blipFill>
-        <p:spPr>
-          <a:xfrm>
-            <a:off x="914400" y="6419088"/>
-            <a:ext cx="1371600" cy="214884"/>
-          </a:xfrm>
-          <a:prstGeom prst="rect">
-            <a:avLst/>
-          </a:prstGeom>
-        </p:spPr>
-      </p:pic>
-      <p:sp>
-        <p:nvSpPr>
-          <p:cNvPr id="7" name="Text 4"/>
+      <p:sp>
+        <p:nvSpPr>
+          <p:cNvPr id="6" name="Text 4"/>
+          <p:cNvSpPr/>
+          <p:nvPr/>
+        </p:nvSpPr>
+        <p:spPr>
+          <a:xfrm>
+            <a:off x="914400" y="6400800"/>
+            <a:ext cx="1645920" cy="365760"/>
+          </a:xfrm>
+          <a:prstGeom prst="rect">
+            <a:avLst/>
+          </a:prstGeom>
+          <a:noFill/>
+          <a:ln/>
+        </p:spPr>
+        <p:txBody>
+          <a:bodyPr wrap="square" rtlCol="0" anchor="ctr"/>
+          <a:lstStyle/>
+          <a:p>
+            <a:pPr algn="l" indent="0" marL="0">
+              <a:buNone/>
+            </a:pPr>
+            <a:r>
+              <a:rPr lang="en-US" sz="1100" dirty="0">
+                <a:solidFill>
+                  <a:srgbClr val="888888"/>
+                </a:solidFill>
+                <a:latin typeface="Inter" pitchFamily="34" charset="0"/>
+                <a:ea typeface="Inter" pitchFamily="34" charset="-122"/>
+                <a:cs typeface="Inter" pitchFamily="34" charset="-120"/>
+              </a:rPr>
+              <a:t>NumeriCor GmbH</a:t>
+            </a:r>
+            <a:endParaRPr lang="en-US" sz="1100" dirty="0"/>
+          </a:p>
+        </p:txBody>
+      </p:sp>
+      <p:sp>
+        <p:nvSpPr>
+          <p:cNvPr id="7" name="Text 5"/>
           <p:cNvSpPr/>
           <p:nvPr/>
         </p:nvSpPr>
@@ -19084,33 +19801,48 @@
           </a:p>
         </p:txBody>
       </p:sp>
-      <p:pic>
-        <p:nvPicPr>
-          <p:cNvPr id="6" name="Image 0" descr="/sessions/gracious-blissful-pasteur/mnt/claude_code_presentation/numericor.png">    </p:cNvPr>
-          <p:cNvPicPr>
-            <a:picLocks noChangeAspect="1"/>
-          </p:cNvPicPr>
-          <p:nvPr/>
-        </p:nvPicPr>
-        <p:blipFill>
-          <a:blip r:embed="rId1"/>
-          <a:stretch>
-            <a:fillRect/>
-          </a:stretch>
-        </p:blipFill>
-        <p:spPr>
-          <a:xfrm>
-            <a:off x="914400" y="6419088"/>
-            <a:ext cx="1371600" cy="214884"/>
-          </a:xfrm>
-          <a:prstGeom prst="rect">
-            <a:avLst/>
-          </a:prstGeom>
-        </p:spPr>
-      </p:pic>
-      <p:sp>
-        <p:nvSpPr>
-          <p:cNvPr id="7" name="Text 4"/>
+      <p:sp>
+        <p:nvSpPr>
+          <p:cNvPr id="6" name="Text 4"/>
+          <p:cNvSpPr/>
+          <p:nvPr/>
+        </p:nvSpPr>
+        <p:spPr>
+          <a:xfrm>
+            <a:off x="914400" y="6400800"/>
+            <a:ext cx="1645920" cy="365760"/>
+          </a:xfrm>
+          <a:prstGeom prst="rect">
+            <a:avLst/>
+          </a:prstGeom>
+          <a:noFill/>
+          <a:ln/>
+        </p:spPr>
+        <p:txBody>
+          <a:bodyPr wrap="square" rtlCol="0" anchor="ctr"/>
+          <a:lstStyle/>
+          <a:p>
+            <a:pPr algn="l" indent="0" marL="0">
+              <a:buNone/>
+            </a:pPr>
+            <a:r>
+              <a:rPr lang="en-US" sz="1100" dirty="0">
+                <a:solidFill>
+                  <a:srgbClr val="888888"/>
+                </a:solidFill>
+                <a:latin typeface="Inter" pitchFamily="34" charset="0"/>
+                <a:ea typeface="Inter" pitchFamily="34" charset="-122"/>
+                <a:cs typeface="Inter" pitchFamily="34" charset="-120"/>
+              </a:rPr>
+              <a:t>NumeriCor GmbH</a:t>
+            </a:r>
+            <a:endParaRPr lang="en-US" sz="1100" dirty="0"/>
+          </a:p>
+        </p:txBody>
+      </p:sp>
+      <p:sp>
+        <p:nvSpPr>
+          <p:cNvPr id="7" name="Text 5"/>
           <p:cNvSpPr/>
           <p:nvPr/>
         </p:nvSpPr>

--- a/claude_code_workshop_v2.pptx
+++ b/claude_code_workshop_v2.pptx
@@ -536,7 +536,8 @@
           <a:p>
             <a:r>
               <a:rPr lang="en-US" dirty="0"/>
-              <a:t/>
+              <a:t>Self-intro: 'Mathematician and computer scientist by training. I now work on software for cardiac electromechanics — finite-element models, coupled electrical-mechanical solvers, Python and C++ pipelines. I'm not an AI researcher. I use Claude Code the way you do: as a second pair of hands for code I already understand. Everything in this workshop is from that perspective — a numerical-software engineer's view of these tools, not an AI vendor's pitch.'
+Housekeeping: 3h30min total, three hands-on exercises (~40 min combined), questions welcome anytime. Starter kit zip will be shared at the end — don't take notes on the commands, they're all in the cheatsheet.</a:t>
             </a:r>
             <a:endParaRPr lang="en-US" dirty="0"/>
           </a:p>
@@ -1600,7 +1601,9 @@
           <a:p>
             <a:r>
               <a:rPr lang="en-US" dirty="0"/>
-              <a:t>Open with a pause and ask: 'think of a decision in your own work — algorithmic, numerical, architectural — that you made two or three years ago. When did you last revisit it?' Almost everyone has a stale one. That is the whole point of this section.
+              <a:t>Open with a pause: 'think of a decision in your own work — algorithmic, numerical, architectural — that you made two or three years ago. When did you last revisit it?' Almost everyone has a stale one. That is the whole point of this section.
+Terminology — ADR stands for Architectural Decision Record (Michael Nygard, 2011). A short markdown doc per consequential decision: context, options, choice, consequences. Numbered sequentially (0001-use-postgres.md, etc.), committed with the code. If your audience hasn't heard the term, skip it; if they have, it's the closest benchmark to haft — you'll come back to the comparison on the next slide.
+Delivery: the cardiac electromechanics example is your actual domain — deliver with authority. The AI segmentation example is adjacent — you are a numerical-software person, not an imaging person. Say so plainly: 'I'm not the AI researcher in the room, but colleagues who work on segmentation have hit exactly this failure mode.' Honesty plays better than pretending to be a U-Net expert.
 The key insight: lab notebooks and ADRs are STATIC artifacts. They have no expiration mechanism. The field moves but your documented commitments don't. haft is about closing that gap.
 If someone pushes back with 'we just re-evaluate when we write the next paper' — fine, but that's reactive. haft makes it proactive: the decision itself surfaces when its evidence ages out.</a:t>
             </a:r>
@@ -1690,9 +1693,10 @@
           <a:p>
             <a:r>
               <a:rPr lang="en-US" dirty="0"/>
-              <a:t>Pareto-front (one sentence): when tradeoffs are genuinely incommensurable — accuracy vs runtime vs memory — you can't reduce them to a weighted sum without smuggling in a value judgement. The Pareto front shows which alternatives are not dominated by any other. Domain knowledge picks among them. That's more honest than a scalar score.
-Trust score (R_eff): a single number per decision that decays as evidence ages. Not a p-value. Think of it as: 'how confident should I still be in the rationale for this?' When it drops past a threshold, the decision surfaces for review.
-FPF is “eternal alpha” per Levenchuk's own phrasing — a working methodology still evolving. haft is inspired-by, not implementation-of. Be honest about this if someone asks.
+              <a:t>Pre-empt the ADR question before it gets asked. Someone will think 'this is just ADRs with extra steps.' Honest answer: haft is ADRs plus two things — (1) decisions carry verifiable claims with verify_after dates, not just a rationale paragraph; (2) trust in each decision decays as evidence ages, so stale decisions surface automatically. If your team already writes ADRs, haft is the next step up. If you don't, haft gives you the discipline AND the lifecycle in one tool.
+Pareto-front clarification — your audience knows Pareto from multi-objective optimization (NSGA-II, MOEA/D, the formal non-dominated set). Be upfront: haft does NOT run formal MOO on your alternatives. What it does is lay out the candidates against your declared criteria in a comparison table and enforce that you reason in terms of tradeoffs rather than collapsing to a single weighted score. Call it Pareto-THINKING, not Pareto-COMPUTATION. The discipline: don't pretend you can trade 0.02 AUC for 30 ms runtime via a magic coefficient — state the tradeoff explicitly and let a human decide. That's why the on-slide bullet says 'explicit tradeoffs, no collapsed score' rather than promising a formal front.
+Trust score (R_eff): one number per decision, decays as evidence ages. Not a p-value. Think 'how confident should I still be in the rationale?' Past threshold, decision surfaces for review.
+FPF is 'eternal alpha' per Levenchuk's own phrasing — a working methodology still evolving. haft is inspired-by, not implementation-of. Be honest about this if someone asks.
 Don't go deep on R_eff math or FPF's seven foundational ideas — the audience can google those. The point is the cycle and the expiration mechanism.</a:t>
             </a:r>
             <a:endParaRPr lang="en-US" dirty="0"/>
@@ -10108,7 +10112,7 @@
                 <a:ea typeface="Inter" pitchFamily="34" charset="-122"/>
                 <a:cs typeface="Inter" pitchFamily="34" charset="-120"/>
               </a:rPr>
-              <a:t>Compare — Pareto-front across accuracy, runtime, memory, stability</a:t>
+              <a:t>Compare — explicit tradeoffs across your criteria (no collapsed score)</a:t>
             </a:r>
             <a:endParaRPr lang="en-US" sz="1600" dirty="0"/>
           </a:p>

--- a/claude_code_workshop_v2.pptx
+++ b/claude_code_workshop_v2.pptx
@@ -4,6 +4,9 @@
   <p:sldMasterIdLst>
     <p:sldMasterId id="2147483648" r:id="rId1"/>
   </p:sldMasterIdLst>
+  <p:notesMasterIdLst>
+    <p:notesMasterId r:id="rId37"/>
+  </p:notesMasterIdLst>
   <p:sldIdLst>
     <p:sldId id="256" r:id="rId2"/>
     <p:sldId id="257" r:id="rId3"/>
@@ -41,9 +44,6 @@
     <p:sldId id="289" r:id="rId35"/>
     <p:sldId id="290" r:id="rId36"/>
   </p:sldIdLst>
-  <p:notesMasterIdLst>
-    <p:notesMasterId r:id="rId37"/>
-  </p:notesMasterIdLst>
   <p:sldSz cx="12192000" cy="6858000"/>
   <p:notesSz cx="6858000" cy="12192000"/>
   <p:defaultTextStyle>
@@ -138,6 +138,11 @@
       </a:defRPr>
     </a:lvl9pPr>
   </p:defaultTextStyle>
+  <p:extLst>
+    <p:ext uri="{EFAFB233-063F-42B5-8137-9DF3F51BA10A}">
+      <p15:sldGuideLst xmlns:p15="http://schemas.microsoft.com/office/powerpoint/2012/main"/>
+    </p:ext>
+  </p:extLst>
 </p:presentation>
 </file>
 
@@ -163,234 +168,10 @@
           <a:chExt cx="0" cy="0"/>
         </a:xfrm>
       </p:grpSpPr>
-      <p:sp>
-        <p:nvSpPr>
-          <p:cNvPr id="2" name="Header Placeholder 1"/>
-          <p:cNvSpPr>
-            <a:spLocks noGrp="1"/>
-          </p:cNvSpPr>
-          <p:nvPr>
-            <p:ph type="hdr" sz="quarter"/>
-          </p:nvPr>
-        </p:nvSpPr>
-        <p:spPr>
-          <a:xfrm>
-            <a:off x="0" y="0"/>
-            <a:ext cx="2971800" cy="458788"/>
-          </a:xfrm>
-          <a:prstGeom prst="rect">
-            <a:avLst/>
-          </a:prstGeom>
-        </p:spPr>
-        <p:txBody>
-          <a:bodyPr vert="horz" lIns="91440" tIns="45720" rIns="91440" bIns="45720" rtlCol="0"/>
-          <a:lstStyle>
-            <a:lvl1pPr algn="l">
-              <a:defRPr sz="1200"/>
-            </a:lvl1pPr>
-          </a:lstStyle>
-          <a:p>
-            <a:endParaRPr lang="en-US"/>
-          </a:p>
-        </p:txBody>
-      </p:sp>
-      <p:sp>
-        <p:nvSpPr>
-          <p:cNvPr id="3" name="Date Placeholder 2"/>
-          <p:cNvSpPr>
-            <a:spLocks noGrp="1"/>
-          </p:cNvSpPr>
-          <p:nvPr>
-            <p:ph type="dt" idx="1"/>
-          </p:nvPr>
-        </p:nvSpPr>
-        <p:spPr>
-          <a:xfrm>
-            <a:off x="3884613" y="0"/>
-            <a:ext cx="2971800" cy="458788"/>
-          </a:xfrm>
-          <a:prstGeom prst="rect">
-            <a:avLst/>
-          </a:prstGeom>
-        </p:spPr>
-        <p:txBody>
-          <a:bodyPr vert="horz" lIns="91440" tIns="45720" rIns="91440" bIns="45720" rtlCol="0"/>
-          <a:lstStyle>
-            <a:lvl1pPr algn="r">
-              <a:defRPr sz="1200"/>
-            </a:lvl1pPr>
-          </a:lstStyle>
-          <a:p>
-            <a:fld id="{5282F153-3F37-0F45-9E97-73ACFA13230C}" type="datetimeFigureOut">
-              <a:rPr lang="en-US"/>
-              <a:t>7/23/19</a:t>
-            </a:fld>
-            <a:endParaRPr lang="en-US"/>
-          </a:p>
-        </p:txBody>
-      </p:sp>
-      <p:sp>
-        <p:nvSpPr>
-          <p:cNvPr id="4" name="Slide Image Placeholder 3"/>
-          <p:cNvSpPr>
-            <a:spLocks noGrp="1" noRot="1" noChangeAspect="1"/>
-          </p:cNvSpPr>
-          <p:nvPr>
-            <p:ph type="sldImg" idx="2"/>
-          </p:nvPr>
-        </p:nvSpPr>
-        <p:spPr>
-          <a:xfrm>
-            <a:off x="685800" y="1143000"/>
-            <a:ext cx="5486400" cy="3086100"/>
-          </a:xfrm>
-          <a:prstGeom prst="rect">
-            <a:avLst/>
-          </a:prstGeom>
-          <a:noFill/>
-          <a:ln w="12700">
-            <a:solidFill>
-              <a:prstClr val="black"/>
-            </a:solidFill>
-          </a:ln>
-        </p:spPr>
-        <p:txBody>
-          <a:bodyPr vert="horz" lIns="91440" tIns="45720" rIns="91440" bIns="45720" rtlCol="0" anchor="ctr"/>
-          <a:lstStyle/>
-          <a:p>
-            <a:endParaRPr lang="en-US"/>
-          </a:p>
-        </p:txBody>
-      </p:sp>
-      <p:sp>
-        <p:nvSpPr>
-          <p:cNvPr id="5" name="Notes Placeholder 4"/>
-          <p:cNvSpPr>
-            <a:spLocks noGrp="1"/>
-          </p:cNvSpPr>
-          <p:nvPr>
-            <p:ph type="body" sz="quarter" idx="3"/>
-          </p:nvPr>
-        </p:nvSpPr>
-        <p:spPr>
-          <a:xfrm>
-            <a:off x="685800" y="4400550"/>
-            <a:ext cx="5486400" cy="3600450"/>
-          </a:xfrm>
-          <a:prstGeom prst="rect">
-            <a:avLst/>
-          </a:prstGeom>
-        </p:spPr>
-        <p:txBody>
-          <a:bodyPr vert="horz" lIns="91440" tIns="45720" rIns="91440" bIns="45720" rtlCol="0"/>
-          <a:lstStyle/>
-          <a:p>
-            <a:pPr lvl="0"/>
-            <a:r>
-              <a:rPr lang="en-US"/>
-              <a:t>Click to edit Master text styles</a:t>
-            </a:r>
-          </a:p>
-          <a:p>
-            <a:pPr lvl="1"/>
-            <a:r>
-              <a:rPr lang="en-US"/>
-              <a:t>Second level</a:t>
-            </a:r>
-          </a:p>
-          <a:p>
-            <a:pPr lvl="2"/>
-            <a:r>
-              <a:rPr lang="en-US"/>
-              <a:t>Third level</a:t>
-            </a:r>
-          </a:p>
-          <a:p>
-            <a:pPr lvl="3"/>
-            <a:r>
-              <a:rPr lang="en-US"/>
-              <a:t>Fourth level</a:t>
-            </a:r>
-          </a:p>
-          <a:p>
-            <a:pPr lvl="4"/>
-            <a:r>
-              <a:rPr lang="en-US"/>
-              <a:t>Fifth level</a:t>
-            </a:r>
-          </a:p>
-        </p:txBody>
-      </p:sp>
-      <p:sp>
-        <p:nvSpPr>
-          <p:cNvPr id="6" name="Footer Placeholder 5"/>
-          <p:cNvSpPr>
-            <a:spLocks noGrp="1"/>
-          </p:cNvSpPr>
-          <p:nvPr>
-            <p:ph type="ftr" sz="quarter" idx="4"/>
-          </p:nvPr>
-        </p:nvSpPr>
-        <p:spPr>
-          <a:xfrm>
-            <a:off x="0" y="8685213"/>
-            <a:ext cx="2971800" cy="458787"/>
-          </a:xfrm>
-          <a:prstGeom prst="rect">
-            <a:avLst/>
-          </a:prstGeom>
-        </p:spPr>
-        <p:txBody>
-          <a:bodyPr vert="horz" lIns="91440" tIns="45720" rIns="91440" bIns="45720" rtlCol="0" anchor="b"/>
-          <a:lstStyle>
-            <a:lvl1pPr algn="l">
-              <a:defRPr sz="1200"/>
-            </a:lvl1pPr>
-          </a:lstStyle>
-          <a:p>
-            <a:endParaRPr lang="en-US"/>
-          </a:p>
-        </p:txBody>
-      </p:sp>
-      <p:sp>
-        <p:nvSpPr>
-          <p:cNvPr id="7" name="Slide Number Placeholder 6"/>
-          <p:cNvSpPr>
-            <a:spLocks noGrp="1"/>
-          </p:cNvSpPr>
-          <p:nvPr>
-            <p:ph type="sldNum" sz="quarter" idx="5"/>
-          </p:nvPr>
-        </p:nvSpPr>
-        <p:spPr>
-          <a:xfrm>
-            <a:off x="3884613" y="8685213"/>
-            <a:ext cx="2971800" cy="458787"/>
-          </a:xfrm>
-          <a:prstGeom prst="rect">
-            <a:avLst/>
-          </a:prstGeom>
-        </p:spPr>
-        <p:txBody>
-          <a:bodyPr vert="horz" lIns="91440" tIns="45720" rIns="91440" bIns="45720" rtlCol="0" anchor="b"/>
-          <a:lstStyle>
-            <a:lvl1pPr algn="r">
-              <a:defRPr sz="1200"/>
-            </a:lvl1pPr>
-          </a:lstStyle>
-          <a:p>
-            <a:fld id="{CE5E9CC1-C706-0F49-92D6-E571CC5EEA8F}" type="slidenum">
-              <a:rPr lang="en-US"/>
-              <a:t>‹#›</a:t>
-            </a:fld>
-            <a:endParaRPr lang="en-US"/>
-          </a:p>
-        </p:txBody>
-      </p:sp>
     </p:spTree>
     <p:extLst>
       <p:ext uri="{BB962C8B-B14F-4D97-AF65-F5344CB8AC3E}">
-        <p14:creationId xmlns:p14="http://schemas.microsoft.com/office/powerpoint/2010/main" val="1024086991"/>
+        <p14:creationId xmlns:p14="http://schemas.microsoft.com/office/powerpoint/2010/main" val="461910602"/>
       </p:ext>
     </p:extLst>
   </p:cSld>
@@ -539,7 +320,6 @@
               <a:t>Self-intro: 'Mathematician and computer scientist by training. I now work on software for cardiac electromechanics — finite-element models, coupled electrical-mechanical solvers, Python and C++ pipelines. I'm not an AI researcher. I use Claude Code the way you do: as a second pair of hands for code I already understand. Everything in this workshop is from that perspective — a numerical-software engineer's view of these tools, not an AI vendor's pitch.'
 Housekeeping: 3h30min total, three hands-on exercises (~40 min combined), questions welcome anytime. Starter kit zip will be shared at the end — don't take notes on the commands, they're all in the cheatsheet.</a:t>
             </a:r>
-            <a:endParaRPr lang="en-US" dirty="0"/>
           </a:p>
         </p:txBody>
       </p:sp>
@@ -623,10 +403,6 @@
           <a:bodyPr/>
           <a:lstStyle/>
           <a:p>
-            <a:r>
-              <a:rPr lang="en-US" dirty="0"/>
-              <a:t/>
-            </a:r>
             <a:endParaRPr lang="en-US" dirty="0"/>
           </a:p>
         </p:txBody>
@@ -717,7 +493,6 @@
 All env vars can also be set in settings.json under the env key.
 effortLevel accepts: low, medium, high. Note: max effort is session-scoped only and cannot be set in settings.json.</a:t>
             </a:r>
-            <a:endParaRPr lang="en-US" dirty="0"/>
           </a:p>
         </p:txBody>
       </p:sp>
@@ -808,7 +583,6 @@
 - SkillsBench: arxiv.org/abs/2602.12670
 On tool-generated CLAUDE.md: Beads writes .beads/CLAUDE.md (or project-level), haft writes to .haft/. Claude loads all discovered CLAUDE.md files in the project. You don't need to manually maintain those — just don't let them bloat your own file.</a:t>
             </a:r>
-            <a:endParaRPr lang="en-US" dirty="0"/>
           </a:p>
         </p:txBody>
       </p:sp>
@@ -896,7 +670,6 @@
               <a:rPr lang="en-US" dirty="0"/>
               <a:t>Walk around and ask people what rule they added. Good examples to share: language/framework preferences, testing conventions, forbidden patterns, naming conventions. Bad examples: generic advice Claude already knows.</a:t>
             </a:r>
-            <a:endParaRPr lang="en-US" dirty="0"/>
           </a:p>
         </p:txBody>
       </p:sp>
@@ -980,10 +753,6 @@
           <a:bodyPr/>
           <a:lstStyle/>
           <a:p>
-            <a:r>
-              <a:rPr lang="en-US" dirty="0"/>
-              <a:t/>
-            </a:r>
             <a:endParaRPr lang="en-US" dirty="0"/>
           </a:p>
         </p:txBody>
@@ -1073,7 +842,6 @@
               <a:t>Full details: code.claude.com/docs/en/data-usage
 For journal peer review: most journals now acknowledge AI-assisted review. If the paper is publicly available (arxiv, preprint server), there is no confidentiality concern. For embargoed submissions, check the specific journal's AI policy before using Claude.</a:t>
             </a:r>
-            <a:endParaRPr lang="en-US" dirty="0"/>
           </a:p>
         </p:txBody>
       </p:sp>
@@ -1157,10 +925,6 @@
           <a:bodyPr/>
           <a:lstStyle/>
           <a:p>
-            <a:r>
-              <a:rPr lang="en-US" dirty="0"/>
-              <a:t/>
-            </a:r>
             <a:endParaRPr lang="en-US" dirty="0"/>
           </a:p>
         </p:txBody>
@@ -1245,10 +1009,6 @@
           <a:bodyPr/>
           <a:lstStyle/>
           <a:p>
-            <a:r>
-              <a:rPr lang="en-US" dirty="0"/>
-              <a:t/>
-            </a:r>
             <a:endParaRPr lang="en-US" dirty="0"/>
           </a:p>
         </p:txBody>
@@ -1339,7 +1099,6 @@
 Model resolution order: env var &gt; per-invocation parameter &gt; frontmatter &gt; inherit from parent.
 Subagents cannot spawn other subagents. For parallel work, use agent teams (separate sessions that communicate).</a:t>
             </a:r>
-            <a:endParaRPr lang="en-US" dirty="0"/>
           </a:p>
         </p:txBody>
       </p:sp>
@@ -1423,10 +1182,6 @@
           <a:bodyPr/>
           <a:lstStyle/>
           <a:p>
-            <a:r>
-              <a:rPr lang="en-US" dirty="0"/>
-              <a:t/>
-            </a:r>
             <a:endParaRPr lang="en-US" dirty="0"/>
           </a:p>
         </p:txBody>
@@ -1511,10 +1266,6 @@
           <a:bodyPr/>
           <a:lstStyle/>
           <a:p>
-            <a:r>
-              <a:rPr lang="en-US" dirty="0"/>
-              <a:t/>
-            </a:r>
             <a:endParaRPr lang="en-US" dirty="0"/>
           </a:p>
         </p:txBody>
@@ -1607,7 +1358,6 @@
 The key insight: lab notebooks and ADRs are STATIC artifacts. They have no expiration mechanism. The field moves but your documented commitments don't. haft is about closing that gap.
 If someone pushes back with 'we just re-evaluate when we write the next paper' — fine, but that's reactive. haft makes it proactive: the decision itself surfaces when its evidence ages out.</a:t>
             </a:r>
-            <a:endParaRPr lang="en-US" dirty="0"/>
           </a:p>
         </p:txBody>
       </p:sp>
@@ -1699,7 +1449,6 @@
 FPF is 'eternal alpha' per Levenchuk's own phrasing — a working methodology still evolving. haft is inspired-by, not implementation-of. Be honest about this if someone asks.
 Don't go deep on R_eff math or FPF's seven foundational ideas — the audience can google those. The point is the cycle and the expiration mechanism.</a:t>
             </a:r>
-            <a:endParaRPr lang="en-US" dirty="0"/>
           </a:p>
         </p:txBody>
       </p:sp>
@@ -1789,7 +1538,6 @@
 The 'publish on top of them' point is the sharpest: research compounds. If decision A underpins result B, and A's evidence decays silently, then B's foundation has cracked and you didn't notice. haft makes that visible.
 This is the slide where the audience should feel 'yes, this is my problem.' If you're getting nods, move on quickly. If you're getting blank stares, ask them to name a time they inherited someone else's code and couldn't tell why a specific choice was made.</a:t>
             </a:r>
-            <a:endParaRPr lang="en-US" dirty="0"/>
           </a:p>
         </p:txBody>
       </p:sp>
@@ -1881,7 +1629,6 @@
 Honest caveat to mention: haft doesn't run your benchmarks for you. It doesn't verify your claims — you still have to do the work. What it does is make sure your decisions don't silently rot.
 Compatible tools list: name Cursor and Gemini CLI at least — shows it's not Claude-Code-locked. Full /h-* command table is in the cheatsheet; don't read it out loud.</a:t>
             </a:r>
-            <a:endParaRPr lang="en-US" dirty="0"/>
           </a:p>
         </p:txBody>
       </p:sp>
@@ -1965,10 +1712,6 @@
           <a:bodyPr/>
           <a:lstStyle/>
           <a:p>
-            <a:r>
-              <a:rPr lang="en-US" dirty="0"/>
-              <a:t/>
-            </a:r>
             <a:endParaRPr lang="en-US" dirty="0"/>
           </a:p>
         </p:txBody>
@@ -2055,9 +1798,8 @@
           <a:p>
             <a:r>
               <a:rPr lang="en-US" dirty="0"/>
-              <a:t/>
-            </a:r>
-            <a:endParaRPr lang="en-US" dirty="0"/>
+              <a:t>Framing for this room: most of you already have an issue tracker — GitLab, Jira, whatever the group uses. Beads is not a replacement for that. It's a local graph of tasks that Claude Code reads and writes, so when you break a feature into pieces and spawn subagents, they have a shared view of what's done, what's blocked, and what's next. Think of it as short-term operational memory for the agent, not long-term project tracking. The Dolt layer is useful because it's diffable and mergeable — if two parallel sessions touch the issue graph, you can reconcile them like you would source code. Steve Yegge built this (yes, that Steve Yegge) — he writes about the motivation on his Substack and the repo has good background reading.</a:t>
+            </a:r>
           </a:p>
         </p:txBody>
       </p:sp>
@@ -2141,10 +1883,6 @@
           <a:bodyPr/>
           <a:lstStyle/>
           <a:p>
-            <a:r>
-              <a:rPr lang="en-US" dirty="0"/>
-              <a:t/>
-            </a:r>
             <a:endParaRPr lang="en-US" dirty="0"/>
           </a:p>
         </p:txBody>
@@ -2229,10 +1967,6 @@
           <a:bodyPr/>
           <a:lstStyle/>
           <a:p>
-            <a:r>
-              <a:rPr lang="en-US" dirty="0"/>
-              <a:t/>
-            </a:r>
             <a:endParaRPr lang="en-US" dirty="0"/>
           </a:p>
         </p:txBody>
@@ -2321,7 +2055,6 @@
               <a:rPr lang="en-US" dirty="0"/>
               <a:t>This is a good moment for a short break if you haven't had one — people can grab coffee while tools install. Common issue: Beads plugin needs uv installed first (the install.sh handles this, but if someone skipped it: curl -LsSf https://astral.sh/uv/install.sh | sh).</a:t>
             </a:r>
-            <a:endParaRPr lang="en-US" dirty="0"/>
           </a:p>
         </p:txBody>
       </p:sp>
@@ -2405,10 +2138,6 @@
           <a:bodyPr/>
           <a:lstStyle/>
           <a:p>
-            <a:r>
-              <a:rPr lang="en-US" dirty="0"/>
-              <a:t/>
-            </a:r>
             <a:endParaRPr lang="en-US" dirty="0"/>
           </a:p>
         </p:txBody>
@@ -2495,9 +2224,8 @@
           <a:p>
             <a:r>
               <a:rPr lang="en-US" dirty="0"/>
-              <a:t/>
-            </a:r>
-            <a:endParaRPr lang="en-US" dirty="0"/>
+              <a:t>Rough timing: Fundamentals ~45min, Privacy/Tokens ~20min, Skills/Plugins/Subagents ~35min, haft ~30min, Beads ~20min, Anti-Deskilling ~25min. Three hands-on exercises are folded in (install, first real task, skill authoring). Ask who has already tried Claude Code vs. other agentic coding tools (Cursor, Copilot CLI, Aider) — calibrates how much time to spend on the early fundamentals. If the room is mostly experienced, skim slides 3–5 and get to operating modes faster.</a:t>
+            </a:r>
           </a:p>
         </p:txBody>
       </p:sp>
@@ -2589,7 +2317,6 @@
 - MDPI (2025): 'Cognitive Atrophy Paradox of AI–Human Interaction'
 Discussion prompt for audience: When did you last solve a problem without reaching for an AI tool first?</a:t>
             </a:r>
-            <a:endParaRPr lang="en-US" dirty="0"/>
           </a:p>
         </p:txBody>
       </p:sp>
@@ -2678,10 +2405,10 @@
               <a:t>Sources:
 - Amodei at Davos (Jan 2026): cnbc.com/2026/01/27/dario-amodei-warns-ai-cause-unusually-painful-disruption-jobs.html
 - 'Machines of Loving Grace' essay: darioamodei.com/essay/machines-of-loving-grace
-- David Deutsch pencil quote via Ivan Zakutnii (haft developer)
-Discussion prompt: Do you agree with the 50% prediction? What does it mean for your field specifically?</a:t>
-            </a:r>
-            <a:endParaRPr lang="en-US" dirty="0"/>
+- Deutsch pencil quote via Ivan Zakutnii (haft developer)
+Tone: I'm not here to sell Amodei's forecast. Present the number, then say plainly that reasonable people disagree — what's not contested is that the tools are now part of how software gets written. For a research audience, connect this to grant cycles and PhD timelines: people entering the field today will spend their whole careers with these tools on the desk.
+Discussion prompt (optional): In your own field — AI research, image segmentation, cardiac electromechanics — which parts of the work still require a human to sit with the problem, and which are already mostly supervised automation? No right answer, just get people talking.</a:t>
+            </a:r>
           </a:p>
         </p:txBody>
       </p:sp>
@@ -2765,10 +2492,6 @@
           <a:bodyPr/>
           <a:lstStyle/>
           <a:p>
-            <a:r>
-              <a:rPr lang="en-US" dirty="0"/>
-              <a:t/>
-            </a:r>
             <a:endParaRPr lang="en-US" dirty="0"/>
           </a:p>
         </p:txBody>
@@ -2866,7 +2589,6 @@
 hotl: [CMake config, test scaffolding, code review]
 hootl: [formatting, boilerplate, doc scaffolding]</a:t>
             </a:r>
-            <a:endParaRPr lang="en-US" dirty="0"/>
           </a:p>
         </p:txBody>
       </p:sp>
@@ -2956,7 +2678,6 @@
 Repo: github.com/anthropics/skills
 Paper: arxiv.org/abs/2602.12670 (SkillsBench)</a:t>
             </a:r>
-            <a:endParaRPr lang="en-US" dirty="0"/>
           </a:p>
         </p:txBody>
       </p:sp>
@@ -3055,7 +2776,6 @@
 - Gloaguen et al. (2025): arxiv.org/abs/2602.11988
 - SkillsBench: arxiv.org/abs/2602.12670</a:t>
             </a:r>
-            <a:endParaRPr lang="en-US" dirty="0"/>
           </a:p>
         </p:txBody>
       </p:sp>
@@ -3141,9 +2861,8 @@
           <a:p>
             <a:r>
               <a:rPr lang="en-US" dirty="0"/>
-              <a:t/>
-            </a:r>
-            <a:endParaRPr lang="en-US" dirty="0"/>
+              <a:t>Framing: this is a terminal tool, not a chatbot. It's closer to a very capable pair programmer sitting in your shell than to a web UI. Mental model for this room: 'a process that reads your working directory and can run commands' — same trust boundary as any other CLI you'd run. The interesting parts aren't the feature list; they're how the context window is managed, how tool use works, and where it still needs you to drive. We'll get to all of that.</a:t>
+            </a:r>
           </a:p>
         </p:txBody>
       </p:sp>
@@ -3229,9 +2948,8 @@
           <a:p>
             <a:r>
               <a:rPr lang="en-US" dirty="0"/>
-              <a:t/>
-            </a:r>
-            <a:endParaRPr lang="en-US" dirty="0"/>
+              <a:t>Usual yes, you can pipe curl to bash caveat — if people are uncomfortable, the installer is a signed binary they can download first and inspect. Auth: two paths — Anthropic Console account (subscription-billed, usage pooled) or a raw API key (pay-per-token). For a research group I'd suggest the Console account per person rather than sharing an API key. On Linux/macOS the installer drops a binary in ~/.local/bin or similar and updates PATH; on fresh shells you may need to `source ~/.bashrc`. If behind a corporate proxy, set HTTPS_PROXY before the curl.</a:t>
+            </a:r>
           </a:p>
         </p:txBody>
       </p:sp>
@@ -3319,7 +3037,6 @@
               <a:rPr lang="en-US" dirty="0"/>
               <a:t>Give people ~10 minutes here. Walk the room. Common issues: Node.js version conflicts (Claude Code uses its own runtime, ignore these), auth failures (check they're using the right account), PATH not updated after install (restart terminal).</a:t>
             </a:r>
-            <a:endParaRPr lang="en-US" dirty="0"/>
           </a:p>
         </p:txBody>
       </p:sp>
@@ -3405,9 +3122,8 @@
           <a:p>
             <a:r>
               <a:rPr lang="en-US" dirty="0"/>
-              <a:t/>
-            </a:r>
-            <a:endParaRPr lang="en-US" dirty="0"/>
+              <a:t>Two shortcuts worth drilling: Esc+Esc rewind (huge — when Claude goes off the rails mid-task you don't need to /clear and lose context, just roll back to the last good turn) and /compact (when the context window fills up it'll compact automatically, but doing it yourself mid-task lets you keep working without losing the thread). /btw is newer and underused — handy for 'what does this error mean' side-questions that you don't want polluting the main session transcript. Demo /init live if time allows — it'll ask a few questions about the project and write an initial CLAUDE.md, which is a nicer starting point than a blank file.</a:t>
+            </a:r>
           </a:p>
         </p:txBody>
       </p:sp>
@@ -3497,7 +3213,6 @@
 Effort level (low/medium/high) is also configurable: in settings.json as 'effortLevel', mid-session with /effort, or --effort flag at launch. 'max' effort is Opus 4.6 only and session-scoped — doesn't persist to settings.
 The /model picker also has a left/right arrow slider for effort level when you select a model.</a:t>
             </a:r>
-            <a:endParaRPr lang="en-US" dirty="0"/>
           </a:p>
         </p:txBody>
       </p:sp>
@@ -3583,9 +3298,8 @@
           <a:p>
             <a:r>
               <a:rPr lang="en-US" dirty="0"/>
-              <a:t/>
-            </a:r>
-            <a:endParaRPr lang="en-US" dirty="0"/>
+              <a:t>The operating mode is the single biggest lever for how much trust you're extending. The honest default for a new repo is Plan Mode — let it read around, produce a plan, and either accept, edit, or throw out. For code I wrote myself and know well I drop straight into Normal. Auto-accept is for chores: bulk renames, mechanical formatting passes, doc scaffolding. I do not use auto-accept on build configs, CMakeLists, solver setup code, or anything that touches MPI or GPU init — too easy for a 'clean up' to silently break the parallel path. Emphasize: modes are per-session, not per-file, so you're in charge of switching when context changes.</a:t>
+            </a:r>
           </a:p>
         </p:txBody>
       </p:sp>
@@ -3658,6 +3372,11 @@
 <file path=ppt/slideMasters/slideMaster1.xml><?xml version="1.0" encoding="utf-8"?>
 <p:sldMaster xmlns:a="http://schemas.openxmlformats.org/drawingml/2006/main" xmlns:r="http://schemas.openxmlformats.org/officeDocument/2006/relationships" xmlns:p="http://schemas.openxmlformats.org/presentationml/2006/main">
   <p:cSld>
+    <p:bg>
+      <p:bgRef idx="1001">
+        <a:schemeClr val="bg1"/>
+      </p:bgRef>
+    </p:bg>
     <p:spTree>
       <p:nvGrpSpPr>
         <p:cNvPr id="1" name=""/>
@@ -3940,6 +3659,7 @@
         <a:solidFill>
           <a:srgbClr val="FFFFFF"/>
         </a:solidFill>
+        <a:effectLst/>
       </p:bgPr>
     </p:bg>
     <p:spTree>
@@ -3977,7 +3697,7 @@
           <a:bodyPr wrap="square" lIns="0" tIns="0" rIns="0" bIns="0" rtlCol="0" anchor="ctr"/>
           <a:lstStyle/>
           <a:p>
-            <a:pPr algn="l" indent="0" marL="0">
+            <a:pPr marL="0" indent="0" algn="l">
               <a:buNone/>
             </a:pPr>
             <a:r>
@@ -4016,7 +3736,7 @@
           <a:bodyPr wrap="square" lIns="0" tIns="0" rIns="0" bIns="0" rtlCol="0" anchor="ctr"/>
           <a:lstStyle/>
           <a:p>
-            <a:pPr algn="l" indent="0" marL="0">
+            <a:pPr marL="0" indent="0" algn="l">
               <a:buNone/>
             </a:pPr>
             <a:r>
@@ -4055,7 +3775,7 @@
           <a:bodyPr wrap="square" rtlCol="0" anchor="ctr"/>
           <a:lstStyle/>
           <a:p>
-            <a:pPr algn="l" indent="0" marL="0">
+            <a:pPr marL="0" indent="0" algn="l">
               <a:buNone/>
             </a:pPr>
             <a:r>
@@ -4094,7 +3814,7 @@
           <a:bodyPr wrap="square" rtlCol="0" anchor="ctr"/>
           <a:lstStyle/>
           <a:p>
-            <a:pPr indent="0" marL="0">
+            <a:pPr marL="0" indent="0">
               <a:buNone/>
             </a:pPr>
             <a:r>
@@ -4128,6 +3848,7 @@
         <a:solidFill>
           <a:srgbClr val="FFFFFF"/>
         </a:solidFill>
+        <a:effectLst/>
       </p:bgPr>
     </p:bg>
     <p:spTree>
@@ -4165,7 +3886,7 @@
           <a:bodyPr wrap="square" lIns="0" tIns="0" rIns="0" bIns="0" rtlCol="0" anchor="ctr"/>
           <a:lstStyle/>
           <a:p>
-            <a:pPr indent="0" marL="0">
+            <a:pPr marL="0" indent="0">
               <a:buNone/>
             </a:pPr>
             <a:r>
@@ -4207,6 +3928,13 @@
             <a:prstDash val="solid"/>
           </a:ln>
         </p:spPr>
+        <p:txBody>
+          <a:bodyPr/>
+          <a:lstStyle/>
+          <a:p>
+            <a:endParaRPr lang="de-DE"/>
+          </a:p>
+        </p:txBody>
       </p:sp>
       <p:sp>
         <p:nvSpPr>
@@ -4229,7 +3957,7 @@
           <a:bodyPr wrap="square" lIns="0" tIns="0" rIns="0" bIns="0" rtlCol="0" anchor="ctr"/>
           <a:lstStyle/>
           <a:p>
-            <a:pPr indent="0" marL="0">
+            <a:pPr marL="0" indent="0">
               <a:buNone/>
             </a:pPr>
             <a:r>
@@ -4268,7 +3996,7 @@
           <a:bodyPr wrap="square" lIns="0" tIns="0" rIns="0" bIns="0" rtlCol="0" anchor="t"/>
           <a:lstStyle/>
           <a:p>
-            <a:pPr indent="0" marL="0">
+            <a:pPr marL="0" indent="0">
               <a:spcAft>
                 <a:spcPts val="400"/>
               </a:spcAft>
@@ -4372,7 +4100,7 @@
             <a:endParaRPr lang="en-US" sz="1600" dirty="0"/>
           </a:p>
           <a:p>
-            <a:pPr indent="0" marL="0">
+            <a:pPr marL="0" indent="0">
               <a:spcAft>
                 <a:spcPts val="400"/>
               </a:spcAft>
@@ -4392,7 +4120,7 @@
             <a:endParaRPr lang="en-US" sz="1600" dirty="0"/>
           </a:p>
           <a:p>
-            <a:pPr indent="0" marL="0">
+            <a:pPr marL="0" indent="0">
               <a:spcAft>
                 <a:spcPts val="400"/>
               </a:spcAft>
@@ -4475,7 +4203,7 @@
             <a:endParaRPr lang="en-US" sz="1600" dirty="0"/>
           </a:p>
           <a:p>
-            <a:pPr indent="0" marL="0">
+            <a:pPr marL="0" indent="0">
               <a:spcAft>
                 <a:spcPts val="400"/>
               </a:spcAft>
@@ -4495,7 +4223,7 @@
             <a:endParaRPr lang="en-US" sz="1600" dirty="0"/>
           </a:p>
           <a:p>
-            <a:pPr indent="0" marL="0">
+            <a:pPr marL="0" indent="0">
               <a:spcAft>
                 <a:spcPts val="400"/>
               </a:spcAft>
@@ -4515,7 +4243,7 @@
             <a:endParaRPr lang="en-US" sz="1600" dirty="0"/>
           </a:p>
           <a:p>
-            <a:pPr indent="0" marL="0">
+            <a:pPr marL="0" indent="0">
               <a:spcAft>
                 <a:spcPts val="400"/>
               </a:spcAft>
@@ -4535,7 +4263,7 @@
             <a:endParaRPr lang="en-US" sz="1600" dirty="0"/>
           </a:p>
           <a:p>
-            <a:pPr indent="0" marL="0">
+            <a:pPr marL="0" indent="0">
               <a:spcAft>
                 <a:spcPts val="400"/>
               </a:spcAft>
@@ -4577,7 +4305,7 @@
           <a:bodyPr wrap="square" rtlCol="0" anchor="ctr"/>
           <a:lstStyle/>
           <a:p>
-            <a:pPr algn="l" indent="0" marL="0">
+            <a:pPr marL="0" indent="0" algn="l">
               <a:buNone/>
             </a:pPr>
             <a:r>
@@ -4616,7 +4344,7 @@
           <a:bodyPr wrap="square" rtlCol="0" anchor="ctr"/>
           <a:lstStyle/>
           <a:p>
-            <a:pPr algn="r" indent="0" marL="0">
+            <a:pPr marL="0" indent="0" algn="r">
               <a:buNone/>
             </a:pPr>
             <a:r>
@@ -4650,6 +4378,7 @@
         <a:solidFill>
           <a:srgbClr val="FFFFFF"/>
         </a:solidFill>
+        <a:effectLst/>
       </p:bgPr>
     </p:bg>
     <p:spTree>
@@ -4687,7 +4416,7 @@
           <a:bodyPr wrap="square" lIns="0" tIns="0" rIns="0" bIns="0" rtlCol="0" anchor="ctr"/>
           <a:lstStyle/>
           <a:p>
-            <a:pPr indent="0" marL="0">
+            <a:pPr marL="0" indent="0">
               <a:buNone/>
             </a:pPr>
             <a:r>
@@ -4729,6 +4458,13 @@
             <a:prstDash val="solid"/>
           </a:ln>
         </p:spPr>
+        <p:txBody>
+          <a:bodyPr/>
+          <a:lstStyle/>
+          <a:p>
+            <a:endParaRPr lang="de-DE"/>
+          </a:p>
+        </p:txBody>
       </p:sp>
       <p:sp>
         <p:nvSpPr>
@@ -4751,7 +4487,7 @@
           <a:bodyPr wrap="square" lIns="0" tIns="0" rIns="0" bIns="0" rtlCol="0" anchor="ctr"/>
           <a:lstStyle/>
           <a:p>
-            <a:pPr indent="0" marL="0">
+            <a:pPr marL="0" indent="0">
               <a:buNone/>
             </a:pPr>
             <a:r>
@@ -4790,7 +4526,7 @@
           <a:bodyPr wrap="square" lIns="0" tIns="0" rIns="0" bIns="0" rtlCol="0" anchor="t"/>
           <a:lstStyle/>
           <a:p>
-            <a:pPr indent="0" marL="0">
+            <a:pPr marL="0" indent="0">
               <a:spcAft>
                 <a:spcPts val="400"/>
               </a:spcAft>
@@ -4810,7 +4546,7 @@
             <a:endParaRPr lang="en-US" sz="1600" dirty="0"/>
           </a:p>
           <a:p>
-            <a:pPr indent="0" marL="0">
+            <a:pPr marL="0" indent="0">
               <a:spcAft>
                 <a:spcPts val="400"/>
               </a:spcAft>
@@ -4833,7 +4569,7 @@
             <a:endParaRPr lang="en-US" sz="1600" dirty="0"/>
           </a:p>
           <a:p>
-            <a:pPr indent="0" marL="0">
+            <a:pPr marL="0" indent="0">
               <a:spcAft>
                 <a:spcPts val="400"/>
               </a:spcAft>
@@ -4856,7 +4592,7 @@
             <a:endParaRPr lang="en-US" sz="1600" dirty="0"/>
           </a:p>
           <a:p>
-            <a:pPr indent="0" marL="0">
+            <a:pPr marL="0" indent="0">
               <a:spcAft>
                 <a:spcPts val="400"/>
               </a:spcAft>
@@ -4876,7 +4612,7 @@
             <a:endParaRPr lang="en-US" sz="1600" dirty="0"/>
           </a:p>
           <a:p>
-            <a:pPr indent="0" marL="0">
+            <a:pPr marL="0" indent="0">
               <a:spcAft>
                 <a:spcPts val="400"/>
               </a:spcAft>
@@ -4896,7 +4632,7 @@
             <a:endParaRPr lang="en-US" sz="1600" dirty="0"/>
           </a:p>
           <a:p>
-            <a:pPr indent="0" marL="0">
+            <a:pPr marL="0" indent="0">
               <a:spcAft>
                 <a:spcPts val="400"/>
               </a:spcAft>
@@ -4919,7 +4655,7 @@
             <a:endParaRPr lang="en-US" sz="1600" dirty="0"/>
           </a:p>
           <a:p>
-            <a:pPr indent="0" marL="0">
+            <a:pPr marL="0" indent="0">
               <a:spcAft>
                 <a:spcPts val="400"/>
               </a:spcAft>
@@ -4942,7 +4678,7 @@
             <a:endParaRPr lang="en-US" sz="1600" dirty="0"/>
           </a:p>
           <a:p>
-            <a:pPr indent="0" marL="0">
+            <a:pPr marL="0" indent="0">
               <a:spcAft>
                 <a:spcPts val="400"/>
               </a:spcAft>
@@ -4962,7 +4698,7 @@
             <a:endParaRPr lang="en-US" sz="1600" dirty="0"/>
           </a:p>
           <a:p>
-            <a:pPr indent="0" marL="0">
+            <a:pPr marL="0" indent="0">
               <a:spcAft>
                 <a:spcPts val="400"/>
               </a:spcAft>
@@ -4982,7 +4718,7 @@
             <a:endParaRPr lang="en-US" sz="1600" dirty="0"/>
           </a:p>
           <a:p>
-            <a:pPr indent="0" marL="0">
+            <a:pPr marL="0" indent="0">
               <a:spcAft>
                 <a:spcPts val="400"/>
               </a:spcAft>
@@ -5005,7 +4741,7 @@
             <a:endParaRPr lang="en-US" sz="1600" dirty="0"/>
           </a:p>
           <a:p>
-            <a:pPr indent="0" marL="0">
+            <a:pPr marL="0" indent="0">
               <a:spcAft>
                 <a:spcPts val="400"/>
               </a:spcAft>
@@ -5028,7 +4764,7 @@
             <a:endParaRPr lang="en-US" sz="1600" dirty="0"/>
           </a:p>
           <a:p>
-            <a:pPr indent="0" marL="0">
+            <a:pPr marL="0" indent="0">
               <a:spcAft>
                 <a:spcPts val="400"/>
               </a:spcAft>
@@ -5048,7 +4784,7 @@
             <a:endParaRPr lang="en-US" sz="1600" dirty="0"/>
           </a:p>
           <a:p>
-            <a:pPr indent="0" marL="0">
+            <a:pPr marL="0" indent="0">
               <a:spcAft>
                 <a:spcPts val="400"/>
               </a:spcAft>
@@ -5068,7 +4804,7 @@
             <a:endParaRPr lang="en-US" sz="1600" dirty="0"/>
           </a:p>
           <a:p>
-            <a:pPr indent="0" marL="0">
+            <a:pPr marL="0" indent="0">
               <a:spcAft>
                 <a:spcPts val="400"/>
               </a:spcAft>
@@ -5091,7 +4827,7 @@
             <a:endParaRPr lang="en-US" sz="1600" dirty="0"/>
           </a:p>
           <a:p>
-            <a:pPr indent="0" marL="0">
+            <a:pPr marL="0" indent="0">
               <a:spcAft>
                 <a:spcPts val="400"/>
               </a:spcAft>
@@ -5114,7 +4850,7 @@
             <a:endParaRPr lang="en-US" sz="1600" dirty="0"/>
           </a:p>
           <a:p>
-            <a:pPr indent="0" marL="0">
+            <a:pPr marL="0" indent="0">
               <a:spcAft>
                 <a:spcPts val="400"/>
               </a:spcAft>
@@ -5134,7 +4870,7 @@
             <a:endParaRPr lang="en-US" sz="1600" dirty="0"/>
           </a:p>
           <a:p>
-            <a:pPr indent="0" marL="0">
+            <a:pPr marL="0" indent="0">
               <a:spcAft>
                 <a:spcPts val="400"/>
               </a:spcAft>
@@ -5176,7 +4912,7 @@
           <a:bodyPr wrap="square" rtlCol="0" anchor="ctr"/>
           <a:lstStyle/>
           <a:p>
-            <a:pPr algn="l" indent="0" marL="0">
+            <a:pPr marL="0" indent="0" algn="l">
               <a:buNone/>
             </a:pPr>
             <a:r>
@@ -5215,7 +4951,7 @@
           <a:bodyPr wrap="square" rtlCol="0" anchor="ctr"/>
           <a:lstStyle/>
           <a:p>
-            <a:pPr algn="r" indent="0" marL="0">
+            <a:pPr marL="0" indent="0" algn="r">
               <a:buNone/>
             </a:pPr>
             <a:r>
@@ -5249,6 +4985,7 @@
         <a:solidFill>
           <a:srgbClr val="FFFFFF"/>
         </a:solidFill>
+        <a:effectLst/>
       </p:bgPr>
     </p:bg>
     <p:spTree>
@@ -5286,7 +5023,7 @@
           <a:bodyPr wrap="square" lIns="0" tIns="0" rIns="0" bIns="0" rtlCol="0" anchor="ctr"/>
           <a:lstStyle/>
           <a:p>
-            <a:pPr indent="0" marL="0">
+            <a:pPr marL="0" indent="0">
               <a:buNone/>
             </a:pPr>
             <a:r>
@@ -5328,6 +5065,13 @@
             <a:prstDash val="solid"/>
           </a:ln>
         </p:spPr>
+        <p:txBody>
+          <a:bodyPr/>
+          <a:lstStyle/>
+          <a:p>
+            <a:endParaRPr lang="de-DE"/>
+          </a:p>
+        </p:txBody>
       </p:sp>
       <p:sp>
         <p:nvSpPr>
@@ -5350,7 +5094,7 @@
           <a:bodyPr wrap="square" lIns="0" tIns="0" rIns="0" bIns="0" rtlCol="0" anchor="ctr"/>
           <a:lstStyle/>
           <a:p>
-            <a:pPr indent="0" marL="0">
+            <a:pPr marL="0" indent="0">
               <a:buNone/>
             </a:pPr>
             <a:r>
@@ -5389,7 +5133,7 @@
           <a:bodyPr wrap="square" lIns="0" tIns="0" rIns="0" bIns="0" rtlCol="0" anchor="t"/>
           <a:lstStyle/>
           <a:p>
-            <a:pPr indent="0" marL="0">
+            <a:pPr marL="0" indent="0">
               <a:spcAft>
                 <a:spcPts val="400"/>
               </a:spcAft>
@@ -5409,7 +5153,7 @@
             <a:endParaRPr lang="en-US" sz="1600" dirty="0"/>
           </a:p>
           <a:p>
-            <a:pPr indent="0" marL="0">
+            <a:pPr marL="0" indent="0">
               <a:spcAft>
                 <a:spcPts val="400"/>
               </a:spcAft>
@@ -5429,7 +5173,7 @@
             <a:endParaRPr lang="en-US" sz="1600" dirty="0"/>
           </a:p>
           <a:p>
-            <a:pPr indent="0" marL="0">
+            <a:pPr marL="0" indent="0">
               <a:spcAft>
                 <a:spcPts val="400"/>
               </a:spcAft>
@@ -5449,7 +5193,7 @@
             <a:endParaRPr lang="en-US" sz="1600" dirty="0"/>
           </a:p>
           <a:p>
-            <a:pPr indent="0" marL="0">
+            <a:pPr marL="0" indent="0">
               <a:spcAft>
                 <a:spcPts val="400"/>
               </a:spcAft>
@@ -5469,7 +5213,7 @@
             <a:endParaRPr lang="en-US" sz="1600" dirty="0"/>
           </a:p>
           <a:p>
-            <a:pPr indent="0" marL="0">
+            <a:pPr marL="0" indent="0">
               <a:spcAft>
                 <a:spcPts val="400"/>
               </a:spcAft>
@@ -5489,7 +5233,7 @@
             <a:endParaRPr lang="en-US" sz="1600" dirty="0"/>
           </a:p>
           <a:p>
-            <a:pPr indent="0" marL="0">
+            <a:pPr marL="0" indent="0">
               <a:spcAft>
                 <a:spcPts val="400"/>
               </a:spcAft>
@@ -5509,7 +5253,7 @@
             <a:endParaRPr lang="en-US" sz="1600" dirty="0"/>
           </a:p>
           <a:p>
-            <a:pPr indent="0" marL="0">
+            <a:pPr marL="0" indent="0">
               <a:spcAft>
                 <a:spcPts val="400"/>
               </a:spcAft>
@@ -5592,7 +5336,7 @@
             <a:endParaRPr lang="en-US" sz="1600" dirty="0"/>
           </a:p>
           <a:p>
-            <a:pPr indent="0" marL="0">
+            <a:pPr marL="0" indent="0">
               <a:spcAft>
                 <a:spcPts val="400"/>
               </a:spcAft>
@@ -5612,7 +5356,7 @@
             <a:endParaRPr lang="en-US" sz="1600" dirty="0"/>
           </a:p>
           <a:p>
-            <a:pPr indent="0" marL="0">
+            <a:pPr marL="0" indent="0">
               <a:spcAft>
                 <a:spcPts val="400"/>
               </a:spcAft>
@@ -5654,7 +5398,7 @@
           <a:bodyPr wrap="square" rtlCol="0" anchor="ctr"/>
           <a:lstStyle/>
           <a:p>
-            <a:pPr algn="l" indent="0" marL="0">
+            <a:pPr marL="0" indent="0" algn="l">
               <a:buNone/>
             </a:pPr>
             <a:r>
@@ -5693,7 +5437,7 @@
           <a:bodyPr wrap="square" rtlCol="0" anchor="ctr"/>
           <a:lstStyle/>
           <a:p>
-            <a:pPr algn="r" indent="0" marL="0">
+            <a:pPr marL="0" indent="0" algn="r">
               <a:buNone/>
             </a:pPr>
             <a:r>
@@ -5727,6 +5471,7 @@
         <a:solidFill>
           <a:srgbClr val="F6F4EF"/>
         </a:solidFill>
+        <a:effectLst/>
       </p:bgPr>
     </p:bg>
     <p:spTree>
@@ -5764,7 +5509,7 @@
           <a:bodyPr wrap="square" lIns="0" tIns="0" rIns="0" bIns="0" rtlCol="0" anchor="ctr"/>
           <a:lstStyle/>
           <a:p>
-            <a:pPr indent="0" marL="0">
+            <a:pPr marL="0" indent="0">
               <a:buNone/>
             </a:pPr>
             <a:r>
@@ -5806,6 +5551,13 @@
             <a:prstDash val="solid"/>
           </a:ln>
         </p:spPr>
+        <p:txBody>
+          <a:bodyPr/>
+          <a:lstStyle/>
+          <a:p>
+            <a:endParaRPr lang="de-DE"/>
+          </a:p>
+        </p:txBody>
       </p:sp>
       <p:sp>
         <p:nvSpPr>
@@ -5828,7 +5580,7 @@
           <a:bodyPr wrap="square" lIns="0" tIns="0" rIns="0" bIns="0" rtlCol="0" anchor="ctr"/>
           <a:lstStyle/>
           <a:p>
-            <a:pPr indent="0" marL="0">
+            <a:pPr marL="0" indent="0">
               <a:buNone/>
             </a:pPr>
             <a:r>
@@ -5867,7 +5619,7 @@
           <a:bodyPr wrap="square" lIns="0" tIns="0" rIns="0" bIns="0" rtlCol="0" anchor="t"/>
           <a:lstStyle/>
           <a:p>
-            <a:pPr indent="0" marL="0">
+            <a:pPr marL="0" indent="0">
               <a:spcAft>
                 <a:spcPts val="400"/>
               </a:spcAft>
@@ -5887,7 +5639,7 @@
             <a:endParaRPr lang="en-US" sz="1600" dirty="0"/>
           </a:p>
           <a:p>
-            <a:pPr indent="0" marL="0">
+            <a:pPr marL="0" indent="0">
               <a:spcAft>
                 <a:spcPts val="400"/>
               </a:spcAft>
@@ -5910,7 +5662,7 @@
             <a:endParaRPr lang="en-US" sz="1600" dirty="0"/>
           </a:p>
           <a:p>
-            <a:pPr indent="0" marL="0">
+            <a:pPr marL="0" indent="0">
               <a:spcAft>
                 <a:spcPts val="400"/>
               </a:spcAft>
@@ -5930,7 +5682,7 @@
             <a:endParaRPr lang="en-US" sz="1600" dirty="0"/>
           </a:p>
           <a:p>
-            <a:pPr indent="0" marL="0">
+            <a:pPr marL="0" indent="0">
               <a:spcAft>
                 <a:spcPts val="400"/>
               </a:spcAft>
@@ -5950,7 +5702,7 @@
             <a:endParaRPr lang="en-US" sz="1600" dirty="0"/>
           </a:p>
           <a:p>
-            <a:pPr indent="0" marL="0">
+            <a:pPr marL="0" indent="0">
               <a:spcAft>
                 <a:spcPts val="400"/>
               </a:spcAft>
@@ -5970,7 +5722,7 @@
             <a:endParaRPr lang="en-US" sz="1600" dirty="0"/>
           </a:p>
           <a:p>
-            <a:pPr indent="0" marL="0">
+            <a:pPr marL="0" indent="0">
               <a:spcAft>
                 <a:spcPts val="400"/>
               </a:spcAft>
@@ -5990,7 +5742,7 @@
             <a:endParaRPr lang="en-US" sz="1600" dirty="0"/>
           </a:p>
           <a:p>
-            <a:pPr indent="0" marL="0">
+            <a:pPr marL="0" indent="0">
               <a:spcAft>
                 <a:spcPts val="400"/>
               </a:spcAft>
@@ -6010,7 +5762,7 @@
             <a:endParaRPr lang="en-US" sz="1600" dirty="0"/>
           </a:p>
           <a:p>
-            <a:pPr indent="0" marL="0">
+            <a:pPr marL="0" indent="0">
               <a:spcAft>
                 <a:spcPts val="400"/>
               </a:spcAft>
@@ -6030,7 +5782,7 @@
             <a:endParaRPr lang="en-US" sz="1600" dirty="0"/>
           </a:p>
           <a:p>
-            <a:pPr indent="0" marL="0">
+            <a:pPr marL="0" indent="0">
               <a:spcAft>
                 <a:spcPts val="400"/>
               </a:spcAft>
@@ -6050,7 +5802,7 @@
             <a:endParaRPr lang="en-US" sz="1600" dirty="0"/>
           </a:p>
           <a:p>
-            <a:pPr indent="0" marL="0">
+            <a:pPr marL="0" indent="0">
               <a:spcAft>
                 <a:spcPts val="400"/>
               </a:spcAft>
@@ -6070,7 +5822,7 @@
             <a:endParaRPr lang="en-US" sz="1600" dirty="0"/>
           </a:p>
           <a:p>
-            <a:pPr indent="0" marL="0">
+            <a:pPr marL="0" indent="0">
               <a:spcAft>
                 <a:spcPts val="400"/>
               </a:spcAft>
@@ -6112,7 +5864,7 @@
           <a:bodyPr wrap="square" rtlCol="0" anchor="ctr"/>
           <a:lstStyle/>
           <a:p>
-            <a:pPr algn="l" indent="0" marL="0">
+            <a:pPr marL="0" indent="0" algn="l">
               <a:buNone/>
             </a:pPr>
             <a:r>
@@ -6151,7 +5903,7 @@
           <a:bodyPr wrap="square" rtlCol="0" anchor="ctr"/>
           <a:lstStyle/>
           <a:p>
-            <a:pPr algn="r" indent="0" marL="0">
+            <a:pPr marL="0" indent="0" algn="r">
               <a:buNone/>
             </a:pPr>
             <a:r>
@@ -6185,6 +5937,7 @@
         <a:solidFill>
           <a:srgbClr val="FFFFFF"/>
         </a:solidFill>
+        <a:effectLst/>
       </p:bgPr>
     </p:bg>
     <p:spTree>
@@ -6222,7 +5975,7 @@
           <a:bodyPr wrap="square" lIns="0" tIns="0" rIns="0" bIns="0" rtlCol="0" anchor="ctr"/>
           <a:lstStyle/>
           <a:p>
-            <a:pPr indent="0" marL="0">
+            <a:pPr marL="0" indent="0">
               <a:buNone/>
             </a:pPr>
             <a:r>
@@ -6264,6 +6017,13 @@
             <a:prstDash val="solid"/>
           </a:ln>
         </p:spPr>
+        <p:txBody>
+          <a:bodyPr/>
+          <a:lstStyle/>
+          <a:p>
+            <a:endParaRPr lang="de-DE"/>
+          </a:p>
+        </p:txBody>
       </p:sp>
       <p:sp>
         <p:nvSpPr>
@@ -6286,7 +6046,7 @@
           <a:bodyPr wrap="square" lIns="0" tIns="0" rIns="0" bIns="0" rtlCol="0" anchor="ctr"/>
           <a:lstStyle/>
           <a:p>
-            <a:pPr indent="0" marL="0">
+            <a:pPr marL="0" indent="0">
               <a:buNone/>
             </a:pPr>
             <a:r>
@@ -6325,7 +6085,7 @@
           <a:bodyPr wrap="square" lIns="0" tIns="0" rIns="0" bIns="0" rtlCol="0" anchor="t"/>
           <a:lstStyle/>
           <a:p>
-            <a:pPr indent="0" marL="0">
+            <a:pPr marL="0" indent="0">
               <a:spcAft>
                 <a:spcPts val="400"/>
               </a:spcAft>
@@ -6345,7 +6105,7 @@
             <a:endParaRPr lang="en-US" sz="1600" dirty="0"/>
           </a:p>
           <a:p>
-            <a:pPr indent="0" marL="0">
+            <a:pPr marL="0" indent="0">
               <a:spcAft>
                 <a:spcPts val="400"/>
               </a:spcAft>
@@ -6365,7 +6125,7 @@
             <a:endParaRPr lang="en-US" sz="1600" dirty="0"/>
           </a:p>
           <a:p>
-            <a:pPr indent="0" marL="0">
+            <a:pPr marL="0" indent="0">
               <a:spcAft>
                 <a:spcPts val="400"/>
               </a:spcAft>
@@ -6448,7 +6208,7 @@
             <a:endParaRPr lang="en-US" sz="1600" dirty="0"/>
           </a:p>
           <a:p>
-            <a:pPr indent="0" marL="0">
+            <a:pPr marL="0" indent="0">
               <a:spcAft>
                 <a:spcPts val="400"/>
               </a:spcAft>
@@ -6468,7 +6228,7 @@
             <a:endParaRPr lang="en-US" sz="1600" dirty="0"/>
           </a:p>
           <a:p>
-            <a:pPr indent="0" marL="0">
+            <a:pPr marL="0" indent="0">
               <a:spcAft>
                 <a:spcPts val="400"/>
               </a:spcAft>
@@ -6488,7 +6248,7 @@
             <a:endParaRPr lang="en-US" sz="1600" dirty="0"/>
           </a:p>
           <a:p>
-            <a:pPr indent="0" marL="0">
+            <a:pPr marL="0" indent="0">
               <a:spcAft>
                 <a:spcPts val="400"/>
               </a:spcAft>
@@ -6530,7 +6290,7 @@
           <a:bodyPr wrap="square" rtlCol="0" anchor="ctr"/>
           <a:lstStyle/>
           <a:p>
-            <a:pPr algn="l" indent="0" marL="0">
+            <a:pPr marL="0" indent="0" algn="l">
               <a:buNone/>
             </a:pPr>
             <a:r>
@@ -6569,7 +6329,7 @@
           <a:bodyPr wrap="square" rtlCol="0" anchor="ctr"/>
           <a:lstStyle/>
           <a:p>
-            <a:pPr algn="r" indent="0" marL="0">
+            <a:pPr marL="0" indent="0" algn="r">
               <a:buNone/>
             </a:pPr>
             <a:r>
@@ -6603,6 +6363,7 @@
         <a:solidFill>
           <a:srgbClr val="FFFFFF"/>
         </a:solidFill>
+        <a:effectLst/>
       </p:bgPr>
     </p:bg>
     <p:spTree>
@@ -6640,7 +6401,7 @@
           <a:bodyPr wrap="square" lIns="0" tIns="0" rIns="0" bIns="0" rtlCol="0" anchor="ctr"/>
           <a:lstStyle/>
           <a:p>
-            <a:pPr indent="0" marL="0">
+            <a:pPr marL="0" indent="0">
               <a:buNone/>
             </a:pPr>
             <a:r>
@@ -6682,6 +6443,13 @@
             <a:prstDash val="solid"/>
           </a:ln>
         </p:spPr>
+        <p:txBody>
+          <a:bodyPr/>
+          <a:lstStyle/>
+          <a:p>
+            <a:endParaRPr lang="de-DE"/>
+          </a:p>
+        </p:txBody>
       </p:sp>
       <p:sp>
         <p:nvSpPr>
@@ -6704,7 +6472,7 @@
           <a:bodyPr wrap="square" lIns="0" tIns="0" rIns="0" bIns="0" rtlCol="0" anchor="ctr"/>
           <a:lstStyle/>
           <a:p>
-            <a:pPr indent="0" marL="0">
+            <a:pPr marL="0" indent="0">
               <a:buNone/>
             </a:pPr>
             <a:r>
@@ -6743,7 +6511,7 @@
           <a:bodyPr wrap="square" lIns="0" tIns="0" rIns="0" bIns="0" rtlCol="0" anchor="t"/>
           <a:lstStyle/>
           <a:p>
-            <a:pPr indent="0" marL="0">
+            <a:pPr marL="0" indent="0">
               <a:spcAft>
                 <a:spcPts val="400"/>
               </a:spcAft>
@@ -6805,7 +6573,7 @@
             <a:endParaRPr lang="en-US" sz="1600" dirty="0"/>
           </a:p>
           <a:p>
-            <a:pPr indent="0" marL="0">
+            <a:pPr marL="0" indent="0">
               <a:spcAft>
                 <a:spcPts val="400"/>
               </a:spcAft>
@@ -6825,7 +6593,7 @@
             <a:endParaRPr lang="en-US" sz="1600" dirty="0"/>
           </a:p>
           <a:p>
-            <a:pPr indent="0" marL="0">
+            <a:pPr marL="0" indent="0">
               <a:spcAft>
                 <a:spcPts val="400"/>
               </a:spcAft>
@@ -6908,7 +6676,7 @@
             <a:endParaRPr lang="en-US" sz="1600" dirty="0"/>
           </a:p>
           <a:p>
-            <a:pPr indent="0" marL="0">
+            <a:pPr marL="0" indent="0">
               <a:spcAft>
                 <a:spcPts val="400"/>
               </a:spcAft>
@@ -6928,7 +6696,7 @@
             <a:endParaRPr lang="en-US" sz="1600" dirty="0"/>
           </a:p>
           <a:p>
-            <a:pPr indent="0" marL="0">
+            <a:pPr marL="0" indent="0">
               <a:spcAft>
                 <a:spcPts val="400"/>
               </a:spcAft>
@@ -6948,7 +6716,7 @@
             <a:endParaRPr lang="en-US" sz="1600" dirty="0"/>
           </a:p>
           <a:p>
-            <a:pPr indent="0" marL="0">
+            <a:pPr marL="0" indent="0">
               <a:spcAft>
                 <a:spcPts val="400"/>
               </a:spcAft>
@@ -6971,7 +6739,7 @@
             <a:endParaRPr lang="en-US" sz="1600" dirty="0"/>
           </a:p>
           <a:p>
-            <a:pPr indent="0" marL="0">
+            <a:pPr marL="0" indent="0">
               <a:spcAft>
                 <a:spcPts val="400"/>
               </a:spcAft>
@@ -6991,7 +6759,7 @@
             <a:endParaRPr lang="en-US" sz="1600" dirty="0"/>
           </a:p>
           <a:p>
-            <a:pPr indent="0" marL="0">
+            <a:pPr marL="0" indent="0">
               <a:spcAft>
                 <a:spcPts val="400"/>
               </a:spcAft>
@@ -7011,7 +6779,7 @@
             <a:endParaRPr lang="en-US" sz="1600" dirty="0"/>
           </a:p>
           <a:p>
-            <a:pPr indent="0" marL="0">
+            <a:pPr marL="0" indent="0">
               <a:spcAft>
                 <a:spcPts val="400"/>
               </a:spcAft>
@@ -7031,7 +6799,7 @@
             <a:endParaRPr lang="en-US" sz="1600" dirty="0"/>
           </a:p>
           <a:p>
-            <a:pPr indent="0" marL="0">
+            <a:pPr marL="0" indent="0">
               <a:spcAft>
                 <a:spcPts val="400"/>
               </a:spcAft>
@@ -7073,7 +6841,7 @@
           <a:bodyPr wrap="square" rtlCol="0" anchor="ctr"/>
           <a:lstStyle/>
           <a:p>
-            <a:pPr algn="l" indent="0" marL="0">
+            <a:pPr marL="0" indent="0" algn="l">
               <a:buNone/>
             </a:pPr>
             <a:r>
@@ -7112,7 +6880,7 @@
           <a:bodyPr wrap="square" rtlCol="0" anchor="ctr"/>
           <a:lstStyle/>
           <a:p>
-            <a:pPr algn="r" indent="0" marL="0">
+            <a:pPr marL="0" indent="0" algn="r">
               <a:buNone/>
             </a:pPr>
             <a:r>
@@ -7146,6 +6914,7 @@
         <a:solidFill>
           <a:srgbClr val="FFFFFF"/>
         </a:solidFill>
+        <a:effectLst/>
       </p:bgPr>
     </p:bg>
     <p:spTree>
@@ -7183,7 +6952,7 @@
           <a:bodyPr wrap="square" lIns="0" tIns="0" rIns="0" bIns="0" rtlCol="0" anchor="ctr"/>
           <a:lstStyle/>
           <a:p>
-            <a:pPr indent="0" marL="0">
+            <a:pPr marL="0" indent="0">
               <a:buNone/>
             </a:pPr>
             <a:r>
@@ -7225,6 +6994,13 @@
             <a:prstDash val="solid"/>
           </a:ln>
         </p:spPr>
+        <p:txBody>
+          <a:bodyPr/>
+          <a:lstStyle/>
+          <a:p>
+            <a:endParaRPr lang="de-DE"/>
+          </a:p>
+        </p:txBody>
       </p:sp>
       <p:sp>
         <p:nvSpPr>
@@ -7247,7 +7023,7 @@
           <a:bodyPr wrap="square" lIns="0" tIns="0" rIns="0" bIns="0" rtlCol="0" anchor="ctr"/>
           <a:lstStyle/>
           <a:p>
-            <a:pPr indent="0" marL="0">
+            <a:pPr marL="0" indent="0">
               <a:buNone/>
             </a:pPr>
             <a:r>
@@ -7286,7 +7062,7 @@
           <a:bodyPr wrap="square" lIns="0" tIns="0" rIns="0" bIns="0" rtlCol="0" anchor="t"/>
           <a:lstStyle/>
           <a:p>
-            <a:pPr indent="0" marL="0">
+            <a:pPr marL="0" indent="0">
               <a:spcAft>
                 <a:spcPts val="400"/>
               </a:spcAft>
@@ -7306,7 +7082,7 @@
             <a:endParaRPr lang="en-US" sz="1600" dirty="0"/>
           </a:p>
           <a:p>
-            <a:pPr indent="0" marL="0">
+            <a:pPr marL="0" indent="0">
               <a:spcAft>
                 <a:spcPts val="400"/>
               </a:spcAft>
@@ -7326,7 +7102,7 @@
             <a:endParaRPr lang="en-US" sz="1600" dirty="0"/>
           </a:p>
           <a:p>
-            <a:pPr indent="0" marL="0">
+            <a:pPr marL="0" indent="0">
               <a:spcAft>
                 <a:spcPts val="400"/>
               </a:spcAft>
@@ -7346,7 +7122,7 @@
             <a:endParaRPr lang="en-US" sz="1600" dirty="0"/>
           </a:p>
           <a:p>
-            <a:pPr indent="0" marL="0">
+            <a:pPr marL="0" indent="0">
               <a:spcAft>
                 <a:spcPts val="400"/>
               </a:spcAft>
@@ -7429,7 +7205,7 @@
             <a:endParaRPr lang="en-US" sz="1600" dirty="0"/>
           </a:p>
           <a:p>
-            <a:pPr indent="0" marL="0">
+            <a:pPr marL="0" indent="0">
               <a:spcAft>
                 <a:spcPts val="400"/>
               </a:spcAft>
@@ -7449,7 +7225,7 @@
             <a:endParaRPr lang="en-US" sz="1600" dirty="0"/>
           </a:p>
           <a:p>
-            <a:pPr indent="0" marL="0">
+            <a:pPr marL="0" indent="0">
               <a:spcAft>
                 <a:spcPts val="400"/>
               </a:spcAft>
@@ -7469,7 +7245,7 @@
             <a:endParaRPr lang="en-US" sz="1600" dirty="0"/>
           </a:p>
           <a:p>
-            <a:pPr indent="0" marL="0">
+            <a:pPr marL="0" indent="0">
               <a:spcAft>
                 <a:spcPts val="400"/>
               </a:spcAft>
@@ -7492,7 +7268,7 @@
             <a:endParaRPr lang="en-US" sz="1600" dirty="0"/>
           </a:p>
           <a:p>
-            <a:pPr indent="0" marL="0">
+            <a:pPr marL="0" indent="0">
               <a:spcAft>
                 <a:spcPts val="400"/>
               </a:spcAft>
@@ -7515,7 +7291,7 @@
             <a:endParaRPr lang="en-US" sz="1600" dirty="0"/>
           </a:p>
           <a:p>
-            <a:pPr indent="0" marL="0">
+            <a:pPr marL="0" indent="0">
               <a:spcAft>
                 <a:spcPts val="400"/>
               </a:spcAft>
@@ -7538,7 +7314,7 @@
             <a:endParaRPr lang="en-US" sz="1600" dirty="0"/>
           </a:p>
           <a:p>
-            <a:pPr indent="0" marL="0">
+            <a:pPr marL="0" indent="0">
               <a:spcAft>
                 <a:spcPts val="400"/>
               </a:spcAft>
@@ -7561,7 +7337,7 @@
             <a:endParaRPr lang="en-US" sz="1600" dirty="0"/>
           </a:p>
           <a:p>
-            <a:pPr indent="0" marL="0">
+            <a:pPr marL="0" indent="0">
               <a:spcAft>
                 <a:spcPts val="400"/>
               </a:spcAft>
@@ -7584,7 +7360,7 @@
             <a:endParaRPr lang="en-US" sz="1600" dirty="0"/>
           </a:p>
           <a:p>
-            <a:pPr indent="0" marL="0">
+            <a:pPr marL="0" indent="0">
               <a:spcAft>
                 <a:spcPts val="400"/>
               </a:spcAft>
@@ -7604,7 +7380,7 @@
             <a:endParaRPr lang="en-US" sz="1600" dirty="0"/>
           </a:p>
           <a:p>
-            <a:pPr indent="0" marL="0">
+            <a:pPr marL="0" indent="0">
               <a:spcAft>
                 <a:spcPts val="400"/>
               </a:spcAft>
@@ -7646,7 +7422,7 @@
           <a:bodyPr wrap="square" rtlCol="0" anchor="ctr"/>
           <a:lstStyle/>
           <a:p>
-            <a:pPr algn="l" indent="0" marL="0">
+            <a:pPr marL="0" indent="0" algn="l">
               <a:buNone/>
             </a:pPr>
             <a:r>
@@ -7685,7 +7461,7 @@
           <a:bodyPr wrap="square" rtlCol="0" anchor="ctr"/>
           <a:lstStyle/>
           <a:p>
-            <a:pPr algn="r" indent="0" marL="0">
+            <a:pPr marL="0" indent="0" algn="r">
               <a:buNone/>
             </a:pPr>
             <a:r>
@@ -7719,6 +7495,7 @@
         <a:solidFill>
           <a:srgbClr val="FFFFFF"/>
         </a:solidFill>
+        <a:effectLst/>
       </p:bgPr>
     </p:bg>
     <p:spTree>
@@ -7756,7 +7533,7 @@
           <a:bodyPr wrap="square" lIns="0" tIns="0" rIns="0" bIns="0" rtlCol="0" anchor="ctr"/>
           <a:lstStyle/>
           <a:p>
-            <a:pPr indent="0" marL="0">
+            <a:pPr marL="0" indent="0">
               <a:buNone/>
             </a:pPr>
             <a:r>
@@ -7798,6 +7575,13 @@
             <a:prstDash val="solid"/>
           </a:ln>
         </p:spPr>
+        <p:txBody>
+          <a:bodyPr/>
+          <a:lstStyle/>
+          <a:p>
+            <a:endParaRPr lang="de-DE"/>
+          </a:p>
+        </p:txBody>
       </p:sp>
       <p:sp>
         <p:nvSpPr>
@@ -7820,7 +7604,7 @@
           <a:bodyPr wrap="square" lIns="0" tIns="0" rIns="0" bIns="0" rtlCol="0" anchor="ctr"/>
           <a:lstStyle/>
           <a:p>
-            <a:pPr indent="0" marL="0">
+            <a:pPr marL="0" indent="0">
               <a:buNone/>
             </a:pPr>
             <a:r>
@@ -7859,7 +7643,7 @@
           <a:bodyPr wrap="square" lIns="0" tIns="0" rIns="0" bIns="0" rtlCol="0" anchor="t"/>
           <a:lstStyle/>
           <a:p>
-            <a:pPr indent="0" marL="0">
+            <a:pPr marL="0" indent="0">
               <a:spcAft>
                 <a:spcPts val="400"/>
               </a:spcAft>
@@ -7879,7 +7663,7 @@
             <a:endParaRPr lang="en-US" sz="1600" dirty="0"/>
           </a:p>
           <a:p>
-            <a:pPr indent="0" marL="0">
+            <a:pPr marL="0" indent="0">
               <a:spcAft>
                 <a:spcPts val="400"/>
               </a:spcAft>
@@ -7899,7 +7683,7 @@
             <a:endParaRPr lang="en-US" sz="1600" dirty="0"/>
           </a:p>
           <a:p>
-            <a:pPr indent="0" marL="0">
+            <a:pPr marL="0" indent="0">
               <a:spcAft>
                 <a:spcPts val="400"/>
               </a:spcAft>
@@ -7919,7 +7703,7 @@
             <a:endParaRPr lang="en-US" sz="1600" dirty="0"/>
           </a:p>
           <a:p>
-            <a:pPr indent="0" marL="0">
+            <a:pPr marL="0" indent="0">
               <a:spcAft>
                 <a:spcPts val="400"/>
               </a:spcAft>
@@ -7939,7 +7723,7 @@
             <a:endParaRPr lang="en-US" sz="1600" dirty="0"/>
           </a:p>
           <a:p>
-            <a:pPr indent="0" marL="0">
+            <a:pPr marL="0" indent="0">
               <a:spcAft>
                 <a:spcPts val="400"/>
               </a:spcAft>
@@ -7959,7 +7743,7 @@
             <a:endParaRPr lang="en-US" sz="1600" dirty="0"/>
           </a:p>
           <a:p>
-            <a:pPr indent="0" marL="0">
+            <a:pPr marL="0" indent="0">
               <a:spcAft>
                 <a:spcPts val="400"/>
               </a:spcAft>
@@ -7979,7 +7763,7 @@
             <a:endParaRPr lang="en-US" sz="1600" dirty="0"/>
           </a:p>
           <a:p>
-            <a:pPr indent="0" marL="0">
+            <a:pPr marL="0" indent="0">
               <a:spcAft>
                 <a:spcPts val="400"/>
               </a:spcAft>
@@ -8062,7 +7846,7 @@
             <a:endParaRPr lang="en-US" sz="1600" dirty="0"/>
           </a:p>
           <a:p>
-            <a:pPr indent="0" marL="0">
+            <a:pPr marL="0" indent="0">
               <a:spcAft>
                 <a:spcPts val="400"/>
               </a:spcAft>
@@ -8082,7 +7866,7 @@
             <a:endParaRPr lang="en-US" sz="1600" dirty="0"/>
           </a:p>
           <a:p>
-            <a:pPr indent="0" marL="0">
+            <a:pPr marL="0" indent="0">
               <a:spcAft>
                 <a:spcPts val="400"/>
               </a:spcAft>
@@ -8124,7 +7908,7 @@
           <a:bodyPr wrap="square" rtlCol="0" anchor="ctr"/>
           <a:lstStyle/>
           <a:p>
-            <a:pPr algn="l" indent="0" marL="0">
+            <a:pPr marL="0" indent="0" algn="l">
               <a:buNone/>
             </a:pPr>
             <a:r>
@@ -8163,7 +7947,7 @@
           <a:bodyPr wrap="square" rtlCol="0" anchor="ctr"/>
           <a:lstStyle/>
           <a:p>
-            <a:pPr algn="r" indent="0" marL="0">
+            <a:pPr marL="0" indent="0" algn="r">
               <a:buNone/>
             </a:pPr>
             <a:r>
@@ -8197,6 +7981,7 @@
         <a:solidFill>
           <a:srgbClr val="FFFFFF"/>
         </a:solidFill>
+        <a:effectLst/>
       </p:bgPr>
     </p:bg>
     <p:spTree>
@@ -8234,7 +8019,7 @@
           <a:bodyPr wrap="square" lIns="0" tIns="0" rIns="0" bIns="0" rtlCol="0" anchor="ctr"/>
           <a:lstStyle/>
           <a:p>
-            <a:pPr indent="0" marL="0">
+            <a:pPr marL="0" indent="0">
               <a:buNone/>
             </a:pPr>
             <a:r>
@@ -8276,6 +8061,13 @@
             <a:prstDash val="solid"/>
           </a:ln>
         </p:spPr>
+        <p:txBody>
+          <a:bodyPr/>
+          <a:lstStyle/>
+          <a:p>
+            <a:endParaRPr lang="de-DE"/>
+          </a:p>
+        </p:txBody>
       </p:sp>
       <p:sp>
         <p:nvSpPr>
@@ -8298,7 +8090,7 @@
           <a:bodyPr wrap="square" lIns="0" tIns="0" rIns="0" bIns="0" rtlCol="0" anchor="ctr"/>
           <a:lstStyle/>
           <a:p>
-            <a:pPr indent="0" marL="0">
+            <a:pPr marL="0" indent="0">
               <a:buNone/>
             </a:pPr>
             <a:r>
@@ -8337,7 +8129,7 @@
           <a:bodyPr wrap="square" lIns="0" tIns="0" rIns="0" bIns="0" rtlCol="0" anchor="t"/>
           <a:lstStyle/>
           <a:p>
-            <a:pPr indent="0" marL="0">
+            <a:pPr marL="0" indent="0">
               <a:spcAft>
                 <a:spcPts val="400"/>
               </a:spcAft>
@@ -8420,7 +8212,7 @@
             <a:endParaRPr lang="en-US" sz="1600" dirty="0"/>
           </a:p>
           <a:p>
-            <a:pPr indent="0" marL="0">
+            <a:pPr marL="0" indent="0">
               <a:spcAft>
                 <a:spcPts val="400"/>
               </a:spcAft>
@@ -8440,7 +8232,7 @@
             <a:endParaRPr lang="en-US" sz="1600" dirty="0"/>
           </a:p>
           <a:p>
-            <a:pPr indent="0" marL="0">
+            <a:pPr marL="0" indent="0">
               <a:spcAft>
                 <a:spcPts val="400"/>
               </a:spcAft>
@@ -8460,7 +8252,7 @@
             <a:endParaRPr lang="en-US" sz="1600" dirty="0"/>
           </a:p>
           <a:p>
-            <a:pPr indent="0" marL="0">
+            <a:pPr marL="0" indent="0">
               <a:spcAft>
                 <a:spcPts val="400"/>
               </a:spcAft>
@@ -8480,7 +8272,7 @@
             <a:endParaRPr lang="en-US" sz="1600" dirty="0"/>
           </a:p>
           <a:p>
-            <a:pPr indent="0" marL="0">
+            <a:pPr marL="0" indent="0">
               <a:spcAft>
                 <a:spcPts val="400"/>
               </a:spcAft>
@@ -8500,7 +8292,7 @@
             <a:endParaRPr lang="en-US" sz="1600" dirty="0"/>
           </a:p>
           <a:p>
-            <a:pPr indent="0" marL="0">
+            <a:pPr marL="0" indent="0">
               <a:spcAft>
                 <a:spcPts val="400"/>
               </a:spcAft>
@@ -8523,7 +8315,7 @@
             <a:endParaRPr lang="en-US" sz="1600" dirty="0"/>
           </a:p>
           <a:p>
-            <a:pPr indent="0" marL="0">
+            <a:pPr marL="0" indent="0">
               <a:spcAft>
                 <a:spcPts val="400"/>
               </a:spcAft>
@@ -8546,7 +8338,7 @@
             <a:endParaRPr lang="en-US" sz="1600" dirty="0"/>
           </a:p>
           <a:p>
-            <a:pPr indent="0" marL="0">
+            <a:pPr marL="0" indent="0">
               <a:spcAft>
                 <a:spcPts val="400"/>
               </a:spcAft>
@@ -8569,7 +8361,7 @@
             <a:endParaRPr lang="en-US" sz="1600" dirty="0"/>
           </a:p>
           <a:p>
-            <a:pPr indent="0" marL="0">
+            <a:pPr marL="0" indent="0">
               <a:spcAft>
                 <a:spcPts val="400"/>
               </a:spcAft>
@@ -8592,7 +8384,7 @@
             <a:endParaRPr lang="en-US" sz="1600" dirty="0"/>
           </a:p>
           <a:p>
-            <a:pPr indent="0" marL="0">
+            <a:pPr marL="0" indent="0">
               <a:spcAft>
                 <a:spcPts val="400"/>
               </a:spcAft>
@@ -8615,7 +8407,7 @@
             <a:endParaRPr lang="en-US" sz="1600" dirty="0"/>
           </a:p>
           <a:p>
-            <a:pPr indent="0" marL="0">
+            <a:pPr marL="0" indent="0">
               <a:spcAft>
                 <a:spcPts val="400"/>
               </a:spcAft>
@@ -8638,7 +8430,7 @@
             <a:endParaRPr lang="en-US" sz="1600" dirty="0"/>
           </a:p>
           <a:p>
-            <a:pPr indent="0" marL="0">
+            <a:pPr marL="0" indent="0">
               <a:spcAft>
                 <a:spcPts val="400"/>
               </a:spcAft>
@@ -8661,7 +8453,7 @@
             <a:endParaRPr lang="en-US" sz="1600" dirty="0"/>
           </a:p>
           <a:p>
-            <a:pPr indent="0" marL="0">
+            <a:pPr marL="0" indent="0">
               <a:spcAft>
                 <a:spcPts val="400"/>
               </a:spcAft>
@@ -8681,7 +8473,7 @@
             <a:endParaRPr lang="en-US" sz="1600" dirty="0"/>
           </a:p>
           <a:p>
-            <a:pPr indent="0" marL="0">
+            <a:pPr marL="0" indent="0">
               <a:spcAft>
                 <a:spcPts val="400"/>
               </a:spcAft>
@@ -8723,7 +8515,7 @@
           <a:bodyPr wrap="square" rtlCol="0" anchor="ctr"/>
           <a:lstStyle/>
           <a:p>
-            <a:pPr algn="l" indent="0" marL="0">
+            <a:pPr marL="0" indent="0" algn="l">
               <a:buNone/>
             </a:pPr>
             <a:r>
@@ -8762,7 +8554,7 @@
           <a:bodyPr wrap="square" rtlCol="0" anchor="ctr"/>
           <a:lstStyle/>
           <a:p>
-            <a:pPr algn="r" indent="0" marL="0">
+            <a:pPr marL="0" indent="0" algn="r">
               <a:buNone/>
             </a:pPr>
             <a:r>
@@ -8796,6 +8588,7 @@
         <a:solidFill>
           <a:srgbClr val="000000"/>
         </a:solidFill>
+        <a:effectLst/>
       </p:bgPr>
     </p:bg>
     <p:spTree>
@@ -8833,7 +8626,7 @@
           <a:bodyPr wrap="square" rtlCol="0" anchor="ctr"/>
           <a:lstStyle/>
           <a:p>
-            <a:pPr algn="r" indent="0" marL="0">
+            <a:pPr marL="0" indent="0" algn="r">
               <a:buNone/>
             </a:pPr>
             <a:r>
@@ -8872,7 +8665,7 @@
           <a:bodyPr wrap="square" lIns="0" tIns="0" rIns="0" bIns="0" rtlCol="0" anchor="ctr"/>
           <a:lstStyle/>
           <a:p>
-            <a:pPr algn="l" indent="0" marL="0">
+            <a:pPr marL="0" indent="0" algn="l">
               <a:buNone/>
             </a:pPr>
             <a:r>
@@ -8911,7 +8704,7 @@
           <a:bodyPr wrap="square" lIns="0" tIns="0" rIns="0" bIns="0" rtlCol="0" anchor="ctr"/>
           <a:lstStyle/>
           <a:p>
-            <a:pPr algn="l" indent="0" marL="0">
+            <a:pPr marL="0" indent="0" algn="l">
               <a:buNone/>
             </a:pPr>
             <a:r>
@@ -8950,7 +8743,7 @@
           <a:bodyPr wrap="square" rtlCol="0" anchor="ctr"/>
           <a:lstStyle/>
           <a:p>
-            <a:pPr algn="l" indent="0" marL="0">
+            <a:pPr marL="0" indent="0" algn="l">
               <a:buNone/>
             </a:pPr>
             <a:r>
@@ -8989,7 +8782,7 @@
           <a:bodyPr wrap="square" rtlCol="0" anchor="ctr"/>
           <a:lstStyle/>
           <a:p>
-            <a:pPr algn="r" indent="0" marL="0">
+            <a:pPr marL="0" indent="0" algn="r">
               <a:buNone/>
             </a:pPr>
             <a:r>
@@ -9023,6 +8816,7 @@
         <a:solidFill>
           <a:srgbClr val="FFFFFF"/>
         </a:solidFill>
+        <a:effectLst/>
       </p:bgPr>
     </p:bg>
     <p:spTree>
@@ -9060,7 +8854,7 @@
           <a:bodyPr wrap="square" lIns="0" tIns="0" rIns="0" bIns="0" rtlCol="0" anchor="ctr"/>
           <a:lstStyle/>
           <a:p>
-            <a:pPr indent="0" marL="0">
+            <a:pPr marL="0" indent="0">
               <a:buNone/>
             </a:pPr>
             <a:r>
@@ -9102,6 +8896,13 @@
             <a:prstDash val="solid"/>
           </a:ln>
         </p:spPr>
+        <p:txBody>
+          <a:bodyPr/>
+          <a:lstStyle/>
+          <a:p>
+            <a:endParaRPr lang="de-DE"/>
+          </a:p>
+        </p:txBody>
       </p:sp>
       <p:sp>
         <p:nvSpPr>
@@ -9124,7 +8925,7 @@
           <a:bodyPr wrap="square" lIns="0" tIns="0" rIns="0" bIns="0" rtlCol="0" anchor="t"/>
           <a:lstStyle/>
           <a:p>
-            <a:pPr indent="0" marL="0">
+            <a:pPr marL="0" indent="0">
               <a:spcAft>
                 <a:spcPts val="400"/>
               </a:spcAft>
@@ -9144,7 +8945,7 @@
             <a:endParaRPr lang="en-US" sz="1600" dirty="0"/>
           </a:p>
           <a:p>
-            <a:pPr indent="0" marL="0">
+            <a:pPr marL="0" indent="0">
               <a:spcAft>
                 <a:spcPts val="400"/>
               </a:spcAft>
@@ -9164,7 +8965,7 @@
             <a:endParaRPr lang="en-US" sz="1600" dirty="0"/>
           </a:p>
           <a:p>
-            <a:pPr indent="0" marL="0">
+            <a:pPr marL="0" indent="0">
               <a:spcAft>
                 <a:spcPts val="400"/>
               </a:spcAft>
@@ -9184,7 +8985,7 @@
             <a:endParaRPr lang="en-US" sz="1600" dirty="0"/>
           </a:p>
           <a:p>
-            <a:pPr indent="0" marL="0">
+            <a:pPr marL="0" indent="0">
               <a:spcAft>
                 <a:spcPts val="400"/>
               </a:spcAft>
@@ -9204,7 +9005,7 @@
             <a:endParaRPr lang="en-US" sz="1600" dirty="0"/>
           </a:p>
           <a:p>
-            <a:pPr indent="0" marL="0">
+            <a:pPr marL="0" indent="0">
               <a:spcAft>
                 <a:spcPts val="400"/>
               </a:spcAft>
@@ -9224,7 +9025,7 @@
             <a:endParaRPr lang="en-US" sz="1600" dirty="0"/>
           </a:p>
           <a:p>
-            <a:pPr indent="0" marL="0">
+            <a:pPr marL="0" indent="0">
               <a:spcAft>
                 <a:spcPts val="400"/>
               </a:spcAft>
@@ -9244,7 +9045,7 @@
             <a:endParaRPr lang="en-US" sz="1600" dirty="0"/>
           </a:p>
           <a:p>
-            <a:pPr indent="0" marL="0">
+            <a:pPr marL="0" indent="0">
               <a:spcAft>
                 <a:spcPts val="400"/>
               </a:spcAft>
@@ -9264,7 +9065,7 @@
             <a:endParaRPr lang="en-US" sz="1600" dirty="0"/>
           </a:p>
           <a:p>
-            <a:pPr indent="0" marL="0">
+            <a:pPr marL="0" indent="0">
               <a:spcAft>
                 <a:spcPts val="400"/>
               </a:spcAft>
@@ -9284,7 +9085,7 @@
             <a:endParaRPr lang="en-US" sz="1600" dirty="0"/>
           </a:p>
           <a:p>
-            <a:pPr indent="0" marL="0">
+            <a:pPr marL="0" indent="0">
               <a:spcAft>
                 <a:spcPts val="400"/>
               </a:spcAft>
@@ -9326,7 +9127,7 @@
           <a:bodyPr wrap="square" rtlCol="0" anchor="ctr"/>
           <a:lstStyle/>
           <a:p>
-            <a:pPr algn="l" indent="0" marL="0">
+            <a:pPr marL="0" indent="0" algn="l">
               <a:buNone/>
             </a:pPr>
             <a:r>
@@ -9365,7 +9166,7 @@
           <a:bodyPr wrap="square" rtlCol="0" anchor="ctr"/>
           <a:lstStyle/>
           <a:p>
-            <a:pPr algn="r" indent="0" marL="0">
+            <a:pPr marL="0" indent="0" algn="r">
               <a:buNone/>
             </a:pPr>
             <a:r>
@@ -9399,6 +9200,7 @@
         <a:solidFill>
           <a:srgbClr val="FFFFFF"/>
         </a:solidFill>
+        <a:effectLst/>
       </p:bgPr>
     </p:bg>
     <p:spTree>
@@ -9436,7 +9238,7 @@
           <a:bodyPr wrap="square" lIns="0" tIns="0" rIns="0" bIns="0" rtlCol="0" anchor="ctr"/>
           <a:lstStyle/>
           <a:p>
-            <a:pPr indent="0" marL="0">
+            <a:pPr marL="0" indent="0">
               <a:buNone/>
             </a:pPr>
             <a:r>
@@ -9478,6 +9280,13 @@
             <a:prstDash val="solid"/>
           </a:ln>
         </p:spPr>
+        <p:txBody>
+          <a:bodyPr/>
+          <a:lstStyle/>
+          <a:p>
+            <a:endParaRPr lang="de-DE"/>
+          </a:p>
+        </p:txBody>
       </p:sp>
       <p:sp>
         <p:nvSpPr>
@@ -9500,7 +9309,7 @@
           <a:bodyPr wrap="square" lIns="0" tIns="0" rIns="0" bIns="0" rtlCol="0" anchor="ctr"/>
           <a:lstStyle/>
           <a:p>
-            <a:pPr indent="0" marL="0">
+            <a:pPr marL="0" indent="0">
               <a:buNone/>
             </a:pPr>
             <a:r>
@@ -9539,7 +9348,7 @@
           <a:bodyPr wrap="square" lIns="0" tIns="0" rIns="0" bIns="0" rtlCol="0" anchor="t"/>
           <a:lstStyle/>
           <a:p>
-            <a:pPr indent="0" marL="0">
+            <a:pPr marL="0" indent="0">
               <a:spcAft>
                 <a:spcPts val="400"/>
               </a:spcAft>
@@ -9559,7 +9368,7 @@
             <a:endParaRPr lang="en-US" sz="1600" dirty="0"/>
           </a:p>
           <a:p>
-            <a:pPr indent="0" marL="0">
+            <a:pPr marL="0" indent="0">
               <a:spcAft>
                 <a:spcPts val="400"/>
               </a:spcAft>
@@ -9579,7 +9388,7 @@
             <a:endParaRPr lang="en-US" sz="1600" dirty="0"/>
           </a:p>
           <a:p>
-            <a:pPr indent="0" marL="0">
+            <a:pPr marL="0" indent="0">
               <a:spcAft>
                 <a:spcPts val="400"/>
               </a:spcAft>
@@ -9599,7 +9408,7 @@
             <a:endParaRPr lang="en-US" sz="1600" dirty="0"/>
           </a:p>
           <a:p>
-            <a:pPr indent="0" marL="0">
+            <a:pPr marL="0" indent="0">
               <a:spcAft>
                 <a:spcPts val="400"/>
               </a:spcAft>
@@ -9619,7 +9428,7 @@
             <a:endParaRPr lang="en-US" sz="1600" dirty="0"/>
           </a:p>
           <a:p>
-            <a:pPr indent="0" marL="0">
+            <a:pPr marL="0" indent="0">
               <a:spcAft>
                 <a:spcPts val="400"/>
               </a:spcAft>
@@ -9639,7 +9448,7 @@
             <a:endParaRPr lang="en-US" sz="1600" dirty="0"/>
           </a:p>
           <a:p>
-            <a:pPr indent="0" marL="0">
+            <a:pPr marL="0" indent="0">
               <a:spcAft>
                 <a:spcPts val="400"/>
               </a:spcAft>
@@ -9659,7 +9468,7 @@
             <a:endParaRPr lang="en-US" sz="1600" dirty="0"/>
           </a:p>
           <a:p>
-            <a:pPr indent="0" marL="0">
+            <a:pPr marL="0" indent="0">
               <a:spcAft>
                 <a:spcPts val="400"/>
               </a:spcAft>
@@ -9679,7 +9488,7 @@
             <a:endParaRPr lang="en-US" sz="1600" dirty="0"/>
           </a:p>
           <a:p>
-            <a:pPr indent="0" marL="0">
+            <a:pPr marL="0" indent="0">
               <a:spcAft>
                 <a:spcPts val="400"/>
               </a:spcAft>
@@ -9721,7 +9530,7 @@
           <a:bodyPr wrap="square" rtlCol="0" anchor="ctr"/>
           <a:lstStyle/>
           <a:p>
-            <a:pPr algn="l" indent="0" marL="0">
+            <a:pPr marL="0" indent="0" algn="l">
               <a:buNone/>
             </a:pPr>
             <a:r>
@@ -9760,7 +9569,7 @@
           <a:bodyPr wrap="square" rtlCol="0" anchor="ctr"/>
           <a:lstStyle/>
           <a:p>
-            <a:pPr algn="r" indent="0" marL="0">
+            <a:pPr marL="0" indent="0" algn="r">
               <a:buNone/>
             </a:pPr>
             <a:r>
@@ -9794,6 +9603,7 @@
         <a:solidFill>
           <a:srgbClr val="FFFFFF"/>
         </a:solidFill>
+        <a:effectLst/>
       </p:bgPr>
     </p:bg>
     <p:spTree>
@@ -9831,7 +9641,7 @@
           <a:bodyPr wrap="square" lIns="0" tIns="0" rIns="0" bIns="0" rtlCol="0" anchor="ctr"/>
           <a:lstStyle/>
           <a:p>
-            <a:pPr indent="0" marL="0">
+            <a:pPr marL="0" indent="0">
               <a:buNone/>
             </a:pPr>
             <a:r>
@@ -9873,6 +9683,13 @@
             <a:prstDash val="solid"/>
           </a:ln>
         </p:spPr>
+        <p:txBody>
+          <a:bodyPr/>
+          <a:lstStyle/>
+          <a:p>
+            <a:endParaRPr lang="de-DE"/>
+          </a:p>
+        </p:txBody>
       </p:sp>
       <p:sp>
         <p:nvSpPr>
@@ -9895,7 +9712,7 @@
           <a:bodyPr wrap="square" lIns="0" tIns="0" rIns="0" bIns="0" rtlCol="0" anchor="ctr"/>
           <a:lstStyle/>
           <a:p>
-            <a:pPr indent="0" marL="0">
+            <a:pPr marL="0" indent="0">
               <a:buNone/>
             </a:pPr>
             <a:r>
@@ -9934,7 +9751,7 @@
           <a:bodyPr wrap="square" lIns="0" tIns="0" rIns="0" bIns="0" rtlCol="0" anchor="t"/>
           <a:lstStyle/>
           <a:p>
-            <a:pPr indent="0" marL="0">
+            <a:pPr marL="0" indent="0">
               <a:spcAft>
                 <a:spcPts val="400"/>
               </a:spcAft>
@@ -9954,7 +9771,7 @@
             <a:endParaRPr lang="en-US" sz="1600" dirty="0"/>
           </a:p>
           <a:p>
-            <a:pPr indent="0" marL="0">
+            <a:pPr marL="0" indent="0">
               <a:spcAft>
                 <a:spcPts val="400"/>
               </a:spcAft>
@@ -9974,7 +9791,7 @@
             <a:endParaRPr lang="en-US" sz="1600" dirty="0"/>
           </a:p>
           <a:p>
-            <a:pPr indent="0" marL="0">
+            <a:pPr marL="0" indent="0">
               <a:spcAft>
                 <a:spcPts val="400"/>
               </a:spcAft>
@@ -9994,7 +9811,7 @@
             <a:endParaRPr lang="en-US" sz="1600" dirty="0"/>
           </a:p>
           <a:p>
-            <a:pPr indent="0" marL="0">
+            <a:pPr marL="0" indent="0">
               <a:spcAft>
                 <a:spcPts val="400"/>
               </a:spcAft>
@@ -10014,7 +9831,7 @@
             <a:endParaRPr lang="en-US" sz="1600" dirty="0"/>
           </a:p>
           <a:p>
-            <a:pPr indent="0" marL="0">
+            <a:pPr marL="0" indent="0">
               <a:spcAft>
                 <a:spcPts val="400"/>
               </a:spcAft>
@@ -10034,7 +9851,7 @@
             <a:endParaRPr lang="en-US" sz="1600" dirty="0"/>
           </a:p>
           <a:p>
-            <a:pPr indent="0" marL="0">
+            <a:pPr marL="0" indent="0">
               <a:spcAft>
                 <a:spcPts val="400"/>
               </a:spcAft>
@@ -10181,7 +9998,7 @@
           <a:bodyPr wrap="square" rtlCol="0" anchor="ctr"/>
           <a:lstStyle/>
           <a:p>
-            <a:pPr algn="l" indent="0" marL="0">
+            <a:pPr marL="0" indent="0" algn="l">
               <a:buNone/>
             </a:pPr>
             <a:r>
@@ -10220,7 +10037,7 @@
           <a:bodyPr wrap="square" rtlCol="0" anchor="ctr"/>
           <a:lstStyle/>
           <a:p>
-            <a:pPr algn="r" indent="0" marL="0">
+            <a:pPr marL="0" indent="0" algn="r">
               <a:buNone/>
             </a:pPr>
             <a:r>
@@ -10254,6 +10071,7 @@
         <a:solidFill>
           <a:srgbClr val="FFFFFF"/>
         </a:solidFill>
+        <a:effectLst/>
       </p:bgPr>
     </p:bg>
     <p:spTree>
@@ -10291,7 +10109,7 @@
           <a:bodyPr wrap="square" lIns="0" tIns="0" rIns="0" bIns="0" rtlCol="0" anchor="ctr"/>
           <a:lstStyle/>
           <a:p>
-            <a:pPr indent="0" marL="0">
+            <a:pPr marL="0" indent="0">
               <a:buNone/>
             </a:pPr>
             <a:r>
@@ -10333,6 +10151,13 @@
             <a:prstDash val="solid"/>
           </a:ln>
         </p:spPr>
+        <p:txBody>
+          <a:bodyPr/>
+          <a:lstStyle/>
+          <a:p>
+            <a:endParaRPr lang="de-DE"/>
+          </a:p>
+        </p:txBody>
       </p:sp>
       <p:sp>
         <p:nvSpPr>
@@ -10355,7 +10180,7 @@
           <a:bodyPr wrap="square" lIns="0" tIns="0" rIns="0" bIns="0" rtlCol="0" anchor="ctr"/>
           <a:lstStyle/>
           <a:p>
-            <a:pPr indent="0" marL="0">
+            <a:pPr marL="0" indent="0">
               <a:buNone/>
             </a:pPr>
             <a:r>
@@ -10415,7 +10240,7 @@
             <a:endParaRPr lang="en-US" sz="1600" dirty="0"/>
           </a:p>
           <a:p>
-            <a:pPr indent="0" marL="0">
+            <a:pPr marL="0" indent="0">
               <a:spcAft>
                 <a:spcPts val="400"/>
               </a:spcAft>
@@ -10456,7 +10281,7 @@
             <a:endParaRPr lang="en-US" sz="1600" dirty="0"/>
           </a:p>
           <a:p>
-            <a:pPr indent="0" marL="0">
+            <a:pPr marL="0" indent="0">
               <a:spcAft>
                 <a:spcPts val="400"/>
               </a:spcAft>
@@ -10497,7 +10322,7 @@
             <a:endParaRPr lang="en-US" sz="1600" dirty="0"/>
           </a:p>
           <a:p>
-            <a:pPr indent="0" marL="0">
+            <a:pPr marL="0" indent="0">
               <a:spcAft>
                 <a:spcPts val="400"/>
               </a:spcAft>
@@ -10560,7 +10385,7 @@
           <a:bodyPr wrap="square" rtlCol="0" anchor="ctr"/>
           <a:lstStyle/>
           <a:p>
-            <a:pPr algn="l" indent="0" marL="0">
+            <a:pPr marL="0" indent="0" algn="l">
               <a:buNone/>
             </a:pPr>
             <a:r>
@@ -10599,7 +10424,7 @@
           <a:bodyPr wrap="square" rtlCol="0" anchor="ctr"/>
           <a:lstStyle/>
           <a:p>
-            <a:pPr algn="r" indent="0" marL="0">
+            <a:pPr marL="0" indent="0" algn="r">
               <a:buNone/>
             </a:pPr>
             <a:r>
@@ -10633,6 +10458,7 @@
         <a:solidFill>
           <a:srgbClr val="FFFFFF"/>
         </a:solidFill>
+        <a:effectLst/>
       </p:bgPr>
     </p:bg>
     <p:spTree>
@@ -10670,7 +10496,7 @@
           <a:bodyPr wrap="square" lIns="0" tIns="0" rIns="0" bIns="0" rtlCol="0" anchor="ctr"/>
           <a:lstStyle/>
           <a:p>
-            <a:pPr indent="0" marL="0">
+            <a:pPr marL="0" indent="0">
               <a:buNone/>
             </a:pPr>
             <a:r>
@@ -10712,6 +10538,13 @@
             <a:prstDash val="solid"/>
           </a:ln>
         </p:spPr>
+        <p:txBody>
+          <a:bodyPr/>
+          <a:lstStyle/>
+          <a:p>
+            <a:endParaRPr lang="de-DE"/>
+          </a:p>
+        </p:txBody>
       </p:sp>
       <p:sp>
         <p:nvSpPr>
@@ -10734,7 +10567,7 @@
           <a:bodyPr wrap="square" lIns="0" tIns="0" rIns="0" bIns="0" rtlCol="0" anchor="ctr"/>
           <a:lstStyle/>
           <a:p>
-            <a:pPr indent="0" marL="0">
+            <a:pPr marL="0" indent="0">
               <a:buNone/>
             </a:pPr>
             <a:r>
@@ -10773,7 +10606,7 @@
           <a:bodyPr wrap="square" lIns="0" tIns="0" rIns="0" bIns="0" rtlCol="0" anchor="t"/>
           <a:lstStyle/>
           <a:p>
-            <a:pPr indent="0" marL="0">
+            <a:pPr marL="0" indent="0">
               <a:spcAft>
                 <a:spcPts val="400"/>
               </a:spcAft>
@@ -10793,7 +10626,7 @@
             <a:endParaRPr lang="en-US" sz="1600" dirty="0"/>
           </a:p>
           <a:p>
-            <a:pPr indent="0" marL="0">
+            <a:pPr marL="0" indent="0">
               <a:spcAft>
                 <a:spcPts val="400"/>
               </a:spcAft>
@@ -10816,7 +10649,7 @@
             <a:endParaRPr lang="en-US" sz="1600" dirty="0"/>
           </a:p>
           <a:p>
-            <a:pPr indent="0" marL="0">
+            <a:pPr marL="0" indent="0">
               <a:spcAft>
                 <a:spcPts val="400"/>
               </a:spcAft>
@@ -10839,7 +10672,7 @@
             <a:endParaRPr lang="en-US" sz="1600" dirty="0"/>
           </a:p>
           <a:p>
-            <a:pPr indent="0" marL="0">
+            <a:pPr marL="0" indent="0">
               <a:spcAft>
                 <a:spcPts val="400"/>
               </a:spcAft>
@@ -10859,7 +10692,7 @@
             <a:endParaRPr lang="en-US" sz="1600" dirty="0"/>
           </a:p>
           <a:p>
-            <a:pPr indent="0" marL="0">
+            <a:pPr marL="0" indent="0">
               <a:spcAft>
                 <a:spcPts val="400"/>
               </a:spcAft>
@@ -10879,7 +10712,7 @@
             <a:endParaRPr lang="en-US" sz="1600" dirty="0"/>
           </a:p>
           <a:p>
-            <a:pPr indent="0" marL="0">
+            <a:pPr marL="0" indent="0">
               <a:spcAft>
                 <a:spcPts val="400"/>
               </a:spcAft>
@@ -10962,7 +10795,7 @@
             <a:endParaRPr lang="en-US" sz="1600" dirty="0"/>
           </a:p>
           <a:p>
-            <a:pPr indent="0" marL="0">
+            <a:pPr marL="0" indent="0">
               <a:spcAft>
                 <a:spcPts val="400"/>
               </a:spcAft>
@@ -10982,7 +10815,7 @@
             <a:endParaRPr lang="en-US" sz="1600" dirty="0"/>
           </a:p>
           <a:p>
-            <a:pPr indent="0" marL="0">
+            <a:pPr marL="0" indent="0">
               <a:spcAft>
                 <a:spcPts val="400"/>
               </a:spcAft>
@@ -11024,7 +10857,7 @@
           <a:bodyPr wrap="square" rtlCol="0" anchor="ctr"/>
           <a:lstStyle/>
           <a:p>
-            <a:pPr algn="l" indent="0" marL="0">
+            <a:pPr marL="0" indent="0" algn="l">
               <a:buNone/>
             </a:pPr>
             <a:r>
@@ -11063,7 +10896,7 @@
           <a:bodyPr wrap="square" rtlCol="0" anchor="ctr"/>
           <a:lstStyle/>
           <a:p>
-            <a:pPr algn="r" indent="0" marL="0">
+            <a:pPr marL="0" indent="0" algn="r">
               <a:buNone/>
             </a:pPr>
             <a:r>
@@ -11097,6 +10930,7 @@
         <a:solidFill>
           <a:srgbClr val="000000"/>
         </a:solidFill>
+        <a:effectLst/>
       </p:bgPr>
     </p:bg>
     <p:spTree>
@@ -11134,7 +10968,7 @@
           <a:bodyPr wrap="square" rtlCol="0" anchor="ctr"/>
           <a:lstStyle/>
           <a:p>
-            <a:pPr algn="r" indent="0" marL="0">
+            <a:pPr marL="0" indent="0" algn="r">
               <a:buNone/>
             </a:pPr>
             <a:r>
@@ -11173,7 +11007,7 @@
           <a:bodyPr wrap="square" lIns="0" tIns="0" rIns="0" bIns="0" rtlCol="0" anchor="ctr"/>
           <a:lstStyle/>
           <a:p>
-            <a:pPr algn="l" indent="0" marL="0">
+            <a:pPr marL="0" indent="0" algn="l">
               <a:buNone/>
             </a:pPr>
             <a:r>
@@ -11212,7 +11046,7 @@
           <a:bodyPr wrap="square" lIns="0" tIns="0" rIns="0" bIns="0" rtlCol="0" anchor="ctr"/>
           <a:lstStyle/>
           <a:p>
-            <a:pPr algn="l" indent="0" marL="0">
+            <a:pPr marL="0" indent="0" algn="l">
               <a:buNone/>
             </a:pPr>
             <a:r>
@@ -11251,7 +11085,7 @@
           <a:bodyPr wrap="square" rtlCol="0" anchor="ctr"/>
           <a:lstStyle/>
           <a:p>
-            <a:pPr algn="l" indent="0" marL="0">
+            <a:pPr marL="0" indent="0" algn="l">
               <a:buNone/>
             </a:pPr>
             <a:r>
@@ -11290,7 +11124,7 @@
           <a:bodyPr wrap="square" rtlCol="0" anchor="ctr"/>
           <a:lstStyle/>
           <a:p>
-            <a:pPr algn="r" indent="0" marL="0">
+            <a:pPr marL="0" indent="0" algn="r">
               <a:buNone/>
             </a:pPr>
             <a:r>
@@ -11324,6 +11158,7 @@
         <a:solidFill>
           <a:srgbClr val="FFFFFF"/>
         </a:solidFill>
+        <a:effectLst/>
       </p:bgPr>
     </p:bg>
     <p:spTree>
@@ -11361,7 +11196,7 @@
           <a:bodyPr wrap="square" lIns="0" tIns="0" rIns="0" bIns="0" rtlCol="0" anchor="ctr"/>
           <a:lstStyle/>
           <a:p>
-            <a:pPr indent="0" marL="0">
+            <a:pPr marL="0" indent="0">
               <a:buNone/>
             </a:pPr>
             <a:r>
@@ -11403,6 +11238,13 @@
             <a:prstDash val="solid"/>
           </a:ln>
         </p:spPr>
+        <p:txBody>
+          <a:bodyPr/>
+          <a:lstStyle/>
+          <a:p>
+            <a:endParaRPr lang="de-DE"/>
+          </a:p>
+        </p:txBody>
       </p:sp>
       <p:sp>
         <p:nvSpPr>
@@ -11425,7 +11267,7 @@
           <a:bodyPr wrap="square" lIns="0" tIns="0" rIns="0" bIns="0" rtlCol="0" anchor="ctr"/>
           <a:lstStyle/>
           <a:p>
-            <a:pPr indent="0" marL="0">
+            <a:pPr marL="0" indent="0">
               <a:buNone/>
             </a:pPr>
             <a:r>
@@ -11464,7 +11306,7 @@
           <a:bodyPr wrap="square" lIns="0" tIns="0" rIns="0" bIns="0" rtlCol="0" anchor="t"/>
           <a:lstStyle/>
           <a:p>
-            <a:pPr indent="0" marL="0">
+            <a:pPr marL="0" indent="0">
               <a:spcAft>
                 <a:spcPts val="400"/>
               </a:spcAft>
@@ -11484,7 +11326,7 @@
             <a:endParaRPr lang="en-US" sz="1600" dirty="0"/>
           </a:p>
           <a:p>
-            <a:pPr indent="0" marL="0">
+            <a:pPr marL="0" indent="0">
               <a:spcAft>
                 <a:spcPts val="400"/>
               </a:spcAft>
@@ -11504,7 +11346,7 @@
             <a:endParaRPr lang="en-US" sz="1600" dirty="0"/>
           </a:p>
           <a:p>
-            <a:pPr indent="0" marL="0">
+            <a:pPr marL="0" indent="0">
               <a:spcAft>
                 <a:spcPts val="400"/>
               </a:spcAft>
@@ -11608,7 +11450,7 @@
             <a:endParaRPr lang="en-US" sz="1600" dirty="0"/>
           </a:p>
           <a:p>
-            <a:pPr indent="0" marL="0">
+            <a:pPr marL="0" indent="0">
               <a:spcAft>
                 <a:spcPts val="400"/>
               </a:spcAft>
@@ -11628,7 +11470,7 @@
             <a:endParaRPr lang="en-US" sz="1600" dirty="0"/>
           </a:p>
           <a:p>
-            <a:pPr indent="0" marL="0">
+            <a:pPr marL="0" indent="0">
               <a:spcAft>
                 <a:spcPts val="400"/>
               </a:spcAft>
@@ -11648,7 +11490,7 @@
             <a:endParaRPr lang="en-US" sz="1600" dirty="0"/>
           </a:p>
           <a:p>
-            <a:pPr indent="0" marL="0">
+            <a:pPr marL="0" indent="0">
               <a:spcAft>
                 <a:spcPts val="400"/>
               </a:spcAft>
@@ -11668,7 +11510,7 @@
             <a:endParaRPr lang="en-US" sz="1600" dirty="0"/>
           </a:p>
           <a:p>
-            <a:pPr indent="0" marL="0">
+            <a:pPr marL="0" indent="0">
               <a:spcAft>
                 <a:spcPts val="400"/>
               </a:spcAft>
@@ -11688,7 +11530,7 @@
             <a:endParaRPr lang="en-US" sz="1600" dirty="0"/>
           </a:p>
           <a:p>
-            <a:pPr indent="0" marL="0">
+            <a:pPr marL="0" indent="0">
               <a:spcAft>
                 <a:spcPts val="400"/>
               </a:spcAft>
@@ -11708,7 +11550,7 @@
             <a:endParaRPr lang="en-US" sz="1600" dirty="0"/>
           </a:p>
           <a:p>
-            <a:pPr indent="0" marL="0">
+            <a:pPr marL="0" indent="0">
               <a:spcAft>
                 <a:spcPts val="400"/>
               </a:spcAft>
@@ -11750,7 +11592,7 @@
           <a:bodyPr wrap="square" rtlCol="0" anchor="ctr"/>
           <a:lstStyle/>
           <a:p>
-            <a:pPr algn="l" indent="0" marL="0">
+            <a:pPr marL="0" indent="0" algn="l">
               <a:buNone/>
             </a:pPr>
             <a:r>
@@ -11789,7 +11631,7 @@
           <a:bodyPr wrap="square" rtlCol="0" anchor="ctr"/>
           <a:lstStyle/>
           <a:p>
-            <a:pPr algn="r" indent="0" marL="0">
+            <a:pPr marL="0" indent="0" algn="r">
               <a:buNone/>
             </a:pPr>
             <a:r>
@@ -11823,6 +11665,7 @@
         <a:solidFill>
           <a:srgbClr val="FFFFFF"/>
         </a:solidFill>
+        <a:effectLst/>
       </p:bgPr>
     </p:bg>
     <p:spTree>
@@ -11860,7 +11703,7 @@
           <a:bodyPr wrap="square" lIns="0" tIns="0" rIns="0" bIns="0" rtlCol="0" anchor="ctr"/>
           <a:lstStyle/>
           <a:p>
-            <a:pPr indent="0" marL="0">
+            <a:pPr marL="0" indent="0">
               <a:buNone/>
             </a:pPr>
             <a:r>
@@ -11902,6 +11745,13 @@
             <a:prstDash val="solid"/>
           </a:ln>
         </p:spPr>
+        <p:txBody>
+          <a:bodyPr/>
+          <a:lstStyle/>
+          <a:p>
+            <a:endParaRPr lang="de-DE"/>
+          </a:p>
+        </p:txBody>
       </p:sp>
       <p:sp>
         <p:nvSpPr>
@@ -11924,7 +11774,7 @@
           <a:bodyPr wrap="square" lIns="0" tIns="0" rIns="0" bIns="0" rtlCol="0" anchor="ctr"/>
           <a:lstStyle/>
           <a:p>
-            <a:pPr indent="0" marL="0">
+            <a:pPr marL="0" indent="0">
               <a:buNone/>
             </a:pPr>
             <a:r>
@@ -11963,7 +11813,7 @@
           <a:bodyPr wrap="square" lIns="0" tIns="0" rIns="0" bIns="0" rtlCol="0" anchor="t"/>
           <a:lstStyle/>
           <a:p>
-            <a:pPr indent="0" marL="0">
+            <a:pPr marL="0" indent="0">
               <a:spcAft>
                 <a:spcPts val="400"/>
               </a:spcAft>
@@ -11983,7 +11833,7 @@
             <a:endParaRPr lang="en-US" sz="1600" dirty="0"/>
           </a:p>
           <a:p>
-            <a:pPr indent="0" marL="0">
+            <a:pPr marL="0" indent="0">
               <a:spcAft>
                 <a:spcPts val="400"/>
               </a:spcAft>
@@ -12006,7 +11856,7 @@
             <a:endParaRPr lang="en-US" sz="1600" dirty="0"/>
           </a:p>
           <a:p>
-            <a:pPr indent="0" marL="0">
+            <a:pPr marL="0" indent="0">
               <a:spcAft>
                 <a:spcPts val="400"/>
               </a:spcAft>
@@ -12026,7 +11876,7 @@
             <a:endParaRPr lang="en-US" sz="1600" dirty="0"/>
           </a:p>
           <a:p>
-            <a:pPr indent="0" marL="0">
+            <a:pPr marL="0" indent="0">
               <a:spcAft>
                 <a:spcPts val="400"/>
               </a:spcAft>
@@ -12046,7 +11896,7 @@
             <a:endParaRPr lang="en-US" sz="1600" dirty="0"/>
           </a:p>
           <a:p>
-            <a:pPr indent="0" marL="0">
+            <a:pPr marL="0" indent="0">
               <a:spcAft>
                 <a:spcPts val="400"/>
               </a:spcAft>
@@ -12069,7 +11919,7 @@
             <a:endParaRPr lang="en-US" sz="1600" dirty="0"/>
           </a:p>
           <a:p>
-            <a:pPr indent="0" marL="0">
+            <a:pPr marL="0" indent="0">
               <a:spcAft>
                 <a:spcPts val="400"/>
               </a:spcAft>
@@ -12089,7 +11939,7 @@
             <a:endParaRPr lang="en-US" sz="1600" dirty="0"/>
           </a:p>
           <a:p>
-            <a:pPr indent="0" marL="0">
+            <a:pPr marL="0" indent="0">
               <a:spcAft>
                 <a:spcPts val="400"/>
               </a:spcAft>
@@ -12109,7 +11959,7 @@
             <a:endParaRPr lang="en-US" sz="1600" dirty="0"/>
           </a:p>
           <a:p>
-            <a:pPr indent="0" marL="0">
+            <a:pPr marL="0" indent="0">
               <a:spcAft>
                 <a:spcPts val="400"/>
               </a:spcAft>
@@ -12171,7 +12021,7 @@
             <a:endParaRPr lang="en-US" sz="1600" dirty="0"/>
           </a:p>
           <a:p>
-            <a:pPr indent="0" marL="0">
+            <a:pPr marL="0" indent="0">
               <a:spcAft>
                 <a:spcPts val="400"/>
               </a:spcAft>
@@ -12191,7 +12041,7 @@
             <a:endParaRPr lang="en-US" sz="1600" dirty="0"/>
           </a:p>
           <a:p>
-            <a:pPr indent="0" marL="0">
+            <a:pPr marL="0" indent="0">
               <a:spcAft>
                 <a:spcPts val="400"/>
               </a:spcAft>
@@ -12211,7 +12061,7 @@
             <a:endParaRPr lang="en-US" sz="1600" dirty="0"/>
           </a:p>
           <a:p>
-            <a:pPr indent="0" marL="0">
+            <a:pPr marL="0" indent="0">
               <a:spcAft>
                 <a:spcPts val="400"/>
               </a:spcAft>
@@ -12253,7 +12103,7 @@
           <a:bodyPr wrap="square" rtlCol="0" anchor="ctr"/>
           <a:lstStyle/>
           <a:p>
-            <a:pPr algn="l" indent="0" marL="0">
+            <a:pPr marL="0" indent="0" algn="l">
               <a:buNone/>
             </a:pPr>
             <a:r>
@@ -12292,7 +12142,7 @@
           <a:bodyPr wrap="square" rtlCol="0" anchor="ctr"/>
           <a:lstStyle/>
           <a:p>
-            <a:pPr algn="r" indent="0" marL="0">
+            <a:pPr marL="0" indent="0" algn="r">
               <a:buNone/>
             </a:pPr>
             <a:r>
@@ -12326,6 +12176,7 @@
         <a:solidFill>
           <a:srgbClr val="FFFFFF"/>
         </a:solidFill>
+        <a:effectLst/>
       </p:bgPr>
     </p:bg>
     <p:spTree>
@@ -12363,7 +12214,7 @@
           <a:bodyPr wrap="square" lIns="0" tIns="0" rIns="0" bIns="0" rtlCol="0" anchor="ctr"/>
           <a:lstStyle/>
           <a:p>
-            <a:pPr indent="0" marL="0">
+            <a:pPr marL="0" indent="0">
               <a:buNone/>
             </a:pPr>
             <a:r>
@@ -12405,6 +12256,13 @@
             <a:prstDash val="solid"/>
           </a:ln>
         </p:spPr>
+        <p:txBody>
+          <a:bodyPr/>
+          <a:lstStyle/>
+          <a:p>
+            <a:endParaRPr lang="de-DE"/>
+          </a:p>
+        </p:txBody>
       </p:sp>
       <p:sp>
         <p:nvSpPr>
@@ -12427,7 +12285,7 @@
           <a:bodyPr wrap="square" lIns="0" tIns="0" rIns="0" bIns="0" rtlCol="0" anchor="ctr"/>
           <a:lstStyle/>
           <a:p>
-            <a:pPr indent="0" marL="0">
+            <a:pPr marL="0" indent="0">
               <a:buNone/>
             </a:pPr>
             <a:r>
@@ -12466,7 +12324,7 @@
           <a:bodyPr wrap="square" lIns="0" tIns="0" rIns="0" bIns="0" rtlCol="0" anchor="t"/>
           <a:lstStyle/>
           <a:p>
-            <a:pPr indent="0" marL="0">
+            <a:pPr marL="0" indent="0">
               <a:spcAft>
                 <a:spcPts val="400"/>
               </a:spcAft>
@@ -12486,7 +12344,7 @@
             <a:endParaRPr lang="en-US" sz="1600" dirty="0"/>
           </a:p>
           <a:p>
-            <a:pPr indent="0" marL="0">
+            <a:pPr marL="0" indent="0">
               <a:spcAft>
                 <a:spcPts val="400"/>
               </a:spcAft>
@@ -12509,7 +12367,7 @@
             <a:endParaRPr lang="en-US" sz="1600" dirty="0"/>
           </a:p>
           <a:p>
-            <a:pPr indent="0" marL="0">
+            <a:pPr marL="0" indent="0">
               <a:spcAft>
                 <a:spcPts val="400"/>
               </a:spcAft>
@@ -12529,7 +12387,7 @@
             <a:endParaRPr lang="en-US" sz="1600" dirty="0"/>
           </a:p>
           <a:p>
-            <a:pPr indent="0" marL="0">
+            <a:pPr marL="0" indent="0">
               <a:spcAft>
                 <a:spcPts val="400"/>
               </a:spcAft>
@@ -12549,7 +12407,7 @@
             <a:endParaRPr lang="en-US" sz="1600" dirty="0"/>
           </a:p>
           <a:p>
-            <a:pPr indent="0" marL="0">
+            <a:pPr marL="0" indent="0">
               <a:spcAft>
                 <a:spcPts val="400"/>
               </a:spcAft>
@@ -12569,7 +12427,7 @@
             <a:endParaRPr lang="en-US" sz="1600" dirty="0"/>
           </a:p>
           <a:p>
-            <a:pPr indent="0" marL="0">
+            <a:pPr marL="0" indent="0">
               <a:spcAft>
                 <a:spcPts val="400"/>
               </a:spcAft>
@@ -12592,7 +12450,7 @@
             <a:endParaRPr lang="en-US" sz="1600" dirty="0"/>
           </a:p>
           <a:p>
-            <a:pPr indent="0" marL="0">
+            <a:pPr marL="0" indent="0">
               <a:spcAft>
                 <a:spcPts val="400"/>
               </a:spcAft>
@@ -12615,7 +12473,7 @@
             <a:endParaRPr lang="en-US" sz="1600" dirty="0"/>
           </a:p>
           <a:p>
-            <a:pPr indent="0" marL="0">
+            <a:pPr marL="0" indent="0">
               <a:spcAft>
                 <a:spcPts val="400"/>
               </a:spcAft>
@@ -12635,7 +12493,7 @@
             <a:endParaRPr lang="en-US" sz="1600" dirty="0"/>
           </a:p>
           <a:p>
-            <a:pPr indent="0" marL="0">
+            <a:pPr marL="0" indent="0">
               <a:spcAft>
                 <a:spcPts val="400"/>
               </a:spcAft>
@@ -12655,7 +12513,7 @@
             <a:endParaRPr lang="en-US" sz="1600" dirty="0"/>
           </a:p>
           <a:p>
-            <a:pPr indent="0" marL="0">
+            <a:pPr marL="0" indent="0">
               <a:spcAft>
                 <a:spcPts val="400"/>
               </a:spcAft>
@@ -12738,7 +12596,7 @@
             <a:endParaRPr lang="en-US" sz="1600" dirty="0"/>
           </a:p>
           <a:p>
-            <a:pPr indent="0" marL="0">
+            <a:pPr marL="0" indent="0">
               <a:spcAft>
                 <a:spcPts val="400"/>
               </a:spcAft>
@@ -12758,7 +12616,7 @@
             <a:endParaRPr lang="en-US" sz="1600" dirty="0"/>
           </a:p>
           <a:p>
-            <a:pPr indent="0" marL="0">
+            <a:pPr marL="0" indent="0">
               <a:spcAft>
                 <a:spcPts val="400"/>
               </a:spcAft>
@@ -12800,7 +12658,7 @@
           <a:bodyPr wrap="square" rtlCol="0" anchor="ctr"/>
           <a:lstStyle/>
           <a:p>
-            <a:pPr algn="l" indent="0" marL="0">
+            <a:pPr marL="0" indent="0" algn="l">
               <a:buNone/>
             </a:pPr>
             <a:r>
@@ -12839,7 +12697,7 @@
           <a:bodyPr wrap="square" rtlCol="0" anchor="ctr"/>
           <a:lstStyle/>
           <a:p>
-            <a:pPr algn="r" indent="0" marL="0">
+            <a:pPr marL="0" indent="0" algn="r">
               <a:buNone/>
             </a:pPr>
             <a:r>
@@ -12873,6 +12731,7 @@
         <a:solidFill>
           <a:srgbClr val="F6F4EF"/>
         </a:solidFill>
+        <a:effectLst/>
       </p:bgPr>
     </p:bg>
     <p:spTree>
@@ -12910,7 +12769,7 @@
           <a:bodyPr wrap="square" lIns="0" tIns="0" rIns="0" bIns="0" rtlCol="0" anchor="ctr"/>
           <a:lstStyle/>
           <a:p>
-            <a:pPr indent="0" marL="0">
+            <a:pPr marL="0" indent="0">
               <a:buNone/>
             </a:pPr>
             <a:r>
@@ -12952,6 +12811,13 @@
             <a:prstDash val="solid"/>
           </a:ln>
         </p:spPr>
+        <p:txBody>
+          <a:bodyPr/>
+          <a:lstStyle/>
+          <a:p>
+            <a:endParaRPr lang="de-DE"/>
+          </a:p>
+        </p:txBody>
       </p:sp>
       <p:sp>
         <p:nvSpPr>
@@ -12974,7 +12840,7 @@
           <a:bodyPr wrap="square" lIns="0" tIns="0" rIns="0" bIns="0" rtlCol="0" anchor="ctr"/>
           <a:lstStyle/>
           <a:p>
-            <a:pPr indent="0" marL="0">
+            <a:pPr marL="0" indent="0">
               <a:buNone/>
             </a:pPr>
             <a:r>
@@ -13013,7 +12879,7 @@
           <a:bodyPr wrap="square" lIns="0" tIns="0" rIns="0" bIns="0" rtlCol="0" anchor="t"/>
           <a:lstStyle/>
           <a:p>
-            <a:pPr indent="0" marL="0">
+            <a:pPr marL="0" indent="0">
               <a:spcAft>
                 <a:spcPts val="400"/>
               </a:spcAft>
@@ -13033,7 +12899,7 @@
             <a:endParaRPr lang="en-US" sz="1600" dirty="0"/>
           </a:p>
           <a:p>
-            <a:pPr indent="0" marL="0">
+            <a:pPr marL="0" indent="0">
               <a:spcAft>
                 <a:spcPts val="400"/>
               </a:spcAft>
@@ -13056,7 +12922,7 @@
             <a:endParaRPr lang="en-US" sz="1600" dirty="0"/>
           </a:p>
           <a:p>
-            <a:pPr indent="0" marL="0">
+            <a:pPr marL="0" indent="0">
               <a:spcAft>
                 <a:spcPts val="400"/>
               </a:spcAft>
@@ -13079,7 +12945,7 @@
             <a:endParaRPr lang="en-US" sz="1600" dirty="0"/>
           </a:p>
           <a:p>
-            <a:pPr indent="0" marL="0">
+            <a:pPr marL="0" indent="0">
               <a:spcAft>
                 <a:spcPts val="400"/>
               </a:spcAft>
@@ -13099,7 +12965,7 @@
             <a:endParaRPr lang="en-US" sz="1600" dirty="0"/>
           </a:p>
           <a:p>
-            <a:pPr indent="0" marL="0">
+            <a:pPr marL="0" indent="0">
               <a:spcAft>
                 <a:spcPts val="400"/>
               </a:spcAft>
@@ -13119,7 +12985,7 @@
             <a:endParaRPr lang="en-US" sz="1600" dirty="0"/>
           </a:p>
           <a:p>
-            <a:pPr indent="0" marL="0">
+            <a:pPr marL="0" indent="0">
               <a:spcAft>
                 <a:spcPts val="400"/>
               </a:spcAft>
@@ -13142,7 +13008,7 @@
             <a:endParaRPr lang="en-US" sz="1600" dirty="0"/>
           </a:p>
           <a:p>
-            <a:pPr indent="0" marL="0">
+            <a:pPr marL="0" indent="0">
               <a:spcAft>
                 <a:spcPts val="400"/>
               </a:spcAft>
@@ -13165,7 +13031,7 @@
             <a:endParaRPr lang="en-US" sz="1600" dirty="0"/>
           </a:p>
           <a:p>
-            <a:pPr indent="0" marL="0">
+            <a:pPr marL="0" indent="0">
               <a:spcAft>
                 <a:spcPts val="400"/>
               </a:spcAft>
@@ -13185,7 +13051,7 @@
             <a:endParaRPr lang="en-US" sz="1600" dirty="0"/>
           </a:p>
           <a:p>
-            <a:pPr indent="0" marL="0">
+            <a:pPr marL="0" indent="0">
               <a:spcAft>
                 <a:spcPts val="400"/>
               </a:spcAft>
@@ -13205,7 +13071,7 @@
             <a:endParaRPr lang="en-US" sz="1600" dirty="0"/>
           </a:p>
           <a:p>
-            <a:pPr indent="0" marL="0">
+            <a:pPr marL="0" indent="0">
               <a:spcAft>
                 <a:spcPts val="400"/>
               </a:spcAft>
@@ -13228,7 +13094,7 @@
             <a:endParaRPr lang="en-US" sz="1600" dirty="0"/>
           </a:p>
           <a:p>
-            <a:pPr indent="0" marL="0">
+            <a:pPr marL="0" indent="0">
               <a:spcAft>
                 <a:spcPts val="400"/>
               </a:spcAft>
@@ -13251,7 +13117,7 @@
             <a:endParaRPr lang="en-US" sz="1600" dirty="0"/>
           </a:p>
           <a:p>
-            <a:pPr indent="0" marL="0">
+            <a:pPr marL="0" indent="0">
               <a:spcAft>
                 <a:spcPts val="400"/>
               </a:spcAft>
@@ -13271,7 +13137,7 @@
             <a:endParaRPr lang="en-US" sz="1600" dirty="0"/>
           </a:p>
           <a:p>
-            <a:pPr indent="0" marL="0">
+            <a:pPr marL="0" indent="0">
               <a:spcAft>
                 <a:spcPts val="400"/>
               </a:spcAft>
@@ -13291,7 +13157,7 @@
             <a:endParaRPr lang="en-US" sz="1600" dirty="0"/>
           </a:p>
           <a:p>
-            <a:pPr indent="0" marL="0">
+            <a:pPr marL="0" indent="0">
               <a:spcAft>
                 <a:spcPts val="400"/>
               </a:spcAft>
@@ -13311,7 +13177,7 @@
             <a:endParaRPr lang="en-US" sz="1600" dirty="0"/>
           </a:p>
           <a:p>
-            <a:pPr indent="0" marL="0">
+            <a:pPr marL="0" indent="0">
               <a:spcAft>
                 <a:spcPts val="400"/>
               </a:spcAft>
@@ -13331,7 +13197,7 @@
             <a:endParaRPr lang="en-US" sz="1600" dirty="0"/>
           </a:p>
           <a:p>
-            <a:pPr indent="0" marL="0">
+            <a:pPr marL="0" indent="0">
               <a:spcAft>
                 <a:spcPts val="400"/>
               </a:spcAft>
@@ -13373,7 +13239,7 @@
           <a:bodyPr wrap="square" rtlCol="0" anchor="ctr"/>
           <a:lstStyle/>
           <a:p>
-            <a:pPr algn="l" indent="0" marL="0">
+            <a:pPr marL="0" indent="0" algn="l">
               <a:buNone/>
             </a:pPr>
             <a:r>
@@ -13412,7 +13278,7 @@
           <a:bodyPr wrap="square" rtlCol="0" anchor="ctr"/>
           <a:lstStyle/>
           <a:p>
-            <a:pPr algn="r" indent="0" marL="0">
+            <a:pPr marL="0" indent="0" algn="r">
               <a:buNone/>
             </a:pPr>
             <a:r>
@@ -13446,6 +13312,7 @@
         <a:solidFill>
           <a:srgbClr val="000000"/>
         </a:solidFill>
+        <a:effectLst/>
       </p:bgPr>
     </p:bg>
     <p:spTree>
@@ -13483,7 +13350,7 @@
           <a:bodyPr wrap="square" rtlCol="0" anchor="ctr"/>
           <a:lstStyle/>
           <a:p>
-            <a:pPr algn="r" indent="0" marL="0">
+            <a:pPr marL="0" indent="0" algn="r">
               <a:buNone/>
             </a:pPr>
             <a:r>
@@ -13522,7 +13389,7 @@
           <a:bodyPr wrap="square" lIns="0" tIns="0" rIns="0" bIns="0" rtlCol="0" anchor="ctr"/>
           <a:lstStyle/>
           <a:p>
-            <a:pPr algn="l" indent="0" marL="0">
+            <a:pPr marL="0" indent="0" algn="l">
               <a:buNone/>
             </a:pPr>
             <a:r>
@@ -13561,7 +13428,7 @@
           <a:bodyPr wrap="square" lIns="0" tIns="0" rIns="0" bIns="0" rtlCol="0" anchor="ctr"/>
           <a:lstStyle/>
           <a:p>
-            <a:pPr algn="l" indent="0" marL="0">
+            <a:pPr marL="0" indent="0" algn="l">
               <a:buNone/>
             </a:pPr>
             <a:r>
@@ -13600,7 +13467,7 @@
           <a:bodyPr wrap="square" rtlCol="0" anchor="ctr"/>
           <a:lstStyle/>
           <a:p>
-            <a:pPr algn="l" indent="0" marL="0">
+            <a:pPr marL="0" indent="0" algn="l">
               <a:buNone/>
             </a:pPr>
             <a:r>
@@ -13639,7 +13506,7 @@
           <a:bodyPr wrap="square" rtlCol="0" anchor="ctr"/>
           <a:lstStyle/>
           <a:p>
-            <a:pPr algn="r" indent="0" marL="0">
+            <a:pPr marL="0" indent="0" algn="r">
               <a:buNone/>
             </a:pPr>
             <a:r>
@@ -13673,6 +13540,7 @@
         <a:solidFill>
           <a:srgbClr val="FFFFFF"/>
         </a:solidFill>
+        <a:effectLst/>
       </p:bgPr>
     </p:bg>
     <p:spTree>
@@ -13710,7 +13578,7 @@
           <a:bodyPr wrap="square" lIns="0" tIns="0" rIns="0" bIns="0" rtlCol="0" anchor="ctr"/>
           <a:lstStyle/>
           <a:p>
-            <a:pPr indent="0" marL="0">
+            <a:pPr marL="0" indent="0">
               <a:buNone/>
             </a:pPr>
             <a:r>
@@ -13752,6 +13620,13 @@
             <a:prstDash val="solid"/>
           </a:ln>
         </p:spPr>
+        <p:txBody>
+          <a:bodyPr/>
+          <a:lstStyle/>
+          <a:p>
+            <a:endParaRPr lang="de-DE"/>
+          </a:p>
+        </p:txBody>
       </p:sp>
       <p:sp>
         <p:nvSpPr>
@@ -13774,7 +13649,7 @@
           <a:bodyPr wrap="square" lIns="0" tIns="0" rIns="0" bIns="0" rtlCol="0" anchor="ctr"/>
           <a:lstStyle/>
           <a:p>
-            <a:pPr indent="0" marL="0">
+            <a:pPr marL="0" indent="0">
               <a:buNone/>
             </a:pPr>
             <a:r>
@@ -13939,7 +13814,7 @@
             <a:endParaRPr lang="en-US" sz="1600" dirty="0"/>
           </a:p>
           <a:p>
-            <a:pPr indent="0" marL="0">
+            <a:pPr marL="0" indent="0">
               <a:spcAft>
                 <a:spcPts val="400"/>
               </a:spcAft>
@@ -13959,7 +13834,7 @@
             <a:endParaRPr lang="en-US" sz="1600" dirty="0"/>
           </a:p>
           <a:p>
-            <a:pPr indent="0" marL="0">
+            <a:pPr marL="0" indent="0">
               <a:spcAft>
                 <a:spcPts val="400"/>
               </a:spcAft>
@@ -13979,7 +13854,7 @@
             <a:endParaRPr lang="en-US" sz="1600" dirty="0"/>
           </a:p>
           <a:p>
-            <a:pPr indent="0" marL="0">
+            <a:pPr marL="0" indent="0">
               <a:spcAft>
                 <a:spcPts val="400"/>
               </a:spcAft>
@@ -14021,7 +13896,7 @@
           <a:bodyPr wrap="square" rtlCol="0" anchor="ctr"/>
           <a:lstStyle/>
           <a:p>
-            <a:pPr algn="l" indent="0" marL="0">
+            <a:pPr marL="0" indent="0" algn="l">
               <a:buNone/>
             </a:pPr>
             <a:r>
@@ -14060,7 +13935,7 @@
           <a:bodyPr wrap="square" rtlCol="0" anchor="ctr"/>
           <a:lstStyle/>
           <a:p>
-            <a:pPr algn="r" indent="0" marL="0">
+            <a:pPr marL="0" indent="0" algn="r">
               <a:buNone/>
             </a:pPr>
             <a:r>
@@ -14094,6 +13969,7 @@
         <a:solidFill>
           <a:srgbClr val="FFFFFF"/>
         </a:solidFill>
+        <a:effectLst/>
       </p:bgPr>
     </p:bg>
     <p:spTree>
@@ -14131,7 +14007,7 @@
           <a:bodyPr wrap="square" lIns="0" tIns="0" rIns="0" bIns="0" rtlCol="0" anchor="ctr"/>
           <a:lstStyle/>
           <a:p>
-            <a:pPr indent="0" marL="0">
+            <a:pPr marL="0" indent="0">
               <a:buNone/>
             </a:pPr>
             <a:r>
@@ -14173,6 +14049,13 @@
             <a:prstDash val="solid"/>
           </a:ln>
         </p:spPr>
+        <p:txBody>
+          <a:bodyPr/>
+          <a:lstStyle/>
+          <a:p>
+            <a:endParaRPr lang="de-DE"/>
+          </a:p>
+        </p:txBody>
       </p:sp>
       <p:sp>
         <p:nvSpPr>
@@ -14195,7 +14078,7 @@
           <a:bodyPr wrap="square" lIns="0" tIns="0" rIns="0" bIns="0" rtlCol="0" anchor="ctr"/>
           <a:lstStyle/>
           <a:p>
-            <a:pPr indent="0" marL="0">
+            <a:pPr marL="0" indent="0">
               <a:buNone/>
             </a:pPr>
             <a:r>
@@ -14234,7 +14117,7 @@
           <a:bodyPr wrap="square" lIns="0" tIns="0" rIns="0" bIns="0" rtlCol="0" anchor="t"/>
           <a:lstStyle/>
           <a:p>
-            <a:pPr indent="0" marL="0">
+            <a:pPr marL="0" indent="0">
               <a:spcAft>
                 <a:spcPts val="400"/>
               </a:spcAft>
@@ -14254,7 +14137,7 @@
             <a:endParaRPr lang="en-US" sz="1600" dirty="0"/>
           </a:p>
           <a:p>
-            <a:pPr indent="0" marL="0">
+            <a:pPr marL="0" indent="0">
               <a:spcAft>
                 <a:spcPts val="400"/>
               </a:spcAft>
@@ -14274,7 +14157,7 @@
             <a:endParaRPr lang="en-US" sz="1600" dirty="0"/>
           </a:p>
           <a:p>
-            <a:pPr indent="0" marL="0">
+            <a:pPr marL="0" indent="0">
               <a:spcAft>
                 <a:spcPts val="400"/>
               </a:spcAft>
@@ -14294,7 +14177,7 @@
             <a:endParaRPr lang="en-US" sz="1600" dirty="0"/>
           </a:p>
           <a:p>
-            <a:pPr indent="0" marL="0">
+            <a:pPr marL="0" indent="0">
               <a:spcAft>
                 <a:spcPts val="400"/>
               </a:spcAft>
@@ -14314,7 +14197,7 @@
             <a:endParaRPr lang="en-US" sz="1600" dirty="0"/>
           </a:p>
           <a:p>
-            <a:pPr indent="0" marL="0">
+            <a:pPr marL="0" indent="0">
               <a:spcAft>
                 <a:spcPts val="400"/>
               </a:spcAft>
@@ -14334,7 +14217,7 @@
             <a:endParaRPr lang="en-US" sz="1600" dirty="0"/>
           </a:p>
           <a:p>
-            <a:pPr indent="0" marL="0">
+            <a:pPr marL="0" indent="0">
               <a:spcAft>
                 <a:spcPts val="400"/>
               </a:spcAft>
@@ -14354,7 +14237,7 @@
             <a:endParaRPr lang="en-US" sz="1600" dirty="0"/>
           </a:p>
           <a:p>
-            <a:pPr indent="0" marL="0">
+            <a:pPr marL="0" indent="0">
               <a:spcAft>
                 <a:spcPts val="400"/>
               </a:spcAft>
@@ -14374,7 +14257,7 @@
             <a:endParaRPr lang="en-US" sz="1600" dirty="0"/>
           </a:p>
           <a:p>
-            <a:pPr indent="0" marL="0">
+            <a:pPr marL="0" indent="0">
               <a:spcAft>
                 <a:spcPts val="400"/>
               </a:spcAft>
@@ -14394,7 +14277,7 @@
             <a:endParaRPr lang="en-US" sz="1600" dirty="0"/>
           </a:p>
           <a:p>
-            <a:pPr indent="0" marL="0">
+            <a:pPr marL="0" indent="0">
               <a:spcAft>
                 <a:spcPts val="400"/>
               </a:spcAft>
@@ -14436,7 +14319,7 @@
           <a:bodyPr wrap="square" rtlCol="0" anchor="ctr"/>
           <a:lstStyle/>
           <a:p>
-            <a:pPr algn="l" indent="0" marL="0">
+            <a:pPr marL="0" indent="0" algn="l">
               <a:buNone/>
             </a:pPr>
             <a:r>
@@ -14475,7 +14358,7 @@
           <a:bodyPr wrap="square" rtlCol="0" anchor="ctr"/>
           <a:lstStyle/>
           <a:p>
-            <a:pPr algn="r" indent="0" marL="0">
+            <a:pPr marL="0" indent="0" algn="r">
               <a:buNone/>
             </a:pPr>
             <a:r>
@@ -14509,6 +14392,7 @@
         <a:solidFill>
           <a:srgbClr val="FFFFFF"/>
         </a:solidFill>
+        <a:effectLst/>
       </p:bgPr>
     </p:bg>
     <p:spTree>
@@ -14546,7 +14430,7 @@
           <a:bodyPr wrap="square" lIns="0" tIns="0" rIns="0" bIns="0" rtlCol="0" anchor="ctr"/>
           <a:lstStyle/>
           <a:p>
-            <a:pPr indent="0" marL="0">
+            <a:pPr marL="0" indent="0">
               <a:buNone/>
             </a:pPr>
             <a:r>
@@ -14588,6 +14472,13 @@
             <a:prstDash val="solid"/>
           </a:ln>
         </p:spPr>
+        <p:txBody>
+          <a:bodyPr/>
+          <a:lstStyle/>
+          <a:p>
+            <a:endParaRPr lang="de-DE"/>
+          </a:p>
+        </p:txBody>
       </p:sp>
       <p:sp>
         <p:nvSpPr>
@@ -14610,7 +14501,7 @@
           <a:bodyPr wrap="square" lIns="0" tIns="0" rIns="0" bIns="0" rtlCol="0" anchor="ctr"/>
           <a:lstStyle/>
           <a:p>
-            <a:pPr indent="0" marL="0">
+            <a:pPr marL="0" indent="0">
               <a:buNone/>
             </a:pPr>
             <a:r>
@@ -14622,7 +14513,7 @@
                 <a:ea typeface="Inter" pitchFamily="34" charset="-122"/>
                 <a:cs typeface="Inter" pitchFamily="34" charset="-120"/>
               </a:rPr>
-              <a:t>AI tools are here to stay — the question is how you use them</a:t>
+              <a:t>These tools are part of the job now — the question is the posture you take</a:t>
             </a:r>
             <a:endParaRPr lang="en-US" sz="1500" dirty="0"/>
           </a:p>
@@ -14649,7 +14540,7 @@
           <a:bodyPr wrap="square" lIns="0" tIns="0" rIns="0" bIns="0" rtlCol="0" anchor="t"/>
           <a:lstStyle/>
           <a:p>
-            <a:pPr indent="0" marL="0">
+            <a:pPr marL="0" indent="0">
               <a:spcAft>
                 <a:spcPts val="400"/>
               </a:spcAft>
@@ -14669,7 +14560,7 @@
             <a:endParaRPr lang="en-US" sz="1600" dirty="0"/>
           </a:p>
           <a:p>
-            <a:pPr indent="0" marL="0">
+            <a:pPr marL="0" indent="0">
               <a:spcAft>
                 <a:spcPts val="400"/>
               </a:spcAft>
@@ -14689,7 +14580,7 @@
             <a:endParaRPr lang="en-US" sz="1600" dirty="0"/>
           </a:p>
           <a:p>
-            <a:pPr indent="0" marL="0">
+            <a:pPr marL="0" indent="0">
               <a:spcAft>
                 <a:spcPts val="400"/>
               </a:spcAft>
@@ -14709,7 +14600,7 @@
             <a:endParaRPr lang="en-US" sz="1600" dirty="0"/>
           </a:p>
           <a:p>
-            <a:pPr indent="0" marL="0">
+            <a:pPr marL="0" indent="0">
               <a:spcAft>
                 <a:spcPts val="400"/>
               </a:spcAft>
@@ -14724,12 +14615,12 @@
                 <a:ea typeface="Inter" pitchFamily="34" charset="-122"/>
                 <a:cs typeface="Inter" pitchFamily="34" charset="-120"/>
               </a:rPr>
-              <a:t>His core argument: we are compressing a century of economic evolution into 5–10 years. The speed is the problem, not the change itself.</a:t>
-            </a:r>
-            <a:endParaRPr lang="en-US" sz="1600" dirty="0"/>
-          </a:p>
-          <a:p>
-            <a:pPr indent="0" marL="0">
+              <a:t>Amodei’s core claim: we are compressing a century of economic evolution into 5–10 years. The speed is the problem, not the change itself. You can disagree with the number and still take the direction seriously.</a:t>
+            </a:r>
+            <a:endParaRPr lang="en-US" sz="1600" dirty="0"/>
+          </a:p>
+          <a:p>
+            <a:pPr marL="0" indent="0">
               <a:spcAft>
                 <a:spcPts val="400"/>
               </a:spcAft>
@@ -14749,7 +14640,7 @@
             <a:endParaRPr lang="en-US" sz="1600" dirty="0"/>
           </a:p>
           <a:p>
-            <a:pPr indent="0" marL="0">
+            <a:pPr marL="0" indent="0">
               <a:spcAft>
                 <a:spcPts val="400"/>
               </a:spcAft>
@@ -14769,7 +14660,7 @@
             <a:endParaRPr lang="en-US" sz="1600" dirty="0"/>
           </a:p>
           <a:p>
-            <a:pPr indent="0" marL="0">
+            <a:pPr marL="0" indent="0">
               <a:spcAft>
                 <a:spcPts val="400"/>
               </a:spcAft>
@@ -14784,12 +14675,12 @@
                 <a:ea typeface="Inter" pitchFamily="34" charset="-122"/>
                 <a:cs typeface="Inter" pitchFamily="34" charset="-120"/>
               </a:rPr>
-              <a:t>“Me and my pencil are smarter than just myself.” (David Deutsch) — There is nothing different with AI. Me and AI are a lot smarter than just myself. The tool amplifies you. But only if you remain the one thinking.</a:t>
-            </a:r>
-            <a:endParaRPr lang="en-US" sz="1600" dirty="0"/>
-          </a:p>
-          <a:p>
-            <a:pPr indent="0" marL="0">
+              <a:t>“Me and my pencil are smarter than just myself.” (David Deutsch) — same shape with AI. Me plus the tool is more capable than me alone, but only while I’m still the one thinking. The moment that stops, the whole thing inverts.</a:t>
+            </a:r>
+            <a:endParaRPr lang="en-US" sz="1600" dirty="0"/>
+          </a:p>
+          <a:p>
+            <a:pPr marL="0" indent="0">
               <a:spcAft>
                 <a:spcPts val="400"/>
               </a:spcAft>
@@ -14809,7 +14700,7 @@
             <a:endParaRPr lang="en-US" sz="1600" dirty="0"/>
           </a:p>
           <a:p>
-            <a:pPr indent="0" marL="0">
+            <a:pPr marL="0" indent="0">
               <a:spcAft>
                 <a:spcPts val="400"/>
               </a:spcAft>
@@ -14824,12 +14715,12 @@
                 <a:ea typeface="Inter" pitchFamily="34" charset="-122"/>
                 <a:cs typeface="Inter" pitchFamily="34" charset="-120"/>
               </a:rPr>
-              <a:t>The bottom line</a:t>
-            </a:r>
-            <a:endParaRPr lang="en-US" sz="1600" dirty="0"/>
-          </a:p>
-          <a:p>
-            <a:pPr indent="0" marL="0">
+              <a:t>The working position</a:t>
+            </a:r>
+            <a:endParaRPr lang="en-US" sz="1600" dirty="0"/>
+          </a:p>
+          <a:p>
+            <a:pPr marL="0" indent="0">
               <a:spcAft>
                 <a:spcPts val="400"/>
               </a:spcAft>
@@ -14844,7 +14735,7 @@
                 <a:ea typeface="Inter" pitchFamily="34" charset="-122"/>
                 <a:cs typeface="Inter" pitchFamily="34" charset="-120"/>
               </a:rPr>
-              <a:t>Either you learn to work with these tools effectively, or you lose out. But “effectively” does not mean “delegate everything.” It means knowing when to think and when to let the tool think.</a:t>
+              <a:t>Learn to use these tools well. “Well” does not mean delegate everything — it means knowing which problems you still want to solve yourself, and being deliberate about the rest. That’s the whole workshop, really.</a:t>
             </a:r>
             <a:endParaRPr lang="en-US" sz="1600" dirty="0"/>
           </a:p>
@@ -14871,7 +14762,7 @@
           <a:bodyPr wrap="square" rtlCol="0" anchor="ctr"/>
           <a:lstStyle/>
           <a:p>
-            <a:pPr algn="l" indent="0" marL="0">
+            <a:pPr marL="0" indent="0" algn="l">
               <a:buNone/>
             </a:pPr>
             <a:r>
@@ -14910,7 +14801,7 @@
           <a:bodyPr wrap="square" rtlCol="0" anchor="ctr"/>
           <a:lstStyle/>
           <a:p>
-            <a:pPr algn="r" indent="0" marL="0">
+            <a:pPr marL="0" indent="0" algn="r">
               <a:buNone/>
             </a:pPr>
             <a:r>
@@ -14944,6 +14835,7 @@
         <a:solidFill>
           <a:srgbClr val="FFFFFF"/>
         </a:solidFill>
+        <a:effectLst/>
       </p:bgPr>
     </p:bg>
     <p:spTree>
@@ -14981,7 +14873,7 @@
           <a:bodyPr wrap="square" lIns="0" tIns="0" rIns="0" bIns="0" rtlCol="0" anchor="ctr"/>
           <a:lstStyle/>
           <a:p>
-            <a:pPr indent="0" marL="0">
+            <a:pPr marL="0" indent="0">
               <a:buNone/>
             </a:pPr>
             <a:r>
@@ -15023,6 +14915,13 @@
             <a:prstDash val="solid"/>
           </a:ln>
         </p:spPr>
+        <p:txBody>
+          <a:bodyPr/>
+          <a:lstStyle/>
+          <a:p>
+            <a:endParaRPr lang="de-DE"/>
+          </a:p>
+        </p:txBody>
       </p:sp>
       <p:sp>
         <p:nvSpPr>
@@ -15045,7 +14944,7 @@
           <a:bodyPr wrap="square" lIns="0" tIns="0" rIns="0" bIns="0" rtlCol="0" anchor="ctr"/>
           <a:lstStyle/>
           <a:p>
-            <a:pPr indent="0" marL="0">
+            <a:pPr marL="0" indent="0">
               <a:buNone/>
             </a:pPr>
             <a:r>
@@ -15084,7 +14983,7 @@
           <a:bodyPr wrap="square" lIns="0" tIns="0" rIns="0" bIns="0" rtlCol="0" anchor="t"/>
           <a:lstStyle/>
           <a:p>
-            <a:pPr indent="0" marL="0">
+            <a:pPr marL="0" indent="0">
               <a:spcAft>
                 <a:spcPts val="400"/>
               </a:spcAft>
@@ -15104,7 +15003,7 @@
             <a:endParaRPr lang="en-US" sz="1600" dirty="0"/>
           </a:p>
           <a:p>
-            <a:pPr indent="0" marL="0">
+            <a:pPr marL="0" indent="0">
               <a:spcAft>
                 <a:spcPts val="400"/>
               </a:spcAft>
@@ -15124,7 +15023,7 @@
             <a:endParaRPr lang="en-US" sz="1600" dirty="0"/>
           </a:p>
           <a:p>
-            <a:pPr indent="0" marL="0">
+            <a:pPr marL="0" indent="0">
               <a:spcAft>
                 <a:spcPts val="400"/>
               </a:spcAft>
@@ -15144,7 +15043,7 @@
             <a:endParaRPr lang="en-US" sz="1600" dirty="0"/>
           </a:p>
           <a:p>
-            <a:pPr indent="0" marL="0">
+            <a:pPr marL="0" indent="0">
               <a:spcAft>
                 <a:spcPts val="400"/>
               </a:spcAft>
@@ -15164,7 +15063,7 @@
             <a:endParaRPr lang="en-US" sz="1600" dirty="0"/>
           </a:p>
           <a:p>
-            <a:pPr indent="0" marL="0">
+            <a:pPr marL="0" indent="0">
               <a:spcAft>
                 <a:spcPts val="400"/>
               </a:spcAft>
@@ -15184,7 +15083,7 @@
             <a:endParaRPr lang="en-US" sz="1600" dirty="0"/>
           </a:p>
           <a:p>
-            <a:pPr indent="0" marL="0">
+            <a:pPr marL="0" indent="0">
               <a:spcAft>
                 <a:spcPts val="400"/>
               </a:spcAft>
@@ -15204,7 +15103,7 @@
             <a:endParaRPr lang="en-US" sz="1600" dirty="0"/>
           </a:p>
           <a:p>
-            <a:pPr indent="0" marL="0">
+            <a:pPr marL="0" indent="0">
               <a:spcAft>
                 <a:spcPts val="400"/>
               </a:spcAft>
@@ -15224,7 +15123,7 @@
             <a:endParaRPr lang="en-US" sz="1600" dirty="0"/>
           </a:p>
           <a:p>
-            <a:pPr indent="0" marL="0">
+            <a:pPr marL="0" indent="0">
               <a:spcAft>
                 <a:spcPts val="400"/>
               </a:spcAft>
@@ -15244,7 +15143,7 @@
             <a:endParaRPr lang="en-US" sz="1600" dirty="0"/>
           </a:p>
           <a:p>
-            <a:pPr indent="0" marL="0">
+            <a:pPr marL="0" indent="0">
               <a:spcAft>
                 <a:spcPts val="400"/>
               </a:spcAft>
@@ -15264,7 +15163,7 @@
             <a:endParaRPr lang="en-US" sz="1600" dirty="0"/>
           </a:p>
           <a:p>
-            <a:pPr indent="0" marL="0">
+            <a:pPr marL="0" indent="0">
               <a:spcAft>
                 <a:spcPts val="400"/>
               </a:spcAft>
@@ -15306,7 +15205,7 @@
           <a:bodyPr wrap="square" rtlCol="0" anchor="ctr"/>
           <a:lstStyle/>
           <a:p>
-            <a:pPr algn="l" indent="0" marL="0">
+            <a:pPr marL="0" indent="0" algn="l">
               <a:buNone/>
             </a:pPr>
             <a:r>
@@ -15345,7 +15244,7 @@
           <a:bodyPr wrap="square" rtlCol="0" anchor="ctr"/>
           <a:lstStyle/>
           <a:p>
-            <a:pPr algn="r" indent="0" marL="0">
+            <a:pPr marL="0" indent="0" algn="r">
               <a:buNone/>
             </a:pPr>
             <a:r>
@@ -15379,6 +15278,7 @@
         <a:solidFill>
           <a:srgbClr val="FFFFFF"/>
         </a:solidFill>
+        <a:effectLst/>
       </p:bgPr>
     </p:bg>
     <p:spTree>
@@ -15416,7 +15316,7 @@
           <a:bodyPr wrap="square" lIns="0" tIns="0" rIns="0" bIns="0" rtlCol="0" anchor="ctr"/>
           <a:lstStyle/>
           <a:p>
-            <a:pPr indent="0" marL="0">
+            <a:pPr marL="0" indent="0">
               <a:buNone/>
             </a:pPr>
             <a:r>
@@ -15458,6 +15358,13 @@
             <a:prstDash val="solid"/>
           </a:ln>
         </p:spPr>
+        <p:txBody>
+          <a:bodyPr/>
+          <a:lstStyle/>
+          <a:p>
+            <a:endParaRPr lang="de-DE"/>
+          </a:p>
+        </p:txBody>
       </p:sp>
       <p:sp>
         <p:nvSpPr>
@@ -15480,7 +15387,7 @@
           <a:bodyPr wrap="square" lIns="0" tIns="0" rIns="0" bIns="0" rtlCol="0" anchor="ctr"/>
           <a:lstStyle/>
           <a:p>
-            <a:pPr indent="0" marL="0">
+            <a:pPr marL="0" indent="0">
               <a:buNone/>
             </a:pPr>
             <a:r>
@@ -15519,7 +15426,7 @@
           <a:bodyPr wrap="square" lIns="0" tIns="0" rIns="0" bIns="0" rtlCol="0" anchor="t"/>
           <a:lstStyle/>
           <a:p>
-            <a:pPr indent="0" marL="0">
+            <a:pPr marL="0" indent="0">
               <a:spcAft>
                 <a:spcPts val="400"/>
               </a:spcAft>
@@ -15539,7 +15446,7 @@
             <a:endParaRPr lang="en-US" sz="1600" dirty="0"/>
           </a:p>
           <a:p>
-            <a:pPr indent="0" marL="0">
+            <a:pPr marL="0" indent="0">
               <a:spcAft>
                 <a:spcPts val="400"/>
               </a:spcAft>
@@ -15559,7 +15466,7 @@
             <a:endParaRPr lang="en-US" sz="1600" dirty="0"/>
           </a:p>
           <a:p>
-            <a:pPr indent="0" marL="0">
+            <a:pPr marL="0" indent="0">
               <a:spcAft>
                 <a:spcPts val="400"/>
               </a:spcAft>
@@ -15579,7 +15486,7 @@
             <a:endParaRPr lang="en-US" sz="1600" dirty="0"/>
           </a:p>
           <a:p>
-            <a:pPr indent="0" marL="0">
+            <a:pPr marL="0" indent="0">
               <a:spcAft>
                 <a:spcPts val="400"/>
               </a:spcAft>
@@ -15599,7 +15506,7 @@
             <a:endParaRPr lang="en-US" sz="1600" dirty="0"/>
           </a:p>
           <a:p>
-            <a:pPr indent="0" marL="0">
+            <a:pPr marL="0" indent="0">
               <a:spcAft>
                 <a:spcPts val="400"/>
               </a:spcAft>
@@ -15619,7 +15526,7 @@
             <a:endParaRPr lang="en-US" sz="1600" dirty="0"/>
           </a:p>
           <a:p>
-            <a:pPr indent="0" marL="0">
+            <a:pPr marL="0" indent="0">
               <a:spcAft>
                 <a:spcPts val="400"/>
               </a:spcAft>
@@ -15639,7 +15546,7 @@
             <a:endParaRPr lang="en-US" sz="1600" dirty="0"/>
           </a:p>
           <a:p>
-            <a:pPr indent="0" marL="0">
+            <a:pPr marL="0" indent="0">
               <a:spcAft>
                 <a:spcPts val="400"/>
               </a:spcAft>
@@ -15659,7 +15566,7 @@
             <a:endParaRPr lang="en-US" sz="1600" dirty="0"/>
           </a:p>
           <a:p>
-            <a:pPr indent="0" marL="0">
+            <a:pPr marL="0" indent="0">
               <a:spcAft>
                 <a:spcPts val="400"/>
               </a:spcAft>
@@ -15679,7 +15586,7 @@
             <a:endParaRPr lang="en-US" sz="1600" dirty="0"/>
           </a:p>
           <a:p>
-            <a:pPr indent="0" marL="0">
+            <a:pPr marL="0" indent="0">
               <a:spcAft>
                 <a:spcPts val="400"/>
               </a:spcAft>
@@ -15699,7 +15606,7 @@
             <a:endParaRPr lang="en-US" sz="1600" dirty="0"/>
           </a:p>
           <a:p>
-            <a:pPr indent="0" marL="0">
+            <a:pPr marL="0" indent="0">
               <a:spcAft>
                 <a:spcPts val="400"/>
               </a:spcAft>
@@ -15741,7 +15648,7 @@
           <a:bodyPr wrap="square" rtlCol="0" anchor="ctr"/>
           <a:lstStyle/>
           <a:p>
-            <a:pPr algn="l" indent="0" marL="0">
+            <a:pPr marL="0" indent="0" algn="l">
               <a:buNone/>
             </a:pPr>
             <a:r>
@@ -15780,7 +15687,7 @@
           <a:bodyPr wrap="square" rtlCol="0" anchor="ctr"/>
           <a:lstStyle/>
           <a:p>
-            <a:pPr algn="r" indent="0" marL="0">
+            <a:pPr marL="0" indent="0" algn="r">
               <a:buNone/>
             </a:pPr>
             <a:r>
@@ -15814,6 +15721,7 @@
         <a:solidFill>
           <a:srgbClr val="FFFFFF"/>
         </a:solidFill>
+        <a:effectLst/>
       </p:bgPr>
     </p:bg>
     <p:spTree>
@@ -15851,7 +15759,7 @@
           <a:bodyPr wrap="square" lIns="0" tIns="0" rIns="0" bIns="0" rtlCol="0" anchor="ctr"/>
           <a:lstStyle/>
           <a:p>
-            <a:pPr indent="0" marL="0">
+            <a:pPr marL="0" indent="0">
               <a:buNone/>
             </a:pPr>
             <a:r>
@@ -15893,6 +15801,13 @@
             <a:prstDash val="solid"/>
           </a:ln>
         </p:spPr>
+        <p:txBody>
+          <a:bodyPr/>
+          <a:lstStyle/>
+          <a:p>
+            <a:endParaRPr lang="de-DE"/>
+          </a:p>
+        </p:txBody>
       </p:sp>
       <p:sp>
         <p:nvSpPr>
@@ -15915,7 +15830,7 @@
           <a:bodyPr wrap="square" lIns="0" tIns="0" rIns="0" bIns="0" rtlCol="0" anchor="ctr"/>
           <a:lstStyle/>
           <a:p>
-            <a:pPr indent="0" marL="0">
+            <a:pPr marL="0" indent="0">
               <a:buNone/>
             </a:pPr>
             <a:r>
@@ -15954,7 +15869,7 @@
           <a:bodyPr wrap="square" lIns="0" tIns="0" rIns="0" bIns="0" rtlCol="0" anchor="t"/>
           <a:lstStyle/>
           <a:p>
-            <a:pPr indent="0" marL="0">
+            <a:pPr marL="0" indent="0">
               <a:spcAft>
                 <a:spcPts val="400"/>
               </a:spcAft>
@@ -15974,7 +15889,7 @@
             <a:endParaRPr lang="en-US" sz="1600" dirty="0"/>
           </a:p>
           <a:p>
-            <a:pPr indent="0" marL="0">
+            <a:pPr marL="0" indent="0">
               <a:spcAft>
                 <a:spcPts val="400"/>
               </a:spcAft>
@@ -15994,7 +15909,7 @@
             <a:endParaRPr lang="en-US" sz="1600" dirty="0"/>
           </a:p>
           <a:p>
-            <a:pPr indent="0" marL="0">
+            <a:pPr marL="0" indent="0">
               <a:spcAft>
                 <a:spcPts val="400"/>
               </a:spcAft>
@@ -16014,7 +15929,7 @@
             <a:endParaRPr lang="en-US" sz="1600" dirty="0"/>
           </a:p>
           <a:p>
-            <a:pPr indent="0" marL="0">
+            <a:pPr marL="0" indent="0">
               <a:spcAft>
                 <a:spcPts val="400"/>
               </a:spcAft>
@@ -16139,7 +16054,7 @@
             <a:endParaRPr lang="en-US" sz="1600" dirty="0"/>
           </a:p>
           <a:p>
-            <a:pPr indent="0" marL="0">
+            <a:pPr marL="0" indent="0">
               <a:spcAft>
                 <a:spcPts val="400"/>
               </a:spcAft>
@@ -16159,7 +16074,7 @@
             <a:endParaRPr lang="en-US" sz="1600" dirty="0"/>
           </a:p>
           <a:p>
-            <a:pPr indent="0" marL="0">
+            <a:pPr marL="0" indent="0">
               <a:spcAft>
                 <a:spcPts val="400"/>
               </a:spcAft>
@@ -16179,7 +16094,7 @@
             <a:endParaRPr lang="en-US" sz="1600" dirty="0"/>
           </a:p>
           <a:p>
-            <a:pPr indent="0" marL="0">
+            <a:pPr marL="0" indent="0">
               <a:spcAft>
                 <a:spcPts val="400"/>
               </a:spcAft>
@@ -16221,7 +16136,7 @@
           <a:bodyPr wrap="square" rtlCol="0" anchor="ctr"/>
           <a:lstStyle/>
           <a:p>
-            <a:pPr algn="l" indent="0" marL="0">
+            <a:pPr marL="0" indent="0" algn="l">
               <a:buNone/>
             </a:pPr>
             <a:r>
@@ -16260,7 +16175,7 @@
           <a:bodyPr wrap="square" rtlCol="0" anchor="ctr"/>
           <a:lstStyle/>
           <a:p>
-            <a:pPr algn="r" indent="0" marL="0">
+            <a:pPr marL="0" indent="0" algn="r">
               <a:buNone/>
             </a:pPr>
             <a:r>
@@ -16294,6 +16209,7 @@
         <a:solidFill>
           <a:srgbClr val="FFFFFF"/>
         </a:solidFill>
+        <a:effectLst/>
       </p:bgPr>
     </p:bg>
     <p:spTree>
@@ -16331,7 +16247,7 @@
           <a:bodyPr wrap="square" lIns="0" tIns="0" rIns="0" bIns="0" rtlCol="0" anchor="ctr"/>
           <a:lstStyle/>
           <a:p>
-            <a:pPr indent="0" marL="0">
+            <a:pPr marL="0" indent="0">
               <a:buNone/>
             </a:pPr>
             <a:r>
@@ -16373,6 +16289,13 @@
             <a:prstDash val="solid"/>
           </a:ln>
         </p:spPr>
+        <p:txBody>
+          <a:bodyPr/>
+          <a:lstStyle/>
+          <a:p>
+            <a:endParaRPr lang="de-DE"/>
+          </a:p>
+        </p:txBody>
       </p:sp>
       <p:sp>
         <p:nvSpPr>
@@ -16395,7 +16318,7 @@
           <a:bodyPr wrap="square" lIns="0" tIns="0" rIns="0" bIns="0" rtlCol="0" anchor="ctr"/>
           <a:lstStyle/>
           <a:p>
-            <a:pPr indent="0" marL="0">
+            <a:pPr marL="0" indent="0">
               <a:buNone/>
             </a:pPr>
             <a:r>
@@ -16434,7 +16357,7 @@
           <a:bodyPr wrap="square" lIns="0" tIns="0" rIns="0" bIns="0" rtlCol="0" anchor="t"/>
           <a:lstStyle/>
           <a:p>
-            <a:pPr indent="0" marL="0">
+            <a:pPr marL="0" indent="0">
               <a:spcAft>
                 <a:spcPts val="400"/>
               </a:spcAft>
@@ -16538,7 +16461,7 @@
             <a:endParaRPr lang="en-US" sz="1600" dirty="0"/>
           </a:p>
           <a:p>
-            <a:pPr indent="0" marL="0">
+            <a:pPr marL="0" indent="0">
               <a:spcAft>
                 <a:spcPts val="400"/>
               </a:spcAft>
@@ -16558,7 +16481,7 @@
             <a:endParaRPr lang="en-US" sz="1600" dirty="0"/>
           </a:p>
           <a:p>
-            <a:pPr indent="0" marL="0">
+            <a:pPr marL="0" indent="0">
               <a:spcAft>
                 <a:spcPts val="400"/>
               </a:spcAft>
@@ -16641,7 +16564,7 @@
             <a:endParaRPr lang="en-US" sz="1600" dirty="0"/>
           </a:p>
           <a:p>
-            <a:pPr indent="0" marL="0">
+            <a:pPr marL="0" indent="0">
               <a:spcAft>
                 <a:spcPts val="400"/>
               </a:spcAft>
@@ -16661,7 +16584,7 @@
             <a:endParaRPr lang="en-US" sz="1600" dirty="0"/>
           </a:p>
           <a:p>
-            <a:pPr indent="0" marL="0">
+            <a:pPr marL="0" indent="0">
               <a:spcAft>
                 <a:spcPts val="400"/>
               </a:spcAft>
@@ -16744,83 +16667,12 @@
             <a:endParaRPr lang="en-US" sz="1600" dirty="0"/>
           </a:p>
           <a:p>
-            <a:pPr indent="0" marL="0">
-              <a:spcAft>
-                <a:spcPts val="400"/>
-              </a:spcAft>
-              <a:buNone/>
-            </a:pPr>
-            <a:r>
-              <a:rPr lang="en-US" sz="700" dirty="0">
-                <a:solidFill>
-                  <a:srgbClr val="000000"/>
-                </a:solidFill>
-                <a:latin typeface="Inter" pitchFamily="34" charset="0"/>
-                <a:ea typeface="Inter" pitchFamily="34" charset="-122"/>
-                <a:cs typeface="Inter" pitchFamily="34" charset="-120"/>
-              </a:rPr>
-              <a:t> </a:t>
-            </a:r>
-            <a:endParaRPr lang="en-US" sz="1600" dirty="0"/>
-          </a:p>
-          <a:p>
-            <a:pPr indent="0" marL="0">
-              <a:spcAft>
-                <a:spcPts val="400"/>
-              </a:spcAft>
-              <a:buNone/>
-            </a:pPr>
-            <a:r>
-              <a:rPr lang="en-US" sz="2800" b="1" dirty="0">
-                <a:solidFill>
-                  <a:srgbClr val="000000"/>
-                </a:solidFill>
-                <a:latin typeface="Inter" pitchFamily="34" charset="0"/>
-                <a:ea typeface="Inter" pitchFamily="34" charset="-122"/>
-                <a:cs typeface="Inter" pitchFamily="34" charset="-120"/>
-              </a:rPr>
-              <a:t>Questions?</a:t>
-            </a:r>
-            <a:endParaRPr lang="en-US" sz="1600" dirty="0"/>
-          </a:p>
-          <a:p>
-            <a:pPr indent="0" marL="0">
-              <a:spcAft>
-                <a:spcPts val="400"/>
-              </a:spcAft>
-              <a:buNone/>
-            </a:pPr>
-            <a:r>
-              <a:rPr lang="en-US" sz="700" dirty="0">
-                <a:solidFill>
-                  <a:srgbClr val="000000"/>
-                </a:solidFill>
-                <a:latin typeface="Inter" pitchFamily="34" charset="0"/>
-                <a:ea typeface="Inter" pitchFamily="34" charset="-122"/>
-                <a:cs typeface="Inter" pitchFamily="34" charset="-120"/>
-              </a:rPr>
-              <a:t> </a:t>
-            </a:r>
-            <a:endParaRPr lang="en-US" sz="1600" dirty="0"/>
-          </a:p>
-          <a:p>
-            <a:pPr indent="0" marL="0">
-              <a:spcAft>
-                <a:spcPts val="400"/>
-              </a:spcAft>
-              <a:buNone/>
-            </a:pPr>
-            <a:r>
-              <a:rPr lang="en-US" sz="900" dirty="0">
-                <a:solidFill>
-                  <a:srgbClr val="CCCCCC"/>
-                </a:solidFill>
-                <a:latin typeface="Inter" pitchFamily="34" charset="0"/>
-                <a:ea typeface="Inter" pitchFamily="34" charset="-122"/>
-                <a:cs typeface="Inter" pitchFamily="34" charset="-120"/>
-              </a:rPr>
-              <a:t>© 2026 Elias Karabelas · NumeriCor GmbH · All rights reserved · No warranties expressed or implied</a:t>
-            </a:r>
+            <a:pPr marL="0" indent="0">
+              <a:spcAft>
+                <a:spcPts val="400"/>
+              </a:spcAft>
+              <a:buNone/>
+            </a:pPr>
             <a:endParaRPr lang="en-US" sz="1600" dirty="0"/>
           </a:p>
         </p:txBody>
@@ -16846,7 +16698,7 @@
           <a:bodyPr wrap="square" rtlCol="0" anchor="ctr"/>
           <a:lstStyle/>
           <a:p>
-            <a:pPr algn="l" indent="0" marL="0">
+            <a:pPr marL="0" indent="0" algn="l">
               <a:buNone/>
             </a:pPr>
             <a:r>
@@ -16885,7 +16737,7 @@
           <a:bodyPr wrap="square" rtlCol="0" anchor="ctr"/>
           <a:lstStyle/>
           <a:p>
-            <a:pPr algn="r" indent="0" marL="0">
+            <a:pPr marL="0" indent="0" algn="r">
               <a:buNone/>
             </a:pPr>
             <a:r>
@@ -16900,6 +16752,56 @@
               <a:t>35</a:t>
             </a:r>
             <a:endParaRPr lang="en-US" sz="1100" dirty="0"/>
+          </a:p>
+        </p:txBody>
+      </p:sp>
+      <p:sp>
+        <p:nvSpPr>
+          <p:cNvPr id="8" name="Textfeld 7">
+            <a:extLst>
+              <a:ext uri="{FF2B5EF4-FFF2-40B4-BE49-F238E27FC236}">
+                <a16:creationId xmlns:a16="http://schemas.microsoft.com/office/drawing/2014/main" id="{1CB0C712-AE0A-0A5A-402D-C2F9C4CA8F4A}"/>
+              </a:ext>
+            </a:extLst>
+          </p:cNvPr>
+          <p:cNvSpPr txBox="1"/>
+          <p:nvPr/>
+        </p:nvSpPr>
+        <p:spPr>
+          <a:xfrm>
+            <a:off x="8260584" y="2967335"/>
+            <a:ext cx="2803656" cy="923330"/>
+          </a:xfrm>
+          <a:prstGeom prst="rect">
+            <a:avLst/>
+          </a:prstGeom>
+          <a:noFill/>
+        </p:spPr>
+        <p:txBody>
+          <a:bodyPr wrap="square" rtlCol="0">
+            <a:spAutoFit/>
+          </a:bodyPr>
+          <a:lstStyle/>
+          <a:p>
+            <a:r>
+              <a:rPr lang="en-US" sz="3600" b="1" dirty="0">
+                <a:solidFill>
+                  <a:srgbClr val="000000"/>
+                </a:solidFill>
+                <a:latin typeface="Inter" panose="02000503000000020004" pitchFamily="2" charset="0"/>
+                <a:ea typeface="Inter" panose="02000503000000020004" pitchFamily="2" charset="0"/>
+                <a:cs typeface="Inter" panose="02000503000000020004" pitchFamily="2" charset="0"/>
+              </a:rPr>
+              <a:t>Questions?</a:t>
+            </a:r>
+            <a:endParaRPr lang="en-US" sz="3600" dirty="0">
+              <a:latin typeface="Inter" panose="02000503000000020004" pitchFamily="2" charset="0"/>
+              <a:ea typeface="Inter" panose="02000503000000020004" pitchFamily="2" charset="0"/>
+              <a:cs typeface="Inter" panose="02000503000000020004" pitchFamily="2" charset="0"/>
+            </a:endParaRPr>
+          </a:p>
+          <a:p>
+            <a:endParaRPr lang="de-DE" dirty="0"/>
           </a:p>
         </p:txBody>
       </p:sp>
@@ -16908,6 +16810,84 @@
   <p:clrMapOvr>
     <a:masterClrMapping/>
   </p:clrMapOvr>
+  <p:timing>
+    <p:tnLst>
+      <p:par>
+        <p:cTn id="1" dur="indefinite" restart="never" nodeType="tmRoot">
+          <p:childTnLst>
+            <p:seq concurrent="1" nextAc="seek">
+              <p:cTn id="2" dur="indefinite" nodeType="mainSeq">
+                <p:childTnLst>
+                  <p:par>
+                    <p:cTn id="3" fill="hold">
+                      <p:stCondLst>
+                        <p:cond delay="indefinite"/>
+                      </p:stCondLst>
+                      <p:childTnLst>
+                        <p:par>
+                          <p:cTn id="4" fill="hold">
+                            <p:stCondLst>
+                              <p:cond delay="0"/>
+                            </p:stCondLst>
+                            <p:childTnLst>
+                              <p:par>
+                                <p:cTn id="5" presetID="1" presetClass="entr" presetSubtype="0" fill="hold" grpId="0" nodeType="clickEffect">
+                                  <p:stCondLst>
+                                    <p:cond delay="0"/>
+                                  </p:stCondLst>
+                                  <p:childTnLst>
+                                    <p:set>
+                                      <p:cBhvr>
+                                        <p:cTn id="6" dur="1" fill="hold">
+                                          <p:stCondLst>
+                                            <p:cond delay="0"/>
+                                          </p:stCondLst>
+                                        </p:cTn>
+                                        <p:tgtEl>
+                                          <p:spTgt spid="8"/>
+                                        </p:tgtEl>
+                                        <p:attrNameLst>
+                                          <p:attrName>style.visibility</p:attrName>
+                                        </p:attrNameLst>
+                                      </p:cBhvr>
+                                      <p:to>
+                                        <p:strVal val="visible"/>
+                                      </p:to>
+                                    </p:set>
+                                  </p:childTnLst>
+                                </p:cTn>
+                              </p:par>
+                            </p:childTnLst>
+                          </p:cTn>
+                        </p:par>
+                      </p:childTnLst>
+                    </p:cTn>
+                  </p:par>
+                </p:childTnLst>
+              </p:cTn>
+              <p:prevCondLst>
+                <p:cond evt="onPrev" delay="0">
+                  <p:tgtEl>
+                    <p:sldTgt/>
+                  </p:tgtEl>
+                </p:cond>
+              </p:prevCondLst>
+              <p:nextCondLst>
+                <p:cond evt="onNext" delay="0">
+                  <p:tgtEl>
+                    <p:sldTgt/>
+                  </p:tgtEl>
+                </p:cond>
+              </p:nextCondLst>
+            </p:seq>
+          </p:childTnLst>
+        </p:cTn>
+      </p:par>
+    </p:tnLst>
+    <p:bldLst>
+      <p:bldP spid="8" grpId="0"/>
+    </p:bldLst>
+  </p:timing>
 </p:sld>
 </file>
 
@@ -16919,6 +16899,7 @@
         <a:solidFill>
           <a:srgbClr val="FFFFFF"/>
         </a:solidFill>
+        <a:effectLst/>
       </p:bgPr>
     </p:bg>
     <p:spTree>
@@ -16956,7 +16937,7 @@
           <a:bodyPr wrap="square" lIns="0" tIns="0" rIns="0" bIns="0" rtlCol="0" anchor="ctr"/>
           <a:lstStyle/>
           <a:p>
-            <a:pPr indent="0" marL="0">
+            <a:pPr marL="0" indent="0">
               <a:buNone/>
             </a:pPr>
             <a:r>
@@ -16998,6 +16979,13 @@
             <a:prstDash val="solid"/>
           </a:ln>
         </p:spPr>
+        <p:txBody>
+          <a:bodyPr/>
+          <a:lstStyle/>
+          <a:p>
+            <a:endParaRPr lang="de-DE"/>
+          </a:p>
+        </p:txBody>
       </p:sp>
       <p:sp>
         <p:nvSpPr>
@@ -17020,7 +17008,7 @@
           <a:bodyPr wrap="square" lIns="0" tIns="0" rIns="0" bIns="0" rtlCol="0" anchor="ctr"/>
           <a:lstStyle/>
           <a:p>
-            <a:pPr indent="0" marL="0">
+            <a:pPr marL="0" indent="0">
               <a:buNone/>
             </a:pPr>
             <a:r>
@@ -17059,7 +17047,7 @@
           <a:bodyPr wrap="square" lIns="0" tIns="0" rIns="0" bIns="0" rtlCol="0" anchor="t"/>
           <a:lstStyle/>
           <a:p>
-            <a:pPr indent="0" marL="0">
+            <a:pPr marL="0" indent="0">
               <a:spcAft>
                 <a:spcPts val="400"/>
               </a:spcAft>
@@ -17074,12 +17062,12 @@
                 <a:ea typeface="Inter" pitchFamily="34" charset="-122"/>
                 <a:cs typeface="Inter" pitchFamily="34" charset="-120"/>
               </a:rPr>
-              <a:t>Claude Code is Anthropic’s command-line tool that brings Claude directly into your development workflow. It reads your codebase, edits files, runs commands, and manages git—all through natural language.</a:t>
-            </a:r>
-            <a:endParaRPr lang="en-US" sz="1600" dirty="0"/>
-          </a:p>
-          <a:p>
-            <a:pPr indent="0" marL="0">
+              <a:t>A CLI from Anthropic that puts a Claude session inside your project directory. It reads files, writes patches, runs shell commands, and works with git — driven from a prompt, not a chat window in a browser.</a:t>
+            </a:r>
+            <a:endParaRPr lang="en-US" sz="1600" dirty="0"/>
+          </a:p>
+          <a:p>
+            <a:pPr marL="0" indent="0">
               <a:spcAft>
                 <a:spcPts val="400"/>
               </a:spcAft>
@@ -17099,7 +17087,7 @@
             <a:endParaRPr lang="en-US" sz="1600" dirty="0"/>
           </a:p>
           <a:p>
-            <a:pPr indent="0" marL="0">
+            <a:pPr marL="0" indent="0">
               <a:spcAft>
                 <a:spcPts val="400"/>
               </a:spcAft>
@@ -17114,7 +17102,7 @@
                 <a:ea typeface="Inter" pitchFamily="34" charset="-122"/>
                 <a:cs typeface="Inter" pitchFamily="34" charset="-120"/>
               </a:rPr>
-              <a:t>Key capabilities</a:t>
+              <a:t>What it actually does</a:t>
             </a:r>
             <a:endParaRPr lang="en-US" sz="1600" dirty="0"/>
           </a:p>
@@ -17135,7 +17123,7 @@
                 <a:ea typeface="Inter" pitchFamily="34" charset="-122"/>
                 <a:cs typeface="Inter" pitchFamily="34" charset="-120"/>
               </a:rPr>
-              <a:t>Full codebase awareness — understands project structure and dependencies</a:t>
+              <a:t>Reads your repo — opens files, follows imports, greps for symbols</a:t>
             </a:r>
             <a:endParaRPr lang="en-US" sz="1600" dirty="0"/>
           </a:p>
@@ -17156,7 +17144,7 @@
                 <a:ea typeface="Inter" pitchFamily="34" charset="-122"/>
                 <a:cs typeface="Inter" pitchFamily="34" charset="-120"/>
               </a:rPr>
-              <a:t>File editing — creates, modifies, and refactors code across multiple files</a:t>
+              <a:t>Edits code — writes diffs across multiple files in one turn</a:t>
             </a:r>
             <a:endParaRPr lang="en-US" sz="1600" dirty="0"/>
           </a:p>
@@ -17177,7 +17165,7 @@
                 <a:ea typeface="Inter" pitchFamily="34" charset="-122"/>
                 <a:cs typeface="Inter" pitchFamily="34" charset="-120"/>
               </a:rPr>
-              <a:t>Shell integration — runs tests, builds, lints, and git commands</a:t>
+              <a:t>Runs your toolchain — tests, builds, linters, git, whatever is on PATH</a:t>
             </a:r>
             <a:endParaRPr lang="en-US" sz="1600" dirty="0"/>
           </a:p>
@@ -17198,7 +17186,7 @@
                 <a:ea typeface="Inter" pitchFamily="34" charset="-122"/>
                 <a:cs typeface="Inter" pitchFamily="34" charset="-120"/>
               </a:rPr>
-              <a:t>Multi-agent workflows — spawns subagents for parallel tasks</a:t>
+              <a:t>Spawns subagents — parallel workers for independent tasks</a:t>
             </a:r>
             <a:endParaRPr lang="en-US" sz="1600" dirty="0"/>
           </a:p>
@@ -17219,7 +17207,7 @@
                 <a:ea typeface="Inter" pitchFamily="34" charset="-122"/>
                 <a:cs typeface="Inter" pitchFamily="34" charset="-120"/>
               </a:rPr>
-              <a:t>Extended thinking — deep reasoning for complex architectural decisions</a:t>
+              <a:t>Thinks longer on demand — extended reasoning when you ask for it</a:t>
             </a:r>
             <a:endParaRPr lang="en-US" sz="1600" dirty="0"/>
           </a:p>
@@ -17246,7 +17234,7 @@
           <a:bodyPr wrap="square" rtlCol="0" anchor="ctr"/>
           <a:lstStyle/>
           <a:p>
-            <a:pPr algn="l" indent="0" marL="0">
+            <a:pPr marL="0" indent="0" algn="l">
               <a:buNone/>
             </a:pPr>
             <a:r>
@@ -17285,7 +17273,7 @@
           <a:bodyPr wrap="square" rtlCol="0" anchor="ctr"/>
           <a:lstStyle/>
           <a:p>
-            <a:pPr algn="r" indent="0" marL="0">
+            <a:pPr marL="0" indent="0" algn="r">
               <a:buNone/>
             </a:pPr>
             <a:r>
@@ -17319,6 +17307,7 @@
         <a:solidFill>
           <a:srgbClr val="FFFFFF"/>
         </a:solidFill>
+        <a:effectLst/>
       </p:bgPr>
     </p:bg>
     <p:spTree>
@@ -17356,7 +17345,7 @@
           <a:bodyPr wrap="square" lIns="0" tIns="0" rIns="0" bIns="0" rtlCol="0" anchor="ctr"/>
           <a:lstStyle/>
           <a:p>
-            <a:pPr indent="0" marL="0">
+            <a:pPr marL="0" indent="0">
               <a:buNone/>
             </a:pPr>
             <a:r>
@@ -17398,6 +17387,13 @@
             <a:prstDash val="solid"/>
           </a:ln>
         </p:spPr>
+        <p:txBody>
+          <a:bodyPr/>
+          <a:lstStyle/>
+          <a:p>
+            <a:endParaRPr lang="de-DE"/>
+          </a:p>
+        </p:txBody>
       </p:sp>
       <p:sp>
         <p:nvSpPr>
@@ -17420,7 +17416,7 @@
           <a:bodyPr wrap="square" lIns="0" tIns="0" rIns="0" bIns="0" rtlCol="0" anchor="ctr"/>
           <a:lstStyle/>
           <a:p>
-            <a:pPr indent="0" marL="0">
+            <a:pPr marL="0" indent="0">
               <a:buNone/>
             </a:pPr>
             <a:r>
@@ -17459,7 +17455,7 @@
           <a:bodyPr wrap="square" lIns="0" tIns="0" rIns="0" bIns="0" rtlCol="0" anchor="t"/>
           <a:lstStyle/>
           <a:p>
-            <a:pPr indent="0" marL="0">
+            <a:pPr marL="0" indent="0">
               <a:spcAft>
                 <a:spcPts val="400"/>
               </a:spcAft>
@@ -17500,7 +17496,7 @@
             <a:endParaRPr lang="en-US" sz="1600" dirty="0"/>
           </a:p>
           <a:p>
-            <a:pPr indent="0" marL="0">
+            <a:pPr marL="0" indent="0">
               <a:spcAft>
                 <a:spcPts val="400"/>
               </a:spcAft>
@@ -17520,7 +17516,7 @@
             <a:endParaRPr lang="en-US" sz="1600" dirty="0"/>
           </a:p>
           <a:p>
-            <a:pPr indent="0" marL="0">
+            <a:pPr marL="0" indent="0">
               <a:spcAft>
                 <a:spcPts val="400"/>
               </a:spcAft>
@@ -17540,7 +17536,7 @@
             <a:endParaRPr lang="en-US" sz="1600" dirty="0"/>
           </a:p>
           <a:p>
-            <a:pPr indent="0" marL="0">
+            <a:pPr marL="0" indent="0">
               <a:spcAft>
                 <a:spcPts val="400"/>
               </a:spcAft>
@@ -17563,7 +17559,7 @@
             <a:endParaRPr lang="en-US" sz="1600" dirty="0"/>
           </a:p>
           <a:p>
-            <a:pPr indent="0" marL="0">
+            <a:pPr marL="0" indent="0">
               <a:spcAft>
                 <a:spcPts val="400"/>
               </a:spcAft>
@@ -17583,7 +17579,7 @@
             <a:endParaRPr lang="en-US" sz="1600" dirty="0"/>
           </a:p>
           <a:p>
-            <a:pPr indent="0" marL="0">
+            <a:pPr marL="0" indent="0">
               <a:spcAft>
                 <a:spcPts val="400"/>
               </a:spcAft>
@@ -17603,7 +17599,7 @@
             <a:endParaRPr lang="en-US" sz="1600" dirty="0"/>
           </a:p>
           <a:p>
-            <a:pPr indent="0" marL="0">
+            <a:pPr marL="0" indent="0">
               <a:spcAft>
                 <a:spcPts val="400"/>
               </a:spcAft>
@@ -17626,7 +17622,7 @@
             <a:endParaRPr lang="en-US" sz="1600" dirty="0"/>
           </a:p>
           <a:p>
-            <a:pPr indent="0" marL="0">
+            <a:pPr marL="0" indent="0">
               <a:spcAft>
                 <a:spcPts val="400"/>
               </a:spcAft>
@@ -17646,7 +17642,7 @@
             <a:endParaRPr lang="en-US" sz="1600" dirty="0"/>
           </a:p>
           <a:p>
-            <a:pPr indent="0" marL="0">
+            <a:pPr marL="0" indent="0">
               <a:spcAft>
                 <a:spcPts val="400"/>
               </a:spcAft>
@@ -17666,7 +17662,7 @@
             <a:endParaRPr lang="en-US" sz="1600" dirty="0"/>
           </a:p>
           <a:p>
-            <a:pPr indent="0" marL="0">
+            <a:pPr marL="0" indent="0">
               <a:spcAft>
                 <a:spcPts val="400"/>
               </a:spcAft>
@@ -17686,7 +17682,7 @@
             <a:endParaRPr lang="en-US" sz="1600" dirty="0"/>
           </a:p>
           <a:p>
-            <a:pPr indent="0" marL="0">
+            <a:pPr marL="0" indent="0">
               <a:spcAft>
                 <a:spcPts val="400"/>
               </a:spcAft>
@@ -17728,7 +17724,7 @@
           <a:bodyPr wrap="square" rtlCol="0" anchor="ctr"/>
           <a:lstStyle/>
           <a:p>
-            <a:pPr algn="l" indent="0" marL="0">
+            <a:pPr marL="0" indent="0" algn="l">
               <a:buNone/>
             </a:pPr>
             <a:r>
@@ -17767,7 +17763,7 @@
           <a:bodyPr wrap="square" rtlCol="0" anchor="ctr"/>
           <a:lstStyle/>
           <a:p>
-            <a:pPr algn="r" indent="0" marL="0">
+            <a:pPr marL="0" indent="0" algn="r">
               <a:buNone/>
             </a:pPr>
             <a:r>
@@ -17801,6 +17797,7 @@
         <a:solidFill>
           <a:srgbClr val="F6F4EF"/>
         </a:solidFill>
+        <a:effectLst/>
       </p:bgPr>
     </p:bg>
     <p:spTree>
@@ -17838,7 +17835,7 @@
           <a:bodyPr wrap="square" lIns="0" tIns="0" rIns="0" bIns="0" rtlCol="0" anchor="ctr"/>
           <a:lstStyle/>
           <a:p>
-            <a:pPr indent="0" marL="0">
+            <a:pPr marL="0" indent="0">
               <a:buNone/>
             </a:pPr>
             <a:r>
@@ -17880,6 +17877,13 @@
             <a:prstDash val="solid"/>
           </a:ln>
         </p:spPr>
+        <p:txBody>
+          <a:bodyPr/>
+          <a:lstStyle/>
+          <a:p>
+            <a:endParaRPr lang="de-DE"/>
+          </a:p>
+        </p:txBody>
       </p:sp>
       <p:sp>
         <p:nvSpPr>
@@ -17902,7 +17906,7 @@
           <a:bodyPr wrap="square" lIns="0" tIns="0" rIns="0" bIns="0" rtlCol="0" anchor="ctr"/>
           <a:lstStyle/>
           <a:p>
-            <a:pPr indent="0" marL="0">
+            <a:pPr marL="0" indent="0">
               <a:buNone/>
             </a:pPr>
             <a:r>
@@ -17941,7 +17945,7 @@
           <a:bodyPr wrap="square" lIns="0" tIns="0" rIns="0" bIns="0" rtlCol="0" anchor="t"/>
           <a:lstStyle/>
           <a:p>
-            <a:pPr indent="0" marL="0">
+            <a:pPr marL="0" indent="0">
               <a:spcAft>
                 <a:spcPts val="400"/>
               </a:spcAft>
@@ -17961,7 +17965,7 @@
             <a:endParaRPr lang="en-US" sz="1600" dirty="0"/>
           </a:p>
           <a:p>
-            <a:pPr indent="0" marL="0">
+            <a:pPr marL="0" indent="0">
               <a:spcAft>
                 <a:spcPts val="400"/>
               </a:spcAft>
@@ -17984,7 +17988,7 @@
             <a:endParaRPr lang="en-US" sz="1600" dirty="0"/>
           </a:p>
           <a:p>
-            <a:pPr indent="0" marL="0">
+            <a:pPr marL="0" indent="0">
               <a:spcAft>
                 <a:spcPts val="400"/>
               </a:spcAft>
@@ -18004,7 +18008,7 @@
             <a:endParaRPr lang="en-US" sz="1600" dirty="0"/>
           </a:p>
           <a:p>
-            <a:pPr indent="0" marL="0">
+            <a:pPr marL="0" indent="0">
               <a:spcAft>
                 <a:spcPts val="400"/>
               </a:spcAft>
@@ -18024,7 +18028,7 @@
             <a:endParaRPr lang="en-US" sz="1600" dirty="0"/>
           </a:p>
           <a:p>
-            <a:pPr indent="0" marL="0">
+            <a:pPr marL="0" indent="0">
               <a:spcAft>
                 <a:spcPts val="400"/>
               </a:spcAft>
@@ -18044,7 +18048,7 @@
             <a:endParaRPr lang="en-US" sz="1600" dirty="0"/>
           </a:p>
           <a:p>
-            <a:pPr indent="0" marL="0">
+            <a:pPr marL="0" indent="0">
               <a:spcAft>
                 <a:spcPts val="400"/>
               </a:spcAft>
@@ -18067,7 +18071,7 @@
             <a:endParaRPr lang="en-US" sz="1600" dirty="0"/>
           </a:p>
           <a:p>
-            <a:pPr indent="0" marL="0">
+            <a:pPr marL="0" indent="0">
               <a:spcAft>
                 <a:spcPts val="400"/>
               </a:spcAft>
@@ -18087,7 +18091,7 @@
             <a:endParaRPr lang="en-US" sz="1600" dirty="0"/>
           </a:p>
           <a:p>
-            <a:pPr indent="0" marL="0">
+            <a:pPr marL="0" indent="0">
               <a:spcAft>
                 <a:spcPts val="400"/>
               </a:spcAft>
@@ -18107,7 +18111,7 @@
             <a:endParaRPr lang="en-US" sz="1600" dirty="0"/>
           </a:p>
           <a:p>
-            <a:pPr indent="0" marL="0">
+            <a:pPr marL="0" indent="0">
               <a:spcAft>
                 <a:spcPts val="400"/>
               </a:spcAft>
@@ -18127,7 +18131,7 @@
             <a:endParaRPr lang="en-US" sz="1600" dirty="0"/>
           </a:p>
           <a:p>
-            <a:pPr indent="0" marL="0">
+            <a:pPr marL="0" indent="0">
               <a:spcAft>
                 <a:spcPts val="400"/>
               </a:spcAft>
@@ -18150,7 +18154,7 @@
             <a:endParaRPr lang="en-US" sz="1600" dirty="0"/>
           </a:p>
           <a:p>
-            <a:pPr indent="0" marL="0">
+            <a:pPr marL="0" indent="0">
               <a:spcAft>
                 <a:spcPts val="400"/>
               </a:spcAft>
@@ -18173,7 +18177,7 @@
             <a:endParaRPr lang="en-US" sz="1600" dirty="0"/>
           </a:p>
           <a:p>
-            <a:pPr indent="0" marL="0">
+            <a:pPr marL="0" indent="0">
               <a:spcAft>
                 <a:spcPts val="400"/>
               </a:spcAft>
@@ -18196,7 +18200,7 @@
             <a:endParaRPr lang="en-US" sz="1600" dirty="0"/>
           </a:p>
           <a:p>
-            <a:pPr indent="0" marL="0">
+            <a:pPr marL="0" indent="0">
               <a:spcAft>
                 <a:spcPts val="400"/>
               </a:spcAft>
@@ -18216,7 +18220,7 @@
             <a:endParaRPr lang="en-US" sz="1600" dirty="0"/>
           </a:p>
           <a:p>
-            <a:pPr indent="0" marL="0">
+            <a:pPr marL="0" indent="0">
               <a:spcAft>
                 <a:spcPts val="400"/>
               </a:spcAft>
@@ -18258,7 +18262,7 @@
           <a:bodyPr wrap="square" rtlCol="0" anchor="ctr"/>
           <a:lstStyle/>
           <a:p>
-            <a:pPr algn="l" indent="0" marL="0">
+            <a:pPr marL="0" indent="0" algn="l">
               <a:buNone/>
             </a:pPr>
             <a:r>
@@ -18297,7 +18301,7 @@
           <a:bodyPr wrap="square" rtlCol="0" anchor="ctr"/>
           <a:lstStyle/>
           <a:p>
-            <a:pPr algn="r" indent="0" marL="0">
+            <a:pPr marL="0" indent="0" algn="r">
               <a:buNone/>
             </a:pPr>
             <a:r>
@@ -18331,6 +18335,7 @@
         <a:solidFill>
           <a:srgbClr val="FFFFFF"/>
         </a:solidFill>
+        <a:effectLst/>
       </p:bgPr>
     </p:bg>
     <p:spTree>
@@ -18368,7 +18373,7 @@
           <a:bodyPr wrap="square" lIns="0" tIns="0" rIns="0" bIns="0" rtlCol="0" anchor="ctr"/>
           <a:lstStyle/>
           <a:p>
-            <a:pPr indent="0" marL="0">
+            <a:pPr marL="0" indent="0">
               <a:buNone/>
             </a:pPr>
             <a:r>
@@ -18410,6 +18415,13 @@
             <a:prstDash val="solid"/>
           </a:ln>
         </p:spPr>
+        <p:txBody>
+          <a:bodyPr/>
+          <a:lstStyle/>
+          <a:p>
+            <a:endParaRPr lang="de-DE"/>
+          </a:p>
+        </p:txBody>
       </p:sp>
       <p:sp>
         <p:nvSpPr>
@@ -18432,7 +18444,7 @@
           <a:bodyPr wrap="square" lIns="0" tIns="0" rIns="0" bIns="0" rtlCol="0" anchor="ctr"/>
           <a:lstStyle/>
           <a:p>
-            <a:pPr indent="0" marL="0">
+            <a:pPr marL="0" indent="0">
               <a:buNone/>
             </a:pPr>
             <a:r>
@@ -18471,7 +18483,7 @@
           <a:bodyPr wrap="square" lIns="0" tIns="0" rIns="0" bIns="0" rtlCol="0" anchor="t"/>
           <a:lstStyle/>
           <a:p>
-            <a:pPr indent="0" marL="0">
+            <a:pPr marL="0" indent="0">
               <a:spcAft>
                 <a:spcPts val="400"/>
               </a:spcAft>
@@ -18638,7 +18650,7 @@
             <a:endParaRPr lang="en-US" sz="1600" dirty="0"/>
           </a:p>
           <a:p>
-            <a:pPr indent="0" marL="0">
+            <a:pPr marL="0" indent="0">
               <a:spcAft>
                 <a:spcPts val="400"/>
               </a:spcAft>
@@ -18658,7 +18670,7 @@
             <a:endParaRPr lang="en-US" sz="1600" dirty="0"/>
           </a:p>
           <a:p>
-            <a:pPr indent="0" marL="0">
+            <a:pPr marL="0" indent="0">
               <a:spcAft>
                 <a:spcPts val="400"/>
               </a:spcAft>
@@ -18741,7 +18753,7 @@
             <a:endParaRPr lang="en-US" sz="1600" dirty="0"/>
           </a:p>
           <a:p>
-            <a:pPr indent="0" marL="0">
+            <a:pPr marL="0" indent="0">
               <a:spcAft>
                 <a:spcPts val="400"/>
               </a:spcAft>
@@ -18761,7 +18773,7 @@
             <a:endParaRPr lang="en-US" sz="1600" dirty="0"/>
           </a:p>
           <a:p>
-            <a:pPr indent="0" marL="0">
+            <a:pPr marL="0" indent="0">
               <a:spcAft>
                 <a:spcPts val="400"/>
               </a:spcAft>
@@ -18845,7 +18857,7 @@
           <a:bodyPr wrap="square" rtlCol="0" anchor="ctr"/>
           <a:lstStyle/>
           <a:p>
-            <a:pPr algn="l" indent="0" marL="0">
+            <a:pPr marL="0" indent="0" algn="l">
               <a:buNone/>
             </a:pPr>
             <a:r>
@@ -18884,7 +18896,7 @@
           <a:bodyPr wrap="square" rtlCol="0" anchor="ctr"/>
           <a:lstStyle/>
           <a:p>
-            <a:pPr algn="r" indent="0" marL="0">
+            <a:pPr marL="0" indent="0" algn="r">
               <a:buNone/>
             </a:pPr>
             <a:r>
@@ -18918,6 +18930,7 @@
         <a:solidFill>
           <a:srgbClr val="FFFFFF"/>
         </a:solidFill>
+        <a:effectLst/>
       </p:bgPr>
     </p:bg>
     <p:spTree>
@@ -18955,7 +18968,7 @@
           <a:bodyPr wrap="square" lIns="0" tIns="0" rIns="0" bIns="0" rtlCol="0" anchor="ctr"/>
           <a:lstStyle/>
           <a:p>
-            <a:pPr indent="0" marL="0">
+            <a:pPr marL="0" indent="0">
               <a:buNone/>
             </a:pPr>
             <a:r>
@@ -18997,6 +19010,13 @@
             <a:prstDash val="solid"/>
           </a:ln>
         </p:spPr>
+        <p:txBody>
+          <a:bodyPr/>
+          <a:lstStyle/>
+          <a:p>
+            <a:endParaRPr lang="de-DE"/>
+          </a:p>
+        </p:txBody>
       </p:sp>
       <p:sp>
         <p:nvSpPr>
@@ -19019,7 +19039,7 @@
           <a:bodyPr wrap="square" lIns="0" tIns="0" rIns="0" bIns="0" rtlCol="0" anchor="ctr"/>
           <a:lstStyle/>
           <a:p>
-            <a:pPr indent="0" marL="0">
+            <a:pPr marL="0" indent="0">
               <a:buNone/>
             </a:pPr>
             <a:r>
@@ -19058,7 +19078,7 @@
           <a:bodyPr wrap="square" lIns="0" tIns="0" rIns="0" bIns="0" rtlCol="0" anchor="t"/>
           <a:lstStyle/>
           <a:p>
-            <a:pPr indent="0" marL="0">
+            <a:pPr marL="0" indent="0">
               <a:spcAft>
                 <a:spcPts val="400"/>
               </a:spcAft>
@@ -19078,7 +19098,7 @@
             <a:endParaRPr lang="en-US" sz="1600" dirty="0"/>
           </a:p>
           <a:p>
-            <a:pPr indent="0" marL="0">
+            <a:pPr marL="0" indent="0">
               <a:spcAft>
                 <a:spcPts val="400"/>
               </a:spcAft>
@@ -19101,7 +19121,7 @@
             <a:endParaRPr lang="en-US" sz="1600" dirty="0"/>
           </a:p>
           <a:p>
-            <a:pPr indent="0" marL="0">
+            <a:pPr marL="0" indent="0">
               <a:spcAft>
                 <a:spcPts val="400"/>
               </a:spcAft>
@@ -19121,7 +19141,7 @@
             <a:endParaRPr lang="en-US" sz="1600" dirty="0"/>
           </a:p>
           <a:p>
-            <a:pPr indent="0" marL="0">
+            <a:pPr marL="0" indent="0">
               <a:spcAft>
                 <a:spcPts val="400"/>
               </a:spcAft>
@@ -19141,7 +19161,7 @@
             <a:endParaRPr lang="en-US" sz="1600" dirty="0"/>
           </a:p>
           <a:p>
-            <a:pPr indent="0" marL="0">
+            <a:pPr marL="0" indent="0">
               <a:spcAft>
                 <a:spcPts val="400"/>
               </a:spcAft>
@@ -19224,7 +19244,7 @@
             <a:endParaRPr lang="en-US" sz="1600" dirty="0"/>
           </a:p>
           <a:p>
-            <a:pPr indent="0" marL="0">
+            <a:pPr marL="0" indent="0">
               <a:spcAft>
                 <a:spcPts val="400"/>
               </a:spcAft>
@@ -19244,7 +19264,7 @@
             <a:endParaRPr lang="en-US" sz="1600" dirty="0"/>
           </a:p>
           <a:p>
-            <a:pPr indent="0" marL="0">
+            <a:pPr marL="0" indent="0">
               <a:spcAft>
                 <a:spcPts val="400"/>
               </a:spcAft>
@@ -19264,7 +19284,7 @@
             <a:endParaRPr lang="en-US" sz="1600" dirty="0"/>
           </a:p>
           <a:p>
-            <a:pPr indent="0" marL="0">
+            <a:pPr marL="0" indent="0">
               <a:spcAft>
                 <a:spcPts val="400"/>
               </a:spcAft>
@@ -19287,7 +19307,7 @@
             <a:endParaRPr lang="en-US" sz="1600" dirty="0"/>
           </a:p>
           <a:p>
-            <a:pPr indent="0" marL="0">
+            <a:pPr marL="0" indent="0">
               <a:spcAft>
                 <a:spcPts val="400"/>
               </a:spcAft>
@@ -19329,7 +19349,7 @@
           <a:bodyPr wrap="square" rtlCol="0" anchor="ctr"/>
           <a:lstStyle/>
           <a:p>
-            <a:pPr algn="l" indent="0" marL="0">
+            <a:pPr marL="0" indent="0" algn="l">
               <a:buNone/>
             </a:pPr>
             <a:r>
@@ -19368,7 +19388,7 @@
           <a:bodyPr wrap="square" rtlCol="0" anchor="ctr"/>
           <a:lstStyle/>
           <a:p>
-            <a:pPr algn="r" indent="0" marL="0">
+            <a:pPr marL="0" indent="0" algn="r">
               <a:buNone/>
             </a:pPr>
             <a:r>
@@ -19402,6 +19422,7 @@
         <a:solidFill>
           <a:srgbClr val="FFFFFF"/>
         </a:solidFill>
+        <a:effectLst/>
       </p:bgPr>
     </p:bg>
     <p:spTree>
@@ -19439,7 +19460,7 @@
           <a:bodyPr wrap="square" lIns="0" tIns="0" rIns="0" bIns="0" rtlCol="0" anchor="ctr"/>
           <a:lstStyle/>
           <a:p>
-            <a:pPr indent="0" marL="0">
+            <a:pPr marL="0" indent="0">
               <a:buNone/>
             </a:pPr>
             <a:r>
@@ -19481,6 +19502,13 @@
             <a:prstDash val="solid"/>
           </a:ln>
         </p:spPr>
+        <p:txBody>
+          <a:bodyPr/>
+          <a:lstStyle/>
+          <a:p>
+            <a:endParaRPr lang="de-DE"/>
+          </a:p>
+        </p:txBody>
       </p:sp>
       <p:sp>
         <p:nvSpPr>
@@ -19503,7 +19531,7 @@
           <a:bodyPr wrap="square" lIns="0" tIns="0" rIns="0" bIns="0" rtlCol="0" anchor="ctr"/>
           <a:lstStyle/>
           <a:p>
-            <a:pPr indent="0" marL="0">
+            <a:pPr marL="0" indent="0">
               <a:buNone/>
             </a:pPr>
             <a:r>
@@ -19542,7 +19570,7 @@
           <a:bodyPr wrap="square" lIns="0" tIns="0" rIns="0" bIns="0" rtlCol="0" anchor="t"/>
           <a:lstStyle/>
           <a:p>
-            <a:pPr indent="0" marL="0">
+            <a:pPr marL="0" indent="0">
               <a:spcAft>
                 <a:spcPts val="400"/>
               </a:spcAft>
@@ -19562,7 +19590,7 @@
             <a:endParaRPr lang="en-US" sz="1600" dirty="0"/>
           </a:p>
           <a:p>
-            <a:pPr indent="0" marL="0">
+            <a:pPr marL="0" indent="0">
               <a:spcAft>
                 <a:spcPts val="400"/>
               </a:spcAft>
@@ -19582,7 +19610,7 @@
             <a:endParaRPr lang="en-US" sz="1600" dirty="0"/>
           </a:p>
           <a:p>
-            <a:pPr indent="0" marL="0">
+            <a:pPr marL="0" indent="0">
               <a:spcAft>
                 <a:spcPts val="400"/>
               </a:spcAft>
@@ -19602,7 +19630,7 @@
             <a:endParaRPr lang="en-US" sz="1600" dirty="0"/>
           </a:p>
           <a:p>
-            <a:pPr indent="0" marL="0">
+            <a:pPr marL="0" indent="0">
               <a:spcAft>
                 <a:spcPts val="400"/>
               </a:spcAft>
@@ -19622,7 +19650,7 @@
             <a:endParaRPr lang="en-US" sz="1600" dirty="0"/>
           </a:p>
           <a:p>
-            <a:pPr indent="0" marL="0">
+            <a:pPr marL="0" indent="0">
               <a:spcAft>
                 <a:spcPts val="400"/>
               </a:spcAft>
@@ -19642,7 +19670,7 @@
             <a:endParaRPr lang="en-US" sz="1600" dirty="0"/>
           </a:p>
           <a:p>
-            <a:pPr indent="0" marL="0">
+            <a:pPr marL="0" indent="0">
               <a:spcAft>
                 <a:spcPts val="400"/>
               </a:spcAft>
@@ -19662,7 +19690,7 @@
             <a:endParaRPr lang="en-US" sz="1600" dirty="0"/>
           </a:p>
           <a:p>
-            <a:pPr indent="0" marL="0">
+            <a:pPr marL="0" indent="0">
               <a:spcAft>
                 <a:spcPts val="400"/>
               </a:spcAft>
@@ -19682,7 +19710,7 @@
             <a:endParaRPr lang="en-US" sz="1600" dirty="0"/>
           </a:p>
           <a:p>
-            <a:pPr indent="0" marL="0">
+            <a:pPr marL="0" indent="0">
               <a:spcAft>
                 <a:spcPts val="400"/>
               </a:spcAft>
@@ -19702,7 +19730,7 @@
             <a:endParaRPr lang="en-US" sz="1600" dirty="0"/>
           </a:p>
           <a:p>
-            <a:pPr indent="0" marL="0">
+            <a:pPr marL="0" indent="0">
               <a:spcAft>
                 <a:spcPts val="400"/>
               </a:spcAft>
@@ -19722,7 +19750,7 @@
             <a:endParaRPr lang="en-US" sz="1600" dirty="0"/>
           </a:p>
           <a:p>
-            <a:pPr indent="0" marL="0">
+            <a:pPr marL="0" indent="0">
               <a:spcAft>
                 <a:spcPts val="400"/>
               </a:spcAft>
@@ -19784,7 +19812,7 @@
             <a:endParaRPr lang="en-US" sz="1600" dirty="0"/>
           </a:p>
           <a:p>
-            <a:pPr indent="0" marL="0">
+            <a:pPr marL="0" indent="0">
               <a:spcAft>
                 <a:spcPts val="400"/>
               </a:spcAft>
@@ -19826,7 +19854,7 @@
           <a:bodyPr wrap="square" rtlCol="0" anchor="ctr"/>
           <a:lstStyle/>
           <a:p>
-            <a:pPr algn="l" indent="0" marL="0">
+            <a:pPr marL="0" indent="0" algn="l">
               <a:buNone/>
             </a:pPr>
             <a:r>
@@ -19865,7 +19893,7 @@
           <a:bodyPr wrap="square" rtlCol="0" anchor="ctr"/>
           <a:lstStyle/>
           <a:p>
-            <a:pPr algn="r" indent="0" marL="0">
+            <a:pPr marL="0" indent="0" algn="r">
               <a:buNone/>
             </a:pPr>
             <a:r>
@@ -20184,4 +20212,319 @@
     </a:ext>
   </a:extLst>
 </a:theme>
+</file>
+
+<file path=ppt/theme/theme2.xml><?xml version="1.0" encoding="utf-8"?>
+<a:theme xmlns:a="http://schemas.openxmlformats.org/drawingml/2006/main" name="Office">
+  <a:themeElements>
+    <a:clrScheme name="Office">
+      <a:dk1>
+        <a:sysClr val="windowText" lastClr="000000"/>
+      </a:dk1>
+      <a:lt1>
+        <a:sysClr val="window" lastClr="FFFFFF"/>
+      </a:lt1>
+      <a:dk2>
+        <a:srgbClr val="0E2841"/>
+      </a:dk2>
+      <a:lt2>
+        <a:srgbClr val="E8E8E8"/>
+      </a:lt2>
+      <a:accent1>
+        <a:srgbClr val="156082"/>
+      </a:accent1>
+      <a:accent2>
+        <a:srgbClr val="E97132"/>
+      </a:accent2>
+      <a:accent3>
+        <a:srgbClr val="196B24"/>
+      </a:accent3>
+      <a:accent4>
+        <a:srgbClr val="0F9ED5"/>
+      </a:accent4>
+      <a:accent5>
+        <a:srgbClr val="A02B93"/>
+      </a:accent5>
+      <a:accent6>
+        <a:srgbClr val="4EA72E"/>
+      </a:accent6>
+      <a:hlink>
+        <a:srgbClr val="467886"/>
+      </a:hlink>
+      <a:folHlink>
+        <a:srgbClr val="96607D"/>
+      </a:folHlink>
+    </a:clrScheme>
+    <a:fontScheme name="Office">
+      <a:majorFont>
+        <a:latin typeface="Aptos Display" panose="02110004020202020204"/>
+        <a:ea typeface=""/>
+        <a:cs typeface=""/>
+        <a:font script="Jpan" typeface="游ゴシック Light"/>
+        <a:font script="Hang" typeface="맑은 고딕"/>
+        <a:font script="Hans" typeface="等线 Light"/>
+        <a:font script="Hant" typeface="新細明體"/>
+        <a:font script="Arab" typeface="Times New Roman"/>
+        <a:font script="Hebr" typeface="Times New Roman"/>
+        <a:font script="Thai" typeface="Angsana New"/>
+        <a:font script="Ethi" typeface="Nyala"/>
+        <a:font script="Beng" typeface="Vrinda"/>
+        <a:font script="Gujr" typeface="Shruti"/>
+        <a:font script="Khmr" typeface="MoolBoran"/>
+        <a:font script="Knda" typeface="Tunga"/>
+        <a:font script="Guru" typeface="Raavi"/>
+        <a:font script="Cans" typeface="Euphemia"/>
+        <a:font script="Cher" typeface="Plantagenet Cherokee"/>
+        <a:font script="Yiii" typeface="Microsoft Yi Baiti"/>
+        <a:font script="Tibt" typeface="Microsoft Himalaya"/>
+        <a:font script="Thaa" typeface="MV Boli"/>
+        <a:font script="Deva" typeface="Mangal"/>
+        <a:font script="Telu" typeface="Gautami"/>
+        <a:font script="Taml" typeface="Latha"/>
+        <a:font script="Syrc" typeface="Estrangelo Edessa"/>
+        <a:font script="Orya" typeface="Kalinga"/>
+        <a:font script="Mlym" typeface="Kartika"/>
+        <a:font script="Laoo" typeface="DokChampa"/>
+        <a:font script="Sinh" typeface="Iskoola Pota"/>
+        <a:font script="Mong" typeface="Mongolian Baiti"/>
+        <a:font script="Viet" typeface="Times New Roman"/>
+        <a:font script="Uigh" typeface="Microsoft Uighur"/>
+        <a:font script="Geor" typeface="Sylfaen"/>
+        <a:font script="Armn" typeface="Arial"/>
+        <a:font script="Bugi" typeface="Leelawadee UI"/>
+        <a:font script="Bopo" typeface="Microsoft JhengHei"/>
+        <a:font script="Java" typeface="Javanese Text"/>
+        <a:font script="Lisu" typeface="Segoe UI"/>
+        <a:font script="Mymr" typeface="Myanmar Text"/>
+        <a:font script="Nkoo" typeface="Ebrima"/>
+        <a:font script="Olck" typeface="Nirmala UI"/>
+        <a:font script="Osma" typeface="Ebrima"/>
+        <a:font script="Phag" typeface="Phagspa"/>
+        <a:font script="Syrn" typeface="Estrangelo Edessa"/>
+        <a:font script="Syrj" typeface="Estrangelo Edessa"/>
+        <a:font script="Syre" typeface="Estrangelo Edessa"/>
+        <a:font script="Sora" typeface="Nirmala UI"/>
+        <a:font script="Tale" typeface="Microsoft Tai Le"/>
+        <a:font script="Talu" typeface="Microsoft New Tai Lue"/>
+        <a:font script="Tfng" typeface="Ebrima"/>
+      </a:majorFont>
+      <a:minorFont>
+        <a:latin typeface="Aptos" panose="02110004020202020204"/>
+        <a:ea typeface=""/>
+        <a:cs typeface=""/>
+        <a:font script="Jpan" typeface="游ゴシック"/>
+        <a:font script="Hang" typeface="맑은 고딕"/>
+        <a:font script="Hans" typeface="等线"/>
+        <a:font script="Hant" typeface="新細明體"/>
+        <a:font script="Arab" typeface="Arial"/>
+        <a:font script="Hebr" typeface="Arial"/>
+        <a:font script="Thai" typeface="Cordia New"/>
+        <a:font script="Ethi" typeface="Nyala"/>
+        <a:font script="Beng" typeface="Vrinda"/>
+        <a:font script="Gujr" typeface="Shruti"/>
+        <a:font script="Khmr" typeface="DaunPenh"/>
+        <a:font script="Knda" typeface="Tunga"/>
+        <a:font script="Guru" typeface="Raavi"/>
+        <a:font script="Cans" typeface="Euphemia"/>
+        <a:font script="Cher" typeface="Plantagenet Cherokee"/>
+        <a:font script="Yiii" typeface="Microsoft Yi Baiti"/>
+        <a:font script="Tibt" typeface="Microsoft Himalaya"/>
+        <a:font script="Thaa" typeface="MV Boli"/>
+        <a:font script="Deva" typeface="Mangal"/>
+        <a:font script="Telu" typeface="Gautami"/>
+        <a:font script="Taml" typeface="Latha"/>
+        <a:font script="Syrc" typeface="Estrangelo Edessa"/>
+        <a:font script="Orya" typeface="Kalinga"/>
+        <a:font script="Mlym" typeface="Kartika"/>
+        <a:font script="Laoo" typeface="DokChampa"/>
+        <a:font script="Sinh" typeface="Iskoola Pota"/>
+        <a:font script="Mong" typeface="Mongolian Baiti"/>
+        <a:font script="Viet" typeface="Arial"/>
+        <a:font script="Uigh" typeface="Microsoft Uighur"/>
+        <a:font script="Geor" typeface="Sylfaen"/>
+        <a:font script="Armn" typeface="Arial"/>
+        <a:font script="Bugi" typeface="Leelawadee UI"/>
+        <a:font script="Bopo" typeface="Microsoft JhengHei"/>
+        <a:font script="Java" typeface="Javanese Text"/>
+        <a:font script="Lisu" typeface="Segoe UI"/>
+        <a:font script="Mymr" typeface="Myanmar Text"/>
+        <a:font script="Nkoo" typeface="Ebrima"/>
+        <a:font script="Olck" typeface="Nirmala UI"/>
+        <a:font script="Osma" typeface="Ebrima"/>
+        <a:font script="Phag" typeface="Phagspa"/>
+        <a:font script="Syrn" typeface="Estrangelo Edessa"/>
+        <a:font script="Syrj" typeface="Estrangelo Edessa"/>
+        <a:font script="Syre" typeface="Estrangelo Edessa"/>
+        <a:font script="Sora" typeface="Nirmala UI"/>
+        <a:font script="Tale" typeface="Microsoft Tai Le"/>
+        <a:font script="Talu" typeface="Microsoft New Tai Lue"/>
+        <a:font script="Tfng" typeface="Ebrima"/>
+      </a:minorFont>
+    </a:fontScheme>
+    <a:fmtScheme name="Office">
+      <a:fillStyleLst>
+        <a:solidFill>
+          <a:schemeClr val="phClr"/>
+        </a:solidFill>
+        <a:gradFill rotWithShape="1">
+          <a:gsLst>
+            <a:gs pos="0">
+              <a:schemeClr val="phClr">
+                <a:lumMod val="110000"/>
+                <a:satMod val="105000"/>
+                <a:tint val="67000"/>
+              </a:schemeClr>
+            </a:gs>
+            <a:gs pos="50000">
+              <a:schemeClr val="phClr">
+                <a:lumMod val="105000"/>
+                <a:satMod val="103000"/>
+                <a:tint val="73000"/>
+              </a:schemeClr>
+            </a:gs>
+            <a:gs pos="100000">
+              <a:schemeClr val="phClr">
+                <a:lumMod val="105000"/>
+                <a:satMod val="109000"/>
+                <a:tint val="81000"/>
+              </a:schemeClr>
+            </a:gs>
+          </a:gsLst>
+          <a:lin ang="5400000" scaled="0"/>
+        </a:gradFill>
+        <a:gradFill rotWithShape="1">
+          <a:gsLst>
+            <a:gs pos="0">
+              <a:schemeClr val="phClr">
+                <a:satMod val="103000"/>
+                <a:lumMod val="102000"/>
+                <a:tint val="94000"/>
+              </a:schemeClr>
+            </a:gs>
+            <a:gs pos="50000">
+              <a:schemeClr val="phClr">
+                <a:satMod val="110000"/>
+                <a:lumMod val="100000"/>
+                <a:shade val="100000"/>
+              </a:schemeClr>
+            </a:gs>
+            <a:gs pos="100000">
+              <a:schemeClr val="phClr">
+                <a:lumMod val="99000"/>
+                <a:satMod val="120000"/>
+                <a:shade val="78000"/>
+              </a:schemeClr>
+            </a:gs>
+          </a:gsLst>
+          <a:lin ang="5400000" scaled="0"/>
+        </a:gradFill>
+      </a:fillStyleLst>
+      <a:lnStyleLst>
+        <a:ln w="12700" cap="flat" cmpd="sng" algn="ctr">
+          <a:solidFill>
+            <a:schemeClr val="phClr"/>
+          </a:solidFill>
+          <a:prstDash val="solid"/>
+          <a:miter lim="800000"/>
+        </a:ln>
+        <a:ln w="19050" cap="flat" cmpd="sng" algn="ctr">
+          <a:solidFill>
+            <a:schemeClr val="phClr"/>
+          </a:solidFill>
+          <a:prstDash val="solid"/>
+          <a:miter lim="800000"/>
+        </a:ln>
+        <a:ln w="25400" cap="flat" cmpd="sng" algn="ctr">
+          <a:solidFill>
+            <a:schemeClr val="phClr"/>
+          </a:solidFill>
+          <a:prstDash val="solid"/>
+          <a:miter lim="800000"/>
+        </a:ln>
+      </a:lnStyleLst>
+      <a:effectStyleLst>
+        <a:effectStyle>
+          <a:effectLst/>
+        </a:effectStyle>
+        <a:effectStyle>
+          <a:effectLst/>
+        </a:effectStyle>
+        <a:effectStyle>
+          <a:effectLst>
+            <a:outerShdw blurRad="57150" dist="19050" dir="5400000" algn="ctr" rotWithShape="0">
+              <a:srgbClr val="000000">
+                <a:alpha val="63000"/>
+              </a:srgbClr>
+            </a:outerShdw>
+          </a:effectLst>
+        </a:effectStyle>
+      </a:effectStyleLst>
+      <a:bgFillStyleLst>
+        <a:solidFill>
+          <a:schemeClr val="phClr"/>
+        </a:solidFill>
+        <a:solidFill>
+          <a:schemeClr val="phClr">
+            <a:tint val="95000"/>
+            <a:satMod val="170000"/>
+          </a:schemeClr>
+        </a:solidFill>
+        <a:gradFill rotWithShape="1">
+          <a:gsLst>
+            <a:gs pos="0">
+              <a:schemeClr val="phClr">
+                <a:tint val="93000"/>
+                <a:satMod val="150000"/>
+                <a:shade val="98000"/>
+                <a:lumMod val="102000"/>
+              </a:schemeClr>
+            </a:gs>
+            <a:gs pos="50000">
+              <a:schemeClr val="phClr">
+                <a:tint val="98000"/>
+                <a:satMod val="130000"/>
+                <a:shade val="90000"/>
+                <a:lumMod val="103000"/>
+              </a:schemeClr>
+            </a:gs>
+            <a:gs pos="100000">
+              <a:schemeClr val="phClr">
+                <a:shade val="63000"/>
+                <a:satMod val="120000"/>
+              </a:schemeClr>
+            </a:gs>
+          </a:gsLst>
+          <a:lin ang="5400000" scaled="0"/>
+        </a:gradFill>
+      </a:bgFillStyleLst>
+    </a:fmtScheme>
+  </a:themeElements>
+  <a:objectDefaults>
+    <a:lnDef>
+      <a:spPr/>
+      <a:bodyPr/>
+      <a:lstStyle/>
+      <a:style>
+        <a:lnRef idx="2">
+          <a:schemeClr val="accent1"/>
+        </a:lnRef>
+        <a:fillRef idx="0">
+          <a:schemeClr val="accent1"/>
+        </a:fillRef>
+        <a:effectRef idx="1">
+          <a:schemeClr val="accent1"/>
+        </a:effectRef>
+        <a:fontRef idx="minor">
+          <a:schemeClr val="tx1"/>
+        </a:fontRef>
+      </a:style>
+    </a:lnDef>
+  </a:objectDefaults>
+  <a:extraClrSchemeLst/>
+  <a:extLst>
+    <a:ext uri="{05A4C25C-085E-4340-85A3-A5531E510DB2}">
+      <thm15:themeFamily xmlns:thm15="http://schemas.microsoft.com/office/thememl/2012/main" name="Office Theme" id="{2E142A2C-CD16-42D6-873A-C26D2A0506FA}" vid="{1BDDFF52-6CD6-40A5-AB3C-68EB2F1E4D0A}"/>
+    </a:ext>
+  </a:extLst>
+</a:theme>
 </file>